--- a/XSS-CORS-Praesentation.pptx
+++ b/XSS-CORS-Praesentation.pptx
@@ -25,14 +25,14 @@
     <p:sldId id="269" r:id="rId16"/>
     <p:sldId id="270" r:id="rId17"/>
     <p:sldId id="271" r:id="rId18"/>
-    <p:sldId id="272" r:id="rId19"/>
-    <p:sldId id="274" r:id="rId20"/>
-    <p:sldId id="275" r:id="rId21"/>
-    <p:sldId id="276" r:id="rId22"/>
-    <p:sldId id="277" r:id="rId23"/>
-    <p:sldId id="278" r:id="rId24"/>
-    <p:sldId id="279" r:id="rId25"/>
-    <p:sldId id="280" r:id="rId26"/>
+    <p:sldId id="274" r:id="rId19"/>
+    <p:sldId id="275" r:id="rId20"/>
+    <p:sldId id="276" r:id="rId21"/>
+    <p:sldId id="277" r:id="rId22"/>
+    <p:sldId id="278" r:id="rId23"/>
+    <p:sldId id="279" r:id="rId24"/>
+    <p:sldId id="280" r:id="rId25"/>
+    <p:sldId id="272" r:id="rId26"/>
   </p:sldIdLst>
   <p:sldSz cx="12192000" cy="6858000"/>
   <p:notesSz cx="6858000" cy="9144000"/>
@@ -161,7 +161,6 @@
             <p14:sldId id="269"/>
             <p14:sldId id="270"/>
             <p14:sldId id="271"/>
-            <p14:sldId id="272"/>
             <p14:sldId id="274"/>
             <p14:sldId id="275"/>
             <p14:sldId id="276"/>
@@ -169,6 +168,7 @@
             <p14:sldId id="278"/>
             <p14:sldId id="279"/>
             <p14:sldId id="280"/>
+            <p14:sldId id="272"/>
           </p14:sldIdLst>
         </p14:section>
       </p14:sectionLst>
@@ -1402,7 +1402,7 @@
           <a:bodyPr/>
           <a:lstStyle/>
           <a:p>
-            <a:endParaRPr lang="en-US" dirty="0"/>
+            <a:endParaRPr dirty="0"/>
           </a:p>
         </p:txBody>
       </p:sp>
@@ -1413,7 +1413,7 @@
             <a:spLocks noGrp="1"/>
           </p:cNvSpPr>
           <p:nvPr>
-            <p:ph type="sldNum" sz="quarter" idx="10"/>
+            <p:ph type="sldNum" idx="5"/>
           </p:nvPr>
         </p:nvSpPr>
         <p:spPr/>
@@ -1421,20 +1421,11 @@
           <a:bodyPr/>
           <a:lstStyle/>
           <a:p>
-            <a:fld id="{F7021451-1387-4CA6-816F-3879F97B5CBC}" type="slidenum">
-              <a:rPr lang="en-US"/>
-              <a:t>20</a:t>
-            </a:fld>
-            <a:endParaRPr lang="en-US"/>
+            <a:endParaRPr/>
           </a:p>
         </p:txBody>
       </p:sp>
     </p:spTree>
-    <p:extLst>
-      <p:ext uri="{BB962C8B-B14F-4D97-AF65-F5344CB8AC3E}">
-        <p14:creationId xmlns:p14="http://schemas.microsoft.com/office/powerpoint/2010/main" val="1024086991"/>
-      </p:ext>
-    </p:extLst>
   </p:cSld>
   <p:clrMapOvr>
     <a:masterClrMapping/>
@@ -1486,9 +1477,7 @@
           <a:bodyPr/>
           <a:lstStyle/>
           <a:p>
-            <a:r>
-              <a:t>Arvid: Zuerst die unsichere Variante öffnen und die Codeausführung zeigen. Danach die sichere Variante starten. Der gespeicherte Payload bleibt unverändert, wird aber nur noch als Text angezeigt.</a:t>
-            </a:r>
+            <a:endParaRPr lang="en-US" dirty="0"/>
           </a:p>
         </p:txBody>
       </p:sp>
@@ -1499,7 +1488,7 @@
             <a:spLocks noGrp="1"/>
           </p:cNvSpPr>
           <p:nvPr>
-            <p:ph type="sldNum" idx="5"/>
+            <p:ph type="sldNum" sz="quarter" idx="10"/>
           </p:nvPr>
         </p:nvSpPr>
         <p:spPr/>
@@ -1507,11 +1496,20 @@
           <a:bodyPr/>
           <a:lstStyle/>
           <a:p>
-            <a:endParaRPr/>
+            <a:fld id="{F7021451-1387-4CA6-816F-3879F97B5CBC}" type="slidenum">
+              <a:rPr lang="en-US"/>
+              <a:t>21</a:t>
+            </a:fld>
+            <a:endParaRPr lang="en-US"/>
           </a:p>
         </p:txBody>
       </p:sp>
     </p:spTree>
+    <p:extLst>
+      <p:ext uri="{BB962C8B-B14F-4D97-AF65-F5344CB8AC3E}">
+        <p14:creationId xmlns:p14="http://schemas.microsoft.com/office/powerpoint/2010/main" val="1024086991"/>
+      </p:ext>
+    </p:extLst>
   </p:cSld>
   <p:clrMapOvr>
     <a:masterClrMapping/>
@@ -2883,7 +2881,7 @@
                 <a:ea typeface="Trebuchet MS"/>
                 <a:cs typeface="Trebuchet MS"/>
               </a:rPr>
-              <a:t>Theorie und Analyse des Scheduler</a:t>
+              <a:t>Theorie und Analyse des Scheduler-Projektes</a:t>
             </a:r>
           </a:p>
         </p:txBody>
@@ -3106,6 +3104,18 @@
   <p:clrMapOvr>
     <a:masterClrMapping/>
   </p:clrMapOvr>
+  <mc:AlternateContent xmlns:mc="http://schemas.openxmlformats.org/markup-compatibility/2006">
+    <mc:Choice xmlns:p14="http://schemas.microsoft.com/office/powerpoint/2010/main" Requires="p14">
+      <p:transition spd="med" p14:dur="700">
+        <p:fade/>
+      </p:transition>
+    </mc:Choice>
+    <mc:Fallback>
+      <p:transition spd="med">
+        <p:fade/>
+      </p:transition>
+    </mc:Fallback>
+  </mc:AlternateContent>
 </p:sld>
 </file>
 
@@ -4075,6 +4085,18 @@
   <p:clrMapOvr>
     <a:masterClrMapping/>
   </p:clrMapOvr>
+  <mc:AlternateContent xmlns:mc="http://schemas.openxmlformats.org/markup-compatibility/2006">
+    <mc:Choice xmlns:p14="http://schemas.microsoft.com/office/powerpoint/2010/main" Requires="p14">
+      <p:transition spd="med" p14:dur="700">
+        <p:fade/>
+      </p:transition>
+    </mc:Choice>
+    <mc:Fallback>
+      <p:transition spd="med">
+        <p:fade/>
+      </p:transition>
+    </mc:Fallback>
+  </mc:AlternateContent>
 </p:sld>
 </file>
 
@@ -4535,6 +4557,18 @@
   <p:clrMapOvr>
     <a:masterClrMapping/>
   </p:clrMapOvr>
+  <mc:AlternateContent xmlns:mc="http://schemas.openxmlformats.org/markup-compatibility/2006">
+    <mc:Choice xmlns:p14="http://schemas.microsoft.com/office/powerpoint/2010/main" Requires="p14">
+      <p:transition spd="med" p14:dur="700">
+        <p:fade/>
+      </p:transition>
+    </mc:Choice>
+    <mc:Fallback>
+      <p:transition spd="med">
+        <p:fade/>
+      </p:transition>
+    </mc:Fallback>
+  </mc:AlternateContent>
 </p:sld>
 </file>
 
@@ -4908,6 +4942,18 @@
   <p:clrMapOvr>
     <a:masterClrMapping/>
   </p:clrMapOvr>
+  <mc:AlternateContent xmlns:mc="http://schemas.openxmlformats.org/markup-compatibility/2006">
+    <mc:Choice xmlns:p14="http://schemas.microsoft.com/office/powerpoint/2010/main" Requires="p14">
+      <p:transition spd="med" p14:dur="700">
+        <p:fade/>
+      </p:transition>
+    </mc:Choice>
+    <mc:Fallback>
+      <p:transition spd="med">
+        <p:fade/>
+      </p:transition>
+    </mc:Fallback>
+  </mc:AlternateContent>
 </p:sld>
 </file>
 
@@ -5581,6 +5627,18 @@
   <p:clrMapOvr>
     <a:masterClrMapping/>
   </p:clrMapOvr>
+  <mc:AlternateContent xmlns:mc="http://schemas.openxmlformats.org/markup-compatibility/2006">
+    <mc:Choice xmlns:p14="http://schemas.microsoft.com/office/powerpoint/2010/main" Requires="p14">
+      <p:transition spd="med" p14:dur="700">
+        <p:fade/>
+      </p:transition>
+    </mc:Choice>
+    <mc:Fallback>
+      <p:transition spd="med">
+        <p:fade/>
+      </p:transition>
+    </mc:Fallback>
+  </mc:AlternateContent>
 </p:sld>
 </file>
 
@@ -6374,6 +6432,18 @@
   <p:clrMapOvr>
     <a:masterClrMapping/>
   </p:clrMapOvr>
+  <mc:AlternateContent xmlns:mc="http://schemas.openxmlformats.org/markup-compatibility/2006">
+    <mc:Choice xmlns:p14="http://schemas.microsoft.com/office/powerpoint/2010/main" Requires="p14">
+      <p:transition spd="med" p14:dur="700">
+        <p:fade/>
+      </p:transition>
+    </mc:Choice>
+    <mc:Fallback>
+      <p:transition spd="med">
+        <p:fade/>
+      </p:transition>
+    </mc:Fallback>
+  </mc:AlternateContent>
 </p:sld>
 </file>
 
@@ -7191,6 +7261,18 @@
   <p:clrMapOvr>
     <a:masterClrMapping/>
   </p:clrMapOvr>
+  <mc:AlternateContent xmlns:mc="http://schemas.openxmlformats.org/markup-compatibility/2006">
+    <mc:Choice xmlns:p14="http://schemas.microsoft.com/office/powerpoint/2010/main" Requires="p14">
+      <p:transition spd="med" p14:dur="700">
+        <p:fade/>
+      </p:transition>
+    </mc:Choice>
+    <mc:Fallback>
+      <p:transition spd="med">
+        <p:fade/>
+      </p:transition>
+    </mc:Fallback>
+  </mc:AlternateContent>
 </p:sld>
 </file>
 
@@ -7602,6 +7684,18 @@
   <p:clrMapOvr>
     <a:masterClrMapping/>
   </p:clrMapOvr>
+  <mc:AlternateContent xmlns:mc="http://schemas.openxmlformats.org/markup-compatibility/2006">
+    <mc:Choice xmlns:p14="http://schemas.microsoft.com/office/powerpoint/2010/main" Requires="p14">
+      <p:transition spd="med" p14:dur="700">
+        <p:fade/>
+      </p:transition>
+    </mc:Choice>
+    <mc:Fallback>
+      <p:transition spd="med">
+        <p:fade/>
+      </p:transition>
+    </mc:Fallback>
+  </mc:AlternateContent>
 </p:sld>
 </file>
 
@@ -8151,6 +8245,18 @@
   <p:clrMapOvr>
     <a:masterClrMapping/>
   </p:clrMapOvr>
+  <mc:AlternateContent xmlns:mc="http://schemas.openxmlformats.org/markup-compatibility/2006">
+    <mc:Choice xmlns:p14="http://schemas.microsoft.com/office/powerpoint/2010/main" Requires="p14">
+      <p:transition spd="med" p14:dur="700">
+        <p:fade/>
+      </p:transition>
+    </mc:Choice>
+    <mc:Fallback>
+      <p:transition spd="med">
+        <p:fade/>
+      </p:transition>
+    </mc:Fallback>
+  </mc:AlternateContent>
 </p:sld>
 </file>
 
@@ -8180,7 +8286,7 @@
         <p:spPr>
           <a:xfrm>
             <a:off x="868680" y="502920"/>
-            <a:ext cx="7315200" cy="274320"/>
+            <a:ext cx="8229600" cy="274320"/>
           </a:xfrm>
           <a:prstGeom prst="rect">
             <a:avLst/>
@@ -8204,7 +8310,7 @@
                 <a:ea typeface="Calibri" pitchFamily="34" charset="-122"/>
                 <a:cs typeface="Calibri" pitchFamily="34" charset="-120"/>
               </a:rPr>
-              <a:t>PROBLEM IM PROJEKT · SCHEDULER</a:t>
+              <a:t>DEMO · AUFBAU</a:t>
             </a:r>
             <a:endParaRPr lang="en-US" sz="1050" dirty="0"/>
           </a:p>
@@ -8212,6 +8318,45 @@
       </p:sp>
       <p:sp>
         <p:nvSpPr>
+          <p:cNvPr id="3" name="Text 1"/>
+          <p:cNvSpPr/>
+          <p:nvPr/>
+        </p:nvSpPr>
+        <p:spPr>
+          <a:xfrm>
+            <a:off x="10774375" y="502920"/>
+            <a:ext cx="548640" cy="274320"/>
+          </a:xfrm>
+          <a:prstGeom prst="rect">
+            <a:avLst/>
+          </a:prstGeom>
+          <a:noFill/>
+          <a:ln/>
+        </p:spPr>
+        <p:txBody>
+          <a:bodyPr wrap="square" lIns="0" tIns="0" rIns="0" bIns="0" rtlCol="0" anchor="ctr"/>
+          <a:lstStyle/>
+          <a:p>
+            <a:pPr marL="0" indent="0" algn="r">
+              <a:buNone/>
+            </a:pPr>
+            <a:fld id="{B45D24B6-C78C-43F1-9D4F-88F7B48373A8}" type="slidenum">
+              <a:rPr lang="en-US" sz="1050" b="1" kern="0" spc="100" smtClean="0">
+                <a:solidFill>
+                  <a:srgbClr val="9AA3AF"/>
+                </a:solidFill>
+                <a:latin typeface="Calibri" pitchFamily="34" charset="0"/>
+                <a:ea typeface="Calibri" pitchFamily="34" charset="-122"/>
+                <a:cs typeface="Calibri" pitchFamily="34" charset="-120"/>
+              </a:rPr>
+              <a:t>18</a:t>
+            </a:fld>
+            <a:endParaRPr lang="en-US" sz="1050" dirty="0"/>
+          </a:p>
+        </p:txBody>
+      </p:sp>
+      <p:sp>
+        <p:nvSpPr>
           <p:cNvPr id="4" name="Text 2"/>
           <p:cNvSpPr/>
           <p:nvPr/>
@@ -8219,7 +8364,7 @@
         <p:spPr>
           <a:xfrm>
             <a:off x="868680" y="1051560"/>
-            <a:ext cx="10424160" cy="777240"/>
+            <a:ext cx="10058400" cy="777240"/>
           </a:xfrm>
           <a:prstGeom prst="rect">
             <a:avLst/>
@@ -8243,7 +8388,7 @@
                 <a:ea typeface="Trebuchet MS" pitchFamily="34" charset="-122"/>
                 <a:cs typeface="Trebuchet MS" pitchFamily="34" charset="-120"/>
               </a:rPr>
-              <a:t>Zwei Punkte zum Prüfen</a:t>
+              <a:t>Setup</a:t>
             </a:r>
             <a:endParaRPr lang="en-US" sz="4000" dirty="0"/>
           </a:p>
@@ -8258,7 +8403,7 @@
         <p:spPr>
           <a:xfrm>
             <a:off x="868680" y="1920240"/>
-            <a:ext cx="10332720" cy="640080"/>
+            <a:ext cx="10424160" cy="640080"/>
           </a:xfrm>
           <a:prstGeom prst="rect">
             <a:avLst/>
@@ -8270,9 +8415,6 @@
           <a:bodyPr wrap="square" lIns="0" tIns="0" rIns="0" bIns="0" rtlCol="0" anchor="ctr"/>
           <a:lstStyle/>
           <a:p>
-            <a:pPr marL="0" indent="0">
-              <a:buNone/>
-            </a:pPr>
             <a:r>
               <a:rPr lang="en-US" sz="1700" dirty="0">
                 <a:solidFill>
@@ -8282,7 +8424,40 @@
                 <a:ea typeface="Calibri" pitchFamily="34" charset="-122"/>
                 <a:cs typeface="Calibri" pitchFamily="34" charset="-120"/>
               </a:rPr>
-              <a:t>CORS schützt nicht vor direktem Zugriff – nur vor dem Lesen durch fremdes JavaScript. Diese zwei Stellen sind unabhängig davon sicherheitsrelevant.</a:t>
+              <a:t>Vier </a:t>
+            </a:r>
+            <a:r>
+              <a:rPr lang="en-US" sz="1700" dirty="0" err="1">
+                <a:solidFill>
+                  <a:srgbClr val="55606E"/>
+                </a:solidFill>
+                <a:latin typeface="Calibri" pitchFamily="34" charset="0"/>
+                <a:ea typeface="Calibri" pitchFamily="34" charset="-122"/>
+                <a:cs typeface="Calibri" pitchFamily="34" charset="-120"/>
+              </a:rPr>
+              <a:t>lokale</a:t>
+            </a:r>
+            <a:r>
+              <a:rPr lang="en-US" sz="1700" dirty="0">
+                <a:solidFill>
+                  <a:srgbClr val="55606E"/>
+                </a:solidFill>
+                <a:latin typeface="Calibri" pitchFamily="34" charset="0"/>
+                <a:ea typeface="Calibri" pitchFamily="34" charset="-122"/>
+                <a:cs typeface="Calibri" pitchFamily="34" charset="-120"/>
+              </a:rPr>
+              <a:t> </a:t>
+            </a:r>
+            <a:r>
+              <a:rPr lang="en-US" sz="1700" dirty="0" err="1">
+                <a:solidFill>
+                  <a:srgbClr val="55606E"/>
+                </a:solidFill>
+                <a:latin typeface="Calibri" pitchFamily="34" charset="0"/>
+                <a:ea typeface="Calibri" pitchFamily="34" charset="-122"/>
+                <a:cs typeface="Calibri" pitchFamily="34" charset="-120"/>
+              </a:rPr>
+              <a:t>Komponenten</a:t>
             </a:r>
             <a:endParaRPr lang="en-US" sz="1700" dirty="0"/>
           </a:p>
@@ -8296,8 +8471,8 @@
         </p:nvSpPr>
         <p:spPr>
           <a:xfrm>
-            <a:off x="6172200" y="2971800"/>
-            <a:ext cx="0" cy="2834640"/>
+            <a:off x="868680" y="2788920"/>
+            <a:ext cx="10454335" cy="0"/>
           </a:xfrm>
           <a:prstGeom prst="line">
             <a:avLst/>
@@ -8319,8 +8494,8 @@
         </p:nvSpPr>
         <p:spPr>
           <a:xfrm>
-            <a:off x="868680" y="2971800"/>
-            <a:ext cx="914400" cy="457200"/>
+            <a:off x="868680" y="2916936"/>
+            <a:ext cx="5943600" cy="384048"/>
           </a:xfrm>
           <a:prstGeom prst="rect">
             <a:avLst/>
@@ -8336,146 +8511,7 @@
               <a:buNone/>
             </a:pPr>
             <a:r>
-              <a:rPr lang="en-US" sz="2200" b="1" dirty="0">
-                <a:solidFill>
-                  <a:srgbClr val="9AA3AF"/>
-                </a:solidFill>
-                <a:latin typeface="Trebuchet MS" pitchFamily="34" charset="0"/>
-                <a:ea typeface="Trebuchet MS" pitchFamily="34" charset="-122"/>
-                <a:cs typeface="Trebuchet MS" pitchFamily="34" charset="-120"/>
-              </a:rPr>
-              <a:t>01</a:t>
-            </a:r>
-            <a:endParaRPr lang="en-US" sz="2200" dirty="0"/>
-          </a:p>
-        </p:txBody>
-      </p:sp>
-      <p:sp>
-        <p:nvSpPr>
-          <p:cNvPr id="8" name="Text 6"/>
-          <p:cNvSpPr/>
-          <p:nvPr/>
-        </p:nvSpPr>
-        <p:spPr>
-          <a:xfrm>
-            <a:off x="1508760" y="2990088"/>
-            <a:ext cx="4297680" cy="457200"/>
-          </a:xfrm>
-          <a:prstGeom prst="rect">
-            <a:avLst/>
-          </a:prstGeom>
-          <a:noFill/>
-          <a:ln/>
-        </p:spPr>
-        <p:txBody>
-          <a:bodyPr wrap="square" lIns="0" tIns="0" rIns="0" bIns="0" rtlCol="0" anchor="ctr"/>
-          <a:lstStyle/>
-          <a:p>
-            <a:pPr marL="0" indent="0">
-              <a:buNone/>
-            </a:pPr>
-            <a:r>
-              <a:rPr lang="en-US" sz="2200" b="1" dirty="0">
-                <a:solidFill>
-                  <a:srgbClr val="16181D"/>
-                </a:solidFill>
-                <a:latin typeface="Trebuchet MS" pitchFamily="34" charset="0"/>
-                <a:ea typeface="Trebuchet MS" pitchFamily="34" charset="-122"/>
-                <a:cs typeface="Trebuchet MS" pitchFamily="34" charset="-120"/>
-              </a:rPr>
-              <a:t>/files/** ist öffentlich</a:t>
-            </a:r>
-            <a:endParaRPr lang="en-US" sz="2200" dirty="0"/>
-          </a:p>
-        </p:txBody>
-      </p:sp>
-      <p:sp>
-        <p:nvSpPr>
-          <p:cNvPr id="9" name="Text 7"/>
-          <p:cNvSpPr/>
-          <p:nvPr/>
-        </p:nvSpPr>
-        <p:spPr>
-          <a:xfrm>
-            <a:off x="868680" y="3611880"/>
-            <a:ext cx="4937760" cy="822960"/>
-          </a:xfrm>
-          <a:prstGeom prst="rect">
-            <a:avLst/>
-          </a:prstGeom>
-          <a:noFill/>
-          <a:ln/>
-        </p:spPr>
-        <p:txBody>
-          <a:bodyPr wrap="square" lIns="0" tIns="0" rIns="0" bIns="0" rtlCol="0" anchor="ctr"/>
-          <a:lstStyle/>
-          <a:p>
-            <a:pPr marL="0" indent="0">
-              <a:buNone/>
-            </a:pPr>
-            <a:r>
-              <a:rPr lang="en-US" sz="1400" dirty="0">
-                <a:solidFill>
-                  <a:srgbClr val="55606E"/>
-                </a:solidFill>
-                <a:latin typeface="Calibri" pitchFamily="34" charset="0"/>
-                <a:ea typeface="Calibri" pitchFamily="34" charset="-122"/>
-                <a:cs typeface="Calibri" pitchFamily="34" charset="-120"/>
-              </a:rPr>
-              <a:t>Spring Security erlaubt alle Requests unter /files/** </a:t>
-            </a:r>
-            <a:r>
-              <a:rPr lang="en-US" sz="1400" b="1" dirty="0">
-                <a:solidFill>
-                  <a:srgbClr val="D23B4E"/>
-                </a:solidFill>
-                <a:latin typeface="Calibri" pitchFamily="34" charset="0"/>
-                <a:ea typeface="Calibri" pitchFamily="34" charset="-122"/>
-                <a:cs typeface="Calibri" pitchFamily="34" charset="-120"/>
-              </a:rPr>
-              <a:t>ohne Authentifizierung</a:t>
-            </a:r>
-            <a:r>
-              <a:rPr lang="en-US" sz="1400" dirty="0">
-                <a:solidFill>
-                  <a:srgbClr val="55606E"/>
-                </a:solidFill>
-                <a:latin typeface="Calibri" pitchFamily="34" charset="0"/>
-                <a:ea typeface="Calibri" pitchFamily="34" charset="-122"/>
-                <a:cs typeface="Calibri" pitchFamily="34" charset="-120"/>
-              </a:rPr>
-              <a:t> – u. a. Planungs- und ICS-Dateien.</a:t>
-            </a:r>
-            <a:endParaRPr lang="en-US" sz="1400" dirty="0"/>
-          </a:p>
-        </p:txBody>
-      </p:sp>
-      <p:sp>
-        <p:nvSpPr>
-          <p:cNvPr id="10" name="Text 8"/>
-          <p:cNvSpPr/>
-          <p:nvPr/>
-        </p:nvSpPr>
-        <p:spPr>
-          <a:xfrm>
-            <a:off x="868680" y="4480560"/>
-            <a:ext cx="4937760" cy="365760"/>
-          </a:xfrm>
-          <a:prstGeom prst="rect">
-            <a:avLst/>
-          </a:prstGeom>
-          <a:noFill/>
-          <a:ln/>
-        </p:spPr>
-        <p:txBody>
-          <a:bodyPr wrap="square" lIns="0" tIns="0" rIns="0" bIns="0" rtlCol="0" anchor="ctr"/>
-          <a:lstStyle/>
-          <a:p>
-            <a:pPr marL="0" indent="0">
-              <a:buNone/>
-            </a:pPr>
-            <a:r>
-              <a:rPr lang="en-US" sz="1300" dirty="0">
+              <a:rPr lang="en-US" sz="1500" b="1" dirty="0">
                 <a:solidFill>
                   <a:srgbClr val="16181D"/>
                 </a:solidFill>
@@ -8483,22 +8519,22 @@
                 <a:ea typeface="Consolas" pitchFamily="34" charset="-122"/>
                 <a:cs typeface="Consolas" pitchFamily="34" charset="-120"/>
               </a:rPr>
-              <a:t>GET /files/planningperiod/{id}/download</a:t>
-            </a:r>
-            <a:endParaRPr lang="en-US" sz="1300" dirty="0"/>
-          </a:p>
-        </p:txBody>
-      </p:sp>
-      <p:sp>
-        <p:nvSpPr>
-          <p:cNvPr id="11" name="Text 9"/>
-          <p:cNvSpPr/>
-          <p:nvPr/>
-        </p:nvSpPr>
-        <p:spPr>
-          <a:xfrm>
-            <a:off x="868680" y="4983480"/>
-            <a:ext cx="4937760" cy="640080"/>
+              <a:t>docker-compose up</a:t>
+            </a:r>
+            <a:endParaRPr lang="en-US" sz="1500" dirty="0"/>
+          </a:p>
+        </p:txBody>
+      </p:sp>
+      <p:sp>
+        <p:nvSpPr>
+          <p:cNvPr id="8" name="Text 6"/>
+          <p:cNvSpPr/>
+          <p:nvPr/>
+        </p:nvSpPr>
+        <p:spPr>
+          <a:xfrm>
+            <a:off x="868680" y="3246120"/>
+            <a:ext cx="6400800" cy="329184"/>
           </a:xfrm>
           <a:prstGeom prst="rect">
             <a:avLst/>
@@ -8514,7 +8550,7 @@
               <a:buNone/>
             </a:pPr>
             <a:r>
-              <a:rPr lang="en-US" sz="1250" i="1" dirty="0">
+              <a:rPr lang="en-US" sz="1250" dirty="0">
                 <a:solidFill>
                   <a:srgbClr val="55606E"/>
                 </a:solidFill>
@@ -8522,7 +8558,7 @@
                 <a:ea typeface="Calibri" pitchFamily="34" charset="-122"/>
                 <a:cs typeface="Calibri" pitchFamily="34" charset="-120"/>
               </a:rPr>
-              <a:t>Guter Demo-Endpunkt – aber prüfen, ob wirklich alles öffentlich sein soll.</a:t>
+              <a:t>Keycloak · Postgres</a:t>
             </a:r>
             <a:endParaRPr lang="en-US" sz="1250" dirty="0"/>
           </a:p>
@@ -8530,14 +8566,14 @@
       </p:sp>
       <p:sp>
         <p:nvSpPr>
-          <p:cNvPr id="12" name="Text 10"/>
-          <p:cNvSpPr/>
-          <p:nvPr/>
-        </p:nvSpPr>
-        <p:spPr>
-          <a:xfrm>
-            <a:off x="868680" y="5623560"/>
-            <a:ext cx="4937760" cy="274320"/>
+          <p:cNvPr id="9" name="Text 7"/>
+          <p:cNvSpPr/>
+          <p:nvPr/>
+        </p:nvSpPr>
+        <p:spPr>
+          <a:xfrm>
+            <a:off x="8579815" y="2916936"/>
+            <a:ext cx="2743200" cy="548640"/>
           </a:xfrm>
           <a:prstGeom prst="rect">
             <a:avLst/>
@@ -8549,11 +8585,11 @@
           <a:bodyPr wrap="square" lIns="0" tIns="0" rIns="0" bIns="0" rtlCol="0" anchor="ctr"/>
           <a:lstStyle/>
           <a:p>
-            <a:pPr marL="0" indent="0">
-              <a:buNone/>
-            </a:pPr>
-            <a:r>
-              <a:rPr lang="en-US" sz="1050" dirty="0">
+            <a:pPr marL="0" indent="0" algn="r">
+              <a:buNone/>
+            </a:pPr>
+            <a:r>
+              <a:rPr lang="en-US" sz="1500" b="1" dirty="0">
                 <a:solidFill>
                   <a:srgbClr val="9AA3AF"/>
                 </a:solidFill>
@@ -8561,22 +8597,45 @@
                 <a:ea typeface="Consolas" pitchFamily="34" charset="-122"/>
                 <a:cs typeface="Consolas" pitchFamily="34" charset="-120"/>
               </a:rPr>
-              <a:t>SecurityConfiguration.java:48</a:t>
-            </a:r>
-            <a:endParaRPr lang="en-US" sz="1050" dirty="0"/>
-          </a:p>
-        </p:txBody>
-      </p:sp>
-      <p:sp>
-        <p:nvSpPr>
-          <p:cNvPr id="13" name="Text 11"/>
-          <p:cNvSpPr/>
-          <p:nvPr/>
-        </p:nvSpPr>
-        <p:spPr>
-          <a:xfrm>
-            <a:off x="6446520" y="2971800"/>
-            <a:ext cx="914400" cy="457200"/>
+              <a:t>:8080 / :5432</a:t>
+            </a:r>
+            <a:endParaRPr lang="en-US" sz="1500" dirty="0"/>
+          </a:p>
+        </p:txBody>
+      </p:sp>
+      <p:sp>
+        <p:nvSpPr>
+          <p:cNvPr id="10" name="Shape 8"/>
+          <p:cNvSpPr/>
+          <p:nvPr/>
+        </p:nvSpPr>
+        <p:spPr>
+          <a:xfrm>
+            <a:off x="868680" y="3630168"/>
+            <a:ext cx="10454335" cy="0"/>
+          </a:xfrm>
+          <a:prstGeom prst="line">
+            <a:avLst/>
+          </a:prstGeom>
+          <a:noFill/>
+          <a:ln w="12700">
+            <a:solidFill>
+              <a:srgbClr val="E4E7EC"/>
+            </a:solidFill>
+            <a:prstDash val="solid"/>
+          </a:ln>
+        </p:spPr>
+      </p:sp>
+      <p:sp>
+        <p:nvSpPr>
+          <p:cNvPr id="11" name="Text 9"/>
+          <p:cNvSpPr/>
+          <p:nvPr/>
+        </p:nvSpPr>
+        <p:spPr>
+          <a:xfrm>
+            <a:off x="868680" y="3758184"/>
+            <a:ext cx="5943600" cy="384048"/>
           </a:xfrm>
           <a:prstGeom prst="rect">
             <a:avLst/>
@@ -8592,124 +8651,7 @@
               <a:buNone/>
             </a:pPr>
             <a:r>
-              <a:rPr lang="en-US" sz="2200" b="1" dirty="0">
-                <a:solidFill>
-                  <a:srgbClr val="9AA3AF"/>
-                </a:solidFill>
-                <a:latin typeface="Trebuchet MS" pitchFamily="34" charset="0"/>
-                <a:ea typeface="Trebuchet MS" pitchFamily="34" charset="-122"/>
-                <a:cs typeface="Trebuchet MS" pitchFamily="34" charset="-120"/>
-              </a:rPr>
-              <a:t>02</a:t>
-            </a:r>
-            <a:endParaRPr lang="en-US" sz="2200" dirty="0"/>
-          </a:p>
-        </p:txBody>
-      </p:sp>
-      <p:sp>
-        <p:nvSpPr>
-          <p:cNvPr id="14" name="Text 12"/>
-          <p:cNvSpPr/>
-          <p:nvPr/>
-        </p:nvSpPr>
-        <p:spPr>
-          <a:xfrm>
-            <a:off x="7086600" y="2990088"/>
-            <a:ext cx="4297680" cy="457200"/>
-          </a:xfrm>
-          <a:prstGeom prst="rect">
-            <a:avLst/>
-          </a:prstGeom>
-          <a:noFill/>
-          <a:ln/>
-        </p:spPr>
-        <p:txBody>
-          <a:bodyPr wrap="square" lIns="0" tIns="0" rIns="0" bIns="0" rtlCol="0" anchor="ctr"/>
-          <a:lstStyle/>
-          <a:p>
-            <a:pPr marL="0" indent="0">
-              <a:buNone/>
-            </a:pPr>
-            <a:r>
-              <a:rPr lang="en-US" sz="2200" b="1" dirty="0">
-                <a:solidFill>
-                  <a:srgbClr val="16181D"/>
-                </a:solidFill>
-                <a:latin typeface="Trebuchet MS" pitchFamily="34" charset="0"/>
-                <a:ea typeface="Trebuchet MS" pitchFamily="34" charset="-122"/>
-                <a:cs typeface="Trebuchet MS" pitchFamily="34" charset="-120"/>
-              </a:rPr>
-              <a:t>Keycloak: webOrigins</a:t>
-            </a:r>
-            <a:endParaRPr lang="en-US" sz="2200" dirty="0"/>
-          </a:p>
-        </p:txBody>
-      </p:sp>
-      <p:sp>
-        <p:nvSpPr>
-          <p:cNvPr id="15" name="Text 13"/>
-          <p:cNvSpPr/>
-          <p:nvPr/>
-        </p:nvSpPr>
-        <p:spPr>
-          <a:xfrm>
-            <a:off x="6446520" y="3611880"/>
-            <a:ext cx="4937760" cy="640080"/>
-          </a:xfrm>
-          <a:prstGeom prst="rect">
-            <a:avLst/>
-          </a:prstGeom>
-          <a:noFill/>
-          <a:ln/>
-        </p:spPr>
-        <p:txBody>
-          <a:bodyPr wrap="square" lIns="0" tIns="0" rIns="0" bIns="0" rtlCol="0" anchor="ctr"/>
-          <a:lstStyle/>
-          <a:p>
-            <a:pPr marL="0" indent="0">
-              <a:buNone/>
-            </a:pPr>
-            <a:r>
-              <a:rPr lang="en-US" sz="1400" dirty="0">
-                <a:solidFill>
-                  <a:srgbClr val="55606E"/>
-                </a:solidFill>
-                <a:latin typeface="Calibri" pitchFamily="34" charset="0"/>
-                <a:ea typeface="Calibri" pitchFamily="34" charset="-122"/>
-                <a:cs typeface="Calibri" pitchFamily="34" charset="-120"/>
-              </a:rPr>
-              <a:t>Der Web-Client im Realm-Export nutzt eine Wildcard und unnötige OAuth-Flows – zu breit für einen SPA-Client.</a:t>
-            </a:r>
-            <a:endParaRPr lang="en-US" sz="1400" dirty="0"/>
-          </a:p>
-        </p:txBody>
-      </p:sp>
-      <p:sp>
-        <p:nvSpPr>
-          <p:cNvPr id="16" name="Text 14"/>
-          <p:cNvSpPr/>
-          <p:nvPr/>
-        </p:nvSpPr>
-        <p:spPr>
-          <a:xfrm>
-            <a:off x="6446520" y="4370832"/>
-            <a:ext cx="3017520" cy="365760"/>
-          </a:xfrm>
-          <a:prstGeom prst="rect">
-            <a:avLst/>
-          </a:prstGeom>
-          <a:noFill/>
-          <a:ln/>
-        </p:spPr>
-        <p:txBody>
-          <a:bodyPr wrap="square" lIns="0" tIns="0" rIns="0" bIns="0" rtlCol="0" anchor="ctr"/>
-          <a:lstStyle/>
-          <a:p>
-            <a:pPr marL="0" indent="0">
-              <a:buNone/>
-            </a:pPr>
-            <a:r>
-              <a:rPr lang="en-US" sz="1300" b="1" dirty="0">
+              <a:rPr lang="en-US" sz="1500" b="1" dirty="0" err="1">
                 <a:solidFill>
                   <a:srgbClr val="16181D"/>
                 </a:solidFill>
@@ -8717,77 +8659,10 @@
                 <a:ea typeface="Consolas" pitchFamily="34" charset="-122"/>
                 <a:cs typeface="Consolas" pitchFamily="34" charset="-120"/>
               </a:rPr>
-              <a:t>webOrigins: ["*"]</a:t>
-            </a:r>
-            <a:endParaRPr lang="en-US" sz="1300" dirty="0"/>
-          </a:p>
-        </p:txBody>
-      </p:sp>
-      <p:sp>
-        <p:nvSpPr>
-          <p:cNvPr id="17" name="Text 15"/>
-          <p:cNvSpPr/>
-          <p:nvPr/>
-        </p:nvSpPr>
-        <p:spPr>
-          <a:xfrm>
-            <a:off x="9464040" y="4370832"/>
-            <a:ext cx="1920240" cy="365760"/>
-          </a:xfrm>
-          <a:prstGeom prst="rect">
-            <a:avLst/>
-          </a:prstGeom>
-          <a:noFill/>
-          <a:ln/>
-        </p:spPr>
-        <p:txBody>
-          <a:bodyPr wrap="square" lIns="0" tIns="0" rIns="0" bIns="0" rtlCol="0" anchor="ctr"/>
-          <a:lstStyle/>
-          <a:p>
-            <a:pPr marL="0" indent="0" algn="r">
-              <a:buNone/>
-            </a:pPr>
-            <a:r>
-              <a:rPr lang="en-US" sz="1200" i="1" dirty="0">
-                <a:solidFill>
-                  <a:srgbClr val="D23B4E"/>
-                </a:solidFill>
-                <a:latin typeface="Calibri" pitchFamily="34" charset="0"/>
-                <a:ea typeface="Calibri" pitchFamily="34" charset="-122"/>
-                <a:cs typeface="Calibri" pitchFamily="34" charset="-120"/>
-              </a:rPr>
-              <a:t>jede Origin</a:t>
-            </a:r>
-            <a:endParaRPr lang="en-US" sz="1200" dirty="0"/>
-          </a:p>
-        </p:txBody>
-      </p:sp>
-      <p:sp>
-        <p:nvSpPr>
-          <p:cNvPr id="18" name="Text 16"/>
-          <p:cNvSpPr/>
-          <p:nvPr/>
-        </p:nvSpPr>
-        <p:spPr>
-          <a:xfrm>
-            <a:off x="6446520" y="4782312"/>
-            <a:ext cx="3017520" cy="365760"/>
-          </a:xfrm>
-          <a:prstGeom prst="rect">
-            <a:avLst/>
-          </a:prstGeom>
-          <a:noFill/>
-          <a:ln/>
-        </p:spPr>
-        <p:txBody>
-          <a:bodyPr wrap="square" lIns="0" tIns="0" rIns="0" bIns="0" rtlCol="0" anchor="ctr"/>
-          <a:lstStyle/>
-          <a:p>
-            <a:pPr marL="0" indent="0">
-              <a:buNone/>
-            </a:pPr>
-            <a:r>
-              <a:rPr lang="en-US" sz="1300" b="1" dirty="0">
+              <a:t>gradlew</a:t>
+            </a:r>
+            <a:r>
+              <a:rPr lang="en-US" sz="1500" b="1" dirty="0">
                 <a:solidFill>
                   <a:srgbClr val="16181D"/>
                 </a:solidFill>
@@ -8795,77 +8670,10 @@
                 <a:ea typeface="Consolas" pitchFamily="34" charset="-122"/>
                 <a:cs typeface="Consolas" pitchFamily="34" charset="-120"/>
               </a:rPr>
-              <a:t>implicitFlowEnabled</a:t>
-            </a:r>
-            <a:endParaRPr lang="en-US" sz="1300" dirty="0"/>
-          </a:p>
-        </p:txBody>
-      </p:sp>
-      <p:sp>
-        <p:nvSpPr>
-          <p:cNvPr id="19" name="Text 17"/>
-          <p:cNvSpPr/>
-          <p:nvPr/>
-        </p:nvSpPr>
-        <p:spPr>
-          <a:xfrm>
-            <a:off x="9464040" y="4782312"/>
-            <a:ext cx="1920240" cy="365760"/>
-          </a:xfrm>
-          <a:prstGeom prst="rect">
-            <a:avLst/>
-          </a:prstGeom>
-          <a:noFill/>
-          <a:ln/>
-        </p:spPr>
-        <p:txBody>
-          <a:bodyPr wrap="square" lIns="0" tIns="0" rIns="0" bIns="0" rtlCol="0" anchor="ctr"/>
-          <a:lstStyle/>
-          <a:p>
-            <a:pPr marL="0" indent="0" algn="r">
-              <a:buNone/>
-            </a:pPr>
-            <a:r>
-              <a:rPr lang="en-US" sz="1200" i="1" dirty="0">
-                <a:solidFill>
-                  <a:srgbClr val="D23B4E"/>
-                </a:solidFill>
-                <a:latin typeface="Calibri" pitchFamily="34" charset="0"/>
-                <a:ea typeface="Calibri" pitchFamily="34" charset="-122"/>
-                <a:cs typeface="Calibri" pitchFamily="34" charset="-120"/>
-              </a:rPr>
-              <a:t>Token im Fragment</a:t>
-            </a:r>
-            <a:endParaRPr lang="en-US" sz="1200" dirty="0"/>
-          </a:p>
-        </p:txBody>
-      </p:sp>
-      <p:sp>
-        <p:nvSpPr>
-          <p:cNvPr id="20" name="Text 18"/>
-          <p:cNvSpPr/>
-          <p:nvPr/>
-        </p:nvSpPr>
-        <p:spPr>
-          <a:xfrm>
-            <a:off x="6446520" y="5193792"/>
-            <a:ext cx="3017520" cy="365760"/>
-          </a:xfrm>
-          <a:prstGeom prst="rect">
-            <a:avLst/>
-          </a:prstGeom>
-          <a:noFill/>
-          <a:ln/>
-        </p:spPr>
-        <p:txBody>
-          <a:bodyPr wrap="square" lIns="0" tIns="0" rIns="0" bIns="0" rtlCol="0" anchor="ctr"/>
-          <a:lstStyle/>
-          <a:p>
-            <a:pPr marL="0" indent="0">
-              <a:buNone/>
-            </a:pPr>
-            <a:r>
-              <a:rPr lang="en-US" sz="1300" b="1" dirty="0">
+              <a:t> </a:t>
+            </a:r>
+            <a:r>
+              <a:rPr lang="en-US" sz="1500" b="1" dirty="0" err="1">
                 <a:solidFill>
                   <a:srgbClr val="16181D"/>
                 </a:solidFill>
@@ -8873,22 +8681,22 @@
                 <a:ea typeface="Consolas" pitchFamily="34" charset="-122"/>
                 <a:cs typeface="Consolas" pitchFamily="34" charset="-120"/>
               </a:rPr>
-              <a:t>directAccessGrants</a:t>
-            </a:r>
-            <a:endParaRPr lang="en-US" sz="1300" dirty="0"/>
-          </a:p>
-        </p:txBody>
-      </p:sp>
-      <p:sp>
-        <p:nvSpPr>
-          <p:cNvPr id="21" name="Text 19"/>
-          <p:cNvSpPr/>
-          <p:nvPr/>
-        </p:nvSpPr>
-        <p:spPr>
-          <a:xfrm>
-            <a:off x="9464040" y="5193792"/>
-            <a:ext cx="1920240" cy="365760"/>
+              <a:t>bootRun</a:t>
+            </a:r>
+            <a:endParaRPr lang="en-US" sz="1500" dirty="0"/>
+          </a:p>
+        </p:txBody>
+      </p:sp>
+      <p:sp>
+        <p:nvSpPr>
+          <p:cNvPr id="12" name="Text 10"/>
+          <p:cNvSpPr/>
+          <p:nvPr/>
+        </p:nvSpPr>
+        <p:spPr>
+          <a:xfrm>
+            <a:off x="868680" y="4087368"/>
+            <a:ext cx="6400800" cy="329184"/>
           </a:xfrm>
           <a:prstGeom prst="rect">
             <a:avLst/>
@@ -8900,50 +8708,50 @@
           <a:bodyPr wrap="square" lIns="0" tIns="0" rIns="0" bIns="0" rtlCol="0" anchor="ctr"/>
           <a:lstStyle/>
           <a:p>
+            <a:pPr marL="0" indent="0">
+              <a:buNone/>
+            </a:pPr>
+            <a:r>
+              <a:rPr lang="en-US" sz="1250" dirty="0">
+                <a:solidFill>
+                  <a:srgbClr val="55606E"/>
+                </a:solidFill>
+                <a:latin typeface="Calibri" pitchFamily="34" charset="0"/>
+                <a:ea typeface="Calibri" pitchFamily="34" charset="-122"/>
+                <a:cs typeface="Calibri" pitchFamily="34" charset="-120"/>
+              </a:rPr>
+              <a:t>Spring-Boot-API</a:t>
+            </a:r>
+            <a:endParaRPr lang="en-US" sz="1250" dirty="0"/>
+          </a:p>
+        </p:txBody>
+      </p:sp>
+      <p:sp>
+        <p:nvSpPr>
+          <p:cNvPr id="13" name="Text 11"/>
+          <p:cNvSpPr/>
+          <p:nvPr/>
+        </p:nvSpPr>
+        <p:spPr>
+          <a:xfrm>
+            <a:off x="8579815" y="3758184"/>
+            <a:ext cx="2743200" cy="548640"/>
+          </a:xfrm>
+          <a:prstGeom prst="rect">
+            <a:avLst/>
+          </a:prstGeom>
+          <a:noFill/>
+          <a:ln/>
+        </p:spPr>
+        <p:txBody>
+          <a:bodyPr wrap="square" lIns="0" tIns="0" rIns="0" bIns="0" rtlCol="0" anchor="ctr"/>
+          <a:lstStyle/>
+          <a:p>
             <a:pPr marL="0" indent="0" algn="r">
               <a:buNone/>
             </a:pPr>
             <a:r>
-              <a:rPr lang="en-US" sz="1200" i="1" dirty="0">
-                <a:solidFill>
-                  <a:srgbClr val="D23B4E"/>
-                </a:solidFill>
-                <a:latin typeface="Calibri" pitchFamily="34" charset="0"/>
-                <a:ea typeface="Calibri" pitchFamily="34" charset="-122"/>
-                <a:cs typeface="Calibri" pitchFamily="34" charset="-120"/>
-              </a:rPr>
-              <a:t>Passwort-Grant</a:t>
-            </a:r>
-            <a:endParaRPr lang="en-US" sz="1200" dirty="0"/>
-          </a:p>
-        </p:txBody>
-      </p:sp>
-      <p:sp>
-        <p:nvSpPr>
-          <p:cNvPr id="22" name="Text 20"/>
-          <p:cNvSpPr/>
-          <p:nvPr/>
-        </p:nvSpPr>
-        <p:spPr>
-          <a:xfrm>
-            <a:off x="6446520" y="5623560"/>
-            <a:ext cx="4937760" cy="274320"/>
-          </a:xfrm>
-          <a:prstGeom prst="rect">
-            <a:avLst/>
-          </a:prstGeom>
-          <a:noFill/>
-          <a:ln/>
-        </p:spPr>
-        <p:txBody>
-          <a:bodyPr wrap="square" lIns="0" tIns="0" rIns="0" bIns="0" rtlCol="0" anchor="ctr"/>
-          <a:lstStyle/>
-          <a:p>
-            <a:pPr marL="0" indent="0">
-              <a:buNone/>
-            </a:pPr>
-            <a:r>
-              <a:rPr lang="en-US" sz="1050" dirty="0">
+              <a:rPr lang="en-US" sz="1500" b="1" dirty="0">
                 <a:solidFill>
                   <a:srgbClr val="9AA3AF"/>
                 </a:solidFill>
@@ -8951,28 +8759,45 @@
                 <a:ea typeface="Consolas" pitchFamily="34" charset="-122"/>
                 <a:cs typeface="Consolas" pitchFamily="34" charset="-120"/>
               </a:rPr>
-              <a:t>scheduler.json:859-867</a:t>
-            </a:r>
-            <a:endParaRPr lang="en-US" sz="1050" dirty="0"/>
-          </a:p>
-        </p:txBody>
-      </p:sp>
-      <p:sp>
-        <p:nvSpPr>
-          <p:cNvPr id="23" name="Text 1">
-            <a:extLst>
-              <a:ext uri="{FF2B5EF4-FFF2-40B4-BE49-F238E27FC236}">
-                <a16:creationId xmlns:a16="http://schemas.microsoft.com/office/drawing/2014/main" id="{159D14D2-A691-AC5D-DD1D-60255DAD0117}"/>
-              </a:ext>
-            </a:extLst>
-          </p:cNvPr>
-          <p:cNvSpPr/>
-          <p:nvPr/>
-        </p:nvSpPr>
-        <p:spPr>
-          <a:xfrm>
-            <a:off x="10774375" y="502920"/>
-            <a:ext cx="548640" cy="274320"/>
+              <a:t>:8079</a:t>
+            </a:r>
+            <a:endParaRPr lang="en-US" sz="1500" dirty="0"/>
+          </a:p>
+        </p:txBody>
+      </p:sp>
+      <p:sp>
+        <p:nvSpPr>
+          <p:cNvPr id="14" name="Shape 12"/>
+          <p:cNvSpPr/>
+          <p:nvPr/>
+        </p:nvSpPr>
+        <p:spPr>
+          <a:xfrm>
+            <a:off x="868680" y="4471416"/>
+            <a:ext cx="10454335" cy="0"/>
+          </a:xfrm>
+          <a:prstGeom prst="line">
+            <a:avLst/>
+          </a:prstGeom>
+          <a:noFill/>
+          <a:ln w="12700">
+            <a:solidFill>
+              <a:srgbClr val="E4E7EC"/>
+            </a:solidFill>
+            <a:prstDash val="solid"/>
+          </a:ln>
+        </p:spPr>
+      </p:sp>
+      <p:sp>
+        <p:nvSpPr>
+          <p:cNvPr id="15" name="Text 13"/>
+          <p:cNvSpPr/>
+          <p:nvPr/>
+        </p:nvSpPr>
+        <p:spPr>
+          <a:xfrm>
+            <a:off x="868680" y="4599432"/>
+            <a:ext cx="5943600" cy="384048"/>
           </a:xfrm>
           <a:prstGeom prst="rect">
             <a:avLst/>
@@ -8984,21 +8809,294 @@
           <a:bodyPr wrap="square" lIns="0" tIns="0" rIns="0" bIns="0" rtlCol="0" anchor="ctr"/>
           <a:lstStyle/>
           <a:p>
+            <a:pPr marL="0" indent="0">
+              <a:buNone/>
+            </a:pPr>
+            <a:r>
+              <a:rPr lang="en-US" sz="1500" b="1" dirty="0">
+                <a:solidFill>
+                  <a:srgbClr val="16181D"/>
+                </a:solidFill>
+                <a:latin typeface="Consolas" pitchFamily="34" charset="0"/>
+                <a:ea typeface="Consolas" pitchFamily="34" charset="-122"/>
+                <a:cs typeface="Consolas" pitchFamily="34" charset="-120"/>
+              </a:rPr>
+              <a:t>npm run dev</a:t>
+            </a:r>
+            <a:endParaRPr lang="en-US" sz="1500" dirty="0"/>
+          </a:p>
+        </p:txBody>
+      </p:sp>
+      <p:sp>
+        <p:nvSpPr>
+          <p:cNvPr id="16" name="Text 14"/>
+          <p:cNvSpPr/>
+          <p:nvPr/>
+        </p:nvSpPr>
+        <p:spPr>
+          <a:xfrm>
+            <a:off x="868680" y="4928616"/>
+            <a:ext cx="6400800" cy="329184"/>
+          </a:xfrm>
+          <a:prstGeom prst="rect">
+            <a:avLst/>
+          </a:prstGeom>
+          <a:noFill/>
+          <a:ln/>
+        </p:spPr>
+        <p:txBody>
+          <a:bodyPr wrap="square" lIns="0" tIns="0" rIns="0" bIns="0" rtlCol="0" anchor="ctr"/>
+          <a:lstStyle/>
+          <a:p>
+            <a:pPr marL="0" indent="0">
+              <a:buNone/>
+            </a:pPr>
+            <a:r>
+              <a:rPr lang="en-US" sz="1250" dirty="0" err="1">
+                <a:solidFill>
+                  <a:srgbClr val="55606E"/>
+                </a:solidFill>
+                <a:latin typeface="Calibri" pitchFamily="34" charset="0"/>
+                <a:ea typeface="Calibri" pitchFamily="34" charset="-122"/>
+                <a:cs typeface="Calibri" pitchFamily="34" charset="-120"/>
+              </a:rPr>
+              <a:t>reguläres</a:t>
+            </a:r>
+            <a:r>
+              <a:rPr lang="en-US" sz="1250" dirty="0">
+                <a:solidFill>
+                  <a:srgbClr val="55606E"/>
+                </a:solidFill>
+                <a:latin typeface="Calibri" pitchFamily="34" charset="0"/>
+                <a:ea typeface="Calibri" pitchFamily="34" charset="-122"/>
+                <a:cs typeface="Calibri" pitchFamily="34" charset="-120"/>
+              </a:rPr>
+              <a:t> Vue-Frontend</a:t>
+            </a:r>
+            <a:endParaRPr lang="en-US" sz="1250" dirty="0"/>
+          </a:p>
+        </p:txBody>
+      </p:sp>
+      <p:sp>
+        <p:nvSpPr>
+          <p:cNvPr id="17" name="Text 15"/>
+          <p:cNvSpPr/>
+          <p:nvPr/>
+        </p:nvSpPr>
+        <p:spPr>
+          <a:xfrm>
+            <a:off x="8579815" y="4599432"/>
+            <a:ext cx="2743200" cy="548640"/>
+          </a:xfrm>
+          <a:prstGeom prst="rect">
+            <a:avLst/>
+          </a:prstGeom>
+          <a:noFill/>
+          <a:ln/>
+        </p:spPr>
+        <p:txBody>
+          <a:bodyPr wrap="square" lIns="0" tIns="0" rIns="0" bIns="0" rtlCol="0" anchor="ctr"/>
+          <a:lstStyle/>
+          <a:p>
             <a:pPr marL="0" indent="0" algn="r">
               <a:buNone/>
             </a:pPr>
-            <a:fld id="{B45D24B6-C78C-43F1-9D4F-88F7B48373A8}" type="slidenum">
-              <a:rPr lang="en-US" sz="1050" b="1" kern="0" spc="100" smtClean="0">
+            <a:r>
+              <a:rPr lang="en-US" sz="1500" b="1" dirty="0">
                 <a:solidFill>
                   <a:srgbClr val="9AA3AF"/>
                 </a:solidFill>
-                <a:latin typeface="Calibri" pitchFamily="34" charset="0"/>
-                <a:ea typeface="Calibri" pitchFamily="34" charset="-122"/>
-                <a:cs typeface="Calibri" pitchFamily="34" charset="-120"/>
-              </a:rPr>
-              <a:t>18</a:t>
-            </a:fld>
-            <a:endParaRPr lang="en-US" sz="1050" dirty="0"/>
+                <a:latin typeface="Consolas" pitchFamily="34" charset="0"/>
+                <a:ea typeface="Consolas" pitchFamily="34" charset="-122"/>
+                <a:cs typeface="Consolas" pitchFamily="34" charset="-120"/>
+              </a:rPr>
+              <a:t>:8078</a:t>
+            </a:r>
+            <a:endParaRPr lang="en-US" sz="1500" dirty="0"/>
+          </a:p>
+        </p:txBody>
+      </p:sp>
+      <p:sp>
+        <p:nvSpPr>
+          <p:cNvPr id="18" name="Shape 16"/>
+          <p:cNvSpPr/>
+          <p:nvPr/>
+        </p:nvSpPr>
+        <p:spPr>
+          <a:xfrm>
+            <a:off x="868680" y="5312664"/>
+            <a:ext cx="10454335" cy="0"/>
+          </a:xfrm>
+          <a:prstGeom prst="line">
+            <a:avLst/>
+          </a:prstGeom>
+          <a:noFill/>
+          <a:ln w="12700">
+            <a:solidFill>
+              <a:srgbClr val="E4E7EC"/>
+            </a:solidFill>
+            <a:prstDash val="solid"/>
+          </a:ln>
+        </p:spPr>
+      </p:sp>
+      <p:sp>
+        <p:nvSpPr>
+          <p:cNvPr id="19" name="Text 17"/>
+          <p:cNvSpPr/>
+          <p:nvPr/>
+        </p:nvSpPr>
+        <p:spPr>
+          <a:xfrm>
+            <a:off x="868680" y="5440680"/>
+            <a:ext cx="5943600" cy="384048"/>
+          </a:xfrm>
+          <a:prstGeom prst="rect">
+            <a:avLst/>
+          </a:prstGeom>
+          <a:noFill/>
+          <a:ln/>
+        </p:spPr>
+        <p:txBody>
+          <a:bodyPr wrap="square" lIns="0" tIns="0" rIns="0" bIns="0" rtlCol="0" anchor="ctr"/>
+          <a:lstStyle/>
+          <a:p>
+            <a:pPr marL="0" indent="0">
+              <a:buNone/>
+            </a:pPr>
+            <a:r>
+              <a:rPr lang="en-US" sz="1500" b="1" dirty="0">
+                <a:solidFill>
+                  <a:srgbClr val="16181D"/>
+                </a:solidFill>
+                <a:latin typeface="Consolas" pitchFamily="34" charset="0"/>
+                <a:ea typeface="Consolas" pitchFamily="34" charset="-122"/>
+                <a:cs typeface="Consolas" pitchFamily="34" charset="-120"/>
+              </a:rPr>
+              <a:t>python -m http.server 5173</a:t>
+            </a:r>
+            <a:endParaRPr lang="en-US" sz="1500" dirty="0"/>
+          </a:p>
+        </p:txBody>
+      </p:sp>
+      <p:sp>
+        <p:nvSpPr>
+          <p:cNvPr id="20" name="Text 18"/>
+          <p:cNvSpPr/>
+          <p:nvPr/>
+        </p:nvSpPr>
+        <p:spPr>
+          <a:xfrm>
+            <a:off x="868680" y="5769864"/>
+            <a:ext cx="6400800" cy="329184"/>
+          </a:xfrm>
+          <a:prstGeom prst="rect">
+            <a:avLst/>
+          </a:prstGeom>
+          <a:noFill/>
+          <a:ln/>
+        </p:spPr>
+        <p:txBody>
+          <a:bodyPr wrap="square" lIns="0" tIns="0" rIns="0" bIns="0" rtlCol="0" anchor="ctr"/>
+          <a:lstStyle/>
+          <a:p>
+            <a:pPr marL="0" indent="0">
+              <a:buNone/>
+            </a:pPr>
+            <a:r>
+              <a:rPr lang="en-US" sz="1250" dirty="0">
+                <a:solidFill>
+                  <a:srgbClr val="55606E"/>
+                </a:solidFill>
+                <a:latin typeface="Calibri" pitchFamily="34" charset="0"/>
+                <a:ea typeface="Calibri" pitchFamily="34" charset="-122"/>
+                <a:cs typeface="Calibri" pitchFamily="34" charset="-120"/>
+              </a:rPr>
+              <a:t>exploit.html - die </a:t>
+            </a:r>
+            <a:r>
+              <a:rPr lang="en-US" sz="1250" dirty="0" err="1">
+                <a:solidFill>
+                  <a:srgbClr val="55606E"/>
+                </a:solidFill>
+                <a:latin typeface="Calibri" pitchFamily="34" charset="0"/>
+                <a:ea typeface="Calibri" pitchFamily="34" charset="-122"/>
+                <a:cs typeface="Calibri" pitchFamily="34" charset="-120"/>
+              </a:rPr>
+              <a:t>Angreifer-Seite</a:t>
+            </a:r>
+            <a:r>
+              <a:rPr lang="en-US" sz="1250" dirty="0">
+                <a:solidFill>
+                  <a:srgbClr val="55606E"/>
+                </a:solidFill>
+                <a:latin typeface="Calibri" pitchFamily="34" charset="0"/>
+                <a:ea typeface="Calibri" pitchFamily="34" charset="-122"/>
+                <a:cs typeface="Calibri" pitchFamily="34" charset="-120"/>
+              </a:rPr>
+              <a:t> auf </a:t>
+            </a:r>
+            <a:r>
+              <a:rPr lang="en-US" sz="1250" dirty="0" err="1">
+                <a:solidFill>
+                  <a:srgbClr val="55606E"/>
+                </a:solidFill>
+                <a:latin typeface="Calibri" pitchFamily="34" charset="0"/>
+                <a:ea typeface="Calibri" pitchFamily="34" charset="-122"/>
+                <a:cs typeface="Calibri" pitchFamily="34" charset="-120"/>
+              </a:rPr>
+              <a:t>anderem</a:t>
+            </a:r>
+            <a:r>
+              <a:rPr lang="en-US" sz="1250" dirty="0">
+                <a:solidFill>
+                  <a:srgbClr val="55606E"/>
+                </a:solidFill>
+                <a:latin typeface="Calibri" pitchFamily="34" charset="0"/>
+                <a:ea typeface="Calibri" pitchFamily="34" charset="-122"/>
+                <a:cs typeface="Calibri" pitchFamily="34" charset="-120"/>
+              </a:rPr>
+              <a:t> Port für CORS</a:t>
+            </a:r>
+            <a:endParaRPr lang="en-US" sz="1250" dirty="0"/>
+          </a:p>
+        </p:txBody>
+      </p:sp>
+      <p:sp>
+        <p:nvSpPr>
+          <p:cNvPr id="21" name="Text 19"/>
+          <p:cNvSpPr/>
+          <p:nvPr/>
+        </p:nvSpPr>
+        <p:spPr>
+          <a:xfrm>
+            <a:off x="8579815" y="5440680"/>
+            <a:ext cx="2743200" cy="548640"/>
+          </a:xfrm>
+          <a:prstGeom prst="rect">
+            <a:avLst/>
+          </a:prstGeom>
+          <a:noFill/>
+          <a:ln/>
+        </p:spPr>
+        <p:txBody>
+          <a:bodyPr wrap="square" lIns="0" tIns="0" rIns="0" bIns="0" rtlCol="0" anchor="ctr"/>
+          <a:lstStyle/>
+          <a:p>
+            <a:pPr marL="0" indent="0" algn="r">
+              <a:buNone/>
+            </a:pPr>
+            <a:r>
+              <a:rPr lang="en-US" sz="1500" b="1" dirty="0">
+                <a:solidFill>
+                  <a:srgbClr val="D23B4E"/>
+                </a:solidFill>
+                <a:latin typeface="Consolas" pitchFamily="34" charset="0"/>
+                <a:ea typeface="Consolas" pitchFamily="34" charset="-122"/>
+                <a:cs typeface="Consolas" pitchFamily="34" charset="-120"/>
+              </a:rPr>
+              <a:t>:5173</a:t>
+            </a:r>
+            <a:endParaRPr lang="en-US" sz="1500" dirty="0"/>
           </a:p>
         </p:txBody>
       </p:sp>
@@ -9007,6 +9105,18 @@
   <p:clrMapOvr>
     <a:masterClrMapping/>
   </p:clrMapOvr>
+  <mc:AlternateContent xmlns:mc="http://schemas.openxmlformats.org/markup-compatibility/2006">
+    <mc:Choice xmlns:p14="http://schemas.microsoft.com/office/powerpoint/2010/main" Requires="p14">
+      <p:transition spd="med" p14:dur="700">
+        <p:fade/>
+      </p:transition>
+    </mc:Choice>
+    <mc:Fallback>
+      <p:transition spd="med">
+        <p:fade/>
+      </p:transition>
+    </mc:Fallback>
+  </mc:AlternateContent>
 </p:sld>
 </file>
 
@@ -9060,7 +9170,7 @@
                 <a:ea typeface="Calibri" pitchFamily="34" charset="-122"/>
                 <a:cs typeface="Calibri" pitchFamily="34" charset="-120"/>
               </a:rPr>
-              <a:t>DEMO · AUFBAU</a:t>
+              <a:t>DEMO · ZUSTAND 1</a:t>
             </a:r>
             <a:endParaRPr lang="en-US" sz="1050" dirty="0"/>
           </a:p>
@@ -9068,14 +9178,14 @@
       </p:sp>
       <p:sp>
         <p:nvSpPr>
-          <p:cNvPr id="3" name="Text 1"/>
-          <p:cNvSpPr/>
-          <p:nvPr/>
-        </p:nvSpPr>
-        <p:spPr>
-          <a:xfrm>
-            <a:off x="10774375" y="502920"/>
-            <a:ext cx="548640" cy="274320"/>
+          <p:cNvPr id="4" name="Text 2"/>
+          <p:cNvSpPr/>
+          <p:nvPr/>
+        </p:nvSpPr>
+        <p:spPr>
+          <a:xfrm>
+            <a:off x="868680" y="914400"/>
+            <a:ext cx="6400800" cy="292608"/>
           </a:xfrm>
           <a:prstGeom prst="rect">
             <a:avLst/>
@@ -9087,34 +9197,34 @@
           <a:bodyPr wrap="square" lIns="0" tIns="0" rIns="0" bIns="0" rtlCol="0" anchor="ctr"/>
           <a:lstStyle/>
           <a:p>
-            <a:pPr marL="0" indent="0" algn="r">
-              <a:buNone/>
-            </a:pPr>
-            <a:fld id="{B45D24B6-C78C-43F1-9D4F-88F7B48373A8}" type="slidenum">
-              <a:rPr lang="en-US" sz="1050" b="1" kern="0" spc="100" smtClean="0">
-                <a:solidFill>
-                  <a:srgbClr val="9AA3AF"/>
-                </a:solidFill>
-                <a:latin typeface="Calibri" pitchFamily="34" charset="0"/>
-                <a:ea typeface="Calibri" pitchFamily="34" charset="-122"/>
-                <a:cs typeface="Calibri" pitchFamily="34" charset="-120"/>
-              </a:rPr>
-              <a:t>19</a:t>
-            </a:fld>
-            <a:endParaRPr lang="en-US" sz="1050" dirty="0"/>
-          </a:p>
-        </p:txBody>
-      </p:sp>
-      <p:sp>
-        <p:nvSpPr>
-          <p:cNvPr id="4" name="Text 2"/>
-          <p:cNvSpPr/>
-          <p:nvPr/>
-        </p:nvSpPr>
-        <p:spPr>
-          <a:xfrm>
-            <a:off x="868680" y="1051560"/>
-            <a:ext cx="10058400" cy="777240"/>
+            <a:pPr marL="0" indent="0">
+              <a:buNone/>
+            </a:pPr>
+            <a:r>
+              <a:rPr lang="en-US" sz="1150" b="1" kern="0" spc="250" dirty="0">
+                <a:solidFill>
+                  <a:srgbClr val="D23B4E"/>
+                </a:solidFill>
+                <a:latin typeface="Calibri" pitchFamily="34" charset="0"/>
+                <a:ea typeface="Calibri" pitchFamily="34" charset="-122"/>
+                <a:cs typeface="Calibri" pitchFamily="34" charset="-120"/>
+              </a:rPr>
+              <a:t>DER ERFOLGREICHE HACK · UNSICHERES CORS</a:t>
+            </a:r>
+            <a:endParaRPr lang="en-US" sz="1150" dirty="0"/>
+          </a:p>
+        </p:txBody>
+      </p:sp>
+      <p:sp>
+        <p:nvSpPr>
+          <p:cNvPr id="5" name="Text 3"/>
+          <p:cNvSpPr/>
+          <p:nvPr/>
+        </p:nvSpPr>
+        <p:spPr>
+          <a:xfrm>
+            <a:off x="868680" y="1234440"/>
+            <a:ext cx="6583680" cy="731520"/>
           </a:xfrm>
           <a:prstGeom prst="rect">
             <a:avLst/>
@@ -9130,7 +9240,7 @@
               <a:buNone/>
             </a:pPr>
             <a:r>
-              <a:rPr lang="en-US" sz="4000" b="1" dirty="0">
+              <a:rPr lang="en-US" sz="3600" b="1" dirty="0">
                 <a:solidFill>
                   <a:srgbClr val="16181D"/>
                 </a:solidFill>
@@ -9138,1248 +9248,6 @@
                 <a:ea typeface="Trebuchet MS" pitchFamily="34" charset="-122"/>
                 <a:cs typeface="Trebuchet MS" pitchFamily="34" charset="-120"/>
               </a:rPr>
-              <a:t>Setup</a:t>
-            </a:r>
-            <a:endParaRPr lang="en-US" sz="4000" dirty="0"/>
-          </a:p>
-        </p:txBody>
-      </p:sp>
-      <p:sp>
-        <p:nvSpPr>
-          <p:cNvPr id="5" name="Text 3"/>
-          <p:cNvSpPr/>
-          <p:nvPr/>
-        </p:nvSpPr>
-        <p:spPr>
-          <a:xfrm>
-            <a:off x="868680" y="1920240"/>
-            <a:ext cx="10424160" cy="640080"/>
-          </a:xfrm>
-          <a:prstGeom prst="rect">
-            <a:avLst/>
-          </a:prstGeom>
-          <a:noFill/>
-          <a:ln/>
-        </p:spPr>
-        <p:txBody>
-          <a:bodyPr wrap="square" lIns="0" tIns="0" rIns="0" bIns="0" rtlCol="0" anchor="ctr"/>
-          <a:lstStyle/>
-          <a:p>
-            <a:r>
-              <a:rPr lang="en-US" sz="1700" dirty="0">
-                <a:solidFill>
-                  <a:srgbClr val="55606E"/>
-                </a:solidFill>
-                <a:latin typeface="Calibri" pitchFamily="34" charset="0"/>
-                <a:ea typeface="Calibri" pitchFamily="34" charset="-122"/>
-                <a:cs typeface="Calibri" pitchFamily="34" charset="-120"/>
-              </a:rPr>
-              <a:t>Vier </a:t>
-            </a:r>
-            <a:r>
-              <a:rPr lang="en-US" sz="1700" dirty="0" err="1">
-                <a:solidFill>
-                  <a:srgbClr val="55606E"/>
-                </a:solidFill>
-                <a:latin typeface="Calibri" pitchFamily="34" charset="0"/>
-                <a:ea typeface="Calibri" pitchFamily="34" charset="-122"/>
-                <a:cs typeface="Calibri" pitchFamily="34" charset="-120"/>
-              </a:rPr>
-              <a:t>lokale</a:t>
-            </a:r>
-            <a:r>
-              <a:rPr lang="en-US" sz="1700" dirty="0">
-                <a:solidFill>
-                  <a:srgbClr val="55606E"/>
-                </a:solidFill>
-                <a:latin typeface="Calibri" pitchFamily="34" charset="0"/>
-                <a:ea typeface="Calibri" pitchFamily="34" charset="-122"/>
-                <a:cs typeface="Calibri" pitchFamily="34" charset="-120"/>
-              </a:rPr>
-              <a:t> </a:t>
-            </a:r>
-            <a:r>
-              <a:rPr lang="en-US" sz="1700" dirty="0" err="1">
-                <a:solidFill>
-                  <a:srgbClr val="55606E"/>
-                </a:solidFill>
-                <a:latin typeface="Calibri" pitchFamily="34" charset="0"/>
-                <a:ea typeface="Calibri" pitchFamily="34" charset="-122"/>
-                <a:cs typeface="Calibri" pitchFamily="34" charset="-120"/>
-              </a:rPr>
-              <a:t>Komponenten</a:t>
-            </a:r>
-            <a:endParaRPr lang="en-US" sz="1700" dirty="0"/>
-          </a:p>
-        </p:txBody>
-      </p:sp>
-      <p:sp>
-        <p:nvSpPr>
-          <p:cNvPr id="6" name="Shape 4"/>
-          <p:cNvSpPr/>
-          <p:nvPr/>
-        </p:nvSpPr>
-        <p:spPr>
-          <a:xfrm>
-            <a:off x="868680" y="2788920"/>
-            <a:ext cx="10454335" cy="0"/>
-          </a:xfrm>
-          <a:prstGeom prst="line">
-            <a:avLst/>
-          </a:prstGeom>
-          <a:noFill/>
-          <a:ln w="12700">
-            <a:solidFill>
-              <a:srgbClr val="E4E7EC"/>
-            </a:solidFill>
-            <a:prstDash val="solid"/>
-          </a:ln>
-        </p:spPr>
-      </p:sp>
-      <p:sp>
-        <p:nvSpPr>
-          <p:cNvPr id="7" name="Text 5"/>
-          <p:cNvSpPr/>
-          <p:nvPr/>
-        </p:nvSpPr>
-        <p:spPr>
-          <a:xfrm>
-            <a:off x="868680" y="2916936"/>
-            <a:ext cx="5943600" cy="384048"/>
-          </a:xfrm>
-          <a:prstGeom prst="rect">
-            <a:avLst/>
-          </a:prstGeom>
-          <a:noFill/>
-          <a:ln/>
-        </p:spPr>
-        <p:txBody>
-          <a:bodyPr wrap="square" lIns="0" tIns="0" rIns="0" bIns="0" rtlCol="0" anchor="ctr"/>
-          <a:lstStyle/>
-          <a:p>
-            <a:pPr marL="0" indent="0">
-              <a:buNone/>
-            </a:pPr>
-            <a:r>
-              <a:rPr lang="en-US" sz="1500" b="1" dirty="0">
-                <a:solidFill>
-                  <a:srgbClr val="16181D"/>
-                </a:solidFill>
-                <a:latin typeface="Consolas" pitchFamily="34" charset="0"/>
-                <a:ea typeface="Consolas" pitchFamily="34" charset="-122"/>
-                <a:cs typeface="Consolas" pitchFamily="34" charset="-120"/>
-              </a:rPr>
-              <a:t>docker-compose up</a:t>
-            </a:r>
-            <a:endParaRPr lang="en-US" sz="1500" dirty="0"/>
-          </a:p>
-        </p:txBody>
-      </p:sp>
-      <p:sp>
-        <p:nvSpPr>
-          <p:cNvPr id="8" name="Text 6"/>
-          <p:cNvSpPr/>
-          <p:nvPr/>
-        </p:nvSpPr>
-        <p:spPr>
-          <a:xfrm>
-            <a:off x="868680" y="3246120"/>
-            <a:ext cx="6400800" cy="329184"/>
-          </a:xfrm>
-          <a:prstGeom prst="rect">
-            <a:avLst/>
-          </a:prstGeom>
-          <a:noFill/>
-          <a:ln/>
-        </p:spPr>
-        <p:txBody>
-          <a:bodyPr wrap="square" lIns="0" tIns="0" rIns="0" bIns="0" rtlCol="0" anchor="ctr"/>
-          <a:lstStyle/>
-          <a:p>
-            <a:pPr marL="0" indent="0">
-              <a:buNone/>
-            </a:pPr>
-            <a:r>
-              <a:rPr lang="en-US" sz="1250" dirty="0">
-                <a:solidFill>
-                  <a:srgbClr val="55606E"/>
-                </a:solidFill>
-                <a:latin typeface="Calibri" pitchFamily="34" charset="0"/>
-                <a:ea typeface="Calibri" pitchFamily="34" charset="-122"/>
-                <a:cs typeface="Calibri" pitchFamily="34" charset="-120"/>
-              </a:rPr>
-              <a:t>Keycloak · Postgres</a:t>
-            </a:r>
-            <a:endParaRPr lang="en-US" sz="1250" dirty="0"/>
-          </a:p>
-        </p:txBody>
-      </p:sp>
-      <p:sp>
-        <p:nvSpPr>
-          <p:cNvPr id="9" name="Text 7"/>
-          <p:cNvSpPr/>
-          <p:nvPr/>
-        </p:nvSpPr>
-        <p:spPr>
-          <a:xfrm>
-            <a:off x="8579815" y="2916936"/>
-            <a:ext cx="2743200" cy="548640"/>
-          </a:xfrm>
-          <a:prstGeom prst="rect">
-            <a:avLst/>
-          </a:prstGeom>
-          <a:noFill/>
-          <a:ln/>
-        </p:spPr>
-        <p:txBody>
-          <a:bodyPr wrap="square" lIns="0" tIns="0" rIns="0" bIns="0" rtlCol="0" anchor="ctr"/>
-          <a:lstStyle/>
-          <a:p>
-            <a:pPr marL="0" indent="0" algn="r">
-              <a:buNone/>
-            </a:pPr>
-            <a:r>
-              <a:rPr lang="en-US" sz="1500" b="1" dirty="0">
-                <a:solidFill>
-                  <a:srgbClr val="9AA3AF"/>
-                </a:solidFill>
-                <a:latin typeface="Consolas" pitchFamily="34" charset="0"/>
-                <a:ea typeface="Consolas" pitchFamily="34" charset="-122"/>
-                <a:cs typeface="Consolas" pitchFamily="34" charset="-120"/>
-              </a:rPr>
-              <a:t>:8080 / :5432</a:t>
-            </a:r>
-            <a:endParaRPr lang="en-US" sz="1500" dirty="0"/>
-          </a:p>
-        </p:txBody>
-      </p:sp>
-      <p:sp>
-        <p:nvSpPr>
-          <p:cNvPr id="10" name="Shape 8"/>
-          <p:cNvSpPr/>
-          <p:nvPr/>
-        </p:nvSpPr>
-        <p:spPr>
-          <a:xfrm>
-            <a:off x="868680" y="3630168"/>
-            <a:ext cx="10454335" cy="0"/>
-          </a:xfrm>
-          <a:prstGeom prst="line">
-            <a:avLst/>
-          </a:prstGeom>
-          <a:noFill/>
-          <a:ln w="12700">
-            <a:solidFill>
-              <a:srgbClr val="E4E7EC"/>
-            </a:solidFill>
-            <a:prstDash val="solid"/>
-          </a:ln>
-        </p:spPr>
-      </p:sp>
-      <p:sp>
-        <p:nvSpPr>
-          <p:cNvPr id="11" name="Text 9"/>
-          <p:cNvSpPr/>
-          <p:nvPr/>
-        </p:nvSpPr>
-        <p:spPr>
-          <a:xfrm>
-            <a:off x="868680" y="3758184"/>
-            <a:ext cx="5943600" cy="384048"/>
-          </a:xfrm>
-          <a:prstGeom prst="rect">
-            <a:avLst/>
-          </a:prstGeom>
-          <a:noFill/>
-          <a:ln/>
-        </p:spPr>
-        <p:txBody>
-          <a:bodyPr wrap="square" lIns="0" tIns="0" rIns="0" bIns="0" rtlCol="0" anchor="ctr"/>
-          <a:lstStyle/>
-          <a:p>
-            <a:pPr marL="0" indent="0">
-              <a:buNone/>
-            </a:pPr>
-            <a:r>
-              <a:rPr lang="en-US" sz="1500" b="1" dirty="0" err="1">
-                <a:solidFill>
-                  <a:srgbClr val="16181D"/>
-                </a:solidFill>
-                <a:latin typeface="Consolas" pitchFamily="34" charset="0"/>
-                <a:ea typeface="Consolas" pitchFamily="34" charset="-122"/>
-                <a:cs typeface="Consolas" pitchFamily="34" charset="-120"/>
-              </a:rPr>
-              <a:t>gradlew</a:t>
-            </a:r>
-            <a:r>
-              <a:rPr lang="en-US" sz="1500" b="1" dirty="0">
-                <a:solidFill>
-                  <a:srgbClr val="16181D"/>
-                </a:solidFill>
-                <a:latin typeface="Consolas" pitchFamily="34" charset="0"/>
-                <a:ea typeface="Consolas" pitchFamily="34" charset="-122"/>
-                <a:cs typeface="Consolas" pitchFamily="34" charset="-120"/>
-              </a:rPr>
-              <a:t> </a:t>
-            </a:r>
-            <a:r>
-              <a:rPr lang="en-US" sz="1500" b="1" dirty="0" err="1">
-                <a:solidFill>
-                  <a:srgbClr val="16181D"/>
-                </a:solidFill>
-                <a:latin typeface="Consolas" pitchFamily="34" charset="0"/>
-                <a:ea typeface="Consolas" pitchFamily="34" charset="-122"/>
-                <a:cs typeface="Consolas" pitchFamily="34" charset="-120"/>
-              </a:rPr>
-              <a:t>bootRun</a:t>
-            </a:r>
-            <a:endParaRPr lang="en-US" sz="1500" dirty="0"/>
-          </a:p>
-        </p:txBody>
-      </p:sp>
-      <p:sp>
-        <p:nvSpPr>
-          <p:cNvPr id="12" name="Text 10"/>
-          <p:cNvSpPr/>
-          <p:nvPr/>
-        </p:nvSpPr>
-        <p:spPr>
-          <a:xfrm>
-            <a:off x="868680" y="4087368"/>
-            <a:ext cx="6400800" cy="329184"/>
-          </a:xfrm>
-          <a:prstGeom prst="rect">
-            <a:avLst/>
-          </a:prstGeom>
-          <a:noFill/>
-          <a:ln/>
-        </p:spPr>
-        <p:txBody>
-          <a:bodyPr wrap="square" lIns="0" tIns="0" rIns="0" bIns="0" rtlCol="0" anchor="ctr"/>
-          <a:lstStyle/>
-          <a:p>
-            <a:pPr marL="0" indent="0">
-              <a:buNone/>
-            </a:pPr>
-            <a:r>
-              <a:rPr lang="en-US" sz="1250" dirty="0">
-                <a:solidFill>
-                  <a:srgbClr val="55606E"/>
-                </a:solidFill>
-                <a:latin typeface="Calibri" pitchFamily="34" charset="0"/>
-                <a:ea typeface="Calibri" pitchFamily="34" charset="-122"/>
-                <a:cs typeface="Calibri" pitchFamily="34" charset="-120"/>
-              </a:rPr>
-              <a:t>Spring-Boot-API</a:t>
-            </a:r>
-            <a:endParaRPr lang="en-US" sz="1250" dirty="0"/>
-          </a:p>
-        </p:txBody>
-      </p:sp>
-      <p:sp>
-        <p:nvSpPr>
-          <p:cNvPr id="13" name="Text 11"/>
-          <p:cNvSpPr/>
-          <p:nvPr/>
-        </p:nvSpPr>
-        <p:spPr>
-          <a:xfrm>
-            <a:off x="8579815" y="3758184"/>
-            <a:ext cx="2743200" cy="548640"/>
-          </a:xfrm>
-          <a:prstGeom prst="rect">
-            <a:avLst/>
-          </a:prstGeom>
-          <a:noFill/>
-          <a:ln/>
-        </p:spPr>
-        <p:txBody>
-          <a:bodyPr wrap="square" lIns="0" tIns="0" rIns="0" bIns="0" rtlCol="0" anchor="ctr"/>
-          <a:lstStyle/>
-          <a:p>
-            <a:pPr marL="0" indent="0" algn="r">
-              <a:buNone/>
-            </a:pPr>
-            <a:r>
-              <a:rPr lang="en-US" sz="1500" b="1" dirty="0">
-                <a:solidFill>
-                  <a:srgbClr val="9AA3AF"/>
-                </a:solidFill>
-                <a:latin typeface="Consolas" pitchFamily="34" charset="0"/>
-                <a:ea typeface="Consolas" pitchFamily="34" charset="-122"/>
-                <a:cs typeface="Consolas" pitchFamily="34" charset="-120"/>
-              </a:rPr>
-              <a:t>:8079</a:t>
-            </a:r>
-            <a:endParaRPr lang="en-US" sz="1500" dirty="0"/>
-          </a:p>
-        </p:txBody>
-      </p:sp>
-      <p:sp>
-        <p:nvSpPr>
-          <p:cNvPr id="14" name="Shape 12"/>
-          <p:cNvSpPr/>
-          <p:nvPr/>
-        </p:nvSpPr>
-        <p:spPr>
-          <a:xfrm>
-            <a:off x="868680" y="4471416"/>
-            <a:ext cx="10454335" cy="0"/>
-          </a:xfrm>
-          <a:prstGeom prst="line">
-            <a:avLst/>
-          </a:prstGeom>
-          <a:noFill/>
-          <a:ln w="12700">
-            <a:solidFill>
-              <a:srgbClr val="E4E7EC"/>
-            </a:solidFill>
-            <a:prstDash val="solid"/>
-          </a:ln>
-        </p:spPr>
-      </p:sp>
-      <p:sp>
-        <p:nvSpPr>
-          <p:cNvPr id="15" name="Text 13"/>
-          <p:cNvSpPr/>
-          <p:nvPr/>
-        </p:nvSpPr>
-        <p:spPr>
-          <a:xfrm>
-            <a:off x="868680" y="4599432"/>
-            <a:ext cx="5943600" cy="384048"/>
-          </a:xfrm>
-          <a:prstGeom prst="rect">
-            <a:avLst/>
-          </a:prstGeom>
-          <a:noFill/>
-          <a:ln/>
-        </p:spPr>
-        <p:txBody>
-          <a:bodyPr wrap="square" lIns="0" tIns="0" rIns="0" bIns="0" rtlCol="0" anchor="ctr"/>
-          <a:lstStyle/>
-          <a:p>
-            <a:pPr marL="0" indent="0">
-              <a:buNone/>
-            </a:pPr>
-            <a:r>
-              <a:rPr lang="en-US" sz="1500" b="1" dirty="0">
-                <a:solidFill>
-                  <a:srgbClr val="16181D"/>
-                </a:solidFill>
-                <a:latin typeface="Consolas" pitchFamily="34" charset="0"/>
-                <a:ea typeface="Consolas" pitchFamily="34" charset="-122"/>
-                <a:cs typeface="Consolas" pitchFamily="34" charset="-120"/>
-              </a:rPr>
-              <a:t>npm run dev</a:t>
-            </a:r>
-            <a:endParaRPr lang="en-US" sz="1500" dirty="0"/>
-          </a:p>
-        </p:txBody>
-      </p:sp>
-      <p:sp>
-        <p:nvSpPr>
-          <p:cNvPr id="16" name="Text 14"/>
-          <p:cNvSpPr/>
-          <p:nvPr/>
-        </p:nvSpPr>
-        <p:spPr>
-          <a:xfrm>
-            <a:off x="868680" y="4928616"/>
-            <a:ext cx="6400800" cy="329184"/>
-          </a:xfrm>
-          <a:prstGeom prst="rect">
-            <a:avLst/>
-          </a:prstGeom>
-          <a:noFill/>
-          <a:ln/>
-        </p:spPr>
-        <p:txBody>
-          <a:bodyPr wrap="square" lIns="0" tIns="0" rIns="0" bIns="0" rtlCol="0" anchor="ctr"/>
-          <a:lstStyle/>
-          <a:p>
-            <a:pPr marL="0" indent="0">
-              <a:buNone/>
-            </a:pPr>
-            <a:r>
-              <a:rPr lang="en-US" sz="1250" dirty="0" err="1">
-                <a:solidFill>
-                  <a:srgbClr val="55606E"/>
-                </a:solidFill>
-                <a:latin typeface="Calibri" pitchFamily="34" charset="0"/>
-                <a:ea typeface="Calibri" pitchFamily="34" charset="-122"/>
-                <a:cs typeface="Calibri" pitchFamily="34" charset="-120"/>
-              </a:rPr>
-              <a:t>reguläres</a:t>
-            </a:r>
-            <a:r>
-              <a:rPr lang="en-US" sz="1250" dirty="0">
-                <a:solidFill>
-                  <a:srgbClr val="55606E"/>
-                </a:solidFill>
-                <a:latin typeface="Calibri" pitchFamily="34" charset="0"/>
-                <a:ea typeface="Calibri" pitchFamily="34" charset="-122"/>
-                <a:cs typeface="Calibri" pitchFamily="34" charset="-120"/>
-              </a:rPr>
-              <a:t> Vue-Frontend</a:t>
-            </a:r>
-            <a:endParaRPr lang="en-US" sz="1250" dirty="0"/>
-          </a:p>
-        </p:txBody>
-      </p:sp>
-      <p:sp>
-        <p:nvSpPr>
-          <p:cNvPr id="17" name="Text 15"/>
-          <p:cNvSpPr/>
-          <p:nvPr/>
-        </p:nvSpPr>
-        <p:spPr>
-          <a:xfrm>
-            <a:off x="8579815" y="4599432"/>
-            <a:ext cx="2743200" cy="548640"/>
-          </a:xfrm>
-          <a:prstGeom prst="rect">
-            <a:avLst/>
-          </a:prstGeom>
-          <a:noFill/>
-          <a:ln/>
-        </p:spPr>
-        <p:txBody>
-          <a:bodyPr wrap="square" lIns="0" tIns="0" rIns="0" bIns="0" rtlCol="0" anchor="ctr"/>
-          <a:lstStyle/>
-          <a:p>
-            <a:pPr marL="0" indent="0" algn="r">
-              <a:buNone/>
-            </a:pPr>
-            <a:r>
-              <a:rPr lang="en-US" sz="1500" b="1" dirty="0">
-                <a:solidFill>
-                  <a:srgbClr val="9AA3AF"/>
-                </a:solidFill>
-                <a:latin typeface="Consolas" pitchFamily="34" charset="0"/>
-                <a:ea typeface="Consolas" pitchFamily="34" charset="-122"/>
-                <a:cs typeface="Consolas" pitchFamily="34" charset="-120"/>
-              </a:rPr>
-              <a:t>:8078</a:t>
-            </a:r>
-            <a:endParaRPr lang="en-US" sz="1500" dirty="0"/>
-          </a:p>
-        </p:txBody>
-      </p:sp>
-      <p:sp>
-        <p:nvSpPr>
-          <p:cNvPr id="18" name="Shape 16"/>
-          <p:cNvSpPr/>
-          <p:nvPr/>
-        </p:nvSpPr>
-        <p:spPr>
-          <a:xfrm>
-            <a:off x="868680" y="5312664"/>
-            <a:ext cx="10454335" cy="0"/>
-          </a:xfrm>
-          <a:prstGeom prst="line">
-            <a:avLst/>
-          </a:prstGeom>
-          <a:noFill/>
-          <a:ln w="12700">
-            <a:solidFill>
-              <a:srgbClr val="E4E7EC"/>
-            </a:solidFill>
-            <a:prstDash val="solid"/>
-          </a:ln>
-        </p:spPr>
-      </p:sp>
-      <p:sp>
-        <p:nvSpPr>
-          <p:cNvPr id="19" name="Text 17"/>
-          <p:cNvSpPr/>
-          <p:nvPr/>
-        </p:nvSpPr>
-        <p:spPr>
-          <a:xfrm>
-            <a:off x="868680" y="5440680"/>
-            <a:ext cx="5943600" cy="384048"/>
-          </a:xfrm>
-          <a:prstGeom prst="rect">
-            <a:avLst/>
-          </a:prstGeom>
-          <a:noFill/>
-          <a:ln/>
-        </p:spPr>
-        <p:txBody>
-          <a:bodyPr wrap="square" lIns="0" tIns="0" rIns="0" bIns="0" rtlCol="0" anchor="ctr"/>
-          <a:lstStyle/>
-          <a:p>
-            <a:pPr marL="0" indent="0">
-              <a:buNone/>
-            </a:pPr>
-            <a:r>
-              <a:rPr lang="en-US" sz="1500" b="1" dirty="0">
-                <a:solidFill>
-                  <a:srgbClr val="16181D"/>
-                </a:solidFill>
-                <a:latin typeface="Consolas" pitchFamily="34" charset="0"/>
-                <a:ea typeface="Consolas" pitchFamily="34" charset="-122"/>
-                <a:cs typeface="Consolas" pitchFamily="34" charset="-120"/>
-              </a:rPr>
-              <a:t>python -m http.server 5173</a:t>
-            </a:r>
-            <a:endParaRPr lang="en-US" sz="1500" dirty="0"/>
-          </a:p>
-        </p:txBody>
-      </p:sp>
-      <p:sp>
-        <p:nvSpPr>
-          <p:cNvPr id="20" name="Text 18"/>
-          <p:cNvSpPr/>
-          <p:nvPr/>
-        </p:nvSpPr>
-        <p:spPr>
-          <a:xfrm>
-            <a:off x="868680" y="5769864"/>
-            <a:ext cx="6400800" cy="329184"/>
-          </a:xfrm>
-          <a:prstGeom prst="rect">
-            <a:avLst/>
-          </a:prstGeom>
-          <a:noFill/>
-          <a:ln/>
-        </p:spPr>
-        <p:txBody>
-          <a:bodyPr wrap="square" lIns="0" tIns="0" rIns="0" bIns="0" rtlCol="0" anchor="ctr"/>
-          <a:lstStyle/>
-          <a:p>
-            <a:pPr marL="0" indent="0">
-              <a:buNone/>
-            </a:pPr>
-            <a:r>
-              <a:rPr lang="en-US" sz="1250" dirty="0">
-                <a:solidFill>
-                  <a:srgbClr val="55606E"/>
-                </a:solidFill>
-                <a:latin typeface="Calibri" pitchFamily="34" charset="0"/>
-                <a:ea typeface="Calibri" pitchFamily="34" charset="-122"/>
-                <a:cs typeface="Calibri" pitchFamily="34" charset="-120"/>
-              </a:rPr>
-              <a:t>exploit.html - die </a:t>
-            </a:r>
-            <a:r>
-              <a:rPr lang="en-US" sz="1250" dirty="0" err="1">
-                <a:solidFill>
-                  <a:srgbClr val="55606E"/>
-                </a:solidFill>
-                <a:latin typeface="Calibri" pitchFamily="34" charset="0"/>
-                <a:ea typeface="Calibri" pitchFamily="34" charset="-122"/>
-                <a:cs typeface="Calibri" pitchFamily="34" charset="-120"/>
-              </a:rPr>
-              <a:t>Angreifer-Seite</a:t>
-            </a:r>
-            <a:r>
-              <a:rPr lang="en-US" sz="1250" dirty="0">
-                <a:solidFill>
-                  <a:srgbClr val="55606E"/>
-                </a:solidFill>
-                <a:latin typeface="Calibri" pitchFamily="34" charset="0"/>
-                <a:ea typeface="Calibri" pitchFamily="34" charset="-122"/>
-                <a:cs typeface="Calibri" pitchFamily="34" charset="-120"/>
-              </a:rPr>
-              <a:t> auf </a:t>
-            </a:r>
-            <a:r>
-              <a:rPr lang="en-US" sz="1250" dirty="0" err="1">
-                <a:solidFill>
-                  <a:srgbClr val="55606E"/>
-                </a:solidFill>
-                <a:latin typeface="Calibri" pitchFamily="34" charset="0"/>
-                <a:ea typeface="Calibri" pitchFamily="34" charset="-122"/>
-                <a:cs typeface="Calibri" pitchFamily="34" charset="-120"/>
-              </a:rPr>
-              <a:t>anderem</a:t>
-            </a:r>
-            <a:r>
-              <a:rPr lang="en-US" sz="1250" dirty="0">
-                <a:solidFill>
-                  <a:srgbClr val="55606E"/>
-                </a:solidFill>
-                <a:latin typeface="Calibri" pitchFamily="34" charset="0"/>
-                <a:ea typeface="Calibri" pitchFamily="34" charset="-122"/>
-                <a:cs typeface="Calibri" pitchFamily="34" charset="-120"/>
-              </a:rPr>
-              <a:t> Port für CORS</a:t>
-            </a:r>
-            <a:endParaRPr lang="en-US" sz="1250" dirty="0"/>
-          </a:p>
-        </p:txBody>
-      </p:sp>
-      <p:sp>
-        <p:nvSpPr>
-          <p:cNvPr id="21" name="Text 19"/>
-          <p:cNvSpPr/>
-          <p:nvPr/>
-        </p:nvSpPr>
-        <p:spPr>
-          <a:xfrm>
-            <a:off x="8579815" y="5440680"/>
-            <a:ext cx="2743200" cy="548640"/>
-          </a:xfrm>
-          <a:prstGeom prst="rect">
-            <a:avLst/>
-          </a:prstGeom>
-          <a:noFill/>
-          <a:ln/>
-        </p:spPr>
-        <p:txBody>
-          <a:bodyPr wrap="square" lIns="0" tIns="0" rIns="0" bIns="0" rtlCol="0" anchor="ctr"/>
-          <a:lstStyle/>
-          <a:p>
-            <a:pPr marL="0" indent="0" algn="r">
-              <a:buNone/>
-            </a:pPr>
-            <a:r>
-              <a:rPr lang="en-US" sz="1500" b="1" dirty="0">
-                <a:solidFill>
-                  <a:srgbClr val="D23B4E"/>
-                </a:solidFill>
-                <a:latin typeface="Consolas" pitchFamily="34" charset="0"/>
-                <a:ea typeface="Consolas" pitchFamily="34" charset="-122"/>
-                <a:cs typeface="Consolas" pitchFamily="34" charset="-120"/>
-              </a:rPr>
-              <a:t>:5173</a:t>
-            </a:r>
-            <a:endParaRPr lang="en-US" sz="1500" dirty="0"/>
-          </a:p>
-        </p:txBody>
-      </p:sp>
-    </p:spTree>
-  </p:cSld>
-  <p:clrMapOvr>
-    <a:masterClrMapping/>
-  </p:clrMapOvr>
-  <mc:AlternateContent xmlns:mc="http://schemas.openxmlformats.org/markup-compatibility/2006" xmlns:p14="http://schemas.microsoft.com/office/powerpoint/2010/main">
-    <mc:Choice Requires="p14">
-      <p:transition spd="med" p14:dur="700">
-        <p:fade/>
-      </p:transition>
-    </mc:Choice>
-    <mc:Fallback xmlns="">
-      <p:transition spd="med">
-        <p:fade/>
-      </p:transition>
-    </mc:Fallback>
-  </mc:AlternateContent>
-</p:sld>
-</file>
-
-<file path=ppt/slides/slide2.xml><?xml version="1.0" encoding="utf-8"?>
-<p:sld xmlns:a="http://schemas.openxmlformats.org/drawingml/2006/main" xmlns:r="http://schemas.openxmlformats.org/officeDocument/2006/relationships" xmlns:p="http://schemas.openxmlformats.org/presentationml/2006/main">
-  <p:cSld>
-    <p:bg>
-      <p:bgPr>
-        <a:solidFill>
-          <a:srgbClr val="FFFFFF"/>
-        </a:solidFill>
-        <a:effectLst/>
-      </p:bgPr>
-    </p:bg>
-    <p:spTree>
-      <p:nvGrpSpPr>
-        <p:cNvPr id="1" name=""/>
-        <p:cNvGrpSpPr/>
-        <p:nvPr/>
-      </p:nvGrpSpPr>
-      <p:grpSpPr>
-        <a:xfrm>
-          <a:off x="0" y="0"/>
-          <a:ext cx="0" cy="0"/>
-          <a:chOff x="0" y="0"/>
-          <a:chExt cx="0" cy="0"/>
-        </a:xfrm>
-      </p:grpSpPr>
-      <p:sp>
-        <p:nvSpPr>
-          <p:cNvPr id="2" name="Text 0">
-            <a:extLst>
-              <a:ext uri="{FF2B5EF4-FFF2-40B4-BE49-F238E27FC236}">
-                <a16:creationId xmlns:a16="http://schemas.microsoft.com/office/drawing/2014/main" id="{1B95CA36-7AD5-4CED-959F-F065EF9A96F2}"/>
-              </a:ext>
-            </a:extLst>
-          </p:cNvPr>
-          <p:cNvSpPr>
-            <a:spLocks noGrp="1"/>
-          </p:cNvSpPr>
-          <p:nvPr/>
-        </p:nvSpPr>
-        <p:spPr>
-          <a:xfrm>
-            <a:off x="868680" y="1874520"/>
-            <a:ext cx="7315200" cy="320040"/>
-          </a:xfrm>
-          <a:prstGeom prst="rect">
-            <a:avLst/>
-          </a:prstGeom>
-          <a:noFill/>
-        </p:spPr>
-        <p:txBody>
-          <a:bodyPr wrap="square" lIns="0" tIns="0" rIns="0" bIns="0" anchor="ctr"/>
-          <a:lstStyle/>
-          <a:p>
-            <a:pPr marL="0" indent="0">
-              <a:buNone/>
-            </a:pPr>
-            <a:r>
-              <a:rPr sz="1200" b="1" dirty="0">
-                <a:solidFill>
-                  <a:srgbClr val="1463FF"/>
-                </a:solidFill>
-                <a:latin typeface="Calibri"/>
-                <a:ea typeface="Calibri"/>
-                <a:cs typeface="Calibri"/>
-              </a:rPr>
-              <a:t>IT SECURITY · SCHEDULER</a:t>
-            </a:r>
-          </a:p>
-        </p:txBody>
-      </p:sp>
-      <p:sp>
-        <p:nvSpPr>
-          <p:cNvPr id="3" name="Text 1">
-            <a:extLst>
-              <a:ext uri="{FF2B5EF4-FFF2-40B4-BE49-F238E27FC236}">
-                <a16:creationId xmlns:a16="http://schemas.microsoft.com/office/drawing/2014/main" id="{FD8DA67A-FD81-4D52-AB3E-0B0E93F9DAB5}"/>
-              </a:ext>
-            </a:extLst>
-          </p:cNvPr>
-          <p:cNvSpPr>
-            <a:spLocks noGrp="1"/>
-          </p:cNvSpPr>
-          <p:nvPr/>
-        </p:nvSpPr>
-        <p:spPr>
-          <a:xfrm>
-            <a:off x="822960" y="2194560"/>
-            <a:ext cx="10058400" cy="1463040"/>
-          </a:xfrm>
-          <a:prstGeom prst="rect">
-            <a:avLst/>
-          </a:prstGeom>
-          <a:noFill/>
-        </p:spPr>
-        <p:txBody>
-          <a:bodyPr wrap="square" lIns="0" tIns="0" rIns="0" bIns="0" anchor="ctr"/>
-          <a:lstStyle/>
-          <a:p>
-            <a:pPr marL="0" indent="0">
-              <a:buNone/>
-            </a:pPr>
-            <a:r>
-              <a:rPr sz="11000" b="1" dirty="0">
-                <a:solidFill>
-                  <a:srgbClr val="16181D"/>
-                </a:solidFill>
-                <a:latin typeface="Trebuchet MS"/>
-                <a:ea typeface="Trebuchet MS"/>
-                <a:cs typeface="Trebuchet MS"/>
-              </a:rPr>
-              <a:t>XSS</a:t>
-            </a:r>
-          </a:p>
-        </p:txBody>
-      </p:sp>
-      <p:sp>
-        <p:nvSpPr>
-          <p:cNvPr id="4" name="Text 2">
-            <a:extLst>
-              <a:ext uri="{FF2B5EF4-FFF2-40B4-BE49-F238E27FC236}">
-                <a16:creationId xmlns:a16="http://schemas.microsoft.com/office/drawing/2014/main" id="{17D4FDB8-F8F0-4D96-95F0-9B90E32AF337}"/>
-              </a:ext>
-            </a:extLst>
-          </p:cNvPr>
-          <p:cNvSpPr>
-            <a:spLocks noGrp="1"/>
-          </p:cNvSpPr>
-          <p:nvPr/>
-        </p:nvSpPr>
-        <p:spPr>
-          <a:xfrm>
-            <a:off x="868680" y="3703320"/>
-            <a:ext cx="10058400" cy="502920"/>
-          </a:xfrm>
-          <a:prstGeom prst="rect">
-            <a:avLst/>
-          </a:prstGeom>
-          <a:noFill/>
-        </p:spPr>
-        <p:txBody>
-          <a:bodyPr wrap="square" lIns="0" tIns="0" rIns="0" bIns="0" anchor="ctr"/>
-          <a:lstStyle/>
-          <a:p>
-            <a:pPr marL="0" indent="0">
-              <a:buNone/>
-            </a:pPr>
-            <a:r>
-              <a:rPr sz="2600">
-                <a:solidFill>
-                  <a:srgbClr val="55606E"/>
-                </a:solidFill>
-                <a:latin typeface="Trebuchet MS"/>
-                <a:ea typeface="Trebuchet MS"/>
-                <a:cs typeface="Trebuchet MS"/>
-              </a:rPr>
-              <a:t>Cross Site Scripting</a:t>
-            </a:r>
-          </a:p>
-        </p:txBody>
-      </p:sp>
-      <p:sp>
-        <p:nvSpPr>
-          <p:cNvPr id="5" name="Shape 3">
-            <a:extLst>
-              <a:ext uri="{FF2B5EF4-FFF2-40B4-BE49-F238E27FC236}">
-                <a16:creationId xmlns:a16="http://schemas.microsoft.com/office/drawing/2014/main" id="{42345276-9CC1-4302-B204-8758E42AE5A8}"/>
-              </a:ext>
-            </a:extLst>
-          </p:cNvPr>
-          <p:cNvSpPr>
-            <a:spLocks noGrp="1"/>
-          </p:cNvSpPr>
-          <p:nvPr/>
-        </p:nvSpPr>
-        <p:spPr>
-          <a:xfrm>
-            <a:off x="868680" y="4526280"/>
-            <a:ext cx="1828800" cy="0"/>
-          </a:xfrm>
-          <a:prstGeom prst="line">
-            <a:avLst/>
-          </a:prstGeom>
-          <a:noFill/>
-          <a:ln w="28575">
-            <a:solidFill>
-              <a:srgbClr val="16181D"/>
-            </a:solidFill>
-            <a:prstDash val="solid"/>
-          </a:ln>
-        </p:spPr>
-      </p:sp>
-      <p:sp>
-        <p:nvSpPr>
-          <p:cNvPr id="6" name="Text 4">
-            <a:extLst>
-              <a:ext uri="{FF2B5EF4-FFF2-40B4-BE49-F238E27FC236}">
-                <a16:creationId xmlns:a16="http://schemas.microsoft.com/office/drawing/2014/main" id="{468481FB-4609-481A-89AB-8748CC339F06}"/>
-              </a:ext>
-            </a:extLst>
-          </p:cNvPr>
-          <p:cNvSpPr>
-            <a:spLocks noGrp="1"/>
-          </p:cNvSpPr>
-          <p:nvPr/>
-        </p:nvSpPr>
-        <p:spPr>
-          <a:xfrm>
-            <a:off x="868680" y="4754880"/>
-            <a:ext cx="8686800" cy="457200"/>
-          </a:xfrm>
-          <a:prstGeom prst="rect">
-            <a:avLst/>
-          </a:prstGeom>
-          <a:noFill/>
-        </p:spPr>
-        <p:txBody>
-          <a:bodyPr wrap="square" lIns="0" tIns="0" rIns="0" bIns="0" anchor="ctr"/>
-          <a:lstStyle/>
-          <a:p>
-            <a:pPr marL="0" indent="0">
-              <a:buNone/>
-            </a:pPr>
-            <a:r>
-              <a:rPr sz="1600" dirty="0" err="1">
-                <a:solidFill>
-                  <a:srgbClr val="55606E"/>
-                </a:solidFill>
-                <a:latin typeface="Calibri"/>
-                <a:ea typeface="Calibri"/>
-                <a:cs typeface="Calibri"/>
-              </a:rPr>
-              <a:t>Theorie</a:t>
-            </a:r>
-            <a:r>
-              <a:rPr sz="1600" dirty="0">
-                <a:solidFill>
-                  <a:srgbClr val="55606E"/>
-                </a:solidFill>
-                <a:latin typeface="Calibri"/>
-                <a:ea typeface="Calibri"/>
-                <a:cs typeface="Calibri"/>
-              </a:rPr>
-              <a:t>, </a:t>
-            </a:r>
-            <a:r>
-              <a:rPr sz="1600" dirty="0" err="1">
-                <a:solidFill>
-                  <a:srgbClr val="55606E"/>
-                </a:solidFill>
-                <a:latin typeface="Calibri"/>
-                <a:ea typeface="Calibri"/>
-                <a:cs typeface="Calibri"/>
-              </a:rPr>
-              <a:t>reale</a:t>
-            </a:r>
-            <a:r>
-              <a:rPr sz="1600" dirty="0">
-                <a:solidFill>
-                  <a:srgbClr val="55606E"/>
-                </a:solidFill>
-                <a:latin typeface="Calibri"/>
-                <a:ea typeface="Calibri"/>
-                <a:cs typeface="Calibri"/>
-              </a:rPr>
-              <a:t> </a:t>
-            </a:r>
-            <a:r>
-              <a:rPr sz="1600" dirty="0" err="1">
-                <a:solidFill>
-                  <a:srgbClr val="55606E"/>
-                </a:solidFill>
-                <a:latin typeface="Calibri"/>
-                <a:ea typeface="Calibri"/>
-                <a:cs typeface="Calibri"/>
-              </a:rPr>
-              <a:t>Schwachstelle</a:t>
-            </a:r>
-            <a:r>
-              <a:rPr sz="1600" dirty="0">
-                <a:solidFill>
-                  <a:srgbClr val="55606E"/>
-                </a:solidFill>
-                <a:latin typeface="Calibri"/>
-                <a:ea typeface="Calibri"/>
-                <a:cs typeface="Calibri"/>
-              </a:rPr>
-              <a:t> und Live Demo </a:t>
-            </a:r>
-            <a:r>
-              <a:rPr sz="1600" dirty="0" err="1">
-                <a:solidFill>
-                  <a:srgbClr val="55606E"/>
-                </a:solidFill>
-                <a:latin typeface="Calibri"/>
-                <a:ea typeface="Calibri"/>
-                <a:cs typeface="Calibri"/>
-              </a:rPr>
-              <a:t>im</a:t>
-            </a:r>
-            <a:r>
-              <a:rPr sz="1600" dirty="0">
-                <a:solidFill>
-                  <a:srgbClr val="55606E"/>
-                </a:solidFill>
-                <a:latin typeface="Calibri"/>
-                <a:ea typeface="Calibri"/>
-                <a:cs typeface="Calibri"/>
-              </a:rPr>
-              <a:t> Scheduler.</a:t>
-            </a:r>
-          </a:p>
-        </p:txBody>
-      </p:sp>
-      <p:sp>
-        <p:nvSpPr>
-          <p:cNvPr id="7" name="Text 5">
-            <a:extLst>
-              <a:ext uri="{FF2B5EF4-FFF2-40B4-BE49-F238E27FC236}">
-                <a16:creationId xmlns:a16="http://schemas.microsoft.com/office/drawing/2014/main" id="{94A987EA-ED23-44AA-ABC1-DB16DB020FDD}"/>
-              </a:ext>
-            </a:extLst>
-          </p:cNvPr>
-          <p:cNvSpPr>
-            <a:spLocks noGrp="1"/>
-          </p:cNvSpPr>
-          <p:nvPr/>
-        </p:nvSpPr>
-        <p:spPr>
-          <a:xfrm>
-            <a:off x="9448495" y="6080760"/>
-            <a:ext cx="1874520" cy="320040"/>
-          </a:xfrm>
-          <a:prstGeom prst="rect">
-            <a:avLst/>
-          </a:prstGeom>
-          <a:noFill/>
-        </p:spPr>
-        <p:txBody>
-          <a:bodyPr wrap="square" lIns="0" tIns="0" rIns="0" bIns="0" anchor="ctr"/>
-          <a:lstStyle/>
-          <a:p>
-            <a:pPr marL="0" indent="0" algn="r">
-              <a:buNone/>
-            </a:pPr>
-            <a:r>
-              <a:rPr sz="1200" i="1" dirty="0" err="1">
-                <a:solidFill>
-                  <a:srgbClr val="9AA3AF"/>
-                </a:solidFill>
-                <a:latin typeface="Calibri"/>
-                <a:ea typeface="Calibri"/>
-                <a:cs typeface="Calibri"/>
-              </a:rPr>
-              <a:t>Vortrag</a:t>
-            </a:r>
-            <a:r>
-              <a:rPr sz="1200" i="1" dirty="0">
-                <a:solidFill>
-                  <a:srgbClr val="9AA3AF"/>
-                </a:solidFill>
-                <a:latin typeface="Calibri"/>
-                <a:ea typeface="Calibri"/>
-                <a:cs typeface="Calibri"/>
-              </a:rPr>
-              <a:t>: Linus &amp; Arvid</a:t>
-            </a:r>
-          </a:p>
-        </p:txBody>
-      </p:sp>
-    </p:spTree>
-    <p:extLst>
-      <p:ext uri="{BB962C8B-B14F-4D97-AF65-F5344CB8AC3E}">
-        <p14:creationId xmlns:p14="http://schemas.microsoft.com/office/powerpoint/2010/main" val="144883870"/>
-      </p:ext>
-    </p:extLst>
-  </p:cSld>
-  <p:clrMapOvr>
-    <a:masterClrMapping/>
-  </p:clrMapOvr>
-</p:sld>
-</file>
-
-<file path=ppt/slides/slide20.xml><?xml version="1.0" encoding="utf-8"?>
-<p:sld xmlns:a="http://schemas.openxmlformats.org/drawingml/2006/main" xmlns:r="http://schemas.openxmlformats.org/officeDocument/2006/relationships" xmlns:p="http://schemas.openxmlformats.org/presentationml/2006/main">
-  <p:cSld>
-    <p:spTree>
-      <p:nvGrpSpPr>
-        <p:cNvPr id="1" name=""/>
-        <p:cNvGrpSpPr/>
-        <p:nvPr/>
-      </p:nvGrpSpPr>
-      <p:grpSpPr>
-        <a:xfrm>
-          <a:off x="0" y="0"/>
-          <a:ext cx="0" cy="0"/>
-          <a:chOff x="0" y="0"/>
-          <a:chExt cx="0" cy="0"/>
-        </a:xfrm>
-      </p:grpSpPr>
-      <p:sp>
-        <p:nvSpPr>
-          <p:cNvPr id="2" name="Text 0"/>
-          <p:cNvSpPr/>
-          <p:nvPr/>
-        </p:nvSpPr>
-        <p:spPr>
-          <a:xfrm>
-            <a:off x="868680" y="502920"/>
-            <a:ext cx="8229600" cy="274320"/>
-          </a:xfrm>
-          <a:prstGeom prst="rect">
-            <a:avLst/>
-          </a:prstGeom>
-          <a:noFill/>
-          <a:ln/>
-        </p:spPr>
-        <p:txBody>
-          <a:bodyPr wrap="square" lIns="0" tIns="0" rIns="0" bIns="0" rtlCol="0" anchor="ctr"/>
-          <a:lstStyle/>
-          <a:p>
-            <a:pPr marL="0" indent="0">
-              <a:buNone/>
-            </a:pPr>
-            <a:r>
-              <a:rPr lang="en-US" sz="1050" b="1" kern="0" spc="250" dirty="0">
-                <a:solidFill>
-                  <a:srgbClr val="9AA3AF"/>
-                </a:solidFill>
-                <a:latin typeface="Calibri" pitchFamily="34" charset="0"/>
-                <a:ea typeface="Calibri" pitchFamily="34" charset="-122"/>
-                <a:cs typeface="Calibri" pitchFamily="34" charset="-120"/>
-              </a:rPr>
-              <a:t>DEMO · ZUSTAND 1</a:t>
-            </a:r>
-            <a:endParaRPr lang="en-US" sz="1050" dirty="0"/>
-          </a:p>
-        </p:txBody>
-      </p:sp>
-      <p:sp>
-        <p:nvSpPr>
-          <p:cNvPr id="4" name="Text 2"/>
-          <p:cNvSpPr/>
-          <p:nvPr/>
-        </p:nvSpPr>
-        <p:spPr>
-          <a:xfrm>
-            <a:off x="868680" y="914400"/>
-            <a:ext cx="6400800" cy="292608"/>
-          </a:xfrm>
-          <a:prstGeom prst="rect">
-            <a:avLst/>
-          </a:prstGeom>
-          <a:noFill/>
-          <a:ln/>
-        </p:spPr>
-        <p:txBody>
-          <a:bodyPr wrap="square" lIns="0" tIns="0" rIns="0" bIns="0" rtlCol="0" anchor="ctr"/>
-          <a:lstStyle/>
-          <a:p>
-            <a:pPr marL="0" indent="0">
-              <a:buNone/>
-            </a:pPr>
-            <a:r>
-              <a:rPr lang="en-US" sz="1150" b="1" kern="0" spc="250" dirty="0">
-                <a:solidFill>
-                  <a:srgbClr val="D23B4E"/>
-                </a:solidFill>
-                <a:latin typeface="Calibri" pitchFamily="34" charset="0"/>
-                <a:ea typeface="Calibri" pitchFamily="34" charset="-122"/>
-                <a:cs typeface="Calibri" pitchFamily="34" charset="-120"/>
-              </a:rPr>
-              <a:t>DER ERFOLGREICHE HACK · UNSICHERES CORS</a:t>
-            </a:r>
-            <a:endParaRPr lang="en-US" sz="1150" dirty="0"/>
-          </a:p>
-        </p:txBody>
-      </p:sp>
-      <p:sp>
-        <p:nvSpPr>
-          <p:cNvPr id="5" name="Text 3"/>
-          <p:cNvSpPr/>
-          <p:nvPr/>
-        </p:nvSpPr>
-        <p:spPr>
-          <a:xfrm>
-            <a:off x="868680" y="1234440"/>
-            <a:ext cx="6583680" cy="731520"/>
-          </a:xfrm>
-          <a:prstGeom prst="rect">
-            <a:avLst/>
-          </a:prstGeom>
-          <a:noFill/>
-          <a:ln/>
-        </p:spPr>
-        <p:txBody>
-          <a:bodyPr wrap="square" lIns="0" tIns="0" rIns="0" bIns="0" rtlCol="0" anchor="ctr"/>
-          <a:lstStyle/>
-          <a:p>
-            <a:pPr marL="0" indent="0">
-              <a:buNone/>
-            </a:pPr>
-            <a:r>
-              <a:rPr lang="en-US" sz="3600" b="1" dirty="0">
-                <a:solidFill>
-                  <a:srgbClr val="16181D"/>
-                </a:solidFill>
-                <a:latin typeface="Trebuchet MS" pitchFamily="34" charset="0"/>
-                <a:ea typeface="Trebuchet MS" pitchFamily="34" charset="-122"/>
-                <a:cs typeface="Trebuchet MS" pitchFamily="34" charset="-120"/>
-              </a:rPr>
               <a:t>Lautloser Download</a:t>
             </a:r>
             <a:endParaRPr lang="en-US" sz="3600" dirty="0"/>
@@ -10476,11 +9344,6 @@
               </a:rPr>
               <a:t> Spring-Backend</a:t>
             </a:r>
-          </a:p>
-          <a:p>
-            <a:pPr marL="0" indent="0">
-              <a:buNone/>
-            </a:pPr>
             <a:endParaRPr lang="en-US" sz="1550" dirty="0"/>
           </a:p>
         </p:txBody>
@@ -11503,7 +10366,7 @@
                 <a:ea typeface="Calibri" pitchFamily="34" charset="-122"/>
                 <a:cs typeface="Calibri" pitchFamily="34" charset="-120"/>
               </a:rPr>
-              <a:t>20</a:t>
+              <a:t>19</a:t>
             </a:fld>
             <a:endParaRPr lang="en-US" sz="1050" dirty="0"/>
           </a:p>
@@ -11514,13 +10377,13 @@
   <p:clrMapOvr>
     <a:masterClrMapping/>
   </p:clrMapOvr>
-  <mc:AlternateContent xmlns:mc="http://schemas.openxmlformats.org/markup-compatibility/2006" xmlns:p14="http://schemas.microsoft.com/office/powerpoint/2010/main">
-    <mc:Choice Requires="p14">
+  <mc:AlternateContent xmlns:mc="http://schemas.openxmlformats.org/markup-compatibility/2006">
+    <mc:Choice xmlns:p14="http://schemas.microsoft.com/office/powerpoint/2010/main" Requires="p14">
       <p:transition spd="med" p14:dur="700">
         <p:fade/>
       </p:transition>
     </mc:Choice>
-    <mc:Fallback xmlns="">
+    <mc:Fallback>
       <p:transition spd="med">
         <p:fade/>
       </p:transition>
@@ -11903,6 +10766,723 @@
 </p:sld>
 </file>
 
+<file path=ppt/slides/slide2.xml><?xml version="1.0" encoding="utf-8"?>
+<p:sld xmlns:a="http://schemas.openxmlformats.org/drawingml/2006/main" xmlns:r="http://schemas.openxmlformats.org/officeDocument/2006/relationships" xmlns:p="http://schemas.openxmlformats.org/presentationml/2006/main">
+  <p:cSld>
+    <p:bg>
+      <p:bgPr>
+        <a:solidFill>
+          <a:srgbClr val="FFFFFF"/>
+        </a:solidFill>
+        <a:effectLst/>
+      </p:bgPr>
+    </p:bg>
+    <p:spTree>
+      <p:nvGrpSpPr>
+        <p:cNvPr id="1" name=""/>
+        <p:cNvGrpSpPr/>
+        <p:nvPr/>
+      </p:nvGrpSpPr>
+      <p:grpSpPr>
+        <a:xfrm>
+          <a:off x="0" y="0"/>
+          <a:ext cx="0" cy="0"/>
+          <a:chOff x="0" y="0"/>
+          <a:chExt cx="0" cy="0"/>
+        </a:xfrm>
+      </p:grpSpPr>
+      <p:sp>
+        <p:nvSpPr>
+          <p:cNvPr id="2" name="Text 0">
+            <a:extLst>
+              <a:ext uri="{FF2B5EF4-FFF2-40B4-BE49-F238E27FC236}">
+                <a16:creationId xmlns:a16="http://schemas.microsoft.com/office/drawing/2014/main" id="{1B95CA36-7AD5-4CED-959F-F065EF9A96F2}"/>
+              </a:ext>
+            </a:extLst>
+          </p:cNvPr>
+          <p:cNvSpPr>
+            <a:spLocks noGrp="1"/>
+          </p:cNvSpPr>
+          <p:nvPr/>
+        </p:nvSpPr>
+        <p:spPr>
+          <a:xfrm>
+            <a:off x="868680" y="1874520"/>
+            <a:ext cx="7315200" cy="320040"/>
+          </a:xfrm>
+          <a:prstGeom prst="rect">
+            <a:avLst/>
+          </a:prstGeom>
+          <a:noFill/>
+        </p:spPr>
+        <p:txBody>
+          <a:bodyPr wrap="square" lIns="0" tIns="0" rIns="0" bIns="0" anchor="ctr"/>
+          <a:lstStyle/>
+          <a:p>
+            <a:pPr marL="0" indent="0">
+              <a:buNone/>
+            </a:pPr>
+            <a:r>
+              <a:rPr sz="1200" b="1" dirty="0">
+                <a:solidFill>
+                  <a:srgbClr val="1463FF"/>
+                </a:solidFill>
+                <a:latin typeface="Calibri"/>
+                <a:ea typeface="Calibri"/>
+                <a:cs typeface="Calibri"/>
+              </a:rPr>
+              <a:t>IT SECURITY · SCHEDULER</a:t>
+            </a:r>
+          </a:p>
+        </p:txBody>
+      </p:sp>
+      <p:sp>
+        <p:nvSpPr>
+          <p:cNvPr id="3" name="Text 1">
+            <a:extLst>
+              <a:ext uri="{FF2B5EF4-FFF2-40B4-BE49-F238E27FC236}">
+                <a16:creationId xmlns:a16="http://schemas.microsoft.com/office/drawing/2014/main" id="{FD8DA67A-FD81-4D52-AB3E-0B0E93F9DAB5}"/>
+              </a:ext>
+            </a:extLst>
+          </p:cNvPr>
+          <p:cNvSpPr>
+            <a:spLocks noGrp="1"/>
+          </p:cNvSpPr>
+          <p:nvPr/>
+        </p:nvSpPr>
+        <p:spPr>
+          <a:xfrm>
+            <a:off x="822960" y="2194560"/>
+            <a:ext cx="10058400" cy="1463040"/>
+          </a:xfrm>
+          <a:prstGeom prst="rect">
+            <a:avLst/>
+          </a:prstGeom>
+          <a:noFill/>
+        </p:spPr>
+        <p:txBody>
+          <a:bodyPr wrap="square" lIns="0" tIns="0" rIns="0" bIns="0" anchor="ctr"/>
+          <a:lstStyle/>
+          <a:p>
+            <a:pPr marL="0" indent="0">
+              <a:buNone/>
+            </a:pPr>
+            <a:r>
+              <a:rPr sz="11000" b="1" dirty="0">
+                <a:solidFill>
+                  <a:srgbClr val="16181D"/>
+                </a:solidFill>
+                <a:latin typeface="Trebuchet MS"/>
+                <a:ea typeface="Trebuchet MS"/>
+                <a:cs typeface="Trebuchet MS"/>
+              </a:rPr>
+              <a:t>XSS</a:t>
+            </a:r>
+          </a:p>
+        </p:txBody>
+      </p:sp>
+      <p:sp>
+        <p:nvSpPr>
+          <p:cNvPr id="4" name="Text 2">
+            <a:extLst>
+              <a:ext uri="{FF2B5EF4-FFF2-40B4-BE49-F238E27FC236}">
+                <a16:creationId xmlns:a16="http://schemas.microsoft.com/office/drawing/2014/main" id="{17D4FDB8-F8F0-4D96-95F0-9B90E32AF337}"/>
+              </a:ext>
+            </a:extLst>
+          </p:cNvPr>
+          <p:cNvSpPr>
+            <a:spLocks noGrp="1"/>
+          </p:cNvSpPr>
+          <p:nvPr/>
+        </p:nvSpPr>
+        <p:spPr>
+          <a:xfrm>
+            <a:off x="868680" y="3703320"/>
+            <a:ext cx="10058400" cy="502920"/>
+          </a:xfrm>
+          <a:prstGeom prst="rect">
+            <a:avLst/>
+          </a:prstGeom>
+          <a:noFill/>
+        </p:spPr>
+        <p:txBody>
+          <a:bodyPr wrap="square" lIns="0" tIns="0" rIns="0" bIns="0" anchor="ctr"/>
+          <a:lstStyle/>
+          <a:p>
+            <a:pPr marL="0" indent="0">
+              <a:buNone/>
+            </a:pPr>
+            <a:r>
+              <a:rPr sz="2600">
+                <a:solidFill>
+                  <a:srgbClr val="55606E"/>
+                </a:solidFill>
+                <a:latin typeface="Trebuchet MS"/>
+                <a:ea typeface="Trebuchet MS"/>
+                <a:cs typeface="Trebuchet MS"/>
+              </a:rPr>
+              <a:t>Cross Site Scripting</a:t>
+            </a:r>
+          </a:p>
+        </p:txBody>
+      </p:sp>
+      <p:sp>
+        <p:nvSpPr>
+          <p:cNvPr id="5" name="Shape 3">
+            <a:extLst>
+              <a:ext uri="{FF2B5EF4-FFF2-40B4-BE49-F238E27FC236}">
+                <a16:creationId xmlns:a16="http://schemas.microsoft.com/office/drawing/2014/main" id="{42345276-9CC1-4302-B204-8758E42AE5A8}"/>
+              </a:ext>
+            </a:extLst>
+          </p:cNvPr>
+          <p:cNvSpPr>
+            <a:spLocks noGrp="1"/>
+          </p:cNvSpPr>
+          <p:nvPr/>
+        </p:nvSpPr>
+        <p:spPr>
+          <a:xfrm>
+            <a:off x="868680" y="4526280"/>
+            <a:ext cx="1828800" cy="0"/>
+          </a:xfrm>
+          <a:prstGeom prst="line">
+            <a:avLst/>
+          </a:prstGeom>
+          <a:noFill/>
+          <a:ln w="28575">
+            <a:solidFill>
+              <a:srgbClr val="16181D"/>
+            </a:solidFill>
+            <a:prstDash val="solid"/>
+          </a:ln>
+        </p:spPr>
+      </p:sp>
+      <p:sp>
+        <p:nvSpPr>
+          <p:cNvPr id="6" name="Text 4">
+            <a:extLst>
+              <a:ext uri="{FF2B5EF4-FFF2-40B4-BE49-F238E27FC236}">
+                <a16:creationId xmlns:a16="http://schemas.microsoft.com/office/drawing/2014/main" id="{468481FB-4609-481A-89AB-8748CC339F06}"/>
+              </a:ext>
+            </a:extLst>
+          </p:cNvPr>
+          <p:cNvSpPr>
+            <a:spLocks noGrp="1"/>
+          </p:cNvSpPr>
+          <p:nvPr/>
+        </p:nvSpPr>
+        <p:spPr>
+          <a:xfrm>
+            <a:off x="868680" y="4754880"/>
+            <a:ext cx="8686800" cy="457200"/>
+          </a:xfrm>
+          <a:prstGeom prst="rect">
+            <a:avLst/>
+          </a:prstGeom>
+          <a:noFill/>
+        </p:spPr>
+        <p:txBody>
+          <a:bodyPr wrap="square" lIns="0" tIns="0" rIns="0" bIns="0" anchor="ctr"/>
+          <a:lstStyle/>
+          <a:p>
+            <a:pPr marL="0" indent="0">
+              <a:buNone/>
+            </a:pPr>
+            <a:r>
+              <a:rPr sz="1600" dirty="0" err="1">
+                <a:solidFill>
+                  <a:srgbClr val="55606E"/>
+                </a:solidFill>
+                <a:latin typeface="Calibri"/>
+                <a:ea typeface="Calibri"/>
+                <a:cs typeface="Calibri"/>
+              </a:rPr>
+              <a:t>Theorie</a:t>
+            </a:r>
+            <a:r>
+              <a:rPr sz="1600" dirty="0">
+                <a:solidFill>
+                  <a:srgbClr val="55606E"/>
+                </a:solidFill>
+                <a:latin typeface="Calibri"/>
+                <a:ea typeface="Calibri"/>
+                <a:cs typeface="Calibri"/>
+              </a:rPr>
+              <a:t>, </a:t>
+            </a:r>
+            <a:r>
+              <a:rPr sz="1600" dirty="0" err="1">
+                <a:solidFill>
+                  <a:srgbClr val="55606E"/>
+                </a:solidFill>
+                <a:latin typeface="Calibri"/>
+                <a:ea typeface="Calibri"/>
+                <a:cs typeface="Calibri"/>
+              </a:rPr>
+              <a:t>reale</a:t>
+            </a:r>
+            <a:r>
+              <a:rPr sz="1600" dirty="0">
+                <a:solidFill>
+                  <a:srgbClr val="55606E"/>
+                </a:solidFill>
+                <a:latin typeface="Calibri"/>
+                <a:ea typeface="Calibri"/>
+                <a:cs typeface="Calibri"/>
+              </a:rPr>
+              <a:t> </a:t>
+            </a:r>
+            <a:r>
+              <a:rPr sz="1600" dirty="0" err="1">
+                <a:solidFill>
+                  <a:srgbClr val="55606E"/>
+                </a:solidFill>
+                <a:latin typeface="Calibri"/>
+                <a:ea typeface="Calibri"/>
+                <a:cs typeface="Calibri"/>
+              </a:rPr>
+              <a:t>Schwachstelle</a:t>
+            </a:r>
+            <a:r>
+              <a:rPr sz="1600" dirty="0">
+                <a:solidFill>
+                  <a:srgbClr val="55606E"/>
+                </a:solidFill>
+                <a:latin typeface="Calibri"/>
+                <a:ea typeface="Calibri"/>
+                <a:cs typeface="Calibri"/>
+              </a:rPr>
+              <a:t> und Live Demo </a:t>
+            </a:r>
+            <a:r>
+              <a:rPr sz="1600" dirty="0" err="1">
+                <a:solidFill>
+                  <a:srgbClr val="55606E"/>
+                </a:solidFill>
+                <a:latin typeface="Calibri"/>
+                <a:ea typeface="Calibri"/>
+                <a:cs typeface="Calibri"/>
+              </a:rPr>
+              <a:t>im</a:t>
+            </a:r>
+            <a:r>
+              <a:rPr sz="1600" dirty="0">
+                <a:solidFill>
+                  <a:srgbClr val="55606E"/>
+                </a:solidFill>
+                <a:latin typeface="Calibri"/>
+                <a:ea typeface="Calibri"/>
+                <a:cs typeface="Calibri"/>
+              </a:rPr>
+              <a:t> Scheduler.</a:t>
+            </a:r>
+          </a:p>
+        </p:txBody>
+      </p:sp>
+      <p:sp>
+        <p:nvSpPr>
+          <p:cNvPr id="7" name="Text 5">
+            <a:extLst>
+              <a:ext uri="{FF2B5EF4-FFF2-40B4-BE49-F238E27FC236}">
+                <a16:creationId xmlns:a16="http://schemas.microsoft.com/office/drawing/2014/main" id="{94A987EA-ED23-44AA-ABC1-DB16DB020FDD}"/>
+              </a:ext>
+            </a:extLst>
+          </p:cNvPr>
+          <p:cNvSpPr>
+            <a:spLocks noGrp="1"/>
+          </p:cNvSpPr>
+          <p:nvPr/>
+        </p:nvSpPr>
+        <p:spPr>
+          <a:xfrm>
+            <a:off x="9448495" y="6080760"/>
+            <a:ext cx="1874520" cy="320040"/>
+          </a:xfrm>
+          <a:prstGeom prst="rect">
+            <a:avLst/>
+          </a:prstGeom>
+          <a:noFill/>
+        </p:spPr>
+        <p:txBody>
+          <a:bodyPr wrap="square" lIns="0" tIns="0" rIns="0" bIns="0" anchor="ctr"/>
+          <a:lstStyle/>
+          <a:p>
+            <a:pPr marL="0" indent="0" algn="r">
+              <a:buNone/>
+            </a:pPr>
+            <a:r>
+              <a:rPr sz="1200" i="1" dirty="0" err="1">
+                <a:solidFill>
+                  <a:srgbClr val="9AA3AF"/>
+                </a:solidFill>
+                <a:latin typeface="Calibri"/>
+                <a:ea typeface="Calibri"/>
+                <a:cs typeface="Calibri"/>
+              </a:rPr>
+              <a:t>Vortrag</a:t>
+            </a:r>
+            <a:r>
+              <a:rPr sz="1200" i="1" dirty="0">
+                <a:solidFill>
+                  <a:srgbClr val="9AA3AF"/>
+                </a:solidFill>
+                <a:latin typeface="Calibri"/>
+                <a:ea typeface="Calibri"/>
+                <a:cs typeface="Calibri"/>
+              </a:rPr>
+              <a:t>: Linus &amp; Arvid</a:t>
+            </a:r>
+          </a:p>
+        </p:txBody>
+      </p:sp>
+    </p:spTree>
+    <p:extLst>
+      <p:ext uri="{BB962C8B-B14F-4D97-AF65-F5344CB8AC3E}">
+        <p14:creationId xmlns:p14="http://schemas.microsoft.com/office/powerpoint/2010/main" val="144883870"/>
+      </p:ext>
+    </p:extLst>
+  </p:cSld>
+  <p:clrMapOvr>
+    <a:masterClrMapping/>
+  </p:clrMapOvr>
+  <mc:AlternateContent xmlns:mc="http://schemas.openxmlformats.org/markup-compatibility/2006">
+    <mc:Choice xmlns:p14="http://schemas.microsoft.com/office/powerpoint/2010/main" Requires="p14">
+      <p:transition spd="med" p14:dur="700">
+        <p:fade/>
+      </p:transition>
+    </mc:Choice>
+    <mc:Fallback>
+      <p:transition spd="med">
+        <p:fade/>
+      </p:transition>
+    </mc:Fallback>
+  </mc:AlternateContent>
+</p:sld>
+</file>
+
+<file path=ppt/slides/slide20.xml><?xml version="1.0" encoding="utf-8"?>
+<p:sld xmlns:a="http://schemas.openxmlformats.org/drawingml/2006/main" xmlns:r="http://schemas.openxmlformats.org/officeDocument/2006/relationships" xmlns:p="http://schemas.openxmlformats.org/presentationml/2006/main">
+  <p:cSld>
+    <p:spTree>
+      <p:nvGrpSpPr>
+        <p:cNvPr id="1" name=""/>
+        <p:cNvGrpSpPr/>
+        <p:nvPr/>
+      </p:nvGrpSpPr>
+      <p:grpSpPr>
+        <a:xfrm>
+          <a:off x="0" y="0"/>
+          <a:ext cx="0" cy="0"/>
+          <a:chOff x="0" y="0"/>
+          <a:chExt cx="0" cy="0"/>
+        </a:xfrm>
+      </p:grpSpPr>
+      <p:sp>
+        <p:nvSpPr>
+          <p:cNvPr id="2" name="Text 0">
+            <a:extLst>
+              <a:ext uri="{FF2B5EF4-FFF2-40B4-BE49-F238E27FC236}">
+                <a16:creationId xmlns:a16="http://schemas.microsoft.com/office/drawing/2014/main" id="{1B95CA36-7AD5-4CED-959F-F065EF9A96F2}"/>
+              </a:ext>
+            </a:extLst>
+          </p:cNvPr>
+          <p:cNvSpPr>
+            <a:spLocks noGrp="1"/>
+          </p:cNvSpPr>
+          <p:nvPr/>
+        </p:nvSpPr>
+        <p:spPr>
+          <a:xfrm>
+            <a:off x="868680" y="1874520"/>
+            <a:ext cx="7315200" cy="320040"/>
+          </a:xfrm>
+          <a:prstGeom prst="rect">
+            <a:avLst/>
+          </a:prstGeom>
+          <a:noFill/>
+        </p:spPr>
+        <p:txBody>
+          <a:bodyPr wrap="square" lIns="0" tIns="0" rIns="0" bIns="0" anchor="ctr"/>
+          <a:lstStyle/>
+          <a:p>
+            <a:pPr marL="0" indent="0">
+              <a:buNone/>
+            </a:pPr>
+            <a:r>
+              <a:rPr sz="1200" b="1" dirty="0">
+                <a:solidFill>
+                  <a:srgbClr val="1463FF"/>
+                </a:solidFill>
+                <a:latin typeface="Calibri"/>
+                <a:ea typeface="Calibri"/>
+                <a:cs typeface="Calibri"/>
+              </a:rPr>
+              <a:t>LIVE DEMO · </a:t>
+            </a:r>
+            <a:r>
+              <a:rPr lang="de-DE" sz="1200" b="1" dirty="0">
+                <a:solidFill>
+                  <a:srgbClr val="1463FF"/>
+                </a:solidFill>
+                <a:latin typeface="Calibri"/>
+                <a:ea typeface="Calibri"/>
+                <a:cs typeface="Calibri"/>
+              </a:rPr>
+              <a:t>CORS</a:t>
+            </a:r>
+            <a:endParaRPr sz="1200" b="1" dirty="0">
+              <a:solidFill>
+                <a:srgbClr val="1463FF"/>
+              </a:solidFill>
+              <a:latin typeface="Calibri"/>
+              <a:ea typeface="Calibri"/>
+              <a:cs typeface="Calibri"/>
+            </a:endParaRPr>
+          </a:p>
+        </p:txBody>
+      </p:sp>
+      <p:sp>
+        <p:nvSpPr>
+          <p:cNvPr id="3" name="Text 1">
+            <a:extLst>
+              <a:ext uri="{FF2B5EF4-FFF2-40B4-BE49-F238E27FC236}">
+                <a16:creationId xmlns:a16="http://schemas.microsoft.com/office/drawing/2014/main" id="{FD8DA67A-FD81-4D52-AB3E-0B0E93F9DAB5}"/>
+              </a:ext>
+            </a:extLst>
+          </p:cNvPr>
+          <p:cNvSpPr>
+            <a:spLocks noGrp="1"/>
+          </p:cNvSpPr>
+          <p:nvPr/>
+        </p:nvSpPr>
+        <p:spPr>
+          <a:xfrm>
+            <a:off x="822960" y="2194560"/>
+            <a:ext cx="10058400" cy="1463040"/>
+          </a:xfrm>
+          <a:prstGeom prst="rect">
+            <a:avLst/>
+          </a:prstGeom>
+          <a:noFill/>
+        </p:spPr>
+        <p:txBody>
+          <a:bodyPr wrap="square" lIns="0" tIns="0" rIns="0" bIns="0" anchor="ctr"/>
+          <a:lstStyle/>
+          <a:p>
+            <a:pPr marL="0" indent="0">
+              <a:buNone/>
+            </a:pPr>
+            <a:r>
+              <a:rPr sz="11000" b="1" dirty="0">
+                <a:solidFill>
+                  <a:srgbClr val="16181D"/>
+                </a:solidFill>
+                <a:latin typeface="Trebuchet MS"/>
+                <a:ea typeface="Trebuchet MS"/>
+                <a:cs typeface="Trebuchet MS"/>
+              </a:rPr>
+              <a:t>Zur Live Demo</a:t>
+            </a:r>
+          </a:p>
+        </p:txBody>
+      </p:sp>
+      <p:sp>
+        <p:nvSpPr>
+          <p:cNvPr id="4" name="Text 2">
+            <a:extLst>
+              <a:ext uri="{FF2B5EF4-FFF2-40B4-BE49-F238E27FC236}">
+                <a16:creationId xmlns:a16="http://schemas.microsoft.com/office/drawing/2014/main" id="{17D4FDB8-F8F0-4D96-95F0-9B90E32AF337}"/>
+              </a:ext>
+            </a:extLst>
+          </p:cNvPr>
+          <p:cNvSpPr>
+            <a:spLocks noGrp="1"/>
+          </p:cNvSpPr>
+          <p:nvPr/>
+        </p:nvSpPr>
+        <p:spPr>
+          <a:xfrm>
+            <a:off x="868680" y="3703320"/>
+            <a:ext cx="10058400" cy="502920"/>
+          </a:xfrm>
+          <a:prstGeom prst="rect">
+            <a:avLst/>
+          </a:prstGeom>
+          <a:noFill/>
+        </p:spPr>
+        <p:txBody>
+          <a:bodyPr wrap="square" lIns="0" tIns="0" rIns="0" bIns="0" anchor="ctr"/>
+          <a:lstStyle/>
+          <a:p>
+            <a:pPr marL="0" indent="0">
+              <a:buNone/>
+            </a:pPr>
+            <a:endParaRPr/>
+          </a:p>
+        </p:txBody>
+      </p:sp>
+      <p:sp>
+        <p:nvSpPr>
+          <p:cNvPr id="5" name="Shape 3">
+            <a:extLst>
+              <a:ext uri="{FF2B5EF4-FFF2-40B4-BE49-F238E27FC236}">
+                <a16:creationId xmlns:a16="http://schemas.microsoft.com/office/drawing/2014/main" id="{42345276-9CC1-4302-B204-8758E42AE5A8}"/>
+              </a:ext>
+            </a:extLst>
+          </p:cNvPr>
+          <p:cNvSpPr>
+            <a:spLocks noGrp="1"/>
+          </p:cNvSpPr>
+          <p:nvPr/>
+        </p:nvSpPr>
+        <p:spPr>
+          <a:xfrm>
+            <a:off x="868680" y="4526280"/>
+            <a:ext cx="1828800" cy="0"/>
+          </a:xfrm>
+          <a:prstGeom prst="line">
+            <a:avLst/>
+          </a:prstGeom>
+          <a:noFill/>
+          <a:ln w="28575">
+            <a:solidFill>
+              <a:srgbClr val="16181D"/>
+            </a:solidFill>
+            <a:prstDash val="solid"/>
+          </a:ln>
+        </p:spPr>
+      </p:sp>
+      <p:sp>
+        <p:nvSpPr>
+          <p:cNvPr id="6" name="Text 4">
+            <a:extLst>
+              <a:ext uri="{FF2B5EF4-FFF2-40B4-BE49-F238E27FC236}">
+                <a16:creationId xmlns:a16="http://schemas.microsoft.com/office/drawing/2014/main" id="{468481FB-4609-481A-89AB-8748CC339F06}"/>
+              </a:ext>
+            </a:extLst>
+          </p:cNvPr>
+          <p:cNvSpPr>
+            <a:spLocks noGrp="1"/>
+          </p:cNvSpPr>
+          <p:nvPr/>
+        </p:nvSpPr>
+        <p:spPr>
+          <a:xfrm>
+            <a:off x="868680" y="4754880"/>
+            <a:ext cx="8686800" cy="457200"/>
+          </a:xfrm>
+          <a:prstGeom prst="rect">
+            <a:avLst/>
+          </a:prstGeom>
+          <a:noFill/>
+        </p:spPr>
+        <p:txBody>
+          <a:bodyPr wrap="square" lIns="0" tIns="0" rIns="0" bIns="0" anchor="ctr"/>
+          <a:lstStyle/>
+          <a:p>
+            <a:pPr marL="0" indent="0">
+              <a:buNone/>
+            </a:pPr>
+            <a:r>
+              <a:rPr lang="de-DE" sz="1600" dirty="0">
+                <a:solidFill>
+                  <a:srgbClr val="55606E"/>
+                </a:solidFill>
+                <a:latin typeface="Calibri"/>
+                <a:ea typeface="Calibri"/>
+                <a:cs typeface="Calibri"/>
+              </a:rPr>
+              <a:t>Cross Origin Anfragen werden erst durch eine Unsichere Konfiguration durchgelassen und dann blockiert.</a:t>
+            </a:r>
+            <a:endParaRPr sz="1600" dirty="0">
+              <a:solidFill>
+                <a:srgbClr val="55606E"/>
+              </a:solidFill>
+              <a:latin typeface="Calibri"/>
+              <a:ea typeface="Calibri"/>
+              <a:cs typeface="Calibri"/>
+            </a:endParaRPr>
+          </a:p>
+        </p:txBody>
+      </p:sp>
+      <p:sp>
+        <p:nvSpPr>
+          <p:cNvPr id="7" name="Text 5">
+            <a:extLst>
+              <a:ext uri="{FF2B5EF4-FFF2-40B4-BE49-F238E27FC236}">
+                <a16:creationId xmlns:a16="http://schemas.microsoft.com/office/drawing/2014/main" id="{94A987EA-ED23-44AA-ABC1-DB16DB020FDD}"/>
+              </a:ext>
+            </a:extLst>
+          </p:cNvPr>
+          <p:cNvSpPr>
+            <a:spLocks noGrp="1"/>
+          </p:cNvSpPr>
+          <p:nvPr/>
+        </p:nvSpPr>
+        <p:spPr>
+          <a:xfrm>
+            <a:off x="9448495" y="6080760"/>
+            <a:ext cx="1874520" cy="320040"/>
+          </a:xfrm>
+          <a:prstGeom prst="rect">
+            <a:avLst/>
+          </a:prstGeom>
+          <a:noFill/>
+        </p:spPr>
+        <p:txBody>
+          <a:bodyPr wrap="square" lIns="0" tIns="0" rIns="0" bIns="0" anchor="ctr"/>
+          <a:lstStyle/>
+          <a:p>
+            <a:pPr marL="0" indent="0" algn="r">
+              <a:buNone/>
+            </a:pPr>
+            <a:r>
+              <a:rPr lang="de-DE" sz="1200" i="1" dirty="0">
+                <a:solidFill>
+                  <a:srgbClr val="9AA3AF"/>
+                </a:solidFill>
+                <a:latin typeface="Calibri"/>
+                <a:ea typeface="Calibri"/>
+                <a:cs typeface="Calibri"/>
+              </a:rPr>
+              <a:t>Ole &amp; Tom</a:t>
+            </a:r>
+            <a:endParaRPr sz="1200" i="1" dirty="0">
+              <a:solidFill>
+                <a:srgbClr val="9AA3AF"/>
+              </a:solidFill>
+              <a:latin typeface="Calibri"/>
+              <a:ea typeface="Calibri"/>
+              <a:cs typeface="Calibri"/>
+            </a:endParaRPr>
+          </a:p>
+        </p:txBody>
+      </p:sp>
+    </p:spTree>
+    <p:extLst>
+      <p:ext uri="{BB962C8B-B14F-4D97-AF65-F5344CB8AC3E}">
+        <p14:creationId xmlns:p14="http://schemas.microsoft.com/office/powerpoint/2010/main" val="2481334609"/>
+      </p:ext>
+    </p:extLst>
+  </p:cSld>
+  <p:clrMapOvr>
+    <a:masterClrMapping/>
+  </p:clrMapOvr>
+  <mc:AlternateContent xmlns:mc="http://schemas.openxmlformats.org/markup-compatibility/2006">
+    <mc:Choice xmlns:p14="http://schemas.microsoft.com/office/powerpoint/2010/main" Requires="p14">
+      <p:transition spd="med" p14:dur="700">
+        <p:fade/>
+      </p:transition>
+    </mc:Choice>
+    <mc:Fallback>
+      <p:transition spd="med">
+        <p:fade/>
+      </p:transition>
+    </mc:Fallback>
+  </mc:AlternateContent>
+</p:sld>
+</file>
+
 <file path=ppt/slides/slide21.xml><?xml version="1.0" encoding="utf-8"?>
 <p:sld xmlns:a="http://schemas.openxmlformats.org/drawingml/2006/main" xmlns:r="http://schemas.openxmlformats.org/officeDocument/2006/relationships" xmlns:p="http://schemas.openxmlformats.org/presentationml/2006/main">
   <p:cSld>
@@ -11922,295 +11502,652 @@
       </p:grpSpPr>
       <p:sp>
         <p:nvSpPr>
-          <p:cNvPr id="2" name="Text 0">
+          <p:cNvPr id="2" name="Text 0"/>
+          <p:cNvSpPr/>
+          <p:nvPr/>
+        </p:nvSpPr>
+        <p:spPr>
+          <a:xfrm>
+            <a:off x="868680" y="502920"/>
+            <a:ext cx="8229600" cy="274320"/>
+          </a:xfrm>
+          <a:prstGeom prst="rect">
+            <a:avLst/>
+          </a:prstGeom>
+          <a:noFill/>
+          <a:ln/>
+        </p:spPr>
+        <p:txBody>
+          <a:bodyPr wrap="square" lIns="0" tIns="0" rIns="0" bIns="0" rtlCol="0" anchor="ctr"/>
+          <a:lstStyle/>
+          <a:p>
+            <a:pPr marL="0" indent="0">
+              <a:buNone/>
+            </a:pPr>
+            <a:r>
+              <a:rPr lang="en-US" sz="1050" b="1" kern="0" spc="250" dirty="0">
+                <a:solidFill>
+                  <a:srgbClr val="9AA3AF"/>
+                </a:solidFill>
+                <a:latin typeface="Calibri" pitchFamily="34" charset="0"/>
+                <a:ea typeface="Calibri" pitchFamily="34" charset="-122"/>
+                <a:cs typeface="Calibri" pitchFamily="34" charset="-120"/>
+              </a:rPr>
+              <a:t>KRITISCHES RISIKO · ARCHITEKTUR</a:t>
+            </a:r>
+            <a:endParaRPr lang="en-US" sz="1050" dirty="0"/>
+          </a:p>
+        </p:txBody>
+      </p:sp>
+      <p:sp>
+        <p:nvSpPr>
+          <p:cNvPr id="4" name="Text 2"/>
+          <p:cNvSpPr/>
+          <p:nvPr/>
+        </p:nvSpPr>
+        <p:spPr>
+          <a:xfrm>
+            <a:off x="868680" y="1051560"/>
+            <a:ext cx="10424160" cy="777240"/>
+          </a:xfrm>
+          <a:prstGeom prst="rect">
+            <a:avLst/>
+          </a:prstGeom>
+          <a:noFill/>
+          <a:ln/>
+        </p:spPr>
+        <p:txBody>
+          <a:bodyPr wrap="square" lIns="0" tIns="0" rIns="0" bIns="0" rtlCol="0" anchor="ctr"/>
+          <a:lstStyle/>
+          <a:p>
+            <a:pPr marL="0" indent="0">
+              <a:buNone/>
+            </a:pPr>
+            <a:r>
+              <a:rPr lang="en-US" sz="3800" b="1" dirty="0">
+                <a:solidFill>
+                  <a:srgbClr val="16181D"/>
+                </a:solidFill>
+                <a:latin typeface="Trebuchet MS" pitchFamily="34" charset="0"/>
+                <a:ea typeface="Trebuchet MS" pitchFamily="34" charset="-122"/>
+                <a:cs typeface="Trebuchet MS" pitchFamily="34" charset="-120"/>
+              </a:rPr>
+              <a:t>Das eigentliche Risiko</a:t>
+            </a:r>
+            <a:endParaRPr lang="en-US" sz="3800" dirty="0"/>
+          </a:p>
+        </p:txBody>
+      </p:sp>
+      <p:sp>
+        <p:nvSpPr>
+          <p:cNvPr id="5" name="Text 3"/>
+          <p:cNvSpPr/>
+          <p:nvPr/>
+        </p:nvSpPr>
+        <p:spPr>
+          <a:xfrm>
+            <a:off x="868680" y="1874520"/>
+            <a:ext cx="10241280" cy="640080"/>
+          </a:xfrm>
+          <a:prstGeom prst="rect">
+            <a:avLst/>
+          </a:prstGeom>
+          <a:noFill/>
+          <a:ln/>
+        </p:spPr>
+        <p:txBody>
+          <a:bodyPr wrap="square" lIns="0" tIns="0" rIns="0" bIns="0" rtlCol="0" anchor="ctr"/>
+          <a:lstStyle/>
+          <a:p>
+            <a:pPr marL="0" indent="0">
+              <a:buNone/>
+            </a:pPr>
+            <a:r>
+              <a:rPr lang="en-US" sz="1700" dirty="0">
+                <a:solidFill>
+                  <a:srgbClr val="55606E"/>
+                </a:solidFill>
+                <a:latin typeface="Calibri" pitchFamily="34" charset="0"/>
+                <a:ea typeface="Calibri" pitchFamily="34" charset="-122"/>
+                <a:cs typeface="Calibri" pitchFamily="34" charset="-120"/>
+              </a:rPr>
+              <a:t>Die Excel-Demo ist nur der sichtbare Teil. Kritisch wird es durch </a:t>
+            </a:r>
+            <a:r>
+              <a:rPr lang="en-US" sz="1700" dirty="0" err="1">
+                <a:solidFill>
+                  <a:srgbClr val="55606E"/>
+                </a:solidFill>
+                <a:latin typeface="Calibri" pitchFamily="34" charset="0"/>
+                <a:ea typeface="Calibri" pitchFamily="34" charset="-122"/>
+                <a:cs typeface="Calibri" pitchFamily="34" charset="-120"/>
+              </a:rPr>
+              <a:t>eine</a:t>
+            </a:r>
+            <a:r>
+              <a:rPr lang="en-US" sz="1700" dirty="0">
+                <a:solidFill>
+                  <a:srgbClr val="55606E"/>
+                </a:solidFill>
+                <a:latin typeface="Calibri" pitchFamily="34" charset="0"/>
+                <a:ea typeface="Calibri" pitchFamily="34" charset="-122"/>
+                <a:cs typeface="Calibri" pitchFamily="34" charset="-120"/>
+              </a:rPr>
+              <a:t> </a:t>
+            </a:r>
+            <a:r>
+              <a:rPr lang="en-US" sz="1700" dirty="0" err="1">
+                <a:solidFill>
+                  <a:srgbClr val="55606E"/>
+                </a:solidFill>
+                <a:latin typeface="Calibri" pitchFamily="34" charset="0"/>
+                <a:ea typeface="Calibri" pitchFamily="34" charset="-122"/>
+                <a:cs typeface="Calibri" pitchFamily="34" charset="-120"/>
+              </a:rPr>
+              <a:t>Fehlerkette</a:t>
+            </a:r>
+            <a:r>
+              <a:rPr lang="en-US" sz="1700" dirty="0">
+                <a:solidFill>
+                  <a:srgbClr val="55606E"/>
+                </a:solidFill>
+                <a:latin typeface="Calibri" pitchFamily="34" charset="0"/>
+                <a:ea typeface="Calibri" pitchFamily="34" charset="-122"/>
+                <a:cs typeface="Calibri" pitchFamily="34" charset="-120"/>
+              </a:rPr>
+              <a:t>, beginnend bei Keycloak.</a:t>
+            </a:r>
+            <a:endParaRPr lang="en-US" sz="1700" dirty="0"/>
+          </a:p>
+        </p:txBody>
+      </p:sp>
+      <p:sp>
+        <p:nvSpPr>
+          <p:cNvPr id="6" name="Text 4"/>
+          <p:cNvSpPr/>
+          <p:nvPr/>
+        </p:nvSpPr>
+        <p:spPr>
+          <a:xfrm>
+            <a:off x="868680" y="2880360"/>
+            <a:ext cx="7315200" cy="274320"/>
+          </a:xfrm>
+          <a:prstGeom prst="rect">
+            <a:avLst/>
+          </a:prstGeom>
+          <a:noFill/>
+          <a:ln/>
+        </p:spPr>
+        <p:txBody>
+          <a:bodyPr wrap="square" lIns="0" tIns="0" rIns="0" bIns="0" rtlCol="0" anchor="ctr"/>
+          <a:lstStyle/>
+          <a:p>
+            <a:pPr marL="0" indent="0">
+              <a:buNone/>
+            </a:pPr>
+            <a:r>
+              <a:rPr lang="en-US" sz="1150" b="1" kern="0" spc="250" dirty="0">
+                <a:solidFill>
+                  <a:srgbClr val="D23B4E"/>
+                </a:solidFill>
+                <a:latin typeface="Calibri" pitchFamily="34" charset="0"/>
+                <a:ea typeface="Calibri" pitchFamily="34" charset="-122"/>
+                <a:cs typeface="Calibri" pitchFamily="34" charset="-120"/>
+              </a:rPr>
+              <a:t>IN scheduler.json</a:t>
+            </a:r>
+            <a:endParaRPr lang="en-US" sz="1150" dirty="0"/>
+          </a:p>
+        </p:txBody>
+      </p:sp>
+      <p:sp>
+        <p:nvSpPr>
+          <p:cNvPr id="7" name="Shape 5"/>
+          <p:cNvSpPr/>
+          <p:nvPr/>
+        </p:nvSpPr>
+        <p:spPr>
+          <a:xfrm>
+            <a:off x="868680" y="3291840"/>
+            <a:ext cx="10454335" cy="0"/>
+          </a:xfrm>
+          <a:prstGeom prst="line">
+            <a:avLst/>
+          </a:prstGeom>
+          <a:noFill/>
+          <a:ln w="12700">
+            <a:solidFill>
+              <a:srgbClr val="E4E7EC"/>
+            </a:solidFill>
+            <a:prstDash val="solid"/>
+          </a:ln>
+        </p:spPr>
+      </p:sp>
+      <p:sp>
+        <p:nvSpPr>
+          <p:cNvPr id="8" name="Text 6"/>
+          <p:cNvSpPr/>
+          <p:nvPr/>
+        </p:nvSpPr>
+        <p:spPr>
+          <a:xfrm>
+            <a:off x="868680" y="3410712"/>
+            <a:ext cx="5943600" cy="411480"/>
+          </a:xfrm>
+          <a:prstGeom prst="rect">
+            <a:avLst/>
+          </a:prstGeom>
+          <a:noFill/>
+          <a:ln/>
+        </p:spPr>
+        <p:txBody>
+          <a:bodyPr wrap="square" lIns="0" tIns="0" rIns="0" bIns="0" rtlCol="0" anchor="ctr"/>
+          <a:lstStyle/>
+          <a:p>
+            <a:pPr marL="0" indent="0">
+              <a:buNone/>
+            </a:pPr>
+            <a:r>
+              <a:rPr lang="en-US" sz="1500" b="1" dirty="0">
+                <a:solidFill>
+                  <a:srgbClr val="16181D"/>
+                </a:solidFill>
+                <a:latin typeface="Consolas" pitchFamily="34" charset="0"/>
+                <a:ea typeface="Consolas" pitchFamily="34" charset="-122"/>
+                <a:cs typeface="Consolas" pitchFamily="34" charset="-120"/>
+              </a:rPr>
+              <a:t>webOrigins: ["*"]</a:t>
+            </a:r>
+            <a:endParaRPr lang="en-US" sz="1500" dirty="0"/>
+          </a:p>
+        </p:txBody>
+      </p:sp>
+      <p:sp>
+        <p:nvSpPr>
+          <p:cNvPr id="9" name="Text 7"/>
+          <p:cNvSpPr/>
+          <p:nvPr/>
+        </p:nvSpPr>
+        <p:spPr>
+          <a:xfrm>
+            <a:off x="6751015" y="3410712"/>
+            <a:ext cx="4572000" cy="411480"/>
+          </a:xfrm>
+          <a:prstGeom prst="rect">
+            <a:avLst/>
+          </a:prstGeom>
+          <a:noFill/>
+          <a:ln/>
+        </p:spPr>
+        <p:txBody>
+          <a:bodyPr wrap="square" lIns="0" tIns="0" rIns="0" bIns="0" rtlCol="0" anchor="ctr"/>
+          <a:lstStyle/>
+          <a:p>
+            <a:pPr marL="0" indent="0" algn="r">
+              <a:buNone/>
+            </a:pPr>
+            <a:r>
+              <a:rPr lang="en-US" sz="1400" i="1" dirty="0">
+                <a:solidFill>
+                  <a:srgbClr val="D23B4E"/>
+                </a:solidFill>
+                <a:latin typeface="Calibri" pitchFamily="34" charset="0"/>
+                <a:ea typeface="Calibri" pitchFamily="34" charset="-122"/>
+                <a:cs typeface="Calibri" pitchFamily="34" charset="-120"/>
+              </a:rPr>
+              <a:t>jede Origin erlaubt</a:t>
+            </a:r>
+            <a:endParaRPr lang="en-US" sz="1400" dirty="0"/>
+          </a:p>
+        </p:txBody>
+      </p:sp>
+      <p:sp>
+        <p:nvSpPr>
+          <p:cNvPr id="10" name="Shape 8"/>
+          <p:cNvSpPr/>
+          <p:nvPr/>
+        </p:nvSpPr>
+        <p:spPr>
+          <a:xfrm>
+            <a:off x="868680" y="3950208"/>
+            <a:ext cx="10454335" cy="0"/>
+          </a:xfrm>
+          <a:prstGeom prst="line">
+            <a:avLst/>
+          </a:prstGeom>
+          <a:noFill/>
+          <a:ln w="12700">
+            <a:solidFill>
+              <a:srgbClr val="E4E7EC"/>
+            </a:solidFill>
+            <a:prstDash val="solid"/>
+          </a:ln>
+        </p:spPr>
+      </p:sp>
+      <p:sp>
+        <p:nvSpPr>
+          <p:cNvPr id="11" name="Text 9"/>
+          <p:cNvSpPr/>
+          <p:nvPr/>
+        </p:nvSpPr>
+        <p:spPr>
+          <a:xfrm>
+            <a:off x="868680" y="4069080"/>
+            <a:ext cx="5943600" cy="411480"/>
+          </a:xfrm>
+          <a:prstGeom prst="rect">
+            <a:avLst/>
+          </a:prstGeom>
+          <a:noFill/>
+          <a:ln/>
+        </p:spPr>
+        <p:txBody>
+          <a:bodyPr wrap="square" lIns="0" tIns="0" rIns="0" bIns="0" rtlCol="0" anchor="ctr"/>
+          <a:lstStyle/>
+          <a:p>
+            <a:pPr marL="0" indent="0">
+              <a:buNone/>
+            </a:pPr>
+            <a:r>
+              <a:rPr lang="en-US" sz="1500" b="1" dirty="0">
+                <a:solidFill>
+                  <a:srgbClr val="16181D"/>
+                </a:solidFill>
+                <a:latin typeface="Consolas" pitchFamily="34" charset="0"/>
+                <a:ea typeface="Consolas" pitchFamily="34" charset="-122"/>
+                <a:cs typeface="Consolas" pitchFamily="34" charset="-120"/>
+              </a:rPr>
+              <a:t>implicitFlowEnabled</a:t>
+            </a:r>
+            <a:endParaRPr lang="en-US" sz="1500" dirty="0"/>
+          </a:p>
+        </p:txBody>
+      </p:sp>
+      <p:sp>
+        <p:nvSpPr>
+          <p:cNvPr id="12" name="Text 10"/>
+          <p:cNvSpPr/>
+          <p:nvPr/>
+        </p:nvSpPr>
+        <p:spPr>
+          <a:xfrm>
+            <a:off x="6751015" y="4069080"/>
+            <a:ext cx="4572000" cy="411480"/>
+          </a:xfrm>
+          <a:prstGeom prst="rect">
+            <a:avLst/>
+          </a:prstGeom>
+          <a:noFill/>
+          <a:ln/>
+        </p:spPr>
+        <p:txBody>
+          <a:bodyPr wrap="square" lIns="0" tIns="0" rIns="0" bIns="0" rtlCol="0" anchor="ctr"/>
+          <a:lstStyle/>
+          <a:p>
+            <a:pPr marL="0" indent="0" algn="r">
+              <a:buNone/>
+            </a:pPr>
+            <a:r>
+              <a:rPr lang="en-US" sz="1400" i="1" dirty="0">
+                <a:solidFill>
+                  <a:srgbClr val="D23B4E"/>
+                </a:solidFill>
+                <a:latin typeface="Calibri" pitchFamily="34" charset="0"/>
+                <a:ea typeface="Calibri" pitchFamily="34" charset="-122"/>
+                <a:cs typeface="Calibri" pitchFamily="34" charset="-120"/>
+              </a:rPr>
+              <a:t>veralteter Flow aktiv</a:t>
+            </a:r>
+            <a:endParaRPr lang="en-US" sz="1400" dirty="0"/>
+          </a:p>
+        </p:txBody>
+      </p:sp>
+      <p:sp>
+        <p:nvSpPr>
+          <p:cNvPr id="13" name="Shape 11"/>
+          <p:cNvSpPr/>
+          <p:nvPr/>
+        </p:nvSpPr>
+        <p:spPr>
+          <a:xfrm>
+            <a:off x="868680" y="4608576"/>
+            <a:ext cx="10454335" cy="0"/>
+          </a:xfrm>
+          <a:prstGeom prst="line">
+            <a:avLst/>
+          </a:prstGeom>
+          <a:noFill/>
+          <a:ln w="12700">
+            <a:solidFill>
+              <a:srgbClr val="E4E7EC"/>
+            </a:solidFill>
+            <a:prstDash val="solid"/>
+          </a:ln>
+        </p:spPr>
+      </p:sp>
+      <p:sp>
+        <p:nvSpPr>
+          <p:cNvPr id="14" name="Text 12"/>
+          <p:cNvSpPr/>
+          <p:nvPr/>
+        </p:nvSpPr>
+        <p:spPr>
+          <a:xfrm>
+            <a:off x="868680" y="4727448"/>
+            <a:ext cx="5943600" cy="411480"/>
+          </a:xfrm>
+          <a:prstGeom prst="rect">
+            <a:avLst/>
+          </a:prstGeom>
+          <a:noFill/>
+          <a:ln/>
+        </p:spPr>
+        <p:txBody>
+          <a:bodyPr wrap="square" lIns="0" tIns="0" rIns="0" bIns="0" rtlCol="0" anchor="ctr"/>
+          <a:lstStyle/>
+          <a:p>
+            <a:pPr marL="0" indent="0">
+              <a:buNone/>
+            </a:pPr>
+            <a:r>
+              <a:rPr lang="en-US" sz="1500" b="1" dirty="0">
+                <a:solidFill>
+                  <a:srgbClr val="16181D"/>
+                </a:solidFill>
+                <a:latin typeface="Consolas" pitchFamily="34" charset="0"/>
+                <a:ea typeface="Consolas" pitchFamily="34" charset="-122"/>
+                <a:cs typeface="Consolas" pitchFamily="34" charset="-120"/>
+              </a:rPr>
+              <a:t>directAccessGrants</a:t>
+            </a:r>
+            <a:endParaRPr lang="en-US" sz="1500" dirty="0"/>
+          </a:p>
+        </p:txBody>
+      </p:sp>
+      <p:sp>
+        <p:nvSpPr>
+          <p:cNvPr id="15" name="Text 13"/>
+          <p:cNvSpPr/>
+          <p:nvPr/>
+        </p:nvSpPr>
+        <p:spPr>
+          <a:xfrm>
+            <a:off x="6751015" y="4727448"/>
+            <a:ext cx="4572000" cy="411480"/>
+          </a:xfrm>
+          <a:prstGeom prst="rect">
+            <a:avLst/>
+          </a:prstGeom>
+          <a:noFill/>
+          <a:ln/>
+        </p:spPr>
+        <p:txBody>
+          <a:bodyPr wrap="square" lIns="0" tIns="0" rIns="0" bIns="0" rtlCol="0" anchor="ctr"/>
+          <a:lstStyle/>
+          <a:p>
+            <a:pPr marL="0" indent="0" algn="r">
+              <a:buNone/>
+            </a:pPr>
+            <a:r>
+              <a:rPr lang="en-US" sz="1400" i="1" dirty="0">
+                <a:solidFill>
+                  <a:srgbClr val="D23B4E"/>
+                </a:solidFill>
+                <a:latin typeface="Calibri" pitchFamily="34" charset="0"/>
+                <a:ea typeface="Calibri" pitchFamily="34" charset="-122"/>
+                <a:cs typeface="Calibri" pitchFamily="34" charset="-120"/>
+              </a:rPr>
+              <a:t>Passwort-Grant aktiv</a:t>
+            </a:r>
+            <a:endParaRPr lang="en-US" sz="1400" dirty="0"/>
+          </a:p>
+        </p:txBody>
+      </p:sp>
+      <p:sp>
+        <p:nvSpPr>
+          <p:cNvPr id="16" name="Text 14"/>
+          <p:cNvSpPr/>
+          <p:nvPr/>
+        </p:nvSpPr>
+        <p:spPr>
+          <a:xfrm>
+            <a:off x="868680" y="5358384"/>
+            <a:ext cx="10241280" cy="457200"/>
+          </a:xfrm>
+          <a:prstGeom prst="rect">
+            <a:avLst/>
+          </a:prstGeom>
+          <a:noFill/>
+          <a:ln/>
+        </p:spPr>
+        <p:txBody>
+          <a:bodyPr wrap="square" lIns="0" tIns="0" rIns="0" bIns="0" rtlCol="0" anchor="ctr"/>
+          <a:lstStyle/>
+          <a:p>
+            <a:pPr marL="0" indent="0">
+              <a:buNone/>
+            </a:pPr>
+            <a:r>
+              <a:rPr lang="en-US" sz="1350" i="1" dirty="0">
+                <a:solidFill>
+                  <a:srgbClr val="9AA3AF"/>
+                </a:solidFill>
+                <a:latin typeface="Calibri" pitchFamily="34" charset="0"/>
+                <a:ea typeface="Calibri" pitchFamily="34" charset="-122"/>
+                <a:cs typeface="Calibri" pitchFamily="34" charset="-120"/>
+              </a:rPr>
+              <a:t>Veraltete Flows und eine Wildcard bei den Web-Origins - </a:t>
+            </a:r>
+            <a:r>
+              <a:rPr lang="en-US" sz="1350" i="1" dirty="0" err="1">
+                <a:solidFill>
+                  <a:srgbClr val="9AA3AF"/>
+                </a:solidFill>
+                <a:latin typeface="Calibri" pitchFamily="34" charset="0"/>
+                <a:ea typeface="Calibri" pitchFamily="34" charset="-122"/>
+                <a:cs typeface="Calibri" pitchFamily="34" charset="-120"/>
+              </a:rPr>
+              <a:t>zu</a:t>
+            </a:r>
+            <a:r>
+              <a:rPr lang="en-US" sz="1350" i="1" dirty="0">
+                <a:solidFill>
+                  <a:srgbClr val="9AA3AF"/>
+                </a:solidFill>
+                <a:latin typeface="Calibri" pitchFamily="34" charset="0"/>
+                <a:ea typeface="Calibri" pitchFamily="34" charset="-122"/>
+                <a:cs typeface="Calibri" pitchFamily="34" charset="-120"/>
+              </a:rPr>
+              <a:t> </a:t>
+            </a:r>
+            <a:r>
+              <a:rPr lang="en-US" sz="1350" i="1" dirty="0" err="1">
+                <a:solidFill>
+                  <a:srgbClr val="9AA3AF"/>
+                </a:solidFill>
+                <a:latin typeface="Calibri" pitchFamily="34" charset="0"/>
+                <a:ea typeface="Calibri" pitchFamily="34" charset="-122"/>
+                <a:cs typeface="Calibri" pitchFamily="34" charset="-120"/>
+              </a:rPr>
+              <a:t>breit</a:t>
+            </a:r>
+            <a:r>
+              <a:rPr lang="en-US" sz="1350" i="1" dirty="0">
+                <a:solidFill>
+                  <a:srgbClr val="9AA3AF"/>
+                </a:solidFill>
+                <a:latin typeface="Calibri" pitchFamily="34" charset="0"/>
+                <a:ea typeface="Calibri" pitchFamily="34" charset="-122"/>
+                <a:cs typeface="Calibri" pitchFamily="34" charset="-120"/>
+              </a:rPr>
+              <a:t> für einen SPA-Client.</a:t>
+            </a:r>
+            <a:endParaRPr lang="en-US" sz="1350" dirty="0"/>
+          </a:p>
+        </p:txBody>
+      </p:sp>
+      <p:sp>
+        <p:nvSpPr>
+          <p:cNvPr id="17" name="Text 1">
             <a:extLst>
               <a:ext uri="{FF2B5EF4-FFF2-40B4-BE49-F238E27FC236}">
-                <a16:creationId xmlns:a16="http://schemas.microsoft.com/office/drawing/2014/main" id="{1B95CA36-7AD5-4CED-959F-F065EF9A96F2}"/>
+                <a16:creationId xmlns:a16="http://schemas.microsoft.com/office/drawing/2014/main" id="{E4CBF162-AD41-8BBF-E6AF-09E8ABA6A2D9}"/>
               </a:ext>
             </a:extLst>
           </p:cNvPr>
-          <p:cNvSpPr>
-            <a:spLocks noGrp="1"/>
-          </p:cNvSpPr>
-          <p:nvPr/>
-        </p:nvSpPr>
-        <p:spPr>
-          <a:xfrm>
-            <a:off x="868680" y="1874520"/>
-            <a:ext cx="7315200" cy="320040"/>
-          </a:xfrm>
-          <a:prstGeom prst="rect">
-            <a:avLst/>
-          </a:prstGeom>
-          <a:noFill/>
-        </p:spPr>
-        <p:txBody>
-          <a:bodyPr wrap="square" lIns="0" tIns="0" rIns="0" bIns="0" anchor="ctr"/>
-          <a:lstStyle/>
-          <a:p>
-            <a:pPr marL="0" indent="0">
-              <a:buNone/>
-            </a:pPr>
-            <a:r>
-              <a:rPr sz="1200" b="1" dirty="0">
-                <a:solidFill>
-                  <a:srgbClr val="1463FF"/>
-                </a:solidFill>
-                <a:latin typeface="Calibri"/>
-                <a:ea typeface="Calibri"/>
-                <a:cs typeface="Calibri"/>
-              </a:rPr>
-              <a:t>LIVE DEMO · </a:t>
-            </a:r>
-            <a:r>
-              <a:rPr lang="de-DE" sz="1200" b="1" dirty="0">
-                <a:solidFill>
-                  <a:srgbClr val="1463FF"/>
-                </a:solidFill>
-                <a:latin typeface="Calibri"/>
-                <a:ea typeface="Calibri"/>
-                <a:cs typeface="Calibri"/>
-              </a:rPr>
-              <a:t>CORS</a:t>
-            </a:r>
-            <a:endParaRPr sz="1200" b="1" dirty="0">
-              <a:solidFill>
-                <a:srgbClr val="1463FF"/>
-              </a:solidFill>
-              <a:latin typeface="Calibri"/>
-              <a:ea typeface="Calibri"/>
-              <a:cs typeface="Calibri"/>
-            </a:endParaRPr>
-          </a:p>
-        </p:txBody>
-      </p:sp>
-      <p:sp>
-        <p:nvSpPr>
-          <p:cNvPr id="3" name="Text 1">
-            <a:extLst>
-              <a:ext uri="{FF2B5EF4-FFF2-40B4-BE49-F238E27FC236}">
-                <a16:creationId xmlns:a16="http://schemas.microsoft.com/office/drawing/2014/main" id="{FD8DA67A-FD81-4D52-AB3E-0B0E93F9DAB5}"/>
-              </a:ext>
-            </a:extLst>
-          </p:cNvPr>
-          <p:cNvSpPr>
-            <a:spLocks noGrp="1"/>
-          </p:cNvSpPr>
-          <p:nvPr/>
-        </p:nvSpPr>
-        <p:spPr>
-          <a:xfrm>
-            <a:off x="822960" y="2194560"/>
-            <a:ext cx="10058400" cy="1463040"/>
-          </a:xfrm>
-          <a:prstGeom prst="rect">
-            <a:avLst/>
-          </a:prstGeom>
-          <a:noFill/>
-        </p:spPr>
-        <p:txBody>
-          <a:bodyPr wrap="square" lIns="0" tIns="0" rIns="0" bIns="0" anchor="ctr"/>
-          <a:lstStyle/>
-          <a:p>
-            <a:pPr marL="0" indent="0">
-              <a:buNone/>
-            </a:pPr>
-            <a:r>
-              <a:rPr sz="11000" b="1" dirty="0">
-                <a:solidFill>
-                  <a:srgbClr val="16181D"/>
-                </a:solidFill>
-                <a:latin typeface="Trebuchet MS"/>
-                <a:ea typeface="Trebuchet MS"/>
-                <a:cs typeface="Trebuchet MS"/>
-              </a:rPr>
-              <a:t>Zur Live Demo</a:t>
-            </a:r>
-          </a:p>
-        </p:txBody>
-      </p:sp>
-      <p:sp>
-        <p:nvSpPr>
-          <p:cNvPr id="4" name="Text 2">
-            <a:extLst>
-              <a:ext uri="{FF2B5EF4-FFF2-40B4-BE49-F238E27FC236}">
-                <a16:creationId xmlns:a16="http://schemas.microsoft.com/office/drawing/2014/main" id="{17D4FDB8-F8F0-4D96-95F0-9B90E32AF337}"/>
-              </a:ext>
-            </a:extLst>
-          </p:cNvPr>
-          <p:cNvSpPr>
-            <a:spLocks noGrp="1"/>
-          </p:cNvSpPr>
-          <p:nvPr/>
-        </p:nvSpPr>
-        <p:spPr>
-          <a:xfrm>
-            <a:off x="868680" y="3703320"/>
-            <a:ext cx="10058400" cy="502920"/>
-          </a:xfrm>
-          <a:prstGeom prst="rect">
-            <a:avLst/>
-          </a:prstGeom>
-          <a:noFill/>
-        </p:spPr>
-        <p:txBody>
-          <a:bodyPr wrap="square" lIns="0" tIns="0" rIns="0" bIns="0" anchor="ctr"/>
-          <a:lstStyle/>
-          <a:p>
-            <a:pPr marL="0" indent="0">
-              <a:buNone/>
-            </a:pPr>
-            <a:endParaRPr/>
-          </a:p>
-        </p:txBody>
-      </p:sp>
-      <p:sp>
-        <p:nvSpPr>
-          <p:cNvPr id="5" name="Shape 3">
-            <a:extLst>
-              <a:ext uri="{FF2B5EF4-FFF2-40B4-BE49-F238E27FC236}">
-                <a16:creationId xmlns:a16="http://schemas.microsoft.com/office/drawing/2014/main" id="{42345276-9CC1-4302-B204-8758E42AE5A8}"/>
-              </a:ext>
-            </a:extLst>
-          </p:cNvPr>
-          <p:cNvSpPr>
-            <a:spLocks noGrp="1"/>
-          </p:cNvSpPr>
-          <p:nvPr/>
-        </p:nvSpPr>
-        <p:spPr>
-          <a:xfrm>
-            <a:off x="868680" y="4526280"/>
-            <a:ext cx="1828800" cy="0"/>
-          </a:xfrm>
-          <a:prstGeom prst="line">
-            <a:avLst/>
-          </a:prstGeom>
-          <a:noFill/>
-          <a:ln w="28575">
-            <a:solidFill>
-              <a:srgbClr val="16181D"/>
-            </a:solidFill>
-            <a:prstDash val="solid"/>
-          </a:ln>
-        </p:spPr>
-      </p:sp>
-      <p:sp>
-        <p:nvSpPr>
-          <p:cNvPr id="6" name="Text 4">
-            <a:extLst>
-              <a:ext uri="{FF2B5EF4-FFF2-40B4-BE49-F238E27FC236}">
-                <a16:creationId xmlns:a16="http://schemas.microsoft.com/office/drawing/2014/main" id="{468481FB-4609-481A-89AB-8748CC339F06}"/>
-              </a:ext>
-            </a:extLst>
-          </p:cNvPr>
-          <p:cNvSpPr>
-            <a:spLocks noGrp="1"/>
-          </p:cNvSpPr>
-          <p:nvPr/>
-        </p:nvSpPr>
-        <p:spPr>
-          <a:xfrm>
-            <a:off x="868680" y="4754880"/>
-            <a:ext cx="8686800" cy="457200"/>
-          </a:xfrm>
-          <a:prstGeom prst="rect">
-            <a:avLst/>
-          </a:prstGeom>
-          <a:noFill/>
-        </p:spPr>
-        <p:txBody>
-          <a:bodyPr wrap="square" lIns="0" tIns="0" rIns="0" bIns="0" anchor="ctr"/>
-          <a:lstStyle/>
-          <a:p>
-            <a:pPr marL="0" indent="0">
-              <a:buNone/>
-            </a:pPr>
-            <a:r>
-              <a:rPr lang="de-DE" sz="1600" dirty="0">
-                <a:solidFill>
-                  <a:srgbClr val="55606E"/>
-                </a:solidFill>
-                <a:latin typeface="Calibri"/>
-                <a:ea typeface="Calibri"/>
-                <a:cs typeface="Calibri"/>
-              </a:rPr>
-              <a:t>Cross Origin Anfragen werden erst durch eine Unsichere Konfiguration durchgelassen und dann blockiert.</a:t>
-            </a:r>
-            <a:endParaRPr sz="1600" dirty="0">
-              <a:solidFill>
-                <a:srgbClr val="55606E"/>
-              </a:solidFill>
-              <a:latin typeface="Calibri"/>
-              <a:ea typeface="Calibri"/>
-              <a:cs typeface="Calibri"/>
-            </a:endParaRPr>
-          </a:p>
-        </p:txBody>
-      </p:sp>
-      <p:sp>
-        <p:nvSpPr>
-          <p:cNvPr id="7" name="Text 5">
-            <a:extLst>
-              <a:ext uri="{FF2B5EF4-FFF2-40B4-BE49-F238E27FC236}">
-                <a16:creationId xmlns:a16="http://schemas.microsoft.com/office/drawing/2014/main" id="{94A987EA-ED23-44AA-ABC1-DB16DB020FDD}"/>
-              </a:ext>
-            </a:extLst>
-          </p:cNvPr>
-          <p:cNvSpPr>
-            <a:spLocks noGrp="1"/>
-          </p:cNvSpPr>
-          <p:nvPr/>
-        </p:nvSpPr>
-        <p:spPr>
-          <a:xfrm>
-            <a:off x="9448495" y="6080760"/>
-            <a:ext cx="1874520" cy="320040"/>
-          </a:xfrm>
-          <a:prstGeom prst="rect">
-            <a:avLst/>
-          </a:prstGeom>
-          <a:noFill/>
-        </p:spPr>
-        <p:txBody>
-          <a:bodyPr wrap="square" lIns="0" tIns="0" rIns="0" bIns="0" anchor="ctr"/>
+          <p:cNvSpPr/>
+          <p:nvPr/>
+        </p:nvSpPr>
+        <p:spPr>
+          <a:xfrm>
+            <a:off x="10774375" y="502920"/>
+            <a:ext cx="548640" cy="274320"/>
+          </a:xfrm>
+          <a:prstGeom prst="rect">
+            <a:avLst/>
+          </a:prstGeom>
+          <a:noFill/>
+          <a:ln/>
+        </p:spPr>
+        <p:txBody>
+          <a:bodyPr wrap="square" lIns="0" tIns="0" rIns="0" bIns="0" rtlCol="0" anchor="ctr"/>
           <a:lstStyle/>
           <a:p>
             <a:pPr marL="0" indent="0" algn="r">
               <a:buNone/>
             </a:pPr>
-            <a:r>
-              <a:rPr lang="de-DE" sz="1200" i="1" dirty="0">
+            <a:fld id="{B45D24B6-C78C-43F1-9D4F-88F7B48373A8}" type="slidenum">
+              <a:rPr lang="en-US" sz="1050" b="1" kern="0" spc="100" smtClean="0">
                 <a:solidFill>
                   <a:srgbClr val="9AA3AF"/>
                 </a:solidFill>
-                <a:latin typeface="Calibri"/>
-                <a:ea typeface="Calibri"/>
-                <a:cs typeface="Calibri"/>
-              </a:rPr>
-              <a:t>Ole &amp; Tom</a:t>
-            </a:r>
-            <a:endParaRPr sz="1200" i="1" dirty="0">
-              <a:solidFill>
-                <a:srgbClr val="9AA3AF"/>
-              </a:solidFill>
-              <a:latin typeface="Calibri"/>
-              <a:ea typeface="Calibri"/>
-              <a:cs typeface="Calibri"/>
-            </a:endParaRPr>
+                <a:latin typeface="Calibri" pitchFamily="34" charset="0"/>
+                <a:ea typeface="Calibri" pitchFamily="34" charset="-122"/>
+                <a:cs typeface="Calibri" pitchFamily="34" charset="-120"/>
+              </a:rPr>
+              <a:t>21</a:t>
+            </a:fld>
+            <a:endParaRPr lang="en-US" sz="1050" dirty="0"/>
           </a:p>
         </p:txBody>
       </p:sp>
     </p:spTree>
-    <p:extLst>
-      <p:ext uri="{BB962C8B-B14F-4D97-AF65-F5344CB8AC3E}">
-        <p14:creationId xmlns:p14="http://schemas.microsoft.com/office/powerpoint/2010/main" val="2481334609"/>
-      </p:ext>
-    </p:extLst>
   </p:cSld>
   <p:clrMapOvr>
     <a:masterClrMapping/>
   </p:clrMapOvr>
+  <mc:AlternateContent xmlns:mc="http://schemas.openxmlformats.org/markup-compatibility/2006">
+    <mc:Choice xmlns:p14="http://schemas.microsoft.com/office/powerpoint/2010/main" Requires="p14">
+      <p:transition spd="med" p14:dur="700">
+        <p:fade/>
+      </p:transition>
+    </mc:Choice>
+    <mc:Fallback>
+      <p:transition spd="med">
+        <p:fade/>
+      </p:transition>
+    </mc:Fallback>
+  </mc:AlternateContent>
 </p:sld>
 </file>
 
@@ -12264,7 +12201,7 @@
                 <a:ea typeface="Calibri" pitchFamily="34" charset="-122"/>
                 <a:cs typeface="Calibri" pitchFamily="34" charset="-120"/>
               </a:rPr>
-              <a:t>KRITISCHES RISIKO · ARCHITEKTUR</a:t>
+              <a:t>KRITISCHES RISIKO · ACCOUNT-TAKEOVER</a:t>
             </a:r>
             <a:endParaRPr lang="en-US" sz="1050" dirty="0"/>
           </a:p>
@@ -12295,7 +12232,7 @@
               <a:buNone/>
             </a:pPr>
             <a:r>
-              <a:rPr lang="en-US" sz="3800" b="1" dirty="0">
+              <a:rPr lang="en-US" sz="3600" b="1" dirty="0">
                 <a:solidFill>
                   <a:srgbClr val="16181D"/>
                 </a:solidFill>
@@ -12303,9 +12240,9 @@
                 <a:ea typeface="Trebuchet MS" pitchFamily="34" charset="-122"/>
                 <a:cs typeface="Trebuchet MS" pitchFamily="34" charset="-120"/>
               </a:rPr>
-              <a:t>Das eigentliche Risiko</a:t>
-            </a:r>
-            <a:endParaRPr lang="en-US" sz="3800" dirty="0"/>
+              <a:t>Token-Diebstahl als Fehlerkette</a:t>
+            </a:r>
+            <a:endParaRPr lang="en-US" sz="3600" dirty="0"/>
           </a:p>
         </p:txBody>
       </p:sp>
@@ -12318,7 +12255,7 @@
         <p:spPr>
           <a:xfrm>
             <a:off x="868680" y="1874520"/>
-            <a:ext cx="10241280" cy="640080"/>
+            <a:ext cx="10424160" cy="640080"/>
           </a:xfrm>
           <a:prstGeom prst="rect">
             <a:avLst/>
@@ -12334,7 +12271,7 @@
               <a:buNone/>
             </a:pPr>
             <a:r>
-              <a:rPr lang="en-US" sz="1700" dirty="0">
+              <a:rPr lang="en-US" sz="1650" dirty="0" err="1">
                 <a:solidFill>
                   <a:srgbClr val="55606E"/>
                 </a:solidFill>
@@ -12342,10 +12279,10 @@
                 <a:ea typeface="Calibri" pitchFamily="34" charset="-122"/>
                 <a:cs typeface="Calibri" pitchFamily="34" charset="-120"/>
               </a:rPr>
-              <a:t>Die Excel-Demo ist nur der sichtbare Teil. Kritisch wird es durch </a:t>
-            </a:r>
-            <a:r>
-              <a:rPr lang="en-US" sz="1700" dirty="0" err="1">
+              <a:t>Über</a:t>
+            </a:r>
+            <a:r>
+              <a:rPr lang="en-US" sz="1650" dirty="0">
                 <a:solidFill>
                   <a:srgbClr val="55606E"/>
                 </a:solidFill>
@@ -12353,10 +12290,87 @@
                 <a:ea typeface="Calibri" pitchFamily="34" charset="-122"/>
                 <a:cs typeface="Calibri" pitchFamily="34" charset="-120"/>
               </a:rPr>
+              <a:t> </a:t>
+            </a:r>
+            <a:r>
+              <a:rPr lang="en-US" sz="1650" dirty="0" err="1">
+                <a:solidFill>
+                  <a:srgbClr val="55606E"/>
+                </a:solidFill>
+                <a:latin typeface="Calibri" pitchFamily="34" charset="0"/>
+                <a:ea typeface="Calibri" pitchFamily="34" charset="-122"/>
+                <a:cs typeface="Calibri" pitchFamily="34" charset="-120"/>
+              </a:rPr>
+              <a:t>dieselbe</a:t>
+            </a:r>
+            <a:r>
+              <a:rPr lang="en-US" sz="1650" dirty="0">
+                <a:solidFill>
+                  <a:srgbClr val="55606E"/>
+                </a:solidFill>
+                <a:latin typeface="Calibri" pitchFamily="34" charset="0"/>
+                <a:ea typeface="Calibri" pitchFamily="34" charset="-122"/>
+                <a:cs typeface="Calibri" pitchFamily="34" charset="-120"/>
+              </a:rPr>
+              <a:t> CORS-</a:t>
+            </a:r>
+            <a:r>
+              <a:rPr lang="en-US" sz="1650" dirty="0" err="1">
+                <a:solidFill>
+                  <a:srgbClr val="55606E"/>
+                </a:solidFill>
+                <a:latin typeface="Calibri" pitchFamily="34" charset="0"/>
+                <a:ea typeface="Calibri" pitchFamily="34" charset="-122"/>
+                <a:cs typeface="Calibri" pitchFamily="34" charset="-120"/>
+              </a:rPr>
+              <a:t>Lücke</a:t>
+            </a:r>
+            <a:r>
+              <a:rPr lang="en-US" sz="1650" dirty="0">
+                <a:solidFill>
+                  <a:srgbClr val="55606E"/>
+                </a:solidFill>
+                <a:latin typeface="Calibri" pitchFamily="34" charset="0"/>
+                <a:ea typeface="Calibri" pitchFamily="34" charset="-122"/>
+                <a:cs typeface="Calibri" pitchFamily="34" charset="-120"/>
+              </a:rPr>
+              <a:t> an der API </a:t>
+            </a:r>
+            <a:r>
+              <a:rPr lang="en-US" sz="1650" dirty="0" err="1">
+                <a:solidFill>
+                  <a:srgbClr val="55606E"/>
+                </a:solidFill>
+                <a:latin typeface="Calibri" pitchFamily="34" charset="0"/>
+                <a:ea typeface="Calibri" pitchFamily="34" charset="-122"/>
+                <a:cs typeface="Calibri" pitchFamily="34" charset="-120"/>
+              </a:rPr>
+              <a:t>wird</a:t>
+            </a:r>
+            <a:r>
+              <a:rPr lang="en-US" sz="1650" dirty="0">
+                <a:solidFill>
+                  <a:srgbClr val="55606E"/>
+                </a:solidFill>
+                <a:latin typeface="Calibri" pitchFamily="34" charset="0"/>
+                <a:ea typeface="Calibri" pitchFamily="34" charset="-122"/>
+                <a:cs typeface="Calibri" pitchFamily="34" charset="-120"/>
+              </a:rPr>
+              <a:t> aus Mitlesen </a:t>
+            </a:r>
+            <a:r>
+              <a:rPr lang="en-US" sz="1650" dirty="0" err="1">
+                <a:solidFill>
+                  <a:srgbClr val="55606E"/>
+                </a:solidFill>
+                <a:latin typeface="Calibri" pitchFamily="34" charset="0"/>
+                <a:ea typeface="Calibri" pitchFamily="34" charset="-122"/>
+                <a:cs typeface="Calibri" pitchFamily="34" charset="-120"/>
+              </a:rPr>
               <a:t>eine</a:t>
             </a:r>
             <a:r>
-              <a:rPr lang="en-US" sz="1700" dirty="0">
+              <a:rPr lang="en-US" sz="1650" dirty="0">
                 <a:solidFill>
                   <a:srgbClr val="55606E"/>
                 </a:solidFill>
@@ -12367,7 +12381,7 @@
               <a:t> </a:t>
             </a:r>
             <a:r>
-              <a:rPr lang="en-US" sz="1700" dirty="0" err="1">
+              <a:rPr lang="en-US" sz="1650" dirty="0" err="1">
                 <a:solidFill>
                   <a:srgbClr val="55606E"/>
                 </a:solidFill>
@@ -12375,10 +12389,10 @@
                 <a:ea typeface="Calibri" pitchFamily="34" charset="-122"/>
                 <a:cs typeface="Calibri" pitchFamily="34" charset="-120"/>
               </a:rPr>
-              <a:t>Fehlerkette</a:t>
-            </a:r>
-            <a:r>
-              <a:rPr lang="en-US" sz="1700" dirty="0">
+              <a:t>vollständige</a:t>
+            </a:r>
+            <a:r>
+              <a:rPr lang="en-US" sz="1650" dirty="0">
                 <a:solidFill>
                   <a:srgbClr val="55606E"/>
                 </a:solidFill>
@@ -12386,9 +12400,31 @@
                 <a:ea typeface="Calibri" pitchFamily="34" charset="-122"/>
                 <a:cs typeface="Calibri" pitchFamily="34" charset="-120"/>
               </a:rPr>
-              <a:t>, beginnend bei Keycloak.</a:t>
-            </a:r>
-            <a:endParaRPr lang="en-US" sz="1700" dirty="0"/>
+              <a:t> </a:t>
+            </a:r>
+            <a:r>
+              <a:rPr lang="en-US" sz="1650" dirty="0" err="1">
+                <a:solidFill>
+                  <a:srgbClr val="55606E"/>
+                </a:solidFill>
+                <a:latin typeface="Calibri" pitchFamily="34" charset="0"/>
+                <a:ea typeface="Calibri" pitchFamily="34" charset="-122"/>
+                <a:cs typeface="Calibri" pitchFamily="34" charset="-120"/>
+              </a:rPr>
+              <a:t>Identitätsübernahme</a:t>
+            </a:r>
+            <a:r>
+              <a:rPr lang="en-US" sz="1650" dirty="0">
+                <a:solidFill>
+                  <a:srgbClr val="55606E"/>
+                </a:solidFill>
+                <a:latin typeface="Calibri" pitchFamily="34" charset="0"/>
+                <a:ea typeface="Calibri" pitchFamily="34" charset="-122"/>
+                <a:cs typeface="Calibri" pitchFamily="34" charset="-120"/>
+              </a:rPr>
+              <a:t>.</a:t>
+            </a:r>
+            <a:endParaRPr lang="en-US" sz="1650" dirty="0"/>
           </a:p>
         </p:txBody>
       </p:sp>
@@ -12400,8 +12436,8 @@
         </p:nvSpPr>
         <p:spPr>
           <a:xfrm>
-            <a:off x="868680" y="2880360"/>
-            <a:ext cx="7315200" cy="274320"/>
+            <a:off x="1080897" y="2898648"/>
+            <a:ext cx="640080" cy="457200"/>
           </a:xfrm>
           <a:prstGeom prst="rect">
             <a:avLst/>
@@ -12417,38 +12453,237 @@
               <a:buNone/>
             </a:pPr>
             <a:r>
-              <a:rPr lang="en-US" sz="1150" b="1" kern="0" spc="250" dirty="0">
-                <a:solidFill>
-                  <a:srgbClr val="D23B4E"/>
-                </a:solidFill>
-                <a:latin typeface="Calibri" pitchFamily="34" charset="0"/>
-                <a:ea typeface="Calibri" pitchFamily="34" charset="-122"/>
-                <a:cs typeface="Calibri" pitchFamily="34" charset="-120"/>
-              </a:rPr>
-              <a:t>IN scheduler.json</a:t>
-            </a:r>
-            <a:endParaRPr lang="en-US" sz="1150" dirty="0"/>
-          </a:p>
-        </p:txBody>
-      </p:sp>
-      <p:sp>
-        <p:nvSpPr>
-          <p:cNvPr id="7" name="Shape 5"/>
-          <p:cNvSpPr/>
-          <p:nvPr/>
-        </p:nvSpPr>
-        <p:spPr>
-          <a:xfrm>
-            <a:off x="868680" y="3291840"/>
-            <a:ext cx="10454335" cy="0"/>
+              <a:rPr lang="en-US" sz="2000" b="1" dirty="0">
+                <a:solidFill>
+                  <a:srgbClr val="9AA3AF"/>
+                </a:solidFill>
+                <a:latin typeface="Trebuchet MS" pitchFamily="34" charset="0"/>
+                <a:ea typeface="Trebuchet MS" pitchFamily="34" charset="-122"/>
+                <a:cs typeface="Trebuchet MS" pitchFamily="34" charset="-120"/>
+              </a:rPr>
+              <a:t>01</a:t>
+            </a:r>
+            <a:endParaRPr lang="en-US" sz="2000" dirty="0"/>
+          </a:p>
+        </p:txBody>
+      </p:sp>
+      <p:sp>
+        <p:nvSpPr>
+          <p:cNvPr id="7" name="Text 5"/>
+          <p:cNvSpPr/>
+          <p:nvPr/>
+        </p:nvSpPr>
+        <p:spPr>
+          <a:xfrm>
+            <a:off x="1883665" y="2898648"/>
+            <a:ext cx="1087755" cy="457200"/>
+          </a:xfrm>
+          <a:prstGeom prst="rect">
+            <a:avLst/>
+          </a:prstGeom>
+          <a:noFill/>
+          <a:ln/>
+        </p:spPr>
+        <p:txBody>
+          <a:bodyPr wrap="square" lIns="0" tIns="0" rIns="0" bIns="0" rtlCol="0" anchor="ctr"/>
+          <a:lstStyle/>
+          <a:p>
+            <a:pPr marL="0" indent="0" algn="ctr">
+              <a:buNone/>
+            </a:pPr>
+            <a:r>
+              <a:rPr lang="en-US" sz="1800" b="1" dirty="0">
+                <a:solidFill>
+                  <a:srgbClr val="16181D"/>
+                </a:solidFill>
+                <a:latin typeface="Trebuchet MS" pitchFamily="34" charset="0"/>
+                <a:ea typeface="Trebuchet MS" pitchFamily="34" charset="-122"/>
+                <a:cs typeface="Trebuchet MS" pitchFamily="34" charset="-120"/>
+              </a:rPr>
+              <a:t>Login</a:t>
+            </a:r>
+            <a:endParaRPr lang="en-US" sz="1800" dirty="0"/>
+          </a:p>
+        </p:txBody>
+      </p:sp>
+      <p:sp>
+        <p:nvSpPr>
+          <p:cNvPr id="8" name="Text 6"/>
+          <p:cNvSpPr/>
+          <p:nvPr/>
+        </p:nvSpPr>
+        <p:spPr>
+          <a:xfrm>
+            <a:off x="3566312" y="2898648"/>
+            <a:ext cx="5059375" cy="457200"/>
+          </a:xfrm>
+          <a:prstGeom prst="rect">
+            <a:avLst/>
+          </a:prstGeom>
+          <a:noFill/>
+          <a:ln/>
+        </p:spPr>
+        <p:txBody>
+          <a:bodyPr wrap="square" lIns="0" tIns="0" rIns="0" bIns="0" rtlCol="0" anchor="ctr"/>
+          <a:lstStyle/>
+          <a:p>
+            <a:pPr marL="0" indent="0">
+              <a:buNone/>
+            </a:pPr>
+            <a:r>
+              <a:rPr lang="en-US" sz="1450" dirty="0" err="1">
+                <a:solidFill>
+                  <a:srgbClr val="55606E"/>
+                </a:solidFill>
+                <a:latin typeface="Calibri" pitchFamily="34" charset="0"/>
+                <a:ea typeface="Calibri" pitchFamily="34" charset="-122"/>
+                <a:cs typeface="Calibri" pitchFamily="34" charset="-120"/>
+              </a:rPr>
+              <a:t>Nutzer</a:t>
+            </a:r>
+            <a:r>
+              <a:rPr lang="en-US" sz="1450" dirty="0">
+                <a:solidFill>
+                  <a:srgbClr val="55606E"/>
+                </a:solidFill>
+                <a:latin typeface="Calibri" pitchFamily="34" charset="0"/>
+                <a:ea typeface="Calibri" pitchFamily="34" charset="-122"/>
+                <a:cs typeface="Calibri" pitchFamily="34" charset="-120"/>
+              </a:rPr>
+              <a:t> </a:t>
+            </a:r>
+            <a:r>
+              <a:rPr lang="en-US" sz="1450" dirty="0" err="1">
+                <a:solidFill>
+                  <a:srgbClr val="55606E"/>
+                </a:solidFill>
+                <a:latin typeface="Calibri" pitchFamily="34" charset="0"/>
+                <a:ea typeface="Calibri" pitchFamily="34" charset="-122"/>
+                <a:cs typeface="Calibri" pitchFamily="34" charset="-120"/>
+              </a:rPr>
+              <a:t>ist</a:t>
+            </a:r>
+            <a:r>
+              <a:rPr lang="en-US" sz="1450" dirty="0">
+                <a:solidFill>
+                  <a:srgbClr val="55606E"/>
+                </a:solidFill>
+                <a:latin typeface="Calibri" pitchFamily="34" charset="0"/>
+                <a:ea typeface="Calibri" pitchFamily="34" charset="-122"/>
+                <a:cs typeface="Calibri" pitchFamily="34" charset="-120"/>
+              </a:rPr>
+              <a:t> </a:t>
+            </a:r>
+            <a:r>
+              <a:rPr lang="en-US" sz="1450" dirty="0" err="1">
+                <a:solidFill>
+                  <a:srgbClr val="55606E"/>
+                </a:solidFill>
+                <a:latin typeface="Calibri" pitchFamily="34" charset="0"/>
+                <a:ea typeface="Calibri" pitchFamily="34" charset="-122"/>
+                <a:cs typeface="Calibri" pitchFamily="34" charset="-120"/>
+              </a:rPr>
+              <a:t>angemeldet</a:t>
+            </a:r>
+            <a:r>
+              <a:rPr lang="en-US" sz="1450" dirty="0">
+                <a:solidFill>
+                  <a:srgbClr val="55606E"/>
+                </a:solidFill>
+                <a:latin typeface="Calibri" pitchFamily="34" charset="0"/>
+                <a:ea typeface="Calibri" pitchFamily="34" charset="-122"/>
+                <a:cs typeface="Calibri" pitchFamily="34" charset="-120"/>
+              </a:rPr>
+              <a:t>, </a:t>
+            </a:r>
+            <a:r>
+              <a:rPr lang="en-US" sz="1450" dirty="0" err="1">
+                <a:solidFill>
+                  <a:srgbClr val="55606E"/>
+                </a:solidFill>
+                <a:latin typeface="Calibri" pitchFamily="34" charset="0"/>
+                <a:ea typeface="Calibri" pitchFamily="34" charset="-122"/>
+                <a:cs typeface="Calibri" pitchFamily="34" charset="-120"/>
+              </a:rPr>
+              <a:t>gültiges</a:t>
+            </a:r>
+            <a:r>
+              <a:rPr lang="en-US" sz="1450" dirty="0">
+                <a:solidFill>
+                  <a:srgbClr val="55606E"/>
+                </a:solidFill>
+                <a:latin typeface="Calibri" pitchFamily="34" charset="0"/>
+                <a:ea typeface="Calibri" pitchFamily="34" charset="-122"/>
+                <a:cs typeface="Calibri" pitchFamily="34" charset="-120"/>
+              </a:rPr>
+              <a:t> Bearer-Token </a:t>
+            </a:r>
+            <a:r>
+              <a:rPr lang="en-US" sz="1450" dirty="0" err="1">
+                <a:solidFill>
+                  <a:srgbClr val="55606E"/>
+                </a:solidFill>
+                <a:latin typeface="Calibri" pitchFamily="34" charset="0"/>
+                <a:ea typeface="Calibri" pitchFamily="34" charset="-122"/>
+                <a:cs typeface="Calibri" pitchFamily="34" charset="-120"/>
+              </a:rPr>
+              <a:t>liegt</a:t>
+            </a:r>
+            <a:r>
+              <a:rPr lang="en-US" sz="1450" dirty="0">
+                <a:solidFill>
+                  <a:srgbClr val="55606E"/>
+                </a:solidFill>
+                <a:latin typeface="Calibri" pitchFamily="34" charset="0"/>
+                <a:ea typeface="Calibri" pitchFamily="34" charset="-122"/>
+                <a:cs typeface="Calibri" pitchFamily="34" charset="-120"/>
+              </a:rPr>
+              <a:t> </a:t>
+            </a:r>
+            <a:r>
+              <a:rPr lang="en-US" sz="1450" dirty="0" err="1">
+                <a:solidFill>
+                  <a:srgbClr val="55606E"/>
+                </a:solidFill>
+                <a:latin typeface="Calibri" pitchFamily="34" charset="0"/>
+                <a:ea typeface="Calibri" pitchFamily="34" charset="-122"/>
+                <a:cs typeface="Calibri" pitchFamily="34" charset="-120"/>
+              </a:rPr>
+              <a:t>im</a:t>
+            </a:r>
+            <a:r>
+              <a:rPr lang="en-US" sz="1450" dirty="0">
+                <a:solidFill>
+                  <a:srgbClr val="55606E"/>
+                </a:solidFill>
+                <a:latin typeface="Calibri" pitchFamily="34" charset="0"/>
+                <a:ea typeface="Calibri" pitchFamily="34" charset="-122"/>
+                <a:cs typeface="Calibri" pitchFamily="34" charset="-120"/>
+              </a:rPr>
+              <a:t> Browser.</a:t>
+            </a:r>
+            <a:endParaRPr lang="en-US" sz="1450" dirty="0"/>
+          </a:p>
+        </p:txBody>
+      </p:sp>
+      <p:sp>
+        <p:nvSpPr>
+          <p:cNvPr id="9" name="Shape 7"/>
+          <p:cNvSpPr/>
+          <p:nvPr/>
+        </p:nvSpPr>
+        <p:spPr>
+          <a:xfrm>
+            <a:off x="1245489" y="3419856"/>
+            <a:ext cx="0" cy="256032"/>
           </a:xfrm>
           <a:prstGeom prst="line">
             <a:avLst/>
           </a:prstGeom>
           <a:noFill/>
-          <a:ln w="12700">
+          <a:ln w="15875">
             <a:solidFill>
-              <a:srgbClr val="E4E7EC"/>
+              <a:srgbClr val="D2D8DF"/>
             </a:solidFill>
             <a:prstDash val="solid"/>
           </a:ln>
@@ -12456,14 +12691,14 @@
       </p:sp>
       <p:sp>
         <p:nvSpPr>
-          <p:cNvPr id="8" name="Text 6"/>
-          <p:cNvSpPr/>
-          <p:nvPr/>
-        </p:nvSpPr>
-        <p:spPr>
-          <a:xfrm>
-            <a:off x="868680" y="3410712"/>
-            <a:ext cx="5943600" cy="411480"/>
+          <p:cNvPr id="10" name="Text 8"/>
+          <p:cNvSpPr/>
+          <p:nvPr/>
+        </p:nvSpPr>
+        <p:spPr>
+          <a:xfrm>
+            <a:off x="1080897" y="3739896"/>
+            <a:ext cx="640080" cy="457200"/>
           </a:xfrm>
           <a:prstGeom prst="rect">
             <a:avLst/>
@@ -12479,30 +12714,69 @@
               <a:buNone/>
             </a:pPr>
             <a:r>
-              <a:rPr lang="en-US" sz="1500" b="1" dirty="0">
+              <a:rPr lang="en-US" sz="2000" b="1" dirty="0">
+                <a:solidFill>
+                  <a:srgbClr val="9AA3AF"/>
+                </a:solidFill>
+                <a:latin typeface="Trebuchet MS" pitchFamily="34" charset="0"/>
+                <a:ea typeface="Trebuchet MS" pitchFamily="34" charset="-122"/>
+                <a:cs typeface="Trebuchet MS" pitchFamily="34" charset="-120"/>
+              </a:rPr>
+              <a:t>02</a:t>
+            </a:r>
+            <a:endParaRPr lang="en-US" sz="2000" dirty="0"/>
+          </a:p>
+        </p:txBody>
+      </p:sp>
+      <p:sp>
+        <p:nvSpPr>
+          <p:cNvPr id="11" name="Text 9"/>
+          <p:cNvSpPr/>
+          <p:nvPr/>
+        </p:nvSpPr>
+        <p:spPr>
+          <a:xfrm>
+            <a:off x="1883665" y="3739896"/>
+            <a:ext cx="1087755" cy="457200"/>
+          </a:xfrm>
+          <a:prstGeom prst="rect">
+            <a:avLst/>
+          </a:prstGeom>
+          <a:noFill/>
+          <a:ln/>
+        </p:spPr>
+        <p:txBody>
+          <a:bodyPr wrap="square" lIns="0" tIns="0" rIns="0" bIns="0" rtlCol="0" anchor="ctr"/>
+          <a:lstStyle/>
+          <a:p>
+            <a:pPr marL="0" indent="0" algn="ctr">
+              <a:buNone/>
+            </a:pPr>
+            <a:r>
+              <a:rPr lang="en-US" sz="1800" b="1" dirty="0">
                 <a:solidFill>
                   <a:srgbClr val="16181D"/>
                 </a:solidFill>
-                <a:latin typeface="Consolas" pitchFamily="34" charset="0"/>
-                <a:ea typeface="Consolas" pitchFamily="34" charset="-122"/>
-                <a:cs typeface="Consolas" pitchFamily="34" charset="-120"/>
-              </a:rPr>
-              <a:t>webOrigins: ["*"]</a:t>
-            </a:r>
-            <a:endParaRPr lang="en-US" sz="1500" dirty="0"/>
-          </a:p>
-        </p:txBody>
-      </p:sp>
-      <p:sp>
-        <p:nvSpPr>
-          <p:cNvPr id="9" name="Text 7"/>
-          <p:cNvSpPr/>
-          <p:nvPr/>
-        </p:nvSpPr>
-        <p:spPr>
-          <a:xfrm>
-            <a:off x="6751015" y="3410712"/>
-            <a:ext cx="4572000" cy="411480"/>
+                <a:latin typeface="Trebuchet MS" pitchFamily="34" charset="0"/>
+                <a:ea typeface="Trebuchet MS" pitchFamily="34" charset="-122"/>
+                <a:cs typeface="Trebuchet MS" pitchFamily="34" charset="-120"/>
+              </a:rPr>
+              <a:t>/session</a:t>
+            </a:r>
+            <a:endParaRPr lang="en-US" sz="1800" dirty="0"/>
+          </a:p>
+        </p:txBody>
+      </p:sp>
+      <p:sp>
+        <p:nvSpPr>
+          <p:cNvPr id="12" name="Text 10"/>
+          <p:cNvSpPr/>
+          <p:nvPr/>
+        </p:nvSpPr>
+        <p:spPr>
+          <a:xfrm>
+            <a:off x="3566312" y="3739896"/>
+            <a:ext cx="5059375" cy="457200"/>
           </a:xfrm>
           <a:prstGeom prst="rect">
             <a:avLst/>
@@ -12514,42 +12788,53 @@
           <a:bodyPr wrap="square" lIns="0" tIns="0" rIns="0" bIns="0" rtlCol="0" anchor="ctr"/>
           <a:lstStyle/>
           <a:p>
-            <a:pPr marL="0" indent="0" algn="r">
-              <a:buNone/>
-            </a:pPr>
-            <a:r>
-              <a:rPr lang="en-US" sz="1400" i="1" dirty="0">
-                <a:solidFill>
-                  <a:srgbClr val="D23B4E"/>
-                </a:solidFill>
-                <a:latin typeface="Calibri" pitchFamily="34" charset="0"/>
-                <a:ea typeface="Calibri" pitchFamily="34" charset="-122"/>
-                <a:cs typeface="Calibri" pitchFamily="34" charset="-120"/>
-              </a:rPr>
-              <a:t>jede Origin erlaubt</a:t>
-            </a:r>
-            <a:endParaRPr lang="en-US" sz="1400" dirty="0"/>
-          </a:p>
-        </p:txBody>
-      </p:sp>
-      <p:sp>
-        <p:nvSpPr>
-          <p:cNvPr id="10" name="Shape 8"/>
-          <p:cNvSpPr/>
-          <p:nvPr/>
-        </p:nvSpPr>
-        <p:spPr>
-          <a:xfrm>
-            <a:off x="868680" y="3950208"/>
-            <a:ext cx="10454335" cy="0"/>
+            <a:pPr marL="0" indent="0">
+              <a:buNone/>
+            </a:pPr>
+            <a:r>
+              <a:rPr lang="en-US" sz="1450" dirty="0" err="1">
+                <a:solidFill>
+                  <a:srgbClr val="55606E"/>
+                </a:solidFill>
+                <a:latin typeface="Calibri" pitchFamily="34" charset="0"/>
+                <a:ea typeface="Calibri" pitchFamily="34" charset="-122"/>
+                <a:cs typeface="Calibri" pitchFamily="34" charset="-120"/>
+              </a:rPr>
+              <a:t>Fremde</a:t>
+            </a:r>
+            <a:r>
+              <a:rPr lang="en-US" sz="1450" dirty="0">
+                <a:solidFill>
+                  <a:srgbClr val="55606E"/>
+                </a:solidFill>
+                <a:latin typeface="Calibri" pitchFamily="34" charset="0"/>
+                <a:ea typeface="Calibri" pitchFamily="34" charset="-122"/>
+                <a:cs typeface="Calibri" pitchFamily="34" charset="-120"/>
+              </a:rPr>
+              <a:t> Seite liest die Antwort dank offenem CORS.</a:t>
+            </a:r>
+            <a:endParaRPr lang="en-US" sz="1450" dirty="0"/>
+          </a:p>
+        </p:txBody>
+      </p:sp>
+      <p:sp>
+        <p:nvSpPr>
+          <p:cNvPr id="13" name="Shape 11"/>
+          <p:cNvSpPr/>
+          <p:nvPr/>
+        </p:nvSpPr>
+        <p:spPr>
+          <a:xfrm>
+            <a:off x="1245489" y="4261104"/>
+            <a:ext cx="0" cy="256032"/>
           </a:xfrm>
           <a:prstGeom prst="line">
             <a:avLst/>
           </a:prstGeom>
           <a:noFill/>
-          <a:ln w="12700">
+          <a:ln w="15875">
             <a:solidFill>
-              <a:srgbClr val="E4E7EC"/>
+              <a:srgbClr val="D2D8DF"/>
             </a:solidFill>
             <a:prstDash val="solid"/>
           </a:ln>
@@ -12557,14 +12842,14 @@
       </p:sp>
       <p:sp>
         <p:nvSpPr>
-          <p:cNvPr id="11" name="Text 9"/>
-          <p:cNvSpPr/>
-          <p:nvPr/>
-        </p:nvSpPr>
-        <p:spPr>
-          <a:xfrm>
-            <a:off x="868680" y="4069080"/>
-            <a:ext cx="5943600" cy="411480"/>
+          <p:cNvPr id="14" name="Text 12"/>
+          <p:cNvSpPr/>
+          <p:nvPr/>
+        </p:nvSpPr>
+        <p:spPr>
+          <a:xfrm>
+            <a:off x="1080897" y="4581144"/>
+            <a:ext cx="640080" cy="457200"/>
           </a:xfrm>
           <a:prstGeom prst="rect">
             <a:avLst/>
@@ -12580,30 +12865,69 @@
               <a:buNone/>
             </a:pPr>
             <a:r>
-              <a:rPr lang="en-US" sz="1500" b="1" dirty="0">
+              <a:rPr lang="en-US" sz="2000" b="1" dirty="0">
+                <a:solidFill>
+                  <a:srgbClr val="9AA3AF"/>
+                </a:solidFill>
+                <a:latin typeface="Trebuchet MS" pitchFamily="34" charset="0"/>
+                <a:ea typeface="Trebuchet MS" pitchFamily="34" charset="-122"/>
+                <a:cs typeface="Trebuchet MS" pitchFamily="34" charset="-120"/>
+              </a:rPr>
+              <a:t>03</a:t>
+            </a:r>
+            <a:endParaRPr lang="en-US" sz="2000" dirty="0"/>
+          </a:p>
+        </p:txBody>
+      </p:sp>
+      <p:sp>
+        <p:nvSpPr>
+          <p:cNvPr id="15" name="Text 13"/>
+          <p:cNvSpPr/>
+          <p:nvPr/>
+        </p:nvSpPr>
+        <p:spPr>
+          <a:xfrm>
+            <a:off x="1883665" y="4581144"/>
+            <a:ext cx="1087755" cy="457200"/>
+          </a:xfrm>
+          <a:prstGeom prst="rect">
+            <a:avLst/>
+          </a:prstGeom>
+          <a:noFill/>
+          <a:ln/>
+        </p:spPr>
+        <p:txBody>
+          <a:bodyPr wrap="square" lIns="0" tIns="0" rIns="0" bIns="0" rtlCol="0" anchor="ctr"/>
+          <a:lstStyle/>
+          <a:p>
+            <a:pPr marL="0" indent="0" algn="ctr">
+              <a:buNone/>
+            </a:pPr>
+            <a:r>
+              <a:rPr lang="en-US" b="1" dirty="0">
                 <a:solidFill>
                   <a:srgbClr val="16181D"/>
                 </a:solidFill>
-                <a:latin typeface="Consolas" pitchFamily="34" charset="0"/>
-                <a:ea typeface="Consolas" pitchFamily="34" charset="-122"/>
-                <a:cs typeface="Consolas" pitchFamily="34" charset="-120"/>
-              </a:rPr>
-              <a:t>implicitFlowEnabled</a:t>
-            </a:r>
-            <a:endParaRPr lang="en-US" sz="1500" dirty="0"/>
-          </a:p>
-        </p:txBody>
-      </p:sp>
-      <p:sp>
-        <p:nvSpPr>
-          <p:cNvPr id="12" name="Text 10"/>
-          <p:cNvSpPr/>
-          <p:nvPr/>
-        </p:nvSpPr>
-        <p:spPr>
-          <a:xfrm>
-            <a:off x="6751015" y="4069080"/>
-            <a:ext cx="4572000" cy="411480"/>
+                <a:latin typeface="Trebuchet MS" pitchFamily="34" charset="0"/>
+                <a:ea typeface="Trebuchet MS" pitchFamily="34" charset="-122"/>
+                <a:cs typeface="Trebuchet MS" pitchFamily="34" charset="-120"/>
+              </a:rPr>
+              <a:t>Leaking</a:t>
+            </a:r>
+            <a:endParaRPr lang="en-US" sz="1800" dirty="0"/>
+          </a:p>
+        </p:txBody>
+      </p:sp>
+      <p:sp>
+        <p:nvSpPr>
+          <p:cNvPr id="16" name="Text 14"/>
+          <p:cNvSpPr/>
+          <p:nvPr/>
+        </p:nvSpPr>
+        <p:spPr>
+          <a:xfrm>
+            <a:off x="3566312" y="4581144"/>
+            <a:ext cx="5059375" cy="457200"/>
           </a:xfrm>
           <a:prstGeom prst="rect">
             <a:avLst/>
@@ -12615,42 +12939,152 @@
           <a:bodyPr wrap="square" lIns="0" tIns="0" rIns="0" bIns="0" rtlCol="0" anchor="ctr"/>
           <a:lstStyle/>
           <a:p>
-            <a:pPr marL="0" indent="0" algn="r">
-              <a:buNone/>
-            </a:pPr>
-            <a:r>
-              <a:rPr lang="en-US" sz="1400" i="1" dirty="0">
-                <a:solidFill>
-                  <a:srgbClr val="D23B4E"/>
-                </a:solidFill>
-                <a:latin typeface="Calibri" pitchFamily="34" charset="0"/>
-                <a:ea typeface="Calibri" pitchFamily="34" charset="-122"/>
-                <a:cs typeface="Calibri" pitchFamily="34" charset="-120"/>
-              </a:rPr>
-              <a:t>veralteter Flow aktiv</a:t>
-            </a:r>
-            <a:endParaRPr lang="en-US" sz="1400" dirty="0"/>
-          </a:p>
-        </p:txBody>
-      </p:sp>
-      <p:sp>
-        <p:nvSpPr>
-          <p:cNvPr id="13" name="Shape 11"/>
-          <p:cNvSpPr/>
-          <p:nvPr/>
-        </p:nvSpPr>
-        <p:spPr>
-          <a:xfrm>
-            <a:off x="868680" y="4608576"/>
-            <a:ext cx="10454335" cy="0"/>
+            <a:pPr marL="0" indent="0">
+              <a:buNone/>
+            </a:pPr>
+            <a:r>
+              <a:rPr lang="en-US" sz="1450" dirty="0">
+                <a:solidFill>
+                  <a:srgbClr val="55606E"/>
+                </a:solidFill>
+                <a:latin typeface="Calibri" pitchFamily="34" charset="0"/>
+                <a:ea typeface="Calibri" pitchFamily="34" charset="-122"/>
+                <a:cs typeface="Calibri" pitchFamily="34" charset="-120"/>
+              </a:rPr>
+              <a:t>Das </a:t>
+            </a:r>
+            <a:r>
+              <a:rPr lang="en-US" sz="1450" dirty="0" err="1">
+                <a:solidFill>
+                  <a:srgbClr val="55606E"/>
+                </a:solidFill>
+                <a:latin typeface="Calibri" pitchFamily="34" charset="0"/>
+                <a:ea typeface="Calibri" pitchFamily="34" charset="-122"/>
+                <a:cs typeface="Calibri" pitchFamily="34" charset="-120"/>
+              </a:rPr>
+              <a:t>gültige</a:t>
+            </a:r>
+            <a:r>
+              <a:rPr lang="en-US" sz="1450" dirty="0">
+                <a:solidFill>
+                  <a:srgbClr val="55606E"/>
+                </a:solidFill>
+                <a:latin typeface="Calibri" pitchFamily="34" charset="0"/>
+                <a:ea typeface="Calibri" pitchFamily="34" charset="-122"/>
+                <a:cs typeface="Calibri" pitchFamily="34" charset="-120"/>
+              </a:rPr>
+              <a:t> Bearer-Token </a:t>
+            </a:r>
+            <a:r>
+              <a:rPr lang="en-US" sz="1450" dirty="0" err="1">
+                <a:solidFill>
+                  <a:srgbClr val="55606E"/>
+                </a:solidFill>
+                <a:latin typeface="Calibri" pitchFamily="34" charset="0"/>
+                <a:ea typeface="Calibri" pitchFamily="34" charset="-122"/>
+                <a:cs typeface="Calibri" pitchFamily="34" charset="-120"/>
+              </a:rPr>
+              <a:t>wird</a:t>
+            </a:r>
+            <a:r>
+              <a:rPr lang="en-US" sz="1450" dirty="0">
+                <a:solidFill>
+                  <a:srgbClr val="55606E"/>
+                </a:solidFill>
+                <a:latin typeface="Calibri" pitchFamily="34" charset="0"/>
+                <a:ea typeface="Calibri" pitchFamily="34" charset="-122"/>
+                <a:cs typeface="Calibri" pitchFamily="34" charset="-120"/>
+              </a:rPr>
+              <a:t> </a:t>
+            </a:r>
+            <a:r>
+              <a:rPr lang="en-US" sz="1450" dirty="0" err="1">
+                <a:solidFill>
+                  <a:srgbClr val="55606E"/>
+                </a:solidFill>
+                <a:latin typeface="Calibri" pitchFamily="34" charset="0"/>
+                <a:ea typeface="Calibri" pitchFamily="34" charset="-122"/>
+                <a:cs typeface="Calibri" pitchFamily="34" charset="-120"/>
+              </a:rPr>
+              <a:t>im</a:t>
+            </a:r>
+            <a:r>
+              <a:rPr lang="en-US" sz="1450" dirty="0">
+                <a:solidFill>
+                  <a:srgbClr val="55606E"/>
+                </a:solidFill>
+                <a:latin typeface="Calibri" pitchFamily="34" charset="0"/>
+                <a:ea typeface="Calibri" pitchFamily="34" charset="-122"/>
+                <a:cs typeface="Calibri" pitchFamily="34" charset="-120"/>
+              </a:rPr>
+              <a:t> </a:t>
+            </a:r>
+            <a:r>
+              <a:rPr lang="en-US" sz="1450" dirty="0" err="1">
+                <a:solidFill>
+                  <a:srgbClr val="55606E"/>
+                </a:solidFill>
+                <a:latin typeface="Calibri" pitchFamily="34" charset="0"/>
+                <a:ea typeface="Calibri" pitchFamily="34" charset="-122"/>
+                <a:cs typeface="Calibri" pitchFamily="34" charset="-120"/>
+              </a:rPr>
+              <a:t>Klartext</a:t>
+            </a:r>
+            <a:r>
+              <a:rPr lang="en-US" sz="1450" dirty="0">
+                <a:solidFill>
+                  <a:srgbClr val="55606E"/>
+                </a:solidFill>
+                <a:latin typeface="Calibri" pitchFamily="34" charset="0"/>
+                <a:ea typeface="Calibri" pitchFamily="34" charset="-122"/>
+                <a:cs typeface="Calibri" pitchFamily="34" charset="-120"/>
+              </a:rPr>
+              <a:t> </a:t>
+            </a:r>
+            <a:r>
+              <a:rPr lang="en-US" sz="1450" dirty="0" err="1">
+                <a:solidFill>
+                  <a:srgbClr val="55606E"/>
+                </a:solidFill>
+                <a:latin typeface="Calibri" pitchFamily="34" charset="0"/>
+                <a:ea typeface="Calibri" pitchFamily="34" charset="-122"/>
+                <a:cs typeface="Calibri" pitchFamily="34" charset="-120"/>
+              </a:rPr>
+              <a:t>ausgelesen</a:t>
+            </a:r>
+            <a:r>
+              <a:rPr lang="en-US" sz="1450" dirty="0">
+                <a:solidFill>
+                  <a:srgbClr val="55606E"/>
+                </a:solidFill>
+                <a:latin typeface="Calibri" pitchFamily="34" charset="0"/>
+                <a:ea typeface="Calibri" pitchFamily="34" charset="-122"/>
+                <a:cs typeface="Calibri" pitchFamily="34" charset="-120"/>
+              </a:rPr>
+              <a:t>.</a:t>
+            </a:r>
+            <a:endParaRPr lang="en-US" sz="1450" dirty="0"/>
+          </a:p>
+        </p:txBody>
+      </p:sp>
+      <p:sp>
+        <p:nvSpPr>
+          <p:cNvPr id="17" name="Shape 15"/>
+          <p:cNvSpPr/>
+          <p:nvPr/>
+        </p:nvSpPr>
+        <p:spPr>
+          <a:xfrm>
+            <a:off x="1245489" y="5102352"/>
+            <a:ext cx="0" cy="256032"/>
           </a:xfrm>
           <a:prstGeom prst="line">
             <a:avLst/>
           </a:prstGeom>
           <a:noFill/>
-          <a:ln w="12700">
+          <a:ln w="15875">
             <a:solidFill>
-              <a:srgbClr val="E4E7EC"/>
+              <a:srgbClr val="D2D8DF"/>
             </a:solidFill>
             <a:prstDash val="solid"/>
           </a:ln>
@@ -12658,14 +13092,14 @@
       </p:sp>
       <p:sp>
         <p:nvSpPr>
-          <p:cNvPr id="14" name="Text 12"/>
-          <p:cNvSpPr/>
-          <p:nvPr/>
-        </p:nvSpPr>
-        <p:spPr>
-          <a:xfrm>
-            <a:off x="868680" y="4727448"/>
-            <a:ext cx="5943600" cy="411480"/>
+          <p:cNvPr id="18" name="Text 16"/>
+          <p:cNvSpPr/>
+          <p:nvPr/>
+        </p:nvSpPr>
+        <p:spPr>
+          <a:xfrm>
+            <a:off x="1080897" y="5422392"/>
+            <a:ext cx="640080" cy="457200"/>
           </a:xfrm>
           <a:prstGeom prst="rect">
             <a:avLst/>
@@ -12681,30 +13115,69 @@
               <a:buNone/>
             </a:pPr>
             <a:r>
-              <a:rPr lang="en-US" sz="1500" b="1" dirty="0">
+              <a:rPr lang="en-US" sz="2000" b="1" dirty="0">
+                <a:solidFill>
+                  <a:srgbClr val="D23B4E"/>
+                </a:solidFill>
+                <a:latin typeface="Trebuchet MS" pitchFamily="34" charset="0"/>
+                <a:ea typeface="Trebuchet MS" pitchFamily="34" charset="-122"/>
+                <a:cs typeface="Trebuchet MS" pitchFamily="34" charset="-120"/>
+              </a:rPr>
+              <a:t>04</a:t>
+            </a:r>
+            <a:endParaRPr lang="en-US" sz="2000" dirty="0"/>
+          </a:p>
+        </p:txBody>
+      </p:sp>
+      <p:sp>
+        <p:nvSpPr>
+          <p:cNvPr id="19" name="Text 17"/>
+          <p:cNvSpPr/>
+          <p:nvPr/>
+        </p:nvSpPr>
+        <p:spPr>
+          <a:xfrm>
+            <a:off x="1883665" y="5422392"/>
+            <a:ext cx="1087755" cy="457200"/>
+          </a:xfrm>
+          <a:prstGeom prst="rect">
+            <a:avLst/>
+          </a:prstGeom>
+          <a:noFill/>
+          <a:ln/>
+        </p:spPr>
+        <p:txBody>
+          <a:bodyPr wrap="square" lIns="0" tIns="0" rIns="0" bIns="0" rtlCol="0" anchor="ctr"/>
+          <a:lstStyle/>
+          <a:p>
+            <a:pPr marL="0" indent="0" algn="ctr">
+              <a:buNone/>
+            </a:pPr>
+            <a:r>
+              <a:rPr lang="en-US" sz="1800" b="1" dirty="0">
                 <a:solidFill>
                   <a:srgbClr val="16181D"/>
                 </a:solidFill>
-                <a:latin typeface="Consolas" pitchFamily="34" charset="0"/>
-                <a:ea typeface="Consolas" pitchFamily="34" charset="-122"/>
-                <a:cs typeface="Consolas" pitchFamily="34" charset="-120"/>
-              </a:rPr>
-              <a:t>directAccessGrants</a:t>
-            </a:r>
-            <a:endParaRPr lang="en-US" sz="1500" dirty="0"/>
-          </a:p>
-        </p:txBody>
-      </p:sp>
-      <p:sp>
-        <p:nvSpPr>
-          <p:cNvPr id="15" name="Text 13"/>
-          <p:cNvSpPr/>
-          <p:nvPr/>
-        </p:nvSpPr>
-        <p:spPr>
-          <a:xfrm>
-            <a:off x="6751015" y="4727448"/>
-            <a:ext cx="4572000" cy="411480"/>
+                <a:latin typeface="Trebuchet MS" pitchFamily="34" charset="0"/>
+                <a:ea typeface="Trebuchet MS" pitchFamily="34" charset="-122"/>
+                <a:cs typeface="Trebuchet MS" pitchFamily="34" charset="-120"/>
+              </a:rPr>
+              <a:t>Takeover</a:t>
+            </a:r>
+            <a:endParaRPr lang="en-US" sz="1800" dirty="0"/>
+          </a:p>
+        </p:txBody>
+      </p:sp>
+      <p:sp>
+        <p:nvSpPr>
+          <p:cNvPr id="20" name="Text 18"/>
+          <p:cNvSpPr/>
+          <p:nvPr/>
+        </p:nvSpPr>
+        <p:spPr>
+          <a:xfrm>
+            <a:off x="3566312" y="5422392"/>
+            <a:ext cx="5059375" cy="457200"/>
           </a:xfrm>
           <a:prstGeom prst="rect">
             <a:avLst/>
@@ -12716,74 +13189,35 @@
           <a:bodyPr wrap="square" lIns="0" tIns="0" rIns="0" bIns="0" rtlCol="0" anchor="ctr"/>
           <a:lstStyle/>
           <a:p>
-            <a:pPr marL="0" indent="0" algn="r">
-              <a:buNone/>
-            </a:pPr>
-            <a:r>
-              <a:rPr lang="en-US" sz="1400" i="1" dirty="0">
-                <a:solidFill>
-                  <a:srgbClr val="D23B4E"/>
-                </a:solidFill>
-                <a:latin typeface="Calibri" pitchFamily="34" charset="0"/>
-                <a:ea typeface="Calibri" pitchFamily="34" charset="-122"/>
-                <a:cs typeface="Calibri" pitchFamily="34" charset="-120"/>
-              </a:rPr>
-              <a:t>Passwort-Grant aktiv</a:t>
-            </a:r>
-            <a:endParaRPr lang="en-US" sz="1400" dirty="0"/>
-          </a:p>
-        </p:txBody>
-      </p:sp>
-      <p:sp>
-        <p:nvSpPr>
-          <p:cNvPr id="16" name="Text 14"/>
-          <p:cNvSpPr/>
-          <p:nvPr/>
-        </p:nvSpPr>
-        <p:spPr>
-          <a:xfrm>
-            <a:off x="868680" y="5358384"/>
-            <a:ext cx="10241280" cy="457200"/>
-          </a:xfrm>
-          <a:prstGeom prst="rect">
-            <a:avLst/>
-          </a:prstGeom>
-          <a:noFill/>
-          <a:ln/>
-        </p:spPr>
-        <p:txBody>
-          <a:bodyPr wrap="square" lIns="0" tIns="0" rIns="0" bIns="0" rtlCol="0" anchor="ctr"/>
-          <a:lstStyle/>
-          <a:p>
-            <a:pPr marL="0" indent="0">
-              <a:buNone/>
-            </a:pPr>
-            <a:r>
-              <a:rPr lang="en-US" sz="1350" i="1" dirty="0">
-                <a:solidFill>
-                  <a:srgbClr val="9AA3AF"/>
-                </a:solidFill>
-                <a:latin typeface="Calibri" pitchFamily="34" charset="0"/>
-                <a:ea typeface="Calibri" pitchFamily="34" charset="-122"/>
-                <a:cs typeface="Calibri" pitchFamily="34" charset="-120"/>
-              </a:rPr>
-              <a:t>Veraltete Flows und eine Wildcard bei den Web-Origins - </a:t>
-            </a:r>
-            <a:r>
-              <a:rPr lang="en-US" sz="1350" i="1" dirty="0" err="1">
-                <a:solidFill>
-                  <a:srgbClr val="9AA3AF"/>
-                </a:solidFill>
-                <a:latin typeface="Calibri" pitchFamily="34" charset="0"/>
-                <a:ea typeface="Calibri" pitchFamily="34" charset="-122"/>
-                <a:cs typeface="Calibri" pitchFamily="34" charset="-120"/>
-              </a:rPr>
-              <a:t>zu</a:t>
-            </a:r>
-            <a:r>
-              <a:rPr lang="en-US" sz="1350" i="1" dirty="0">
-                <a:solidFill>
-                  <a:srgbClr val="9AA3AF"/>
+            <a:pPr marL="0" indent="0">
+              <a:buNone/>
+            </a:pPr>
+            <a:r>
+              <a:rPr lang="en-US" sz="1450" dirty="0">
+                <a:solidFill>
+                  <a:srgbClr val="55606E"/>
+                </a:solidFill>
+                <a:latin typeface="Calibri" pitchFamily="34" charset="0"/>
+                <a:ea typeface="Calibri" pitchFamily="34" charset="-122"/>
+                <a:cs typeface="Calibri" pitchFamily="34" charset="-120"/>
+              </a:rPr>
+              <a:t>Angreifer </a:t>
+            </a:r>
+            <a:r>
+              <a:rPr lang="en-US" sz="1450" dirty="0" err="1">
+                <a:solidFill>
+                  <a:srgbClr val="55606E"/>
+                </a:solidFill>
+                <a:latin typeface="Calibri" pitchFamily="34" charset="0"/>
+                <a:ea typeface="Calibri" pitchFamily="34" charset="-122"/>
+                <a:cs typeface="Calibri" pitchFamily="34" charset="-120"/>
+              </a:rPr>
+              <a:t>agiert</a:t>
+            </a:r>
+            <a:r>
+              <a:rPr lang="en-US" sz="1450" dirty="0">
+                <a:solidFill>
+                  <a:srgbClr val="55606E"/>
                 </a:solidFill>
                 <a:latin typeface="Calibri" pitchFamily="34" charset="0"/>
                 <a:ea typeface="Calibri" pitchFamily="34" charset="-122"/>
@@ -12792,37 +13226,37 @@
               <a:t> </a:t>
             </a:r>
             <a:r>
-              <a:rPr lang="en-US" sz="1350" i="1" dirty="0" err="1">
-                <a:solidFill>
-                  <a:srgbClr val="9AA3AF"/>
-                </a:solidFill>
-                <a:latin typeface="Calibri" pitchFamily="34" charset="0"/>
-                <a:ea typeface="Calibri" pitchFamily="34" charset="-122"/>
-                <a:cs typeface="Calibri" pitchFamily="34" charset="-120"/>
-              </a:rPr>
-              <a:t>breit</a:t>
-            </a:r>
-            <a:r>
-              <a:rPr lang="en-US" sz="1350" i="1" dirty="0">
-                <a:solidFill>
-                  <a:srgbClr val="9AA3AF"/>
-                </a:solidFill>
-                <a:latin typeface="Calibri" pitchFamily="34" charset="0"/>
-                <a:ea typeface="Calibri" pitchFamily="34" charset="-122"/>
-                <a:cs typeface="Calibri" pitchFamily="34" charset="-120"/>
-              </a:rPr>
-              <a:t> für einen SPA-Client.</a:t>
-            </a:r>
-            <a:endParaRPr lang="en-US" sz="1350" dirty="0"/>
-          </a:p>
-        </p:txBody>
-      </p:sp>
-      <p:sp>
-        <p:nvSpPr>
-          <p:cNvPr id="17" name="Text 1">
+              <a:rPr lang="en-US" sz="1450" dirty="0" err="1">
+                <a:solidFill>
+                  <a:srgbClr val="55606E"/>
+                </a:solidFill>
+                <a:latin typeface="Calibri" pitchFamily="34" charset="0"/>
+                <a:ea typeface="Calibri" pitchFamily="34" charset="-122"/>
+                <a:cs typeface="Calibri" pitchFamily="34" charset="-120"/>
+              </a:rPr>
+              <a:t>vollständig</a:t>
+            </a:r>
+            <a:r>
+              <a:rPr lang="en-US" sz="1450" dirty="0">
+                <a:solidFill>
+                  <a:srgbClr val="55606E"/>
+                </a:solidFill>
+                <a:latin typeface="Calibri" pitchFamily="34" charset="0"/>
+                <a:ea typeface="Calibri" pitchFamily="34" charset="-122"/>
+                <a:cs typeface="Calibri" pitchFamily="34" charset="-120"/>
+              </a:rPr>
+              <a:t> als der Nutzer.</a:t>
+            </a:r>
+            <a:endParaRPr lang="en-US" sz="1450" dirty="0"/>
+          </a:p>
+        </p:txBody>
+      </p:sp>
+      <p:sp>
+        <p:nvSpPr>
+          <p:cNvPr id="21" name="Text 1">
             <a:extLst>
               <a:ext uri="{FF2B5EF4-FFF2-40B4-BE49-F238E27FC236}">
-                <a16:creationId xmlns:a16="http://schemas.microsoft.com/office/drawing/2014/main" id="{E4CBF162-AD41-8BBF-E6AF-09E8ABA6A2D9}"/>
+                <a16:creationId xmlns:a16="http://schemas.microsoft.com/office/drawing/2014/main" id="{56F96ED9-BE3A-4178-B271-B9ED9DFDF13F}"/>
               </a:ext>
             </a:extLst>
           </p:cNvPr>
@@ -12867,13 +13301,13 @@
   <p:clrMapOvr>
     <a:masterClrMapping/>
   </p:clrMapOvr>
-  <mc:AlternateContent xmlns:mc="http://schemas.openxmlformats.org/markup-compatibility/2006" xmlns:p14="http://schemas.microsoft.com/office/powerpoint/2010/main">
-    <mc:Choice Requires="p14">
+  <mc:AlternateContent xmlns:mc="http://schemas.openxmlformats.org/markup-compatibility/2006">
+    <mc:Choice xmlns:p14="http://schemas.microsoft.com/office/powerpoint/2010/main" Requires="p14">
       <p:transition spd="med" p14:dur="700">
         <p:fade/>
       </p:transition>
     </mc:Choice>
-    <mc:Fallback xmlns="">
+    <mc:Fallback>
       <p:transition spd="med">
         <p:fade/>
       </p:transition>
@@ -12932,7 +13366,7 @@
                 <a:ea typeface="Calibri" pitchFamily="34" charset="-122"/>
                 <a:cs typeface="Calibri" pitchFamily="34" charset="-120"/>
               </a:rPr>
-              <a:t>KRITISCHES RISIKO · ACCOUNT-TAKEOVER</a:t>
+              <a:t>FAZIT · ARCHITEKTUR</a:t>
             </a:r>
             <a:endParaRPr lang="en-US" sz="1050" dirty="0"/>
           </a:p>
@@ -12947,7 +13381,7 @@
         <p:spPr>
           <a:xfrm>
             <a:off x="868680" y="1051560"/>
-            <a:ext cx="10424160" cy="777240"/>
+            <a:ext cx="10607040" cy="777240"/>
           </a:xfrm>
           <a:prstGeom prst="rect">
             <a:avLst/>
@@ -12963,7 +13397,7 @@
               <a:buNone/>
             </a:pPr>
             <a:r>
-              <a:rPr lang="en-US" sz="3600" b="1" dirty="0">
+              <a:rPr lang="en-US" sz="3400" b="1" dirty="0">
                 <a:solidFill>
                   <a:srgbClr val="16181D"/>
                 </a:solidFill>
@@ -12971,259 +13405,21 @@
                 <a:ea typeface="Trebuchet MS" pitchFamily="34" charset="-122"/>
                 <a:cs typeface="Trebuchet MS" pitchFamily="34" charset="-120"/>
               </a:rPr>
-              <a:t>Token-Diebstahl als Fehlerkette</a:t>
-            </a:r>
-            <a:endParaRPr lang="en-US" sz="3600" dirty="0"/>
-          </a:p>
-        </p:txBody>
-      </p:sp>
-      <p:sp>
-        <p:nvSpPr>
-          <p:cNvPr id="5" name="Text 3"/>
-          <p:cNvSpPr/>
-          <p:nvPr/>
-        </p:nvSpPr>
-        <p:spPr>
-          <a:xfrm>
-            <a:off x="868680" y="1874520"/>
-            <a:ext cx="10424160" cy="640080"/>
-          </a:xfrm>
-          <a:prstGeom prst="rect">
-            <a:avLst/>
-          </a:prstGeom>
-          <a:noFill/>
-          <a:ln/>
-        </p:spPr>
-        <p:txBody>
-          <a:bodyPr wrap="square" lIns="0" tIns="0" rIns="0" bIns="0" rtlCol="0" anchor="ctr"/>
-          <a:lstStyle/>
-          <a:p>
-            <a:pPr marL="0" indent="0">
-              <a:buNone/>
-            </a:pPr>
-            <a:r>
-              <a:rPr lang="en-US" sz="1650" dirty="0" err="1">
-                <a:solidFill>
-                  <a:srgbClr val="55606E"/>
-                </a:solidFill>
-                <a:latin typeface="Calibri" pitchFamily="34" charset="0"/>
-                <a:ea typeface="Calibri" pitchFamily="34" charset="-122"/>
-                <a:cs typeface="Calibri" pitchFamily="34" charset="-120"/>
-              </a:rPr>
-              <a:t>Über</a:t>
-            </a:r>
-            <a:r>
-              <a:rPr lang="en-US" sz="1650" dirty="0">
-                <a:solidFill>
-                  <a:srgbClr val="55606E"/>
-                </a:solidFill>
-                <a:latin typeface="Calibri" pitchFamily="34" charset="0"/>
-                <a:ea typeface="Calibri" pitchFamily="34" charset="-122"/>
-                <a:cs typeface="Calibri" pitchFamily="34" charset="-120"/>
-              </a:rPr>
-              <a:t> </a:t>
-            </a:r>
-            <a:r>
-              <a:rPr lang="en-US" sz="1650" dirty="0" err="1">
-                <a:solidFill>
-                  <a:srgbClr val="55606E"/>
-                </a:solidFill>
-                <a:latin typeface="Calibri" pitchFamily="34" charset="0"/>
-                <a:ea typeface="Calibri" pitchFamily="34" charset="-122"/>
-                <a:cs typeface="Calibri" pitchFamily="34" charset="-120"/>
-              </a:rPr>
-              <a:t>dieselbe</a:t>
-            </a:r>
-            <a:r>
-              <a:rPr lang="en-US" sz="1650" dirty="0">
-                <a:solidFill>
-                  <a:srgbClr val="55606E"/>
-                </a:solidFill>
-                <a:latin typeface="Calibri" pitchFamily="34" charset="0"/>
-                <a:ea typeface="Calibri" pitchFamily="34" charset="-122"/>
-                <a:cs typeface="Calibri" pitchFamily="34" charset="-120"/>
-              </a:rPr>
-              <a:t> CORS-</a:t>
-            </a:r>
-            <a:r>
-              <a:rPr lang="en-US" sz="1650" dirty="0" err="1">
-                <a:solidFill>
-                  <a:srgbClr val="55606E"/>
-                </a:solidFill>
-                <a:latin typeface="Calibri" pitchFamily="34" charset="0"/>
-                <a:ea typeface="Calibri" pitchFamily="34" charset="-122"/>
-                <a:cs typeface="Calibri" pitchFamily="34" charset="-120"/>
-              </a:rPr>
-              <a:t>Lücke</a:t>
-            </a:r>
-            <a:r>
-              <a:rPr lang="en-US" sz="1650" dirty="0">
-                <a:solidFill>
-                  <a:srgbClr val="55606E"/>
-                </a:solidFill>
-                <a:latin typeface="Calibri" pitchFamily="34" charset="0"/>
-                <a:ea typeface="Calibri" pitchFamily="34" charset="-122"/>
-                <a:cs typeface="Calibri" pitchFamily="34" charset="-120"/>
-              </a:rPr>
-              <a:t> an der API </a:t>
-            </a:r>
-            <a:r>
-              <a:rPr lang="en-US" sz="1650" dirty="0" err="1">
-                <a:solidFill>
-                  <a:srgbClr val="55606E"/>
-                </a:solidFill>
-                <a:latin typeface="Calibri" pitchFamily="34" charset="0"/>
-                <a:ea typeface="Calibri" pitchFamily="34" charset="-122"/>
-                <a:cs typeface="Calibri" pitchFamily="34" charset="-120"/>
-              </a:rPr>
-              <a:t>wird</a:t>
-            </a:r>
-            <a:r>
-              <a:rPr lang="en-US" sz="1650" dirty="0">
-                <a:solidFill>
-                  <a:srgbClr val="55606E"/>
-                </a:solidFill>
-                <a:latin typeface="Calibri" pitchFamily="34" charset="0"/>
-                <a:ea typeface="Calibri" pitchFamily="34" charset="-122"/>
-                <a:cs typeface="Calibri" pitchFamily="34" charset="-120"/>
-              </a:rPr>
-              <a:t> aus Mitlesen </a:t>
-            </a:r>
-            <a:r>
-              <a:rPr lang="en-US" sz="1650" dirty="0" err="1">
-                <a:solidFill>
-                  <a:srgbClr val="55606E"/>
-                </a:solidFill>
-                <a:latin typeface="Calibri" pitchFamily="34" charset="0"/>
-                <a:ea typeface="Calibri" pitchFamily="34" charset="-122"/>
-                <a:cs typeface="Calibri" pitchFamily="34" charset="-120"/>
-              </a:rPr>
-              <a:t>eine</a:t>
-            </a:r>
-            <a:r>
-              <a:rPr lang="en-US" sz="1650" dirty="0">
-                <a:solidFill>
-                  <a:srgbClr val="55606E"/>
-                </a:solidFill>
-                <a:latin typeface="Calibri" pitchFamily="34" charset="0"/>
-                <a:ea typeface="Calibri" pitchFamily="34" charset="-122"/>
-                <a:cs typeface="Calibri" pitchFamily="34" charset="-120"/>
-              </a:rPr>
-              <a:t> </a:t>
-            </a:r>
-            <a:r>
-              <a:rPr lang="en-US" sz="1650" dirty="0" err="1">
-                <a:solidFill>
-                  <a:srgbClr val="55606E"/>
-                </a:solidFill>
-                <a:latin typeface="Calibri" pitchFamily="34" charset="0"/>
-                <a:ea typeface="Calibri" pitchFamily="34" charset="-122"/>
-                <a:cs typeface="Calibri" pitchFamily="34" charset="-120"/>
-              </a:rPr>
-              <a:t>vollständige</a:t>
-            </a:r>
-            <a:r>
-              <a:rPr lang="en-US" sz="1650" dirty="0">
-                <a:solidFill>
-                  <a:srgbClr val="55606E"/>
-                </a:solidFill>
-                <a:latin typeface="Calibri" pitchFamily="34" charset="0"/>
-                <a:ea typeface="Calibri" pitchFamily="34" charset="-122"/>
-                <a:cs typeface="Calibri" pitchFamily="34" charset="-120"/>
-              </a:rPr>
-              <a:t> </a:t>
-            </a:r>
-            <a:r>
-              <a:rPr lang="en-US" sz="1650" dirty="0" err="1">
-                <a:solidFill>
-                  <a:srgbClr val="55606E"/>
-                </a:solidFill>
-                <a:latin typeface="Calibri" pitchFamily="34" charset="0"/>
-                <a:ea typeface="Calibri" pitchFamily="34" charset="-122"/>
-                <a:cs typeface="Calibri" pitchFamily="34" charset="-120"/>
-              </a:rPr>
-              <a:t>Identitätsübernahme</a:t>
-            </a:r>
-            <a:r>
-              <a:rPr lang="en-US" sz="1650" dirty="0">
-                <a:solidFill>
-                  <a:srgbClr val="55606E"/>
-                </a:solidFill>
-                <a:latin typeface="Calibri" pitchFamily="34" charset="0"/>
-                <a:ea typeface="Calibri" pitchFamily="34" charset="-122"/>
-                <a:cs typeface="Calibri" pitchFamily="34" charset="-120"/>
-              </a:rPr>
-              <a:t>.</a:t>
-            </a:r>
-            <a:endParaRPr lang="en-US" sz="1650" dirty="0"/>
-          </a:p>
-        </p:txBody>
-      </p:sp>
-      <p:sp>
-        <p:nvSpPr>
-          <p:cNvPr id="6" name="Text 4"/>
-          <p:cNvSpPr/>
-          <p:nvPr/>
-        </p:nvSpPr>
-        <p:spPr>
-          <a:xfrm>
-            <a:off x="1080897" y="2898648"/>
-            <a:ext cx="640080" cy="457200"/>
-          </a:xfrm>
-          <a:prstGeom prst="rect">
-            <a:avLst/>
-          </a:prstGeom>
-          <a:noFill/>
-          <a:ln/>
-        </p:spPr>
-        <p:txBody>
-          <a:bodyPr wrap="square" lIns="0" tIns="0" rIns="0" bIns="0" rtlCol="0" anchor="ctr"/>
-          <a:lstStyle/>
-          <a:p>
-            <a:pPr marL="0" indent="0">
-              <a:buNone/>
-            </a:pPr>
-            <a:r>
-              <a:rPr lang="en-US" sz="2000" b="1" dirty="0">
-                <a:solidFill>
-                  <a:srgbClr val="9AA3AF"/>
+              <a:t>Das </a:t>
+            </a:r>
+            <a:r>
+              <a:rPr lang="en-US" sz="3400" b="1" dirty="0" err="1">
+                <a:solidFill>
+                  <a:srgbClr val="16181D"/>
                 </a:solidFill>
                 <a:latin typeface="Trebuchet MS" pitchFamily="34" charset="0"/>
                 <a:ea typeface="Trebuchet MS" pitchFamily="34" charset="-122"/>
                 <a:cs typeface="Trebuchet MS" pitchFamily="34" charset="-120"/>
               </a:rPr>
-              <a:t>01</a:t>
-            </a:r>
-            <a:endParaRPr lang="en-US" sz="2000" dirty="0"/>
-          </a:p>
-        </p:txBody>
-      </p:sp>
-      <p:sp>
-        <p:nvSpPr>
-          <p:cNvPr id="7" name="Text 5"/>
-          <p:cNvSpPr/>
-          <p:nvPr/>
-        </p:nvSpPr>
-        <p:spPr>
-          <a:xfrm>
-            <a:off x="1883665" y="2898648"/>
-            <a:ext cx="1087755" cy="457200"/>
-          </a:xfrm>
-          <a:prstGeom prst="rect">
-            <a:avLst/>
-          </a:prstGeom>
-          <a:noFill/>
-          <a:ln/>
-        </p:spPr>
-        <p:txBody>
-          <a:bodyPr wrap="square" lIns="0" tIns="0" rIns="0" bIns="0" rtlCol="0" anchor="ctr"/>
-          <a:lstStyle/>
-          <a:p>
-            <a:pPr marL="0" indent="0" algn="ctr">
-              <a:buNone/>
-            </a:pPr>
-            <a:r>
-              <a:rPr lang="en-US" sz="1800" b="1" dirty="0">
+              <a:t>Zusammenspiel</a:t>
+            </a:r>
+            <a:r>
+              <a:rPr lang="en-US" sz="3400" b="1" dirty="0">
                 <a:solidFill>
                   <a:srgbClr val="16181D"/>
                 </a:solidFill>
@@ -13231,22 +13427,33 @@
                 <a:ea typeface="Trebuchet MS" pitchFamily="34" charset="-122"/>
                 <a:cs typeface="Trebuchet MS" pitchFamily="34" charset="-120"/>
               </a:rPr>
-              <a:t>Login</a:t>
-            </a:r>
-            <a:endParaRPr lang="en-US" sz="1800" dirty="0"/>
-          </a:p>
-        </p:txBody>
-      </p:sp>
-      <p:sp>
-        <p:nvSpPr>
-          <p:cNvPr id="8" name="Text 6"/>
-          <p:cNvSpPr/>
-          <p:nvPr/>
-        </p:nvSpPr>
-        <p:spPr>
-          <a:xfrm>
-            <a:off x="3566312" y="2898648"/>
-            <a:ext cx="5059375" cy="457200"/>
+              <a:t> der </a:t>
+            </a:r>
+            <a:r>
+              <a:rPr lang="en-US" sz="3400" b="1" dirty="0" err="1">
+                <a:solidFill>
+                  <a:srgbClr val="16181D"/>
+                </a:solidFill>
+                <a:latin typeface="Trebuchet MS" pitchFamily="34" charset="0"/>
+                <a:ea typeface="Trebuchet MS" pitchFamily="34" charset="-122"/>
+                <a:cs typeface="Trebuchet MS" pitchFamily="34" charset="-120"/>
+              </a:rPr>
+              <a:t>Schwachstellen</a:t>
+            </a:r>
+            <a:endParaRPr lang="en-US" sz="3400" dirty="0"/>
+          </a:p>
+        </p:txBody>
+      </p:sp>
+      <p:sp>
+        <p:nvSpPr>
+          <p:cNvPr id="5" name="Text 3"/>
+          <p:cNvSpPr/>
+          <p:nvPr/>
+        </p:nvSpPr>
+        <p:spPr>
+          <a:xfrm>
+            <a:off x="868680" y="1874520"/>
+            <a:ext cx="10241280" cy="457200"/>
           </a:xfrm>
           <a:prstGeom prst="rect">
             <a:avLst/>
@@ -13262,7 +13469,7 @@
               <a:buNone/>
             </a:pPr>
             <a:r>
-              <a:rPr lang="en-US" sz="1450" dirty="0" err="1">
+              <a:rPr lang="en-US" sz="1700" dirty="0">
                 <a:solidFill>
                   <a:srgbClr val="55606E"/>
                 </a:solidFill>
@@ -13270,10 +13477,10 @@
                 <a:ea typeface="Calibri" pitchFamily="34" charset="-122"/>
                 <a:cs typeface="Calibri" pitchFamily="34" charset="-120"/>
               </a:rPr>
-              <a:t>Nutzer</a:t>
-            </a:r>
-            <a:r>
-              <a:rPr lang="en-US" sz="1450" dirty="0">
+              <a:t>Keine </a:t>
+            </a:r>
+            <a:r>
+              <a:rPr lang="en-US" sz="1700" dirty="0" err="1">
                 <a:solidFill>
                   <a:srgbClr val="55606E"/>
                 </a:solidFill>
@@ -13281,10 +13488,43 @@
                 <a:ea typeface="Calibri" pitchFamily="34" charset="-122"/>
                 <a:cs typeface="Calibri" pitchFamily="34" charset="-120"/>
               </a:rPr>
+              <a:t>Einzel-Lücke</a:t>
+            </a:r>
+            <a:r>
+              <a:rPr lang="en-US" sz="1700" dirty="0">
+                <a:solidFill>
+                  <a:srgbClr val="55606E"/>
+                </a:solidFill>
+                <a:latin typeface="Calibri" pitchFamily="34" charset="0"/>
+                <a:ea typeface="Calibri" pitchFamily="34" charset="-122"/>
+                <a:cs typeface="Calibri" pitchFamily="34" charset="-120"/>
+              </a:rPr>
+              <a:t>, </a:t>
+            </a:r>
+            <a:r>
+              <a:rPr lang="en-US" sz="1700" dirty="0" err="1">
+                <a:solidFill>
+                  <a:srgbClr val="55606E"/>
+                </a:solidFill>
+                <a:latin typeface="Calibri" pitchFamily="34" charset="0"/>
+                <a:ea typeface="Calibri" pitchFamily="34" charset="-122"/>
+                <a:cs typeface="Calibri" pitchFamily="34" charset="-120"/>
+              </a:rPr>
+              <a:t>sondern</a:t>
+            </a:r>
+            <a:r>
+              <a:rPr lang="en-US" sz="1700" dirty="0">
+                <a:solidFill>
+                  <a:srgbClr val="55606E"/>
+                </a:solidFill>
+                <a:latin typeface="Calibri" pitchFamily="34" charset="0"/>
+                <a:ea typeface="Calibri" pitchFamily="34" charset="-122"/>
+                <a:cs typeface="Calibri" pitchFamily="34" charset="-120"/>
+              </a:rPr>
               <a:t> </a:t>
             </a:r>
             <a:r>
-              <a:rPr lang="en-US" sz="1450" dirty="0" err="1">
+              <a:rPr lang="de-DE" sz="1700" dirty="0">
                 <a:solidFill>
                   <a:srgbClr val="55606E"/>
                 </a:solidFill>
@@ -13292,129 +13532,29 @@
                 <a:ea typeface="Calibri" pitchFamily="34" charset="-122"/>
                 <a:cs typeface="Calibri" pitchFamily="34" charset="-120"/>
               </a:rPr>
-              <a:t>ist</a:t>
-            </a:r>
-            <a:r>
-              <a:rPr lang="en-US" sz="1450" dirty="0">
-                <a:solidFill>
-                  <a:srgbClr val="55606E"/>
-                </a:solidFill>
-                <a:latin typeface="Calibri" pitchFamily="34" charset="0"/>
-                <a:ea typeface="Calibri" pitchFamily="34" charset="-122"/>
-                <a:cs typeface="Calibri" pitchFamily="34" charset="-120"/>
-              </a:rPr>
-              <a:t> </a:t>
-            </a:r>
-            <a:r>
-              <a:rPr lang="en-US" sz="1450" dirty="0" err="1">
-                <a:solidFill>
-                  <a:srgbClr val="55606E"/>
-                </a:solidFill>
-                <a:latin typeface="Calibri" pitchFamily="34" charset="0"/>
-                <a:ea typeface="Calibri" pitchFamily="34" charset="-122"/>
-                <a:cs typeface="Calibri" pitchFamily="34" charset="-120"/>
-              </a:rPr>
-              <a:t>angemeldet</a:t>
-            </a:r>
-            <a:r>
-              <a:rPr lang="en-US" sz="1450" dirty="0">
-                <a:solidFill>
-                  <a:srgbClr val="55606E"/>
-                </a:solidFill>
-                <a:latin typeface="Calibri" pitchFamily="34" charset="0"/>
-                <a:ea typeface="Calibri" pitchFamily="34" charset="-122"/>
-                <a:cs typeface="Calibri" pitchFamily="34" charset="-120"/>
-              </a:rPr>
-              <a:t>, </a:t>
-            </a:r>
-            <a:r>
-              <a:rPr lang="en-US" sz="1450" dirty="0" err="1">
-                <a:solidFill>
-                  <a:srgbClr val="55606E"/>
-                </a:solidFill>
-                <a:latin typeface="Calibri" pitchFamily="34" charset="0"/>
-                <a:ea typeface="Calibri" pitchFamily="34" charset="-122"/>
-                <a:cs typeface="Calibri" pitchFamily="34" charset="-120"/>
-              </a:rPr>
-              <a:t>gültiges</a:t>
-            </a:r>
-            <a:r>
-              <a:rPr lang="en-US" sz="1450" dirty="0">
-                <a:solidFill>
-                  <a:srgbClr val="55606E"/>
-                </a:solidFill>
-                <a:latin typeface="Calibri" pitchFamily="34" charset="0"/>
-                <a:ea typeface="Calibri" pitchFamily="34" charset="-122"/>
-                <a:cs typeface="Calibri" pitchFamily="34" charset="-120"/>
-              </a:rPr>
-              <a:t> Bearer-Token </a:t>
-            </a:r>
-            <a:r>
-              <a:rPr lang="en-US" sz="1450" dirty="0" err="1">
-                <a:solidFill>
-                  <a:srgbClr val="55606E"/>
-                </a:solidFill>
-                <a:latin typeface="Calibri" pitchFamily="34" charset="0"/>
-                <a:ea typeface="Calibri" pitchFamily="34" charset="-122"/>
-                <a:cs typeface="Calibri" pitchFamily="34" charset="-120"/>
-              </a:rPr>
-              <a:t>liegt</a:t>
-            </a:r>
-            <a:r>
-              <a:rPr lang="en-US" sz="1450" dirty="0">
-                <a:solidFill>
-                  <a:srgbClr val="55606E"/>
-                </a:solidFill>
-                <a:latin typeface="Calibri" pitchFamily="34" charset="0"/>
-                <a:ea typeface="Calibri" pitchFamily="34" charset="-122"/>
-                <a:cs typeface="Calibri" pitchFamily="34" charset="-120"/>
-              </a:rPr>
-              <a:t> </a:t>
-            </a:r>
-            <a:r>
-              <a:rPr lang="en-US" sz="1450" dirty="0" err="1">
-                <a:solidFill>
-                  <a:srgbClr val="55606E"/>
-                </a:solidFill>
-                <a:latin typeface="Calibri" pitchFamily="34" charset="0"/>
-                <a:ea typeface="Calibri" pitchFamily="34" charset="-122"/>
-                <a:cs typeface="Calibri" pitchFamily="34" charset="-120"/>
-              </a:rPr>
-              <a:t>im</a:t>
-            </a:r>
-            <a:r>
-              <a:rPr lang="en-US" sz="1450" dirty="0">
-                <a:solidFill>
-                  <a:srgbClr val="55606E"/>
-                </a:solidFill>
-                <a:latin typeface="Calibri" pitchFamily="34" charset="0"/>
-                <a:ea typeface="Calibri" pitchFamily="34" charset="-122"/>
-                <a:cs typeface="Calibri" pitchFamily="34" charset="-120"/>
-              </a:rPr>
-              <a:t> Browser.</a:t>
-            </a:r>
-            <a:endParaRPr lang="en-US" sz="1450" dirty="0"/>
-          </a:p>
-        </p:txBody>
-      </p:sp>
-      <p:sp>
-        <p:nvSpPr>
-          <p:cNvPr id="9" name="Shape 7"/>
-          <p:cNvSpPr/>
-          <p:nvPr/>
-        </p:nvSpPr>
-        <p:spPr>
-          <a:xfrm>
-            <a:off x="1245489" y="3419856"/>
-            <a:ext cx="0" cy="256032"/>
+              <a:t>die Schichten machen es kritisch</a:t>
+            </a:r>
+          </a:p>
+        </p:txBody>
+      </p:sp>
+      <p:sp>
+        <p:nvSpPr>
+          <p:cNvPr id="6" name="Shape 4"/>
+          <p:cNvSpPr/>
+          <p:nvPr/>
+        </p:nvSpPr>
+        <p:spPr>
+          <a:xfrm>
+            <a:off x="868680" y="2743200"/>
+            <a:ext cx="10454335" cy="0"/>
           </a:xfrm>
           <a:prstGeom prst="line">
             <a:avLst/>
           </a:prstGeom>
           <a:noFill/>
-          <a:ln w="15875">
+          <a:ln w="12700">
             <a:solidFill>
-              <a:srgbClr val="D2D8DF"/>
+              <a:srgbClr val="E4E7EC"/>
             </a:solidFill>
             <a:prstDash val="solid"/>
           </a:ln>
@@ -13422,14 +13562,14 @@
       </p:sp>
       <p:sp>
         <p:nvSpPr>
-          <p:cNvPr id="10" name="Text 8"/>
-          <p:cNvSpPr/>
-          <p:nvPr/>
-        </p:nvSpPr>
-        <p:spPr>
-          <a:xfrm>
-            <a:off x="1080897" y="3739896"/>
-            <a:ext cx="640080" cy="457200"/>
+          <p:cNvPr id="7" name="Text 5"/>
+          <p:cNvSpPr/>
+          <p:nvPr/>
+        </p:nvSpPr>
+        <p:spPr>
+          <a:xfrm>
+            <a:off x="868680" y="2889504"/>
+            <a:ext cx="10454335" cy="384048"/>
           </a:xfrm>
           <a:prstGeom prst="rect">
             <a:avLst/>
@@ -13445,30 +13585,30 @@
               <a:buNone/>
             </a:pPr>
             <a:r>
-              <a:rPr lang="en-US" sz="2000" b="1" dirty="0">
-                <a:solidFill>
-                  <a:srgbClr val="9AA3AF"/>
+              <a:rPr lang="en-US" sz="1900" b="1" dirty="0">
+                <a:solidFill>
+                  <a:srgbClr val="16181D"/>
                 </a:solidFill>
                 <a:latin typeface="Trebuchet MS" pitchFamily="34" charset="0"/>
                 <a:ea typeface="Trebuchet MS" pitchFamily="34" charset="-122"/>
                 <a:cs typeface="Trebuchet MS" pitchFamily="34" charset="-120"/>
               </a:rPr>
-              <a:t>02</a:t>
-            </a:r>
-            <a:endParaRPr lang="en-US" sz="2000" dirty="0"/>
-          </a:p>
-        </p:txBody>
-      </p:sp>
-      <p:sp>
-        <p:nvSpPr>
-          <p:cNvPr id="11" name="Text 9"/>
-          <p:cNvSpPr/>
-          <p:nvPr/>
-        </p:nvSpPr>
-        <p:spPr>
-          <a:xfrm>
-            <a:off x="1883665" y="3739896"/>
-            <a:ext cx="1087755" cy="457200"/>
+              <a:t>Offenes CORS</a:t>
+            </a:r>
+            <a:endParaRPr lang="en-US" sz="1900" dirty="0"/>
+          </a:p>
+        </p:txBody>
+      </p:sp>
+      <p:sp>
+        <p:nvSpPr>
+          <p:cNvPr id="8" name="Text 6"/>
+          <p:cNvSpPr/>
+          <p:nvPr/>
+        </p:nvSpPr>
+        <p:spPr>
+          <a:xfrm>
+            <a:off x="868680" y="3310128"/>
+            <a:ext cx="10454335" cy="365760"/>
           </a:xfrm>
           <a:prstGeom prst="rect">
             <a:avLst/>
@@ -13480,11 +13620,73 @@
           <a:bodyPr wrap="square" lIns="0" tIns="0" rIns="0" bIns="0" rtlCol="0" anchor="ctr"/>
           <a:lstStyle/>
           <a:p>
-            <a:pPr marL="0" indent="0" algn="ctr">
-              <a:buNone/>
-            </a:pPr>
-            <a:r>
-              <a:rPr lang="en-US" sz="1800" b="1" dirty="0">
+            <a:pPr marL="0" indent="0">
+              <a:buNone/>
+            </a:pPr>
+            <a:r>
+              <a:rPr lang="en-US" sz="1400" dirty="0">
+                <a:solidFill>
+                  <a:srgbClr val="55606E"/>
+                </a:solidFill>
+                <a:latin typeface="Calibri" pitchFamily="34" charset="0"/>
+                <a:ea typeface="Calibri" pitchFamily="34" charset="-122"/>
+                <a:cs typeface="Calibri" pitchFamily="34" charset="-120"/>
+              </a:rPr>
+              <a:t>weicht die Browser-Sperre für fremde Origins auf.</a:t>
+            </a:r>
+            <a:endParaRPr lang="en-US" sz="1400" dirty="0"/>
+          </a:p>
+        </p:txBody>
+      </p:sp>
+      <p:sp>
+        <p:nvSpPr>
+          <p:cNvPr id="9" name="Shape 7"/>
+          <p:cNvSpPr/>
+          <p:nvPr/>
+        </p:nvSpPr>
+        <p:spPr>
+          <a:xfrm>
+            <a:off x="868680" y="3822192"/>
+            <a:ext cx="10454335" cy="0"/>
+          </a:xfrm>
+          <a:prstGeom prst="line">
+            <a:avLst/>
+          </a:prstGeom>
+          <a:noFill/>
+          <a:ln w="12700">
+            <a:solidFill>
+              <a:srgbClr val="E4E7EC"/>
+            </a:solidFill>
+            <a:prstDash val="solid"/>
+          </a:ln>
+        </p:spPr>
+      </p:sp>
+      <p:sp>
+        <p:nvSpPr>
+          <p:cNvPr id="10" name="Text 8"/>
+          <p:cNvSpPr/>
+          <p:nvPr/>
+        </p:nvSpPr>
+        <p:spPr>
+          <a:xfrm>
+            <a:off x="868680" y="3968496"/>
+            <a:ext cx="10454335" cy="384048"/>
+          </a:xfrm>
+          <a:prstGeom prst="rect">
+            <a:avLst/>
+          </a:prstGeom>
+          <a:noFill/>
+          <a:ln/>
+        </p:spPr>
+        <p:txBody>
+          <a:bodyPr wrap="square" lIns="0" tIns="0" rIns="0" bIns="0" rtlCol="0" anchor="ctr"/>
+          <a:lstStyle/>
+          <a:p>
+            <a:pPr marL="0" indent="0">
+              <a:buNone/>
+            </a:pPr>
+            <a:r>
+              <a:rPr lang="en-US" sz="1900" b="1" dirty="0">
                 <a:solidFill>
                   <a:srgbClr val="16181D"/>
                 </a:solidFill>
@@ -13492,22 +13694,22 @@
                 <a:ea typeface="Trebuchet MS" pitchFamily="34" charset="-122"/>
                 <a:cs typeface="Trebuchet MS" pitchFamily="34" charset="-120"/>
               </a:rPr>
-              <a:t>/session</a:t>
-            </a:r>
-            <a:endParaRPr lang="en-US" sz="1800" dirty="0"/>
-          </a:p>
-        </p:txBody>
-      </p:sp>
-      <p:sp>
-        <p:nvSpPr>
-          <p:cNvPr id="12" name="Text 10"/>
-          <p:cNvSpPr/>
-          <p:nvPr/>
-        </p:nvSpPr>
-        <p:spPr>
-          <a:xfrm>
-            <a:off x="3566312" y="3739896"/>
-            <a:ext cx="5059375" cy="457200"/>
+              <a:t>Unauthentifizierter /files-Endpunkt</a:t>
+            </a:r>
+            <a:endParaRPr lang="en-US" sz="1900" dirty="0"/>
+          </a:p>
+        </p:txBody>
+      </p:sp>
+      <p:sp>
+        <p:nvSpPr>
+          <p:cNvPr id="11" name="Text 9"/>
+          <p:cNvSpPr/>
+          <p:nvPr/>
+        </p:nvSpPr>
+        <p:spPr>
+          <a:xfrm>
+            <a:off x="868680" y="4389120"/>
+            <a:ext cx="10454335" cy="365760"/>
           </a:xfrm>
           <a:prstGeom prst="rect">
             <a:avLst/>
@@ -13523,7 +13725,7 @@
               <a:buNone/>
             </a:pPr>
             <a:r>
-              <a:rPr lang="en-US" sz="1450" dirty="0" err="1">
+              <a:rPr lang="en-US" sz="1400" dirty="0">
                 <a:solidFill>
                   <a:srgbClr val="55606E"/>
                 </a:solidFill>
@@ -13531,41 +13733,30 @@
                 <a:ea typeface="Calibri" pitchFamily="34" charset="-122"/>
                 <a:cs typeface="Calibri" pitchFamily="34" charset="-120"/>
               </a:rPr>
-              <a:t>Fremde</a:t>
-            </a:r>
-            <a:r>
-              <a:rPr lang="en-US" sz="1450" dirty="0">
-                <a:solidFill>
-                  <a:srgbClr val="55606E"/>
-                </a:solidFill>
-                <a:latin typeface="Calibri" pitchFamily="34" charset="0"/>
-                <a:ea typeface="Calibri" pitchFamily="34" charset="-122"/>
-                <a:cs typeface="Calibri" pitchFamily="34" charset="-120"/>
-              </a:rPr>
-              <a:t> Seite liest die Antwort dank offenem CORS.</a:t>
-            </a:r>
-            <a:endParaRPr lang="en-US" sz="1450" dirty="0"/>
-          </a:p>
-        </p:txBody>
-      </p:sp>
-      <p:sp>
-        <p:nvSpPr>
-          <p:cNvPr id="13" name="Shape 11"/>
-          <p:cNvSpPr/>
-          <p:nvPr/>
-        </p:nvSpPr>
-        <p:spPr>
-          <a:xfrm>
-            <a:off x="1245489" y="4261104"/>
-            <a:ext cx="0" cy="256032"/>
+              <a:t>liefert Datei-Exporte ohne Anmeldung.</a:t>
+            </a:r>
+            <a:endParaRPr lang="en-US" sz="1400" dirty="0"/>
+          </a:p>
+        </p:txBody>
+      </p:sp>
+      <p:sp>
+        <p:nvSpPr>
+          <p:cNvPr id="12" name="Shape 10"/>
+          <p:cNvSpPr/>
+          <p:nvPr/>
+        </p:nvSpPr>
+        <p:spPr>
+          <a:xfrm>
+            <a:off x="868680" y="4901184"/>
+            <a:ext cx="10454335" cy="0"/>
           </a:xfrm>
           <a:prstGeom prst="line">
             <a:avLst/>
           </a:prstGeom>
           <a:noFill/>
-          <a:ln w="15875">
+          <a:ln w="12700">
             <a:solidFill>
-              <a:srgbClr val="D2D8DF"/>
+              <a:srgbClr val="E4E7EC"/>
             </a:solidFill>
             <a:prstDash val="solid"/>
           </a:ln>
@@ -13573,14 +13764,14 @@
       </p:sp>
       <p:sp>
         <p:nvSpPr>
-          <p:cNvPr id="14" name="Text 12"/>
-          <p:cNvSpPr/>
-          <p:nvPr/>
-        </p:nvSpPr>
-        <p:spPr>
-          <a:xfrm>
-            <a:off x="1080897" y="4581144"/>
-            <a:ext cx="640080" cy="457200"/>
+          <p:cNvPr id="13" name="Text 11"/>
+          <p:cNvSpPr/>
+          <p:nvPr/>
+        </p:nvSpPr>
+        <p:spPr>
+          <a:xfrm>
+            <a:off x="868680" y="5047488"/>
+            <a:ext cx="10454335" cy="384048"/>
           </a:xfrm>
           <a:prstGeom prst="rect">
             <a:avLst/>
@@ -13596,46 +13787,18 @@
               <a:buNone/>
             </a:pPr>
             <a:r>
-              <a:rPr lang="en-US" sz="2000" b="1" dirty="0">
-                <a:solidFill>
-                  <a:srgbClr val="9AA3AF"/>
+              <a:rPr lang="en-US" sz="1900" b="1" dirty="0" err="1">
+                <a:solidFill>
+                  <a:srgbClr val="16181D"/>
                 </a:solidFill>
                 <a:latin typeface="Trebuchet MS" pitchFamily="34" charset="0"/>
                 <a:ea typeface="Trebuchet MS" pitchFamily="34" charset="-122"/>
                 <a:cs typeface="Trebuchet MS" pitchFamily="34" charset="-120"/>
               </a:rPr>
-              <a:t>03</a:t>
-            </a:r>
-            <a:endParaRPr lang="en-US" sz="2000" dirty="0"/>
-          </a:p>
-        </p:txBody>
-      </p:sp>
-      <p:sp>
-        <p:nvSpPr>
-          <p:cNvPr id="15" name="Text 13"/>
-          <p:cNvSpPr/>
-          <p:nvPr/>
-        </p:nvSpPr>
-        <p:spPr>
-          <a:xfrm>
-            <a:off x="1883665" y="4581144"/>
-            <a:ext cx="1087755" cy="457200"/>
-          </a:xfrm>
-          <a:prstGeom prst="rect">
-            <a:avLst/>
-          </a:prstGeom>
-          <a:noFill/>
-          <a:ln/>
-        </p:spPr>
-        <p:txBody>
-          <a:bodyPr wrap="square" lIns="0" tIns="0" rIns="0" bIns="0" rtlCol="0" anchor="ctr"/>
-          <a:lstStyle/>
-          <a:p>
-            <a:pPr marL="0" indent="0" algn="ctr">
-              <a:buNone/>
-            </a:pPr>
-            <a:r>
-              <a:rPr lang="en-US" b="1" dirty="0">
+              <a:t>Unsichere</a:t>
+            </a:r>
+            <a:r>
+              <a:rPr lang="en-US" sz="1900" b="1" dirty="0">
                 <a:solidFill>
                   <a:srgbClr val="16181D"/>
                 </a:solidFill>
@@ -13643,22 +13806,22 @@
                 <a:ea typeface="Trebuchet MS" pitchFamily="34" charset="-122"/>
                 <a:cs typeface="Trebuchet MS" pitchFamily="34" charset="-120"/>
               </a:rPr>
-              <a:t>Leaking</a:t>
-            </a:r>
-            <a:endParaRPr lang="en-US" sz="1800" dirty="0"/>
-          </a:p>
-        </p:txBody>
-      </p:sp>
-      <p:sp>
-        <p:nvSpPr>
-          <p:cNvPr id="16" name="Text 14"/>
-          <p:cNvSpPr/>
-          <p:nvPr/>
-        </p:nvSpPr>
-        <p:spPr>
-          <a:xfrm>
-            <a:off x="3566312" y="4581144"/>
-            <a:ext cx="5059375" cy="457200"/>
+              <a:t> Keycloak-Regeln</a:t>
+            </a:r>
+            <a:endParaRPr lang="en-US" sz="1900" dirty="0"/>
+          </a:p>
+        </p:txBody>
+      </p:sp>
+      <p:sp>
+        <p:nvSpPr>
+          <p:cNvPr id="14" name="Text 12"/>
+          <p:cNvSpPr/>
+          <p:nvPr/>
+        </p:nvSpPr>
+        <p:spPr>
+          <a:xfrm>
+            <a:off x="868680" y="5468112"/>
+            <a:ext cx="10454335" cy="365760"/>
           </a:xfrm>
           <a:prstGeom prst="rect">
             <a:avLst/>
@@ -13674,7 +13837,7 @@
               <a:buNone/>
             </a:pPr>
             <a:r>
-              <a:rPr lang="en-US" sz="1450" dirty="0">
+              <a:rPr lang="en-US" sz="1400" dirty="0">
                 <a:solidFill>
                   <a:srgbClr val="55606E"/>
                 </a:solidFill>
@@ -13682,312 +13845,18 @@
                 <a:ea typeface="Calibri" pitchFamily="34" charset="-122"/>
                 <a:cs typeface="Calibri" pitchFamily="34" charset="-120"/>
               </a:rPr>
-              <a:t>Das </a:t>
-            </a:r>
-            <a:r>
-              <a:rPr lang="en-US" sz="1450" dirty="0" err="1">
-                <a:solidFill>
-                  <a:srgbClr val="55606E"/>
-                </a:solidFill>
-                <a:latin typeface="Calibri" pitchFamily="34" charset="0"/>
-                <a:ea typeface="Calibri" pitchFamily="34" charset="-122"/>
-                <a:cs typeface="Calibri" pitchFamily="34" charset="-120"/>
-              </a:rPr>
-              <a:t>gültige</a:t>
-            </a:r>
-            <a:r>
-              <a:rPr lang="en-US" sz="1450" dirty="0">
-                <a:solidFill>
-                  <a:srgbClr val="55606E"/>
-                </a:solidFill>
-                <a:latin typeface="Calibri" pitchFamily="34" charset="0"/>
-                <a:ea typeface="Calibri" pitchFamily="34" charset="-122"/>
-                <a:cs typeface="Calibri" pitchFamily="34" charset="-120"/>
-              </a:rPr>
-              <a:t> Bearer-Token </a:t>
-            </a:r>
-            <a:r>
-              <a:rPr lang="en-US" sz="1450" dirty="0" err="1">
-                <a:solidFill>
-                  <a:srgbClr val="55606E"/>
-                </a:solidFill>
-                <a:latin typeface="Calibri" pitchFamily="34" charset="0"/>
-                <a:ea typeface="Calibri" pitchFamily="34" charset="-122"/>
-                <a:cs typeface="Calibri" pitchFamily="34" charset="-120"/>
-              </a:rPr>
-              <a:t>wird</a:t>
-            </a:r>
-            <a:r>
-              <a:rPr lang="en-US" sz="1450" dirty="0">
-                <a:solidFill>
-                  <a:srgbClr val="55606E"/>
-                </a:solidFill>
-                <a:latin typeface="Calibri" pitchFamily="34" charset="0"/>
-                <a:ea typeface="Calibri" pitchFamily="34" charset="-122"/>
-                <a:cs typeface="Calibri" pitchFamily="34" charset="-120"/>
-              </a:rPr>
-              <a:t> </a:t>
-            </a:r>
-            <a:r>
-              <a:rPr lang="en-US" sz="1450" dirty="0" err="1">
-                <a:solidFill>
-                  <a:srgbClr val="55606E"/>
-                </a:solidFill>
-                <a:latin typeface="Calibri" pitchFamily="34" charset="0"/>
-                <a:ea typeface="Calibri" pitchFamily="34" charset="-122"/>
-                <a:cs typeface="Calibri" pitchFamily="34" charset="-120"/>
-              </a:rPr>
-              <a:t>im</a:t>
-            </a:r>
-            <a:r>
-              <a:rPr lang="en-US" sz="1450" dirty="0">
-                <a:solidFill>
-                  <a:srgbClr val="55606E"/>
-                </a:solidFill>
-                <a:latin typeface="Calibri" pitchFamily="34" charset="0"/>
-                <a:ea typeface="Calibri" pitchFamily="34" charset="-122"/>
-                <a:cs typeface="Calibri" pitchFamily="34" charset="-120"/>
-              </a:rPr>
-              <a:t> </a:t>
-            </a:r>
-            <a:r>
-              <a:rPr lang="en-US" sz="1450" dirty="0" err="1">
-                <a:solidFill>
-                  <a:srgbClr val="55606E"/>
-                </a:solidFill>
-                <a:latin typeface="Calibri" pitchFamily="34" charset="0"/>
-                <a:ea typeface="Calibri" pitchFamily="34" charset="-122"/>
-                <a:cs typeface="Calibri" pitchFamily="34" charset="-120"/>
-              </a:rPr>
-              <a:t>Klartext</a:t>
-            </a:r>
-            <a:r>
-              <a:rPr lang="en-US" sz="1450" dirty="0">
-                <a:solidFill>
-                  <a:srgbClr val="55606E"/>
-                </a:solidFill>
-                <a:latin typeface="Calibri" pitchFamily="34" charset="0"/>
-                <a:ea typeface="Calibri" pitchFamily="34" charset="-122"/>
-                <a:cs typeface="Calibri" pitchFamily="34" charset="-120"/>
-              </a:rPr>
-              <a:t> </a:t>
-            </a:r>
-            <a:r>
-              <a:rPr lang="en-US" sz="1450" dirty="0" err="1">
-                <a:solidFill>
-                  <a:srgbClr val="55606E"/>
-                </a:solidFill>
-                <a:latin typeface="Calibri" pitchFamily="34" charset="0"/>
-                <a:ea typeface="Calibri" pitchFamily="34" charset="-122"/>
-                <a:cs typeface="Calibri" pitchFamily="34" charset="-120"/>
-              </a:rPr>
-              <a:t>ausgelesen</a:t>
-            </a:r>
-            <a:r>
-              <a:rPr lang="en-US" sz="1450" dirty="0">
-                <a:solidFill>
-                  <a:srgbClr val="55606E"/>
-                </a:solidFill>
-                <a:latin typeface="Calibri" pitchFamily="34" charset="0"/>
-                <a:ea typeface="Calibri" pitchFamily="34" charset="-122"/>
-                <a:cs typeface="Calibri" pitchFamily="34" charset="-120"/>
-              </a:rPr>
-              <a:t>.</a:t>
-            </a:r>
-            <a:endParaRPr lang="en-US" sz="1450" dirty="0"/>
-          </a:p>
-        </p:txBody>
-      </p:sp>
-      <p:sp>
-        <p:nvSpPr>
-          <p:cNvPr id="17" name="Shape 15"/>
-          <p:cNvSpPr/>
-          <p:nvPr/>
-        </p:nvSpPr>
-        <p:spPr>
-          <a:xfrm>
-            <a:off x="1245489" y="5102352"/>
-            <a:ext cx="0" cy="256032"/>
-          </a:xfrm>
-          <a:prstGeom prst="line">
-            <a:avLst/>
-          </a:prstGeom>
-          <a:noFill/>
-          <a:ln w="15875">
-            <a:solidFill>
-              <a:srgbClr val="D2D8DF"/>
-            </a:solidFill>
-            <a:prstDash val="solid"/>
-          </a:ln>
-        </p:spPr>
-      </p:sp>
-      <p:sp>
-        <p:nvSpPr>
-          <p:cNvPr id="18" name="Text 16"/>
-          <p:cNvSpPr/>
-          <p:nvPr/>
-        </p:nvSpPr>
-        <p:spPr>
-          <a:xfrm>
-            <a:off x="1080897" y="5422392"/>
-            <a:ext cx="640080" cy="457200"/>
-          </a:xfrm>
-          <a:prstGeom prst="rect">
-            <a:avLst/>
-          </a:prstGeom>
-          <a:noFill/>
-          <a:ln/>
-        </p:spPr>
-        <p:txBody>
-          <a:bodyPr wrap="square" lIns="0" tIns="0" rIns="0" bIns="0" rtlCol="0" anchor="ctr"/>
-          <a:lstStyle/>
-          <a:p>
-            <a:pPr marL="0" indent="0">
-              <a:buNone/>
-            </a:pPr>
-            <a:r>
-              <a:rPr lang="en-US" sz="2000" b="1" dirty="0">
-                <a:solidFill>
-                  <a:srgbClr val="D23B4E"/>
-                </a:solidFill>
-                <a:latin typeface="Trebuchet MS" pitchFamily="34" charset="0"/>
-                <a:ea typeface="Trebuchet MS" pitchFamily="34" charset="-122"/>
-                <a:cs typeface="Trebuchet MS" pitchFamily="34" charset="-120"/>
-              </a:rPr>
-              <a:t>04</a:t>
-            </a:r>
-            <a:endParaRPr lang="en-US" sz="2000" dirty="0"/>
-          </a:p>
-        </p:txBody>
-      </p:sp>
-      <p:sp>
-        <p:nvSpPr>
-          <p:cNvPr id="19" name="Text 17"/>
-          <p:cNvSpPr/>
-          <p:nvPr/>
-        </p:nvSpPr>
-        <p:spPr>
-          <a:xfrm>
-            <a:off x="1883665" y="5422392"/>
-            <a:ext cx="1087755" cy="457200"/>
-          </a:xfrm>
-          <a:prstGeom prst="rect">
-            <a:avLst/>
-          </a:prstGeom>
-          <a:noFill/>
-          <a:ln/>
-        </p:spPr>
-        <p:txBody>
-          <a:bodyPr wrap="square" lIns="0" tIns="0" rIns="0" bIns="0" rtlCol="0" anchor="ctr"/>
-          <a:lstStyle/>
-          <a:p>
-            <a:pPr marL="0" indent="0" algn="ctr">
-              <a:buNone/>
-            </a:pPr>
-            <a:r>
-              <a:rPr lang="en-US" sz="1800" b="1" dirty="0">
-                <a:solidFill>
-                  <a:srgbClr val="16181D"/>
-                </a:solidFill>
-                <a:latin typeface="Trebuchet MS" pitchFamily="34" charset="0"/>
-                <a:ea typeface="Trebuchet MS" pitchFamily="34" charset="-122"/>
-                <a:cs typeface="Trebuchet MS" pitchFamily="34" charset="-120"/>
-              </a:rPr>
-              <a:t>Takeover</a:t>
-            </a:r>
-            <a:endParaRPr lang="en-US" sz="1800" dirty="0"/>
-          </a:p>
-        </p:txBody>
-      </p:sp>
-      <p:sp>
-        <p:nvSpPr>
-          <p:cNvPr id="20" name="Text 18"/>
-          <p:cNvSpPr/>
-          <p:nvPr/>
-        </p:nvSpPr>
-        <p:spPr>
-          <a:xfrm>
-            <a:off x="3566312" y="5422392"/>
-            <a:ext cx="5059375" cy="457200"/>
-          </a:xfrm>
-          <a:prstGeom prst="rect">
-            <a:avLst/>
-          </a:prstGeom>
-          <a:noFill/>
-          <a:ln/>
-        </p:spPr>
-        <p:txBody>
-          <a:bodyPr wrap="square" lIns="0" tIns="0" rIns="0" bIns="0" rtlCol="0" anchor="ctr"/>
-          <a:lstStyle/>
-          <a:p>
-            <a:pPr marL="0" indent="0">
-              <a:buNone/>
-            </a:pPr>
-            <a:r>
-              <a:rPr lang="en-US" sz="1450" dirty="0">
-                <a:solidFill>
-                  <a:srgbClr val="55606E"/>
-                </a:solidFill>
-                <a:latin typeface="Calibri" pitchFamily="34" charset="0"/>
-                <a:ea typeface="Calibri" pitchFamily="34" charset="-122"/>
-                <a:cs typeface="Calibri" pitchFamily="34" charset="-120"/>
-              </a:rPr>
-              <a:t>Angreifer </a:t>
-            </a:r>
-            <a:r>
-              <a:rPr lang="en-US" sz="1450" dirty="0" err="1">
-                <a:solidFill>
-                  <a:srgbClr val="55606E"/>
-                </a:solidFill>
-                <a:latin typeface="Calibri" pitchFamily="34" charset="0"/>
-                <a:ea typeface="Calibri" pitchFamily="34" charset="-122"/>
-                <a:cs typeface="Calibri" pitchFamily="34" charset="-120"/>
-              </a:rPr>
-              <a:t>agiert</a:t>
-            </a:r>
-            <a:r>
-              <a:rPr lang="en-US" sz="1450" dirty="0">
-                <a:solidFill>
-                  <a:srgbClr val="55606E"/>
-                </a:solidFill>
-                <a:latin typeface="Calibri" pitchFamily="34" charset="0"/>
-                <a:ea typeface="Calibri" pitchFamily="34" charset="-122"/>
-                <a:cs typeface="Calibri" pitchFamily="34" charset="-120"/>
-              </a:rPr>
-              <a:t> </a:t>
-            </a:r>
-            <a:r>
-              <a:rPr lang="en-US" sz="1450" dirty="0" err="1">
-                <a:solidFill>
-                  <a:srgbClr val="55606E"/>
-                </a:solidFill>
-                <a:latin typeface="Calibri" pitchFamily="34" charset="0"/>
-                <a:ea typeface="Calibri" pitchFamily="34" charset="-122"/>
-                <a:cs typeface="Calibri" pitchFamily="34" charset="-120"/>
-              </a:rPr>
-              <a:t>vollständig</a:t>
-            </a:r>
-            <a:r>
-              <a:rPr lang="en-US" sz="1450" dirty="0">
-                <a:solidFill>
-                  <a:srgbClr val="55606E"/>
-                </a:solidFill>
-                <a:latin typeface="Calibri" pitchFamily="34" charset="0"/>
-                <a:ea typeface="Calibri" pitchFamily="34" charset="-122"/>
-                <a:cs typeface="Calibri" pitchFamily="34" charset="-120"/>
-              </a:rPr>
-              <a:t> als der Nutzer.</a:t>
-            </a:r>
-            <a:endParaRPr lang="en-US" sz="1450" dirty="0"/>
-          </a:p>
-        </p:txBody>
-      </p:sp>
-      <p:sp>
-        <p:nvSpPr>
-          <p:cNvPr id="21" name="Text 1">
+              <a:t>Wildcard-Origins und veraltete Token-Flows.</a:t>
+            </a:r>
+            <a:endParaRPr lang="en-US" sz="1400" dirty="0"/>
+          </a:p>
+        </p:txBody>
+      </p:sp>
+      <p:sp>
+        <p:nvSpPr>
+          <p:cNvPr id="15" name="Text 1">
             <a:extLst>
               <a:ext uri="{FF2B5EF4-FFF2-40B4-BE49-F238E27FC236}">
-                <a16:creationId xmlns:a16="http://schemas.microsoft.com/office/drawing/2014/main" id="{56F96ED9-BE3A-4178-B271-B9ED9DFDF13F}"/>
+                <a16:creationId xmlns:a16="http://schemas.microsoft.com/office/drawing/2014/main" id="{E30CECDF-2AC1-01E7-3CE7-CA5D74B92E3C}"/>
               </a:ext>
             </a:extLst>
           </p:cNvPr>
@@ -14032,13 +13901,13 @@
   <p:clrMapOvr>
     <a:masterClrMapping/>
   </p:clrMapOvr>
-  <mc:AlternateContent xmlns:mc="http://schemas.openxmlformats.org/markup-compatibility/2006" xmlns:p14="http://schemas.microsoft.com/office/powerpoint/2010/main">
-    <mc:Choice Requires="p14">
+  <mc:AlternateContent xmlns:mc="http://schemas.openxmlformats.org/markup-compatibility/2006">
+    <mc:Choice xmlns:p14="http://schemas.microsoft.com/office/powerpoint/2010/main" Requires="p14">
       <p:transition spd="med" p14:dur="700">
         <p:fade/>
       </p:transition>
     </mc:Choice>
-    <mc:Fallback xmlns="">
+    <mc:Fallback>
       <p:transition spd="med">
         <p:fade/>
       </p:transition>
@@ -14097,7 +13966,7 @@
                 <a:ea typeface="Calibri" pitchFamily="34" charset="-122"/>
                 <a:cs typeface="Calibri" pitchFamily="34" charset="-120"/>
               </a:rPr>
-              <a:t>FAZIT · ARCHITEKTUR</a:t>
+              <a:t>FAZIT</a:t>
             </a:r>
             <a:endParaRPr lang="en-US" sz="1050" dirty="0"/>
           </a:p>
@@ -14111,8 +13980,8 @@
         </p:nvSpPr>
         <p:spPr>
           <a:xfrm>
-            <a:off x="868680" y="1051560"/>
-            <a:ext cx="10607040" cy="777240"/>
+            <a:off x="868680" y="1188720"/>
+            <a:ext cx="10058400" cy="822960"/>
           </a:xfrm>
           <a:prstGeom prst="rect">
             <a:avLst/>
@@ -14128,7 +13997,7 @@
               <a:buNone/>
             </a:pPr>
             <a:r>
-              <a:rPr lang="en-US" sz="3400" b="1" dirty="0">
+              <a:rPr lang="en-US" sz="4400" b="1" dirty="0">
                 <a:solidFill>
                   <a:srgbClr val="16181D"/>
                 </a:solidFill>
@@ -14136,10 +14005,38 @@
                 <a:ea typeface="Trebuchet MS" pitchFamily="34" charset="-122"/>
                 <a:cs typeface="Trebuchet MS" pitchFamily="34" charset="-120"/>
               </a:rPr>
-              <a:t>Das </a:t>
-            </a:r>
-            <a:r>
-              <a:rPr lang="en-US" sz="3400" b="1" dirty="0" err="1">
+              <a:t>Fazit</a:t>
+            </a:r>
+            <a:endParaRPr lang="en-US" sz="4400" dirty="0"/>
+          </a:p>
+        </p:txBody>
+      </p:sp>
+      <p:sp>
+        <p:nvSpPr>
+          <p:cNvPr id="5" name="Text 3"/>
+          <p:cNvSpPr/>
+          <p:nvPr/>
+        </p:nvSpPr>
+        <p:spPr>
+          <a:xfrm>
+            <a:off x="868680" y="2103120"/>
+            <a:ext cx="10058400" cy="822960"/>
+          </a:xfrm>
+          <a:prstGeom prst="rect">
+            <a:avLst/>
+          </a:prstGeom>
+          <a:noFill/>
+          <a:ln/>
+        </p:spPr>
+        <p:txBody>
+          <a:bodyPr wrap="square" lIns="0" tIns="0" rIns="0" bIns="0" rtlCol="0" anchor="ctr"/>
+          <a:lstStyle/>
+          <a:p>
+            <a:pPr marL="0" indent="0">
+              <a:buNone/>
+            </a:pPr>
+            <a:r>
+              <a:rPr lang="en-US" sz="2100" b="1" dirty="0">
                 <a:solidFill>
                   <a:srgbClr val="16181D"/>
                 </a:solidFill>
@@ -14147,10 +14044,15 @@
                 <a:ea typeface="Trebuchet MS" pitchFamily="34" charset="-122"/>
                 <a:cs typeface="Trebuchet MS" pitchFamily="34" charset="-120"/>
               </a:rPr>
-              <a:t>Zusammenspiel</a:t>
-            </a:r>
-            <a:r>
-              <a:rPr lang="en-US" sz="3400" b="1" dirty="0">
+              <a:t>CORS ist kein Schutz - es weicht die Browser-Sperre kontrolliert auf.</a:t>
+            </a:r>
+          </a:p>
+          <a:p>
+            <a:pPr marL="0" indent="0">
+              <a:buNone/>
+            </a:pPr>
+            <a:r>
+              <a:rPr lang="en-US" sz="2100" b="1" dirty="0">
                 <a:solidFill>
                   <a:srgbClr val="16181D"/>
                 </a:solidFill>
@@ -14158,10 +14060,10 @@
                 <a:ea typeface="Trebuchet MS" pitchFamily="34" charset="-122"/>
                 <a:cs typeface="Trebuchet MS" pitchFamily="34" charset="-120"/>
               </a:rPr>
-              <a:t> der </a:t>
-            </a:r>
-            <a:r>
-              <a:rPr lang="en-US" sz="3400" b="1" dirty="0" err="1">
+              <a:t>Auth </a:t>
+            </a:r>
+            <a:r>
+              <a:rPr lang="en-US" sz="2100" b="1" dirty="0" err="1">
                 <a:solidFill>
                   <a:srgbClr val="16181D"/>
                 </a:solidFill>
@@ -14169,102 +14071,20 @@
                 <a:ea typeface="Trebuchet MS" pitchFamily="34" charset="-122"/>
                 <a:cs typeface="Trebuchet MS" pitchFamily="34" charset="-120"/>
               </a:rPr>
-              <a:t>Schwachstellen</a:t>
-            </a:r>
-            <a:endParaRPr lang="en-US" sz="3400" dirty="0"/>
-          </a:p>
-        </p:txBody>
-      </p:sp>
-      <p:sp>
-        <p:nvSpPr>
-          <p:cNvPr id="5" name="Text 3"/>
-          <p:cNvSpPr/>
-          <p:nvPr/>
-        </p:nvSpPr>
-        <p:spPr>
-          <a:xfrm>
-            <a:off x="868680" y="1874520"/>
-            <a:ext cx="10241280" cy="457200"/>
-          </a:xfrm>
-          <a:prstGeom prst="rect">
-            <a:avLst/>
-          </a:prstGeom>
-          <a:noFill/>
-          <a:ln/>
-        </p:spPr>
-        <p:txBody>
-          <a:bodyPr wrap="square" lIns="0" tIns="0" rIns="0" bIns="0" rtlCol="0" anchor="ctr"/>
-          <a:lstStyle/>
-          <a:p>
-            <a:pPr marL="0" indent="0">
-              <a:buNone/>
-            </a:pPr>
-            <a:r>
-              <a:rPr lang="en-US" sz="1700" dirty="0">
-                <a:solidFill>
-                  <a:srgbClr val="55606E"/>
-                </a:solidFill>
-                <a:latin typeface="Calibri" pitchFamily="34" charset="0"/>
-                <a:ea typeface="Calibri" pitchFamily="34" charset="-122"/>
-                <a:cs typeface="Calibri" pitchFamily="34" charset="-120"/>
-              </a:rPr>
-              <a:t>Keine </a:t>
-            </a:r>
-            <a:r>
-              <a:rPr lang="en-US" sz="1700" dirty="0" err="1">
-                <a:solidFill>
-                  <a:srgbClr val="55606E"/>
-                </a:solidFill>
-                <a:latin typeface="Calibri" pitchFamily="34" charset="0"/>
-                <a:ea typeface="Calibri" pitchFamily="34" charset="-122"/>
-                <a:cs typeface="Calibri" pitchFamily="34" charset="-120"/>
-              </a:rPr>
-              <a:t>Einzel-Lücke</a:t>
-            </a:r>
-            <a:r>
-              <a:rPr lang="en-US" sz="1700" dirty="0">
-                <a:solidFill>
-                  <a:srgbClr val="55606E"/>
-                </a:solidFill>
-                <a:latin typeface="Calibri" pitchFamily="34" charset="0"/>
-                <a:ea typeface="Calibri" pitchFamily="34" charset="-122"/>
-                <a:cs typeface="Calibri" pitchFamily="34" charset="-120"/>
-              </a:rPr>
-              <a:t>, </a:t>
-            </a:r>
-            <a:r>
-              <a:rPr lang="en-US" sz="1700" dirty="0" err="1">
-                <a:solidFill>
-                  <a:srgbClr val="55606E"/>
-                </a:solidFill>
-                <a:latin typeface="Calibri" pitchFamily="34" charset="0"/>
-                <a:ea typeface="Calibri" pitchFamily="34" charset="-122"/>
-                <a:cs typeface="Calibri" pitchFamily="34" charset="-120"/>
-              </a:rPr>
-              <a:t>sondern</a:t>
-            </a:r>
-            <a:r>
-              <a:rPr lang="en-US" sz="1700" dirty="0">
-                <a:solidFill>
-                  <a:srgbClr val="55606E"/>
-                </a:solidFill>
-                <a:latin typeface="Calibri" pitchFamily="34" charset="0"/>
-                <a:ea typeface="Calibri" pitchFamily="34" charset="-122"/>
-                <a:cs typeface="Calibri" pitchFamily="34" charset="-120"/>
-              </a:rPr>
-              <a:t> </a:t>
-            </a:r>
-            <a:r>
-              <a:rPr lang="de-DE" sz="1700" dirty="0">
-                <a:solidFill>
-                  <a:srgbClr val="55606E"/>
-                </a:solidFill>
-                <a:latin typeface="Calibri" pitchFamily="34" charset="0"/>
-                <a:ea typeface="Calibri" pitchFamily="34" charset="-122"/>
-                <a:cs typeface="Calibri" pitchFamily="34" charset="-120"/>
-              </a:rPr>
-              <a:t>die Schichten machen es kritisch</a:t>
-            </a:r>
+              <a:t>prüft</a:t>
+            </a:r>
+            <a:r>
+              <a:rPr lang="en-US" sz="2100" b="1" dirty="0">
+                <a:solidFill>
+                  <a:srgbClr val="16181D"/>
+                </a:solidFill>
+                <a:latin typeface="Trebuchet MS" pitchFamily="34" charset="0"/>
+                <a:ea typeface="Trebuchet MS" pitchFamily="34" charset="-122"/>
+                <a:cs typeface="Trebuchet MS" pitchFamily="34" charset="-120"/>
+              </a:rPr>
+              <a:t> die Rechte.</a:t>
+            </a:r>
+            <a:endParaRPr lang="en-US" sz="2100" dirty="0"/>
           </a:p>
         </p:txBody>
       </p:sp>
@@ -14276,7 +14096,7 @@
         </p:nvSpPr>
         <p:spPr>
           <a:xfrm>
-            <a:off x="868680" y="2743200"/>
+            <a:off x="868680" y="3200400"/>
             <a:ext cx="10454335" cy="0"/>
           </a:xfrm>
           <a:prstGeom prst="line">
@@ -14299,8 +14119,8 @@
         </p:nvSpPr>
         <p:spPr>
           <a:xfrm>
-            <a:off x="868680" y="2889504"/>
-            <a:ext cx="10454335" cy="384048"/>
+            <a:off x="868680" y="3429000"/>
+            <a:ext cx="7315200" cy="274320"/>
           </a:xfrm>
           <a:prstGeom prst="rect">
             <a:avLst/>
@@ -14316,30 +14136,69 @@
               <a:buNone/>
             </a:pPr>
             <a:r>
-              <a:rPr lang="en-US" sz="1900" b="1" dirty="0">
-                <a:solidFill>
-                  <a:srgbClr val="16181D"/>
+              <a:rPr lang="en-US" sz="1150" b="1" kern="0" spc="250" dirty="0">
+                <a:solidFill>
+                  <a:srgbClr val="1E8F5E"/>
+                </a:solidFill>
+                <a:latin typeface="Calibri" pitchFamily="34" charset="0"/>
+                <a:ea typeface="Calibri" pitchFamily="34" charset="-122"/>
+                <a:cs typeface="Calibri" pitchFamily="34" charset="-120"/>
+              </a:rPr>
+              <a:t>DIE FINALE LÖSUNG</a:t>
+            </a:r>
+            <a:endParaRPr lang="en-US" sz="1150" dirty="0"/>
+          </a:p>
+        </p:txBody>
+      </p:sp>
+      <p:sp>
+        <p:nvSpPr>
+          <p:cNvPr id="8" name="Text 6"/>
+          <p:cNvSpPr/>
+          <p:nvPr/>
+        </p:nvSpPr>
+        <p:spPr>
+          <a:xfrm>
+            <a:off x="868680" y="3794760"/>
+            <a:ext cx="548640" cy="457200"/>
+          </a:xfrm>
+          <a:prstGeom prst="rect">
+            <a:avLst/>
+          </a:prstGeom>
+          <a:noFill/>
+          <a:ln/>
+        </p:spPr>
+        <p:txBody>
+          <a:bodyPr wrap="square" lIns="0" tIns="0" rIns="0" bIns="0" rtlCol="0" anchor="ctr"/>
+          <a:lstStyle/>
+          <a:p>
+            <a:pPr marL="0" indent="0">
+              <a:buNone/>
+            </a:pPr>
+            <a:r>
+              <a:rPr lang="en-US" sz="1700" b="1" dirty="0">
+                <a:solidFill>
+                  <a:srgbClr val="9AA3AF"/>
                 </a:solidFill>
                 <a:latin typeface="Trebuchet MS" pitchFamily="34" charset="0"/>
                 <a:ea typeface="Trebuchet MS" pitchFamily="34" charset="-122"/>
                 <a:cs typeface="Trebuchet MS" pitchFamily="34" charset="-120"/>
               </a:rPr>
-              <a:t>Offenes CORS</a:t>
-            </a:r>
-            <a:endParaRPr lang="en-US" sz="1900" dirty="0"/>
-          </a:p>
-        </p:txBody>
-      </p:sp>
-      <p:sp>
-        <p:nvSpPr>
-          <p:cNvPr id="8" name="Text 6"/>
-          <p:cNvSpPr/>
-          <p:nvPr/>
-        </p:nvSpPr>
-        <p:spPr>
-          <a:xfrm>
-            <a:off x="868680" y="3310128"/>
-            <a:ext cx="10454335" cy="365760"/>
+              <a:t>01</a:t>
+            </a:r>
+            <a:endParaRPr lang="en-US" sz="1700" dirty="0"/>
+          </a:p>
+        </p:txBody>
+      </p:sp>
+      <p:sp>
+        <p:nvSpPr>
+          <p:cNvPr id="9" name="Text 7"/>
+          <p:cNvSpPr/>
+          <p:nvPr/>
+        </p:nvSpPr>
+        <p:spPr>
+          <a:xfrm>
+            <a:off x="1508760" y="3794760"/>
+            <a:ext cx="9814255" cy="457200"/>
           </a:xfrm>
           <a:prstGeom prst="rect">
             <a:avLst/>
@@ -14355,42 +14214,19 @@
               <a:buNone/>
             </a:pPr>
             <a:r>
-              <a:rPr lang="en-US" sz="1400" dirty="0">
-                <a:solidFill>
-                  <a:srgbClr val="55606E"/>
-                </a:solidFill>
-                <a:latin typeface="Calibri" pitchFamily="34" charset="0"/>
-                <a:ea typeface="Calibri" pitchFamily="34" charset="-122"/>
-                <a:cs typeface="Calibri" pitchFamily="34" charset="-120"/>
-              </a:rPr>
-              <a:t>weicht die Browser-Sperre für fremde Origins auf.</a:t>
-            </a:r>
-            <a:endParaRPr lang="en-US" sz="1400" dirty="0"/>
-          </a:p>
-        </p:txBody>
-      </p:sp>
-      <p:sp>
-        <p:nvSpPr>
-          <p:cNvPr id="9" name="Shape 7"/>
-          <p:cNvSpPr/>
-          <p:nvPr/>
-        </p:nvSpPr>
-        <p:spPr>
-          <a:xfrm>
-            <a:off x="868680" y="3822192"/>
-            <a:ext cx="10454335" cy="0"/>
-          </a:xfrm>
-          <a:prstGeom prst="line">
-            <a:avLst/>
-          </a:prstGeom>
-          <a:noFill/>
-          <a:ln w="12700">
-            <a:solidFill>
-              <a:srgbClr val="E4E7EC"/>
-            </a:solidFill>
-            <a:prstDash val="solid"/>
-          </a:ln>
-        </p:spPr>
+              <a:rPr lang="en-US" sz="1600" dirty="0">
+                <a:solidFill>
+                  <a:srgbClr val="16181D"/>
+                </a:solidFill>
+                <a:latin typeface="Calibri" pitchFamily="34" charset="0"/>
+                <a:ea typeface="Calibri" pitchFamily="34" charset="-122"/>
+                <a:cs typeface="Calibri" pitchFamily="34" charset="-120"/>
+              </a:rPr>
+              <a:t>Saubere Trennung von Dev- und Prod-Properties.</a:t>
+            </a:r>
+            <a:endParaRPr lang="en-US" sz="1600" dirty="0"/>
+          </a:p>
+        </p:txBody>
       </p:sp>
       <p:sp>
         <p:nvSpPr>
@@ -14400,8 +14236,8 @@
         </p:nvSpPr>
         <p:spPr>
           <a:xfrm>
-            <a:off x="868680" y="3968496"/>
-            <a:ext cx="10454335" cy="384048"/>
+            <a:off x="868680" y="4343400"/>
+            <a:ext cx="548640" cy="457200"/>
           </a:xfrm>
           <a:prstGeom prst="rect">
             <a:avLst/>
@@ -14417,17 +14253,17 @@
               <a:buNone/>
             </a:pPr>
             <a:r>
-              <a:rPr lang="en-US" sz="1900" b="1" dirty="0">
-                <a:solidFill>
-                  <a:srgbClr val="16181D"/>
+              <a:rPr lang="en-US" sz="1700" b="1" dirty="0">
+                <a:solidFill>
+                  <a:srgbClr val="9AA3AF"/>
                 </a:solidFill>
                 <a:latin typeface="Trebuchet MS" pitchFamily="34" charset="0"/>
                 <a:ea typeface="Trebuchet MS" pitchFamily="34" charset="-122"/>
                 <a:cs typeface="Trebuchet MS" pitchFamily="34" charset="-120"/>
               </a:rPr>
-              <a:t>Unauthentifizierter /files-Endpunkt</a:t>
-            </a:r>
-            <a:endParaRPr lang="en-US" sz="1900" dirty="0"/>
+              <a:t>02</a:t>
+            </a:r>
+            <a:endParaRPr lang="en-US" sz="1700" dirty="0"/>
           </a:p>
         </p:txBody>
       </p:sp>
@@ -14439,8 +14275,8 @@
         </p:nvSpPr>
         <p:spPr>
           <a:xfrm>
-            <a:off x="868680" y="4389120"/>
-            <a:ext cx="10454335" cy="365760"/>
+            <a:off x="1508760" y="4343400"/>
+            <a:ext cx="9814255" cy="457200"/>
           </a:xfrm>
           <a:prstGeom prst="rect">
             <a:avLst/>
@@ -14456,53 +14292,41 @@
               <a:buNone/>
             </a:pPr>
             <a:r>
-              <a:rPr lang="en-US" sz="1400" dirty="0">
-                <a:solidFill>
-                  <a:srgbClr val="55606E"/>
-                </a:solidFill>
-                <a:latin typeface="Calibri" pitchFamily="34" charset="0"/>
-                <a:ea typeface="Calibri" pitchFamily="34" charset="-122"/>
-                <a:cs typeface="Calibri" pitchFamily="34" charset="-120"/>
-              </a:rPr>
-              <a:t>liefert Datei-Exporte ohne Anmeldung.</a:t>
-            </a:r>
-            <a:endParaRPr lang="en-US" sz="1400" dirty="0"/>
-          </a:p>
-        </p:txBody>
-      </p:sp>
-      <p:sp>
-        <p:nvSpPr>
-          <p:cNvPr id="12" name="Shape 10"/>
-          <p:cNvSpPr/>
-          <p:nvPr/>
-        </p:nvSpPr>
-        <p:spPr>
-          <a:xfrm>
-            <a:off x="868680" y="4901184"/>
-            <a:ext cx="10454335" cy="0"/>
-          </a:xfrm>
-          <a:prstGeom prst="line">
-            <a:avLst/>
-          </a:prstGeom>
-          <a:noFill/>
-          <a:ln w="12700">
-            <a:solidFill>
-              <a:srgbClr val="E4E7EC"/>
-            </a:solidFill>
-            <a:prstDash val="solid"/>
-          </a:ln>
-        </p:spPr>
-      </p:sp>
-      <p:sp>
-        <p:nvSpPr>
-          <p:cNvPr id="13" name="Text 11"/>
-          <p:cNvSpPr/>
-          <p:nvPr/>
-        </p:nvSpPr>
-        <p:spPr>
-          <a:xfrm>
-            <a:off x="868680" y="5047488"/>
-            <a:ext cx="10454335" cy="384048"/>
+              <a:rPr lang="en-US" sz="1600" dirty="0" err="1">
+                <a:solidFill>
+                  <a:srgbClr val="16181D"/>
+                </a:solidFill>
+                <a:latin typeface="Calibri" pitchFamily="34" charset="0"/>
+                <a:ea typeface="Calibri" pitchFamily="34" charset="-122"/>
+                <a:cs typeface="Calibri" pitchFamily="34" charset="-120"/>
+              </a:rPr>
+              <a:t>Authentifizierung</a:t>
+            </a:r>
+            <a:r>
+              <a:rPr lang="en-US" sz="1600" dirty="0">
+                <a:solidFill>
+                  <a:srgbClr val="16181D"/>
+                </a:solidFill>
+                <a:latin typeface="Calibri" pitchFamily="34" charset="0"/>
+                <a:ea typeface="Calibri" pitchFamily="34" charset="-122"/>
+                <a:cs typeface="Calibri" pitchFamily="34" charset="-120"/>
+              </a:rPr>
+              <a:t> für Datei-Exporte erzwingen.</a:t>
+            </a:r>
+            <a:endParaRPr lang="en-US" sz="1600" dirty="0"/>
+          </a:p>
+        </p:txBody>
+      </p:sp>
+      <p:sp>
+        <p:nvSpPr>
+          <p:cNvPr id="12" name="Text 10"/>
+          <p:cNvSpPr/>
+          <p:nvPr/>
+        </p:nvSpPr>
+        <p:spPr>
+          <a:xfrm>
+            <a:off x="868680" y="4892040"/>
+            <a:ext cx="548640" cy="457200"/>
           </a:xfrm>
           <a:prstGeom prst="rect">
             <a:avLst/>
@@ -14518,41 +14342,108 @@
               <a:buNone/>
             </a:pPr>
             <a:r>
-              <a:rPr lang="en-US" sz="1900" b="1" dirty="0" err="1">
-                <a:solidFill>
-                  <a:srgbClr val="16181D"/>
+              <a:rPr lang="en-US" sz="1700" b="1" dirty="0">
+                <a:solidFill>
+                  <a:srgbClr val="9AA3AF"/>
                 </a:solidFill>
                 <a:latin typeface="Trebuchet MS" pitchFamily="34" charset="0"/>
                 <a:ea typeface="Trebuchet MS" pitchFamily="34" charset="-122"/>
                 <a:cs typeface="Trebuchet MS" pitchFamily="34" charset="-120"/>
               </a:rPr>
-              <a:t>Unsichere</a:t>
-            </a:r>
-            <a:r>
-              <a:rPr lang="en-US" sz="1900" b="1" dirty="0">
+              <a:t>03</a:t>
+            </a:r>
+            <a:endParaRPr lang="en-US" sz="1700" dirty="0"/>
+          </a:p>
+        </p:txBody>
+      </p:sp>
+      <p:sp>
+        <p:nvSpPr>
+          <p:cNvPr id="13" name="Text 11"/>
+          <p:cNvSpPr/>
+          <p:nvPr/>
+        </p:nvSpPr>
+        <p:spPr>
+          <a:xfrm>
+            <a:off x="1508760" y="4892040"/>
+            <a:ext cx="9814255" cy="457200"/>
+          </a:xfrm>
+          <a:prstGeom prst="rect">
+            <a:avLst/>
+          </a:prstGeom>
+          <a:noFill/>
+          <a:ln/>
+        </p:spPr>
+        <p:txBody>
+          <a:bodyPr wrap="square" lIns="0" tIns="0" rIns="0" bIns="0" rtlCol="0" anchor="ctr"/>
+          <a:lstStyle/>
+          <a:p>
+            <a:pPr marL="0" indent="0">
+              <a:buNone/>
+            </a:pPr>
+            <a:r>
+              <a:rPr lang="en-US" sz="1600" dirty="0">
                 <a:solidFill>
                   <a:srgbClr val="16181D"/>
+                </a:solidFill>
+                <a:latin typeface="Calibri" pitchFamily="34" charset="0"/>
+                <a:ea typeface="Calibri" pitchFamily="34" charset="-122"/>
+                <a:cs typeface="Calibri" pitchFamily="34" charset="-120"/>
+              </a:rPr>
+              <a:t>Keycloak-Wildcards schliessen, veraltete Flows deaktivieren.</a:t>
+            </a:r>
+            <a:endParaRPr lang="en-US" sz="1600" dirty="0"/>
+          </a:p>
+        </p:txBody>
+      </p:sp>
+      <p:sp>
+        <p:nvSpPr>
+          <p:cNvPr id="14" name="Text 12"/>
+          <p:cNvSpPr/>
+          <p:nvPr/>
+        </p:nvSpPr>
+        <p:spPr>
+          <a:xfrm>
+            <a:off x="868680" y="5440680"/>
+            <a:ext cx="548640" cy="457200"/>
+          </a:xfrm>
+          <a:prstGeom prst="rect">
+            <a:avLst/>
+          </a:prstGeom>
+          <a:noFill/>
+          <a:ln/>
+        </p:spPr>
+        <p:txBody>
+          <a:bodyPr wrap="square" lIns="0" tIns="0" rIns="0" bIns="0" rtlCol="0" anchor="ctr"/>
+          <a:lstStyle/>
+          <a:p>
+            <a:pPr marL="0" indent="0">
+              <a:buNone/>
+            </a:pPr>
+            <a:r>
+              <a:rPr lang="en-US" sz="1700" b="1" dirty="0">
+                <a:solidFill>
+                  <a:srgbClr val="9AA3AF"/>
                 </a:solidFill>
                 <a:latin typeface="Trebuchet MS" pitchFamily="34" charset="0"/>
                 <a:ea typeface="Trebuchet MS" pitchFamily="34" charset="-122"/>
                 <a:cs typeface="Trebuchet MS" pitchFamily="34" charset="-120"/>
               </a:rPr>
-              <a:t> Keycloak-Regeln</a:t>
-            </a:r>
-            <a:endParaRPr lang="en-US" sz="1900" dirty="0"/>
-          </a:p>
-        </p:txBody>
-      </p:sp>
-      <p:sp>
-        <p:nvSpPr>
-          <p:cNvPr id="14" name="Text 12"/>
-          <p:cNvSpPr/>
-          <p:nvPr/>
-        </p:nvSpPr>
-        <p:spPr>
-          <a:xfrm>
-            <a:off x="868680" y="5468112"/>
-            <a:ext cx="10454335" cy="365760"/>
+              <a:t>04</a:t>
+            </a:r>
+            <a:endParaRPr lang="en-US" sz="1700" dirty="0"/>
+          </a:p>
+        </p:txBody>
+      </p:sp>
+      <p:sp>
+        <p:nvSpPr>
+          <p:cNvPr id="15" name="Text 13"/>
+          <p:cNvSpPr/>
+          <p:nvPr/>
+        </p:nvSpPr>
+        <p:spPr>
+          <a:xfrm>
+            <a:off x="1508760" y="5440680"/>
+            <a:ext cx="9814255" cy="457200"/>
           </a:xfrm>
           <a:prstGeom prst="rect">
             <a:avLst/>
@@ -14568,26 +14459,26 @@
               <a:buNone/>
             </a:pPr>
             <a:r>
-              <a:rPr lang="en-US" sz="1400" dirty="0">
-                <a:solidFill>
-                  <a:srgbClr val="55606E"/>
-                </a:solidFill>
-                <a:latin typeface="Calibri" pitchFamily="34" charset="0"/>
-                <a:ea typeface="Calibri" pitchFamily="34" charset="-122"/>
-                <a:cs typeface="Calibri" pitchFamily="34" charset="-120"/>
-              </a:rPr>
-              <a:t>Wildcard-Origins und veraltete Token-Flows.</a:t>
-            </a:r>
-            <a:endParaRPr lang="en-US" sz="1400" dirty="0"/>
-          </a:p>
-        </p:txBody>
-      </p:sp>
-      <p:sp>
-        <p:nvSpPr>
-          <p:cNvPr id="15" name="Text 1">
+              <a:rPr lang="en-US" sz="1600" dirty="0">
+                <a:solidFill>
+                  <a:srgbClr val="16181D"/>
+                </a:solidFill>
+                <a:latin typeface="Calibri" pitchFamily="34" charset="0"/>
+                <a:ea typeface="Calibri" pitchFamily="34" charset="-122"/>
+                <a:cs typeface="Calibri" pitchFamily="34" charset="-120"/>
+              </a:rPr>
+              <a:t>Feste CORS-Allowlist statt Origin-Spiegelung.</a:t>
+            </a:r>
+            <a:endParaRPr lang="en-US" sz="1600" dirty="0"/>
+          </a:p>
+        </p:txBody>
+      </p:sp>
+      <p:sp>
+        <p:nvSpPr>
+          <p:cNvPr id="16" name="Text 1">
             <a:extLst>
               <a:ext uri="{FF2B5EF4-FFF2-40B4-BE49-F238E27FC236}">
-                <a16:creationId xmlns:a16="http://schemas.microsoft.com/office/drawing/2014/main" id="{E30CECDF-2AC1-01E7-3CE7-CA5D74B92E3C}"/>
+                <a16:creationId xmlns:a16="http://schemas.microsoft.com/office/drawing/2014/main" id="{50AC08BC-9F32-DDAA-6B5E-9BC06F58D6F6}"/>
               </a:ext>
             </a:extLst>
           </p:cNvPr>
@@ -14632,13 +14523,13 @@
   <p:clrMapOvr>
     <a:masterClrMapping/>
   </p:clrMapOvr>
-  <mc:AlternateContent xmlns:mc="http://schemas.openxmlformats.org/markup-compatibility/2006" xmlns:p14="http://schemas.microsoft.com/office/powerpoint/2010/main">
-    <mc:Choice Requires="p14">
+  <mc:AlternateContent xmlns:mc="http://schemas.openxmlformats.org/markup-compatibility/2006">
+    <mc:Choice xmlns:p14="http://schemas.microsoft.com/office/powerpoint/2010/main" Requires="p14">
       <p:transition spd="med" p14:dur="700">
         <p:fade/>
       </p:transition>
     </mc:Choice>
-    <mc:Fallback xmlns="">
+    <mc:Fallback>
       <p:transition spd="med">
         <p:fade/>
       </p:transition>
@@ -14648,7 +14539,7 @@
 </file>
 
 <file path=ppt/slides/slide25.xml><?xml version="1.0" encoding="utf-8"?>
-<p:sld xmlns:a="http://schemas.openxmlformats.org/drawingml/2006/main" xmlns:r="http://schemas.openxmlformats.org/officeDocument/2006/relationships" xmlns:p="http://schemas.openxmlformats.org/presentationml/2006/main">
+<p:sld xmlns:a="http://schemas.openxmlformats.org/drawingml/2006/main" xmlns:r="http://schemas.openxmlformats.org/officeDocument/2006/relationships" xmlns:p="http://schemas.openxmlformats.org/presentationml/2006/main" show="0">
   <p:cSld>
     <p:spTree>
       <p:nvGrpSpPr>
@@ -14673,7 +14564,7 @@
         <p:spPr>
           <a:xfrm>
             <a:off x="868680" y="502920"/>
-            <a:ext cx="8229600" cy="274320"/>
+            <a:ext cx="7315200" cy="274320"/>
           </a:xfrm>
           <a:prstGeom prst="rect">
             <a:avLst/>
@@ -14697,7 +14588,7 @@
                 <a:ea typeface="Calibri" pitchFamily="34" charset="-122"/>
                 <a:cs typeface="Calibri" pitchFamily="34" charset="-120"/>
               </a:rPr>
-              <a:t>FAZIT</a:t>
+              <a:t>PROBLEM IM PROJEKT · SCHEDULER</a:t>
             </a:r>
             <a:endParaRPr lang="en-US" sz="1050" dirty="0"/>
           </a:p>
@@ -14711,8 +14602,8 @@
         </p:nvSpPr>
         <p:spPr>
           <a:xfrm>
-            <a:off x="868680" y="1188720"/>
-            <a:ext cx="10058400" cy="822960"/>
+            <a:off x="868680" y="1051560"/>
+            <a:ext cx="10424160" cy="777240"/>
           </a:xfrm>
           <a:prstGeom prst="rect">
             <a:avLst/>
@@ -14728,7 +14619,7 @@
               <a:buNone/>
             </a:pPr>
             <a:r>
-              <a:rPr lang="en-US" sz="4400" b="1" dirty="0">
+              <a:rPr lang="en-US" sz="4000" b="1" dirty="0">
                 <a:solidFill>
                   <a:srgbClr val="16181D"/>
                 </a:solidFill>
@@ -14736,9 +14627,9 @@
                 <a:ea typeface="Trebuchet MS" pitchFamily="34" charset="-122"/>
                 <a:cs typeface="Trebuchet MS" pitchFamily="34" charset="-120"/>
               </a:rPr>
-              <a:t>Fazit</a:t>
-            </a:r>
-            <a:endParaRPr lang="en-US" sz="4400" dirty="0"/>
+              <a:t>Zwei Punkte zum Prüfen</a:t>
+            </a:r>
+            <a:endParaRPr lang="en-US" sz="4000" dirty="0"/>
           </a:p>
         </p:txBody>
       </p:sp>
@@ -14750,8 +14641,8 @@
         </p:nvSpPr>
         <p:spPr>
           <a:xfrm>
-            <a:off x="868680" y="2103120"/>
-            <a:ext cx="10058400" cy="822960"/>
+            <a:off x="868680" y="1920240"/>
+            <a:ext cx="10332720" cy="640080"/>
           </a:xfrm>
           <a:prstGeom prst="rect">
             <a:avLst/>
@@ -14767,55 +14658,17 @@
               <a:buNone/>
             </a:pPr>
             <a:r>
-              <a:rPr lang="en-US" sz="2100" b="1" dirty="0">
-                <a:solidFill>
-                  <a:srgbClr val="16181D"/>
-                </a:solidFill>
-                <a:latin typeface="Trebuchet MS" pitchFamily="34" charset="0"/>
-                <a:ea typeface="Trebuchet MS" pitchFamily="34" charset="-122"/>
-                <a:cs typeface="Trebuchet MS" pitchFamily="34" charset="-120"/>
-              </a:rPr>
-              <a:t>CORS ist kein Schutz - es weicht die Browser-Sperre kontrolliert auf.</a:t>
-            </a:r>
-          </a:p>
-          <a:p>
-            <a:pPr marL="0" indent="0">
-              <a:buNone/>
-            </a:pPr>
-            <a:r>
-              <a:rPr lang="en-US" sz="2100" b="1" dirty="0">
-                <a:solidFill>
-                  <a:srgbClr val="16181D"/>
-                </a:solidFill>
-                <a:latin typeface="Trebuchet MS" pitchFamily="34" charset="0"/>
-                <a:ea typeface="Trebuchet MS" pitchFamily="34" charset="-122"/>
-                <a:cs typeface="Trebuchet MS" pitchFamily="34" charset="-120"/>
-              </a:rPr>
-              <a:t>Auth </a:t>
-            </a:r>
-            <a:r>
-              <a:rPr lang="en-US" sz="2100" b="1" dirty="0" err="1">
-                <a:solidFill>
-                  <a:srgbClr val="16181D"/>
-                </a:solidFill>
-                <a:latin typeface="Trebuchet MS" pitchFamily="34" charset="0"/>
-                <a:ea typeface="Trebuchet MS" pitchFamily="34" charset="-122"/>
-                <a:cs typeface="Trebuchet MS" pitchFamily="34" charset="-120"/>
-              </a:rPr>
-              <a:t>prüft</a:t>
-            </a:r>
-            <a:r>
-              <a:rPr lang="en-US" sz="2100" b="1" dirty="0">
-                <a:solidFill>
-                  <a:srgbClr val="16181D"/>
-                </a:solidFill>
-                <a:latin typeface="Trebuchet MS" pitchFamily="34" charset="0"/>
-                <a:ea typeface="Trebuchet MS" pitchFamily="34" charset="-122"/>
-                <a:cs typeface="Trebuchet MS" pitchFamily="34" charset="-120"/>
-              </a:rPr>
-              <a:t> die Rechte.</a:t>
-            </a:r>
-            <a:endParaRPr lang="en-US" sz="2100" dirty="0"/>
+              <a:rPr lang="en-US" sz="1700" dirty="0">
+                <a:solidFill>
+                  <a:srgbClr val="55606E"/>
+                </a:solidFill>
+                <a:latin typeface="Calibri" pitchFamily="34" charset="0"/>
+                <a:ea typeface="Calibri" pitchFamily="34" charset="-122"/>
+                <a:cs typeface="Calibri" pitchFamily="34" charset="-120"/>
+              </a:rPr>
+              <a:t>CORS schützt nicht vor direktem Zugriff – nur vor dem Lesen durch fremdes JavaScript. Diese zwei Stellen sind unabhängig davon sicherheitsrelevant.</a:t>
+            </a:r>
+            <a:endParaRPr lang="en-US" sz="1700" dirty="0"/>
           </a:p>
         </p:txBody>
       </p:sp>
@@ -14827,8 +14680,8 @@
         </p:nvSpPr>
         <p:spPr>
           <a:xfrm>
-            <a:off x="868680" y="3200400"/>
-            <a:ext cx="10454335" cy="0"/>
+            <a:off x="6172200" y="2971800"/>
+            <a:ext cx="0" cy="2834640"/>
           </a:xfrm>
           <a:prstGeom prst="line">
             <a:avLst/>
@@ -14850,8 +14703,8 @@
         </p:nvSpPr>
         <p:spPr>
           <a:xfrm>
-            <a:off x="868680" y="3429000"/>
-            <a:ext cx="7315200" cy="274320"/>
+            <a:off x="868680" y="2971800"/>
+            <a:ext cx="914400" cy="457200"/>
           </a:xfrm>
           <a:prstGeom prst="rect">
             <a:avLst/>
@@ -14867,46 +14720,7 @@
               <a:buNone/>
             </a:pPr>
             <a:r>
-              <a:rPr lang="en-US" sz="1150" b="1" kern="0" spc="250" dirty="0">
-                <a:solidFill>
-                  <a:srgbClr val="1E8F5E"/>
-                </a:solidFill>
-                <a:latin typeface="Calibri" pitchFamily="34" charset="0"/>
-                <a:ea typeface="Calibri" pitchFamily="34" charset="-122"/>
-                <a:cs typeface="Calibri" pitchFamily="34" charset="-120"/>
-              </a:rPr>
-              <a:t>DIE FINALE LÖSUNG</a:t>
-            </a:r>
-            <a:endParaRPr lang="en-US" sz="1150" dirty="0"/>
-          </a:p>
-        </p:txBody>
-      </p:sp>
-      <p:sp>
-        <p:nvSpPr>
-          <p:cNvPr id="8" name="Text 6"/>
-          <p:cNvSpPr/>
-          <p:nvPr/>
-        </p:nvSpPr>
-        <p:spPr>
-          <a:xfrm>
-            <a:off x="868680" y="3794760"/>
-            <a:ext cx="548640" cy="457200"/>
-          </a:xfrm>
-          <a:prstGeom prst="rect">
-            <a:avLst/>
-          </a:prstGeom>
-          <a:noFill/>
-          <a:ln/>
-        </p:spPr>
-        <p:txBody>
-          <a:bodyPr wrap="square" lIns="0" tIns="0" rIns="0" bIns="0" rtlCol="0" anchor="ctr"/>
-          <a:lstStyle/>
-          <a:p>
-            <a:pPr marL="0" indent="0">
-              <a:buNone/>
-            </a:pPr>
-            <a:r>
-              <a:rPr lang="en-US" sz="1700" b="1" dirty="0">
+              <a:rPr lang="en-US" sz="2200" b="1" dirty="0">
                 <a:solidFill>
                   <a:srgbClr val="9AA3AF"/>
                 </a:solidFill>
@@ -14916,20 +14730,20 @@
               </a:rPr>
               <a:t>01</a:t>
             </a:r>
-            <a:endParaRPr lang="en-US" sz="1700" dirty="0"/>
-          </a:p>
-        </p:txBody>
-      </p:sp>
-      <p:sp>
-        <p:nvSpPr>
-          <p:cNvPr id="9" name="Text 7"/>
-          <p:cNvSpPr/>
-          <p:nvPr/>
-        </p:nvSpPr>
-        <p:spPr>
-          <a:xfrm>
-            <a:off x="1508760" y="3794760"/>
-            <a:ext cx="9814255" cy="457200"/>
+            <a:endParaRPr lang="en-US" sz="2200" dirty="0"/>
+          </a:p>
+        </p:txBody>
+      </p:sp>
+      <p:sp>
+        <p:nvSpPr>
+          <p:cNvPr id="8" name="Text 6"/>
+          <p:cNvSpPr/>
+          <p:nvPr/>
+        </p:nvSpPr>
+        <p:spPr>
+          <a:xfrm>
+            <a:off x="1508760" y="2990088"/>
+            <a:ext cx="4297680" cy="457200"/>
           </a:xfrm>
           <a:prstGeom prst="rect">
             <a:avLst/>
@@ -14945,56 +14759,117 @@
               <a:buNone/>
             </a:pPr>
             <a:r>
-              <a:rPr lang="en-US" sz="1600" dirty="0">
+              <a:rPr lang="en-US" sz="2200" b="1" dirty="0">
                 <a:solidFill>
                   <a:srgbClr val="16181D"/>
-                </a:solidFill>
-                <a:latin typeface="Calibri" pitchFamily="34" charset="0"/>
-                <a:ea typeface="Calibri" pitchFamily="34" charset="-122"/>
-                <a:cs typeface="Calibri" pitchFamily="34" charset="-120"/>
-              </a:rPr>
-              <a:t>Saubere Trennung von Dev- und Prod-Properties.</a:t>
-            </a:r>
-            <a:endParaRPr lang="en-US" sz="1600" dirty="0"/>
-          </a:p>
-        </p:txBody>
-      </p:sp>
-      <p:sp>
-        <p:nvSpPr>
-          <p:cNvPr id="10" name="Text 8"/>
-          <p:cNvSpPr/>
-          <p:nvPr/>
-        </p:nvSpPr>
-        <p:spPr>
-          <a:xfrm>
-            <a:off x="868680" y="4343400"/>
-            <a:ext cx="548640" cy="457200"/>
-          </a:xfrm>
-          <a:prstGeom prst="rect">
-            <a:avLst/>
-          </a:prstGeom>
-          <a:noFill/>
-          <a:ln/>
-        </p:spPr>
-        <p:txBody>
-          <a:bodyPr wrap="square" lIns="0" tIns="0" rIns="0" bIns="0" rtlCol="0" anchor="ctr"/>
-          <a:lstStyle/>
-          <a:p>
-            <a:pPr marL="0" indent="0">
-              <a:buNone/>
-            </a:pPr>
-            <a:r>
-              <a:rPr lang="en-US" sz="1700" b="1" dirty="0">
-                <a:solidFill>
-                  <a:srgbClr val="9AA3AF"/>
                 </a:solidFill>
                 <a:latin typeface="Trebuchet MS" pitchFamily="34" charset="0"/>
                 <a:ea typeface="Trebuchet MS" pitchFamily="34" charset="-122"/>
                 <a:cs typeface="Trebuchet MS" pitchFamily="34" charset="-120"/>
               </a:rPr>
-              <a:t>02</a:t>
-            </a:r>
-            <a:endParaRPr lang="en-US" sz="1700" dirty="0"/>
+              <a:t>/files/** ist öffentlich</a:t>
+            </a:r>
+            <a:endParaRPr lang="en-US" sz="2200" dirty="0"/>
+          </a:p>
+        </p:txBody>
+      </p:sp>
+      <p:sp>
+        <p:nvSpPr>
+          <p:cNvPr id="9" name="Text 7"/>
+          <p:cNvSpPr/>
+          <p:nvPr/>
+        </p:nvSpPr>
+        <p:spPr>
+          <a:xfrm>
+            <a:off x="868680" y="3611880"/>
+            <a:ext cx="4937760" cy="822960"/>
+          </a:xfrm>
+          <a:prstGeom prst="rect">
+            <a:avLst/>
+          </a:prstGeom>
+          <a:noFill/>
+          <a:ln/>
+        </p:spPr>
+        <p:txBody>
+          <a:bodyPr wrap="square" lIns="0" tIns="0" rIns="0" bIns="0" rtlCol="0" anchor="ctr"/>
+          <a:lstStyle/>
+          <a:p>
+            <a:pPr marL="0" indent="0">
+              <a:buNone/>
+            </a:pPr>
+            <a:r>
+              <a:rPr lang="en-US" sz="1400" dirty="0">
+                <a:solidFill>
+                  <a:srgbClr val="55606E"/>
+                </a:solidFill>
+                <a:latin typeface="Calibri" pitchFamily="34" charset="0"/>
+                <a:ea typeface="Calibri" pitchFamily="34" charset="-122"/>
+                <a:cs typeface="Calibri" pitchFamily="34" charset="-120"/>
+              </a:rPr>
+              <a:t>Spring Security erlaubt alle Requests unter /files/** </a:t>
+            </a:r>
+            <a:r>
+              <a:rPr lang="en-US" sz="1400" b="1" dirty="0">
+                <a:solidFill>
+                  <a:srgbClr val="D23B4E"/>
+                </a:solidFill>
+                <a:latin typeface="Calibri" pitchFamily="34" charset="0"/>
+                <a:ea typeface="Calibri" pitchFamily="34" charset="-122"/>
+                <a:cs typeface="Calibri" pitchFamily="34" charset="-120"/>
+              </a:rPr>
+              <a:t>ohne Authentifizierung</a:t>
+            </a:r>
+            <a:r>
+              <a:rPr lang="en-US" sz="1400" dirty="0">
+                <a:solidFill>
+                  <a:srgbClr val="55606E"/>
+                </a:solidFill>
+                <a:latin typeface="Calibri" pitchFamily="34" charset="0"/>
+                <a:ea typeface="Calibri" pitchFamily="34" charset="-122"/>
+                <a:cs typeface="Calibri" pitchFamily="34" charset="-120"/>
+              </a:rPr>
+              <a:t> – u. a. Planungs- und ICS-Dateien.</a:t>
+            </a:r>
+            <a:endParaRPr lang="en-US" sz="1400" dirty="0"/>
+          </a:p>
+        </p:txBody>
+      </p:sp>
+      <p:sp>
+        <p:nvSpPr>
+          <p:cNvPr id="10" name="Text 8"/>
+          <p:cNvSpPr/>
+          <p:nvPr/>
+        </p:nvSpPr>
+        <p:spPr>
+          <a:xfrm>
+            <a:off x="868680" y="4480560"/>
+            <a:ext cx="4937760" cy="365760"/>
+          </a:xfrm>
+          <a:prstGeom prst="rect">
+            <a:avLst/>
+          </a:prstGeom>
+          <a:noFill/>
+          <a:ln/>
+        </p:spPr>
+        <p:txBody>
+          <a:bodyPr wrap="square" lIns="0" tIns="0" rIns="0" bIns="0" rtlCol="0" anchor="ctr"/>
+          <a:lstStyle/>
+          <a:p>
+            <a:pPr marL="0" indent="0">
+              <a:buNone/>
+            </a:pPr>
+            <a:r>
+              <a:rPr lang="en-US" sz="1300" dirty="0">
+                <a:solidFill>
+                  <a:srgbClr val="16181D"/>
+                </a:solidFill>
+                <a:latin typeface="Consolas" pitchFamily="34" charset="0"/>
+                <a:ea typeface="Consolas" pitchFamily="34" charset="-122"/>
+                <a:cs typeface="Consolas" pitchFamily="34" charset="-120"/>
+              </a:rPr>
+              <a:t>GET /files/planningperiod/{id}/download</a:t>
+            </a:r>
+            <a:endParaRPr lang="en-US" sz="1300" dirty="0"/>
           </a:p>
         </p:txBody>
       </p:sp>
@@ -15006,8 +14881,8 @@
         </p:nvSpPr>
         <p:spPr>
           <a:xfrm>
-            <a:off x="1508760" y="4343400"/>
-            <a:ext cx="9814255" cy="457200"/>
+            <a:off x="868680" y="4983480"/>
+            <a:ext cx="4937760" cy="640080"/>
           </a:xfrm>
           <a:prstGeom prst="rect">
             <a:avLst/>
@@ -15023,28 +14898,17 @@
               <a:buNone/>
             </a:pPr>
             <a:r>
-              <a:rPr lang="en-US" sz="1600" dirty="0" err="1">
-                <a:solidFill>
-                  <a:srgbClr val="16181D"/>
-                </a:solidFill>
-                <a:latin typeface="Calibri" pitchFamily="34" charset="0"/>
-                <a:ea typeface="Calibri" pitchFamily="34" charset="-122"/>
-                <a:cs typeface="Calibri" pitchFamily="34" charset="-120"/>
-              </a:rPr>
-              <a:t>Authentifizierung</a:t>
-            </a:r>
-            <a:r>
-              <a:rPr lang="en-US" sz="1600" dirty="0">
-                <a:solidFill>
-                  <a:srgbClr val="16181D"/>
-                </a:solidFill>
-                <a:latin typeface="Calibri" pitchFamily="34" charset="0"/>
-                <a:ea typeface="Calibri" pitchFamily="34" charset="-122"/>
-                <a:cs typeface="Calibri" pitchFamily="34" charset="-120"/>
-              </a:rPr>
-              <a:t> für Datei-Exporte erzwingen.</a:t>
-            </a:r>
-            <a:endParaRPr lang="en-US" sz="1600" dirty="0"/>
+              <a:rPr lang="en-US" sz="1250" i="1" dirty="0">
+                <a:solidFill>
+                  <a:srgbClr val="55606E"/>
+                </a:solidFill>
+                <a:latin typeface="Calibri" pitchFamily="34" charset="0"/>
+                <a:ea typeface="Calibri" pitchFamily="34" charset="-122"/>
+                <a:cs typeface="Calibri" pitchFamily="34" charset="-120"/>
+              </a:rPr>
+              <a:t>Guter Demo-Endpunkt – aber prüfen, ob wirklich alles öffentlich sein soll.</a:t>
+            </a:r>
+            <a:endParaRPr lang="en-US" sz="1250" dirty="0"/>
           </a:p>
         </p:txBody>
       </p:sp>
@@ -15056,8 +14920,8 @@
         </p:nvSpPr>
         <p:spPr>
           <a:xfrm>
-            <a:off x="868680" y="4892040"/>
-            <a:ext cx="548640" cy="457200"/>
+            <a:off x="868680" y="5623560"/>
+            <a:ext cx="4937760" cy="274320"/>
           </a:xfrm>
           <a:prstGeom prst="rect">
             <a:avLst/>
@@ -15073,7 +14937,46 @@
               <a:buNone/>
             </a:pPr>
             <a:r>
-              <a:rPr lang="en-US" sz="1700" b="1" dirty="0">
+              <a:rPr lang="en-US" sz="1050" dirty="0">
+                <a:solidFill>
+                  <a:srgbClr val="9AA3AF"/>
+                </a:solidFill>
+                <a:latin typeface="Consolas" pitchFamily="34" charset="0"/>
+                <a:ea typeface="Consolas" pitchFamily="34" charset="-122"/>
+                <a:cs typeface="Consolas" pitchFamily="34" charset="-120"/>
+              </a:rPr>
+              <a:t>SecurityConfiguration.java:48</a:t>
+            </a:r>
+            <a:endParaRPr lang="en-US" sz="1050" dirty="0"/>
+          </a:p>
+        </p:txBody>
+      </p:sp>
+      <p:sp>
+        <p:nvSpPr>
+          <p:cNvPr id="13" name="Text 11"/>
+          <p:cNvSpPr/>
+          <p:nvPr/>
+        </p:nvSpPr>
+        <p:spPr>
+          <a:xfrm>
+            <a:off x="6446520" y="2971800"/>
+            <a:ext cx="914400" cy="457200"/>
+          </a:xfrm>
+          <a:prstGeom prst="rect">
+            <a:avLst/>
+          </a:prstGeom>
+          <a:noFill/>
+          <a:ln/>
+        </p:spPr>
+        <p:txBody>
+          <a:bodyPr wrap="square" lIns="0" tIns="0" rIns="0" bIns="0" rtlCol="0" anchor="ctr"/>
+          <a:lstStyle/>
+          <a:p>
+            <a:pPr marL="0" indent="0">
+              <a:buNone/>
+            </a:pPr>
+            <a:r>
+              <a:rPr lang="en-US" sz="2200" b="1" dirty="0">
                 <a:solidFill>
                   <a:srgbClr val="9AA3AF"/>
                 </a:solidFill>
@@ -15081,22 +14984,22 @@
                 <a:ea typeface="Trebuchet MS" pitchFamily="34" charset="-122"/>
                 <a:cs typeface="Trebuchet MS" pitchFamily="34" charset="-120"/>
               </a:rPr>
-              <a:t>03</a:t>
-            </a:r>
-            <a:endParaRPr lang="en-US" sz="1700" dirty="0"/>
-          </a:p>
-        </p:txBody>
-      </p:sp>
-      <p:sp>
-        <p:nvSpPr>
-          <p:cNvPr id="13" name="Text 11"/>
-          <p:cNvSpPr/>
-          <p:nvPr/>
-        </p:nvSpPr>
-        <p:spPr>
-          <a:xfrm>
-            <a:off x="1508760" y="4892040"/>
-            <a:ext cx="9814255" cy="457200"/>
+              <a:t>02</a:t>
+            </a:r>
+            <a:endParaRPr lang="en-US" sz="2200" dirty="0"/>
+          </a:p>
+        </p:txBody>
+      </p:sp>
+      <p:sp>
+        <p:nvSpPr>
+          <p:cNvPr id="14" name="Text 12"/>
+          <p:cNvSpPr/>
+          <p:nvPr/>
+        </p:nvSpPr>
+        <p:spPr>
+          <a:xfrm>
+            <a:off x="7086600" y="2990088"/>
+            <a:ext cx="4297680" cy="457200"/>
           </a:xfrm>
           <a:prstGeom prst="rect">
             <a:avLst/>
@@ -15112,56 +15015,17 @@
               <a:buNone/>
             </a:pPr>
             <a:r>
-              <a:rPr lang="en-US" sz="1600" dirty="0">
+              <a:rPr lang="en-US" sz="2200" b="1" dirty="0">
                 <a:solidFill>
                   <a:srgbClr val="16181D"/>
-                </a:solidFill>
-                <a:latin typeface="Calibri" pitchFamily="34" charset="0"/>
-                <a:ea typeface="Calibri" pitchFamily="34" charset="-122"/>
-                <a:cs typeface="Calibri" pitchFamily="34" charset="-120"/>
-              </a:rPr>
-              <a:t>Keycloak-Wildcards schliessen, veraltete Flows deaktivieren.</a:t>
-            </a:r>
-            <a:endParaRPr lang="en-US" sz="1600" dirty="0"/>
-          </a:p>
-        </p:txBody>
-      </p:sp>
-      <p:sp>
-        <p:nvSpPr>
-          <p:cNvPr id="14" name="Text 12"/>
-          <p:cNvSpPr/>
-          <p:nvPr/>
-        </p:nvSpPr>
-        <p:spPr>
-          <a:xfrm>
-            <a:off x="868680" y="5440680"/>
-            <a:ext cx="548640" cy="457200"/>
-          </a:xfrm>
-          <a:prstGeom prst="rect">
-            <a:avLst/>
-          </a:prstGeom>
-          <a:noFill/>
-          <a:ln/>
-        </p:spPr>
-        <p:txBody>
-          <a:bodyPr wrap="square" lIns="0" tIns="0" rIns="0" bIns="0" rtlCol="0" anchor="ctr"/>
-          <a:lstStyle/>
-          <a:p>
-            <a:pPr marL="0" indent="0">
-              <a:buNone/>
-            </a:pPr>
-            <a:r>
-              <a:rPr lang="en-US" sz="1700" b="1" dirty="0">
-                <a:solidFill>
-                  <a:srgbClr val="9AA3AF"/>
                 </a:solidFill>
                 <a:latin typeface="Trebuchet MS" pitchFamily="34" charset="0"/>
                 <a:ea typeface="Trebuchet MS" pitchFamily="34" charset="-122"/>
                 <a:cs typeface="Trebuchet MS" pitchFamily="34" charset="-120"/>
               </a:rPr>
-              <a:t>04</a:t>
-            </a:r>
-            <a:endParaRPr lang="en-US" sz="1700" dirty="0"/>
+              <a:t>Keycloak: webOrigins</a:t>
+            </a:r>
+            <a:endParaRPr lang="en-US" sz="2200" dirty="0"/>
           </a:p>
         </p:txBody>
       </p:sp>
@@ -15173,8 +15037,8 @@
         </p:nvSpPr>
         <p:spPr>
           <a:xfrm>
-            <a:off x="1508760" y="5440680"/>
-            <a:ext cx="9814255" cy="457200"/>
+            <a:off x="6446520" y="3611880"/>
+            <a:ext cx="4937760" cy="640080"/>
           </a:xfrm>
           <a:prstGeom prst="rect">
             <a:avLst/>
@@ -15190,26 +15054,299 @@
               <a:buNone/>
             </a:pPr>
             <a:r>
-              <a:rPr lang="en-US" sz="1600" dirty="0">
+              <a:rPr lang="en-US" sz="1400" dirty="0">
+                <a:solidFill>
+                  <a:srgbClr val="55606E"/>
+                </a:solidFill>
+                <a:latin typeface="Calibri" pitchFamily="34" charset="0"/>
+                <a:ea typeface="Calibri" pitchFamily="34" charset="-122"/>
+                <a:cs typeface="Calibri" pitchFamily="34" charset="-120"/>
+              </a:rPr>
+              <a:t>Der Web-Client im Realm-Export nutzt eine Wildcard und unnötige OAuth-Flows – zu breit für einen SPA-Client.</a:t>
+            </a:r>
+            <a:endParaRPr lang="en-US" sz="1400" dirty="0"/>
+          </a:p>
+        </p:txBody>
+      </p:sp>
+      <p:sp>
+        <p:nvSpPr>
+          <p:cNvPr id="16" name="Text 14"/>
+          <p:cNvSpPr/>
+          <p:nvPr/>
+        </p:nvSpPr>
+        <p:spPr>
+          <a:xfrm>
+            <a:off x="6446520" y="4370832"/>
+            <a:ext cx="3017520" cy="365760"/>
+          </a:xfrm>
+          <a:prstGeom prst="rect">
+            <a:avLst/>
+          </a:prstGeom>
+          <a:noFill/>
+          <a:ln/>
+        </p:spPr>
+        <p:txBody>
+          <a:bodyPr wrap="square" lIns="0" tIns="0" rIns="0" bIns="0" rtlCol="0" anchor="ctr"/>
+          <a:lstStyle/>
+          <a:p>
+            <a:pPr marL="0" indent="0">
+              <a:buNone/>
+            </a:pPr>
+            <a:r>
+              <a:rPr lang="en-US" sz="1300" b="1" dirty="0">
                 <a:solidFill>
                   <a:srgbClr val="16181D"/>
                 </a:solidFill>
-                <a:latin typeface="Calibri" pitchFamily="34" charset="0"/>
-                <a:ea typeface="Calibri" pitchFamily="34" charset="-122"/>
-                <a:cs typeface="Calibri" pitchFamily="34" charset="-120"/>
-              </a:rPr>
-              <a:t>Feste CORS-Allowlist statt Origin-Spiegelung.</a:t>
-            </a:r>
-            <a:endParaRPr lang="en-US" sz="1600" dirty="0"/>
-          </a:p>
-        </p:txBody>
-      </p:sp>
-      <p:sp>
-        <p:nvSpPr>
-          <p:cNvPr id="16" name="Text 1">
+                <a:latin typeface="Consolas" pitchFamily="34" charset="0"/>
+                <a:ea typeface="Consolas" pitchFamily="34" charset="-122"/>
+                <a:cs typeface="Consolas" pitchFamily="34" charset="-120"/>
+              </a:rPr>
+              <a:t>webOrigins: ["*"]</a:t>
+            </a:r>
+            <a:endParaRPr lang="en-US" sz="1300" dirty="0"/>
+          </a:p>
+        </p:txBody>
+      </p:sp>
+      <p:sp>
+        <p:nvSpPr>
+          <p:cNvPr id="17" name="Text 15"/>
+          <p:cNvSpPr/>
+          <p:nvPr/>
+        </p:nvSpPr>
+        <p:spPr>
+          <a:xfrm>
+            <a:off x="9464040" y="4370832"/>
+            <a:ext cx="1920240" cy="365760"/>
+          </a:xfrm>
+          <a:prstGeom prst="rect">
+            <a:avLst/>
+          </a:prstGeom>
+          <a:noFill/>
+          <a:ln/>
+        </p:spPr>
+        <p:txBody>
+          <a:bodyPr wrap="square" lIns="0" tIns="0" rIns="0" bIns="0" rtlCol="0" anchor="ctr"/>
+          <a:lstStyle/>
+          <a:p>
+            <a:pPr marL="0" indent="0" algn="r">
+              <a:buNone/>
+            </a:pPr>
+            <a:r>
+              <a:rPr lang="en-US" sz="1200" i="1" dirty="0">
+                <a:solidFill>
+                  <a:srgbClr val="D23B4E"/>
+                </a:solidFill>
+                <a:latin typeface="Calibri" pitchFamily="34" charset="0"/>
+                <a:ea typeface="Calibri" pitchFamily="34" charset="-122"/>
+                <a:cs typeface="Calibri" pitchFamily="34" charset="-120"/>
+              </a:rPr>
+              <a:t>jede Origin</a:t>
+            </a:r>
+            <a:endParaRPr lang="en-US" sz="1200" dirty="0"/>
+          </a:p>
+        </p:txBody>
+      </p:sp>
+      <p:sp>
+        <p:nvSpPr>
+          <p:cNvPr id="18" name="Text 16"/>
+          <p:cNvSpPr/>
+          <p:nvPr/>
+        </p:nvSpPr>
+        <p:spPr>
+          <a:xfrm>
+            <a:off x="6446520" y="4782312"/>
+            <a:ext cx="3017520" cy="365760"/>
+          </a:xfrm>
+          <a:prstGeom prst="rect">
+            <a:avLst/>
+          </a:prstGeom>
+          <a:noFill/>
+          <a:ln/>
+        </p:spPr>
+        <p:txBody>
+          <a:bodyPr wrap="square" lIns="0" tIns="0" rIns="0" bIns="0" rtlCol="0" anchor="ctr"/>
+          <a:lstStyle/>
+          <a:p>
+            <a:pPr marL="0" indent="0">
+              <a:buNone/>
+            </a:pPr>
+            <a:r>
+              <a:rPr lang="en-US" sz="1300" b="1" dirty="0">
+                <a:solidFill>
+                  <a:srgbClr val="16181D"/>
+                </a:solidFill>
+                <a:latin typeface="Consolas" pitchFamily="34" charset="0"/>
+                <a:ea typeface="Consolas" pitchFamily="34" charset="-122"/>
+                <a:cs typeface="Consolas" pitchFamily="34" charset="-120"/>
+              </a:rPr>
+              <a:t>implicitFlowEnabled</a:t>
+            </a:r>
+            <a:endParaRPr lang="en-US" sz="1300" dirty="0"/>
+          </a:p>
+        </p:txBody>
+      </p:sp>
+      <p:sp>
+        <p:nvSpPr>
+          <p:cNvPr id="19" name="Text 17"/>
+          <p:cNvSpPr/>
+          <p:nvPr/>
+        </p:nvSpPr>
+        <p:spPr>
+          <a:xfrm>
+            <a:off x="9464040" y="4782312"/>
+            <a:ext cx="1920240" cy="365760"/>
+          </a:xfrm>
+          <a:prstGeom prst="rect">
+            <a:avLst/>
+          </a:prstGeom>
+          <a:noFill/>
+          <a:ln/>
+        </p:spPr>
+        <p:txBody>
+          <a:bodyPr wrap="square" lIns="0" tIns="0" rIns="0" bIns="0" rtlCol="0" anchor="ctr"/>
+          <a:lstStyle/>
+          <a:p>
+            <a:pPr marL="0" indent="0" algn="r">
+              <a:buNone/>
+            </a:pPr>
+            <a:r>
+              <a:rPr lang="en-US" sz="1200" i="1" dirty="0">
+                <a:solidFill>
+                  <a:srgbClr val="D23B4E"/>
+                </a:solidFill>
+                <a:latin typeface="Calibri" pitchFamily="34" charset="0"/>
+                <a:ea typeface="Calibri" pitchFamily="34" charset="-122"/>
+                <a:cs typeface="Calibri" pitchFamily="34" charset="-120"/>
+              </a:rPr>
+              <a:t>Token im Fragment</a:t>
+            </a:r>
+            <a:endParaRPr lang="en-US" sz="1200" dirty="0"/>
+          </a:p>
+        </p:txBody>
+      </p:sp>
+      <p:sp>
+        <p:nvSpPr>
+          <p:cNvPr id="20" name="Text 18"/>
+          <p:cNvSpPr/>
+          <p:nvPr/>
+        </p:nvSpPr>
+        <p:spPr>
+          <a:xfrm>
+            <a:off x="6446520" y="5193792"/>
+            <a:ext cx="3017520" cy="365760"/>
+          </a:xfrm>
+          <a:prstGeom prst="rect">
+            <a:avLst/>
+          </a:prstGeom>
+          <a:noFill/>
+          <a:ln/>
+        </p:spPr>
+        <p:txBody>
+          <a:bodyPr wrap="square" lIns="0" tIns="0" rIns="0" bIns="0" rtlCol="0" anchor="ctr"/>
+          <a:lstStyle/>
+          <a:p>
+            <a:pPr marL="0" indent="0">
+              <a:buNone/>
+            </a:pPr>
+            <a:r>
+              <a:rPr lang="en-US" sz="1300" b="1" dirty="0">
+                <a:solidFill>
+                  <a:srgbClr val="16181D"/>
+                </a:solidFill>
+                <a:latin typeface="Consolas" pitchFamily="34" charset="0"/>
+                <a:ea typeface="Consolas" pitchFamily="34" charset="-122"/>
+                <a:cs typeface="Consolas" pitchFamily="34" charset="-120"/>
+              </a:rPr>
+              <a:t>directAccessGrants</a:t>
+            </a:r>
+            <a:endParaRPr lang="en-US" sz="1300" dirty="0"/>
+          </a:p>
+        </p:txBody>
+      </p:sp>
+      <p:sp>
+        <p:nvSpPr>
+          <p:cNvPr id="21" name="Text 19"/>
+          <p:cNvSpPr/>
+          <p:nvPr/>
+        </p:nvSpPr>
+        <p:spPr>
+          <a:xfrm>
+            <a:off x="9464040" y="5193792"/>
+            <a:ext cx="1920240" cy="365760"/>
+          </a:xfrm>
+          <a:prstGeom prst="rect">
+            <a:avLst/>
+          </a:prstGeom>
+          <a:noFill/>
+          <a:ln/>
+        </p:spPr>
+        <p:txBody>
+          <a:bodyPr wrap="square" lIns="0" tIns="0" rIns="0" bIns="0" rtlCol="0" anchor="ctr"/>
+          <a:lstStyle/>
+          <a:p>
+            <a:pPr marL="0" indent="0" algn="r">
+              <a:buNone/>
+            </a:pPr>
+            <a:r>
+              <a:rPr lang="en-US" sz="1200" i="1" dirty="0">
+                <a:solidFill>
+                  <a:srgbClr val="D23B4E"/>
+                </a:solidFill>
+                <a:latin typeface="Calibri" pitchFamily="34" charset="0"/>
+                <a:ea typeface="Calibri" pitchFamily="34" charset="-122"/>
+                <a:cs typeface="Calibri" pitchFamily="34" charset="-120"/>
+              </a:rPr>
+              <a:t>Passwort-Grant</a:t>
+            </a:r>
+            <a:endParaRPr lang="en-US" sz="1200" dirty="0"/>
+          </a:p>
+        </p:txBody>
+      </p:sp>
+      <p:sp>
+        <p:nvSpPr>
+          <p:cNvPr id="22" name="Text 20"/>
+          <p:cNvSpPr/>
+          <p:nvPr/>
+        </p:nvSpPr>
+        <p:spPr>
+          <a:xfrm>
+            <a:off x="6446520" y="5623560"/>
+            <a:ext cx="4937760" cy="274320"/>
+          </a:xfrm>
+          <a:prstGeom prst="rect">
+            <a:avLst/>
+          </a:prstGeom>
+          <a:noFill/>
+          <a:ln/>
+        </p:spPr>
+        <p:txBody>
+          <a:bodyPr wrap="square" lIns="0" tIns="0" rIns="0" bIns="0" rtlCol="0" anchor="ctr"/>
+          <a:lstStyle/>
+          <a:p>
+            <a:pPr marL="0" indent="0">
+              <a:buNone/>
+            </a:pPr>
+            <a:r>
+              <a:rPr lang="en-US" sz="1050" dirty="0">
+                <a:solidFill>
+                  <a:srgbClr val="9AA3AF"/>
+                </a:solidFill>
+                <a:latin typeface="Consolas" pitchFamily="34" charset="0"/>
+                <a:ea typeface="Consolas" pitchFamily="34" charset="-122"/>
+                <a:cs typeface="Consolas" pitchFamily="34" charset="-120"/>
+              </a:rPr>
+              <a:t>scheduler.json:859-867</a:t>
+            </a:r>
+            <a:endParaRPr lang="en-US" sz="1050" dirty="0"/>
+          </a:p>
+        </p:txBody>
+      </p:sp>
+      <p:sp>
+        <p:nvSpPr>
+          <p:cNvPr id="23" name="Text 1">
             <a:extLst>
               <a:ext uri="{FF2B5EF4-FFF2-40B4-BE49-F238E27FC236}">
-                <a16:creationId xmlns:a16="http://schemas.microsoft.com/office/drawing/2014/main" id="{50AC08BC-9F32-DDAA-6B5E-9BC06F58D6F6}"/>
+                <a16:creationId xmlns:a16="http://schemas.microsoft.com/office/drawing/2014/main" id="{159D14D2-A691-AC5D-DD1D-60255DAD0117}"/>
               </a:ext>
             </a:extLst>
           </p:cNvPr>
@@ -15254,13 +15391,13 @@
   <p:clrMapOvr>
     <a:masterClrMapping/>
   </p:clrMapOvr>
-  <mc:AlternateContent xmlns:mc="http://schemas.openxmlformats.org/markup-compatibility/2006" xmlns:p14="http://schemas.microsoft.com/office/powerpoint/2010/main">
-    <mc:Choice Requires="p14">
+  <mc:AlternateContent xmlns:mc="http://schemas.openxmlformats.org/markup-compatibility/2006">
+    <mc:Choice xmlns:p14="http://schemas.microsoft.com/office/powerpoint/2010/main" Requires="p14">
       <p:transition spd="med" p14:dur="700">
         <p:fade/>
       </p:transition>
     </mc:Choice>
-    <mc:Fallback xmlns="">
+    <mc:Fallback>
       <p:transition spd="med">
         <p:fade/>
       </p:transition>
@@ -15880,6 +16017,18 @@
   <p:clrMapOvr>
     <a:masterClrMapping/>
   </p:clrMapOvr>
+  <mc:AlternateContent xmlns:mc="http://schemas.openxmlformats.org/markup-compatibility/2006">
+    <mc:Choice xmlns:p14="http://schemas.microsoft.com/office/powerpoint/2010/main" Requires="p14">
+      <p:transition spd="med" p14:dur="700">
+        <p:fade/>
+      </p:transition>
+    </mc:Choice>
+    <mc:Fallback>
+      <p:transition spd="med">
+        <p:fade/>
+      </p:transition>
+    </mc:Fallback>
+  </mc:AlternateContent>
 </p:sld>
 </file>
 
@@ -16607,6 +16756,18 @@
   <p:clrMapOvr>
     <a:masterClrMapping/>
   </p:clrMapOvr>
+  <mc:AlternateContent xmlns:mc="http://schemas.openxmlformats.org/markup-compatibility/2006">
+    <mc:Choice xmlns:p14="http://schemas.microsoft.com/office/powerpoint/2010/main" Requires="p14">
+      <p:transition spd="med" p14:dur="700">
+        <p:fade/>
+      </p:transition>
+    </mc:Choice>
+    <mc:Fallback>
+      <p:transition spd="med">
+        <p:fade/>
+      </p:transition>
+    </mc:Fallback>
+  </mc:AlternateContent>
 </p:sld>
 </file>
 
@@ -17587,6 +17748,18 @@
   <p:clrMapOvr>
     <a:masterClrMapping/>
   </p:clrMapOvr>
+  <mc:AlternateContent xmlns:mc="http://schemas.openxmlformats.org/markup-compatibility/2006">
+    <mc:Choice xmlns:p14="http://schemas.microsoft.com/office/powerpoint/2010/main" Requires="p14">
+      <p:transition spd="med" p14:dur="700">
+        <p:fade/>
+      </p:transition>
+    </mc:Choice>
+    <mc:Fallback>
+      <p:transition spd="med">
+        <p:fade/>
+      </p:transition>
+    </mc:Fallback>
+  </mc:AlternateContent>
 </p:sld>
 </file>
 
@@ -18567,6 +18740,18 @@
   <p:clrMapOvr>
     <a:masterClrMapping/>
   </p:clrMapOvr>
+  <mc:AlternateContent xmlns:mc="http://schemas.openxmlformats.org/markup-compatibility/2006">
+    <mc:Choice xmlns:p14="http://schemas.microsoft.com/office/powerpoint/2010/main" Requires="p14">
+      <p:transition spd="med" p14:dur="700">
+        <p:fade/>
+      </p:transition>
+    </mc:Choice>
+    <mc:Fallback>
+      <p:transition spd="med">
+        <p:fade/>
+      </p:transition>
+    </mc:Fallback>
+  </mc:AlternateContent>
 </p:sld>
 </file>
 
@@ -19294,6 +19479,18 @@
   <p:clrMapOvr>
     <a:masterClrMapping/>
   </p:clrMapOvr>
+  <mc:AlternateContent xmlns:mc="http://schemas.openxmlformats.org/markup-compatibility/2006">
+    <mc:Choice xmlns:p14="http://schemas.microsoft.com/office/powerpoint/2010/main" Requires="p14">
+      <p:transition spd="med" p14:dur="700">
+        <p:fade/>
+      </p:transition>
+    </mc:Choice>
+    <mc:Fallback>
+      <p:transition spd="med">
+        <p:fade/>
+      </p:transition>
+    </mc:Fallback>
+  </mc:AlternateContent>
 </p:sld>
 </file>
 
@@ -19578,6 +19775,18 @@
   <p:clrMapOvr>
     <a:masterClrMapping/>
   </p:clrMapOvr>
+  <mc:AlternateContent xmlns:mc="http://schemas.openxmlformats.org/markup-compatibility/2006">
+    <mc:Choice xmlns:p14="http://schemas.microsoft.com/office/powerpoint/2010/main" Requires="p14">
+      <p:transition spd="med" p14:dur="700">
+        <p:fade/>
+      </p:transition>
+    </mc:Choice>
+    <mc:Fallback>
+      <p:transition spd="med">
+        <p:fade/>
+      </p:transition>
+    </mc:Fallback>
+  </mc:AlternateContent>
 </p:sld>
 </file>
 
@@ -20513,6 +20722,18 @@
   <p:clrMapOvr>
     <a:masterClrMapping/>
   </p:clrMapOvr>
+  <mc:AlternateContent xmlns:mc="http://schemas.openxmlformats.org/markup-compatibility/2006">
+    <mc:Choice xmlns:p14="http://schemas.microsoft.com/office/powerpoint/2010/main" Requires="p14">
+      <p:transition spd="med" p14:dur="700">
+        <p:fade/>
+      </p:transition>
+    </mc:Choice>
+    <mc:Fallback>
+      <p:transition spd="med">
+        <p:fade/>
+      </p:transition>
+    </mc:Fallback>
+  </mc:AlternateContent>
 </p:sld>
 </file>
 

--- a/XSS-CORS-Praesentation.pptx
+++ b/XSS-CORS-Praesentation.pptx
@@ -184,6 +184,14 @@
     </p:ext>
   </p:extLst>
 </p:presentation>
+</file>
+
+<file path=ppt/revisionInfo.xml><?xml version="1.0" encoding="utf-8"?>
+<p1510:revInfo xmlns:a="http://schemas.openxmlformats.org/drawingml/2006/main" xmlns:r="http://schemas.openxmlformats.org/officeDocument/2006/relationships" xmlns:p1510="http://schemas.microsoft.com/office/powerpoint/2015/10/main">
+  <p1510:revLst>
+    <p1510:client id="{3936D8B2-EE5C-4402-A73C-56A4568A741A}" v="48" dt="2026-06-10T13:26:20.273"/>
+  </p1510:revLst>
+</p1510:revInfo>
 </file>
 
 <file path=ppt/notesMasters/notesMaster1.xml><?xml version="1.0" encoding="utf-8"?>
@@ -3362,13 +3370,13 @@
   <p:clrMapOvr>
     <a:masterClrMapping/>
   </p:clrMapOvr>
-  <mc:AlternateContent xmlns:mc="http://schemas.openxmlformats.org/markup-compatibility/2006">
-    <mc:Choice xmlns:p14="http://schemas.microsoft.com/office/powerpoint/2010/main" Requires="p14">
+  <mc:AlternateContent xmlns:mc="http://schemas.openxmlformats.org/markup-compatibility/2006" xmlns:p14="http://schemas.microsoft.com/office/powerpoint/2010/main">
+    <mc:Choice Requires="p14">
       <p:transition spd="med" p14:dur="700">
         <p:fade/>
       </p:transition>
     </mc:Choice>
-    <mc:Fallback>
+    <mc:Fallback xmlns="">
       <p:transition spd="med">
         <p:fade/>
       </p:transition>
@@ -3553,8 +3561,8 @@
         </p:nvSpPr>
         <p:spPr>
           <a:xfrm>
-            <a:off x="6172200" y="2971800"/>
-            <a:ext cx="0" cy="2834640"/>
+            <a:off x="6153615" y="2990385"/>
+            <a:ext cx="9293" cy="3094835"/>
           </a:xfrm>
           <a:prstGeom prst="line">
             <a:avLst/>
@@ -3764,7 +3772,7 @@
         </p:nvSpPr>
         <p:spPr>
           <a:xfrm>
-            <a:off x="868680" y="4983480"/>
+            <a:off x="868680" y="5438822"/>
             <a:ext cx="4937760" cy="640080"/>
           </a:xfrm>
           <a:prstGeom prst="rect">
@@ -3809,7 +3817,7 @@
         </p:nvSpPr>
         <p:spPr>
           <a:xfrm>
-            <a:off x="868680" y="5623560"/>
+            <a:off x="868680" y="6162536"/>
             <a:ext cx="4937760" cy="274320"/>
           </a:xfrm>
           <a:prstGeom prst="rect">
@@ -3944,7 +3952,7 @@
         </p:nvSpPr>
         <p:spPr>
           <a:xfrm>
-            <a:off x="6446520" y="3611880"/>
+            <a:off x="6455813" y="3379563"/>
             <a:ext cx="4937760" cy="640080"/>
           </a:xfrm>
           <a:prstGeom prst="rect">
@@ -3989,7 +3997,7 @@
         </p:nvSpPr>
         <p:spPr>
           <a:xfrm>
-            <a:off x="6446520" y="4370832"/>
+            <a:off x="6688130" y="4203564"/>
             <a:ext cx="3017520" cy="365760"/>
           </a:xfrm>
           <a:prstGeom prst="rect">
@@ -4034,7 +4042,7 @@
         </p:nvSpPr>
         <p:spPr>
           <a:xfrm>
-            <a:off x="9464040" y="4370832"/>
+            <a:off x="9454747" y="4203564"/>
             <a:ext cx="1920240" cy="365760"/>
           </a:xfrm>
           <a:prstGeom prst="rect">
@@ -4079,7 +4087,7 @@
         </p:nvSpPr>
         <p:spPr>
           <a:xfrm>
-            <a:off x="6446520" y="4782312"/>
+            <a:off x="7004081" y="4484946"/>
             <a:ext cx="3017520" cy="365760"/>
           </a:xfrm>
           <a:prstGeom prst="rect">
@@ -4124,7 +4132,7 @@
         </p:nvSpPr>
         <p:spPr>
           <a:xfrm>
-            <a:off x="9464040" y="4782312"/>
+            <a:off x="9464040" y="4494239"/>
             <a:ext cx="1920240" cy="365760"/>
           </a:xfrm>
           <a:prstGeom prst="rect">
@@ -4169,7 +4177,7 @@
         </p:nvSpPr>
         <p:spPr>
           <a:xfrm>
-            <a:off x="6446520" y="5193792"/>
+            <a:off x="6688130" y="4803500"/>
             <a:ext cx="3017520" cy="365760"/>
           </a:xfrm>
           <a:prstGeom prst="rect">
@@ -4185,61 +4193,33 @@
               <a:buNone/>
             </a:pPr>
             <a:r>
-              <a:rPr sz="1300" b="1">
+              <a:rPr lang="de-DE" sz="1300" b="1" dirty="0">
                 <a:solidFill>
                   <a:srgbClr val="16181D"/>
                 </a:solidFill>
                 <a:latin typeface="Consolas"/>
-                <a:ea typeface="Consolas"/>
-                <a:cs typeface="Consolas"/>
-              </a:rPr>
-              <a:t>Ergebnis</a:t>
-            </a:r>
-          </a:p>
-        </p:txBody>
-      </p:sp>
-      <p:sp>
-        <p:nvSpPr>
-          <p:cNvPr id="21" name="Text 19">
-            <a:extLst>
-              <a:ext uri="{FF2B5EF4-FFF2-40B4-BE49-F238E27FC236}">
-                <a16:creationId xmlns:a16="http://schemas.microsoft.com/office/drawing/2014/main" id="{97DC8436-6B9E-4ACA-8DCB-610FD3084EE3}"/>
-              </a:ext>
-            </a:extLst>
-          </p:cNvPr>
-          <p:cNvSpPr>
-            <a:spLocks noGrp="1"/>
-          </p:cNvSpPr>
-          <p:nvPr/>
-        </p:nvSpPr>
-        <p:spPr>
-          <a:xfrm>
-            <a:off x="9464040" y="5193792"/>
-            <a:ext cx="1920240" cy="365760"/>
-          </a:xfrm>
-          <a:prstGeom prst="rect">
-            <a:avLst/>
-          </a:prstGeom>
-          <a:noFill/>
-        </p:spPr>
-        <p:txBody>
-          <a:bodyPr wrap="square" lIns="0" tIns="0" rIns="0" bIns="0" anchor="ctr"/>
-          <a:lstStyle/>
-          <a:p>
-            <a:pPr marL="0" indent="0" algn="r">
-              <a:buNone/>
-            </a:pPr>
-            <a:r>
-              <a:rPr sz="1200" i="1">
-                <a:solidFill>
-                  <a:srgbClr val="D23B4E"/>
-                </a:solidFill>
-                <a:latin typeface="Calibri"/>
-                <a:ea typeface="Calibri"/>
-                <a:cs typeface="Calibri"/>
-              </a:rPr>
-              <a:t>Text statt Code</a:t>
-            </a:r>
+              </a:rPr>
+              <a:t>&lt;</a:t>
+            </a:r>
+            <a:r>
+              <a:rPr lang="de-DE" sz="1300" b="1" dirty="0" err="1">
+                <a:solidFill>
+                  <a:srgbClr val="16181D"/>
+                </a:solidFill>
+                <a:latin typeface="Consolas"/>
+              </a:rPr>
+              <a:t>template</a:t>
+            </a:r>
+            <a:r>
+              <a:rPr lang="de-DE" sz="1300" b="1" dirty="0">
+                <a:solidFill>
+                  <a:srgbClr val="16181D"/>
+                </a:solidFill>
+                <a:latin typeface="Consolas"/>
+              </a:rPr>
+              <a:t>&gt;</a:t>
+            </a:r>
+            <a:endParaRPr lang="de-DE" dirty="0"/>
           </a:p>
         </p:txBody>
       </p:sp>
@@ -4259,7 +4239,7 @@
         </p:nvSpPr>
         <p:spPr>
           <a:xfrm>
-            <a:off x="6446520" y="5623560"/>
+            <a:off x="6446520" y="6162536"/>
             <a:ext cx="4937760" cy="274320"/>
           </a:xfrm>
           <a:prstGeom prst="rect">
@@ -4330,6 +4310,204 @@
               <a:t>10</a:t>
             </a:fld>
             <a:endParaRPr lang="en-US" sz="1050" dirty="0"/>
+          </a:p>
+        </p:txBody>
+      </p:sp>
+      <p:sp>
+        <p:nvSpPr>
+          <p:cNvPr id="23" name="Text 14">
+            <a:extLst>
+              <a:ext uri="{FF2B5EF4-FFF2-40B4-BE49-F238E27FC236}">
+                <a16:creationId xmlns:a16="http://schemas.microsoft.com/office/drawing/2014/main" id="{790E6680-DEAF-79FE-997D-B579AC52F0A7}"/>
+              </a:ext>
+            </a:extLst>
+          </p:cNvPr>
+          <p:cNvSpPr>
+            <a:spLocks noGrp="1"/>
+          </p:cNvSpPr>
+          <p:nvPr/>
+        </p:nvSpPr>
+        <p:spPr>
+          <a:xfrm>
+            <a:off x="6446519" y="3999124"/>
+            <a:ext cx="3017520" cy="365760"/>
+          </a:xfrm>
+          <a:prstGeom prst="rect">
+            <a:avLst/>
+          </a:prstGeom>
+          <a:noFill/>
+        </p:spPr>
+        <p:txBody>
+          <a:bodyPr wrap="square" lIns="0" tIns="0" rIns="0" bIns="0" anchor="ctr"/>
+          <a:lstStyle/>
+          <a:p>
+            <a:r>
+              <a:rPr lang="en-US" sz="1300" b="1" dirty="0">
+                <a:solidFill>
+                  <a:srgbClr val="16181D"/>
+                </a:solidFill>
+                <a:latin typeface="Consolas"/>
+                <a:ea typeface="Consolas"/>
+                <a:cs typeface="Consolas"/>
+              </a:rPr>
+              <a:t>&lt;</a:t>
+            </a:r>
+            <a:r>
+              <a:rPr lang="en-US" sz="1300" b="1" dirty="0" err="1">
+                <a:solidFill>
+                  <a:srgbClr val="16181D"/>
+                </a:solidFill>
+                <a:latin typeface="Consolas"/>
+                <a:ea typeface="Consolas"/>
+                <a:cs typeface="Consolas"/>
+              </a:rPr>
+              <a:t>VueCal</a:t>
+            </a:r>
+            <a:r>
+              <a:rPr lang="en-US" sz="1300" b="1" dirty="0">
+                <a:solidFill>
+                  <a:srgbClr val="16181D"/>
+                </a:solidFill>
+                <a:latin typeface="Consolas"/>
+                <a:ea typeface="Consolas"/>
+                <a:cs typeface="Consolas"/>
+              </a:rPr>
+              <a:t> :events="events" /&gt;</a:t>
+            </a:r>
+          </a:p>
+          <a:p>
+            <a:pPr marL="0" indent="0">
+              <a:buNone/>
+            </a:pPr>
+            <a:endParaRPr sz="1300" b="1" dirty="0">
+              <a:solidFill>
+                <a:srgbClr val="16181D"/>
+              </a:solidFill>
+              <a:latin typeface="Consolas"/>
+              <a:ea typeface="Consolas"/>
+              <a:cs typeface="Consolas"/>
+            </a:endParaRPr>
+          </a:p>
+        </p:txBody>
+      </p:sp>
+      <p:sp>
+        <p:nvSpPr>
+          <p:cNvPr id="25" name="Text 9">
+            <a:extLst>
+              <a:ext uri="{FF2B5EF4-FFF2-40B4-BE49-F238E27FC236}">
+                <a16:creationId xmlns:a16="http://schemas.microsoft.com/office/drawing/2014/main" id="{D1397139-91AE-B426-7B3D-BDAD328AE4ED}"/>
+              </a:ext>
+            </a:extLst>
+          </p:cNvPr>
+          <p:cNvSpPr>
+            <a:spLocks noGrp="1"/>
+          </p:cNvSpPr>
+          <p:nvPr/>
+        </p:nvSpPr>
+        <p:spPr>
+          <a:xfrm>
+            <a:off x="6434996" y="5438821"/>
+            <a:ext cx="3971322" cy="723714"/>
+          </a:xfrm>
+          <a:prstGeom prst="rect">
+            <a:avLst/>
+          </a:prstGeom>
+          <a:noFill/>
+        </p:spPr>
+        <p:txBody>
+          <a:bodyPr wrap="square" lIns="0" tIns="0" rIns="0" bIns="0" anchor="ctr"/>
+          <a:lstStyle/>
+          <a:p>
+            <a:r>
+              <a:rPr lang="de-DE" sz="1250" i="1">
+                <a:solidFill>
+                  <a:srgbClr val="55606E"/>
+                </a:solidFill>
+                <a:latin typeface="Calibri"/>
+                <a:ea typeface="Calibri"/>
+                <a:cs typeface="Calibri"/>
+              </a:rPr>
+              <a:t>Text statt Code</a:t>
+            </a:r>
+            <a:r>
+              <a:rPr sz="1250" i="1">
+                <a:solidFill>
+                  <a:srgbClr val="55606E"/>
+                </a:solidFill>
+                <a:latin typeface="Calibri"/>
+                <a:ea typeface="Calibri"/>
+                <a:cs typeface="Calibri"/>
+              </a:rPr>
+              <a:t>.</a:t>
+            </a:r>
+          </a:p>
+        </p:txBody>
+      </p:sp>
+      <p:sp>
+        <p:nvSpPr>
+          <p:cNvPr id="26" name="Text 18">
+            <a:extLst>
+              <a:ext uri="{FF2B5EF4-FFF2-40B4-BE49-F238E27FC236}">
+                <a16:creationId xmlns:a16="http://schemas.microsoft.com/office/drawing/2014/main" id="{EA9AEB05-21AE-C13A-F79E-3E89CF72013B}"/>
+              </a:ext>
+            </a:extLst>
+          </p:cNvPr>
+          <p:cNvSpPr>
+            <a:spLocks noGrp="1"/>
+          </p:cNvSpPr>
+          <p:nvPr/>
+        </p:nvSpPr>
+        <p:spPr>
+          <a:xfrm>
+            <a:off x="6437227" y="5128744"/>
+            <a:ext cx="3017520" cy="365760"/>
+          </a:xfrm>
+          <a:prstGeom prst="rect">
+            <a:avLst/>
+          </a:prstGeom>
+          <a:noFill/>
+        </p:spPr>
+        <p:txBody>
+          <a:bodyPr wrap="square" lIns="0" tIns="0" rIns="0" bIns="0" anchor="ctr"/>
+          <a:lstStyle/>
+          <a:p>
+            <a:pPr marL="0" indent="0">
+              <a:buNone/>
+            </a:pPr>
+            <a:r>
+              <a:rPr lang="de-DE" sz="1300" b="1" dirty="0">
+                <a:solidFill>
+                  <a:srgbClr val="16181D"/>
+                </a:solidFill>
+                <a:latin typeface="Consolas"/>
+                <a:ea typeface="+mn-lt"/>
+                <a:cs typeface="+mn-lt"/>
+              </a:rPr>
+              <a:t>&lt;/</a:t>
+            </a:r>
+            <a:r>
+              <a:rPr lang="de-DE" sz="1300" b="1" dirty="0" err="1">
+                <a:solidFill>
+                  <a:srgbClr val="16181D"/>
+                </a:solidFill>
+                <a:latin typeface="Consolas"/>
+                <a:ea typeface="+mn-lt"/>
+                <a:cs typeface="+mn-lt"/>
+              </a:rPr>
+              <a:t>VueCal</a:t>
+            </a:r>
+            <a:r>
+              <a:rPr lang="de-DE" sz="1300" b="1" dirty="0">
+                <a:solidFill>
+                  <a:srgbClr val="16181D"/>
+                </a:solidFill>
+                <a:latin typeface="Consolas"/>
+                <a:ea typeface="+mn-lt"/>
+                <a:cs typeface="+mn-lt"/>
+              </a:rPr>
+              <a:t>&gt;</a:t>
+            </a:r>
+            <a:endParaRPr lang="de-DE" dirty="0"/>
           </a:p>
         </p:txBody>
       </p:sp>
@@ -4343,13 +4521,13 @@
   <p:clrMapOvr>
     <a:masterClrMapping/>
   </p:clrMapOvr>
-  <mc:AlternateContent xmlns:mc="http://schemas.openxmlformats.org/markup-compatibility/2006">
-    <mc:Choice xmlns:p14="http://schemas.microsoft.com/office/powerpoint/2010/main" Requires="p14">
+  <mc:AlternateContent xmlns:mc="http://schemas.openxmlformats.org/markup-compatibility/2006" xmlns:p14="http://schemas.microsoft.com/office/powerpoint/2010/main">
+    <mc:Choice Requires="p14">
       <p:transition spd="med" p14:dur="700">
         <p:fade/>
       </p:transition>
     </mc:Choice>
-    <mc:Fallback>
+    <mc:Fallback xmlns="">
       <p:transition spd="med">
         <p:fade/>
       </p:transition>
@@ -4815,13 +4993,13 @@
   <p:clrMapOvr>
     <a:masterClrMapping/>
   </p:clrMapOvr>
-  <mc:AlternateContent xmlns:mc="http://schemas.openxmlformats.org/markup-compatibility/2006">
-    <mc:Choice xmlns:p14="http://schemas.microsoft.com/office/powerpoint/2010/main" Requires="p14">
+  <mc:AlternateContent xmlns:mc="http://schemas.openxmlformats.org/markup-compatibility/2006" xmlns:p14="http://schemas.microsoft.com/office/powerpoint/2010/main">
+    <mc:Choice Requires="p14">
       <p:transition spd="med" p14:dur="700">
         <p:fade/>
       </p:transition>
     </mc:Choice>
-    <mc:Fallback>
+    <mc:Fallback xmlns="">
       <p:transition spd="med">
         <p:fade/>
       </p:transition>
@@ -5200,13 +5378,13 @@
   <p:clrMapOvr>
     <a:masterClrMapping/>
   </p:clrMapOvr>
-  <mc:AlternateContent xmlns:mc="http://schemas.openxmlformats.org/markup-compatibility/2006">
-    <mc:Choice xmlns:p14="http://schemas.microsoft.com/office/powerpoint/2010/main" Requires="p14">
+  <mc:AlternateContent xmlns:mc="http://schemas.openxmlformats.org/markup-compatibility/2006" xmlns:p14="http://schemas.microsoft.com/office/powerpoint/2010/main">
+    <mc:Choice Requires="p14">
       <p:transition spd="med" p14:dur="700">
         <p:fade/>
       </p:transition>
     </mc:Choice>
-    <mc:Fallback>
+    <mc:Fallback xmlns="">
       <p:transition spd="med">
         <p:fade/>
       </p:transition>
@@ -5863,13 +6041,13 @@
   <p:clrMapOvr>
     <a:masterClrMapping/>
   </p:clrMapOvr>
-  <mc:AlternateContent xmlns:mc="http://schemas.openxmlformats.org/markup-compatibility/2006">
-    <mc:Choice xmlns:p14="http://schemas.microsoft.com/office/powerpoint/2010/main" Requires="p14">
+  <mc:AlternateContent xmlns:mc="http://schemas.openxmlformats.org/markup-compatibility/2006" xmlns:p14="http://schemas.microsoft.com/office/powerpoint/2010/main">
+    <mc:Choice Requires="p14">
       <p:transition spd="med" p14:dur="700">
         <p:fade/>
       </p:transition>
     </mc:Choice>
-    <mc:Fallback>
+    <mc:Fallback xmlns="">
       <p:transition spd="med">
         <p:fade/>
       </p:transition>
@@ -6660,13 +6838,13 @@
   <p:clrMapOvr>
     <a:masterClrMapping/>
   </p:clrMapOvr>
-  <mc:AlternateContent xmlns:mc="http://schemas.openxmlformats.org/markup-compatibility/2006">
-    <mc:Choice xmlns:p14="http://schemas.microsoft.com/office/powerpoint/2010/main" Requires="p14">
+  <mc:AlternateContent xmlns:mc="http://schemas.openxmlformats.org/markup-compatibility/2006" xmlns:p14="http://schemas.microsoft.com/office/powerpoint/2010/main">
+    <mc:Choice Requires="p14">
       <p:transition spd="med" p14:dur="700">
         <p:fade/>
       </p:transition>
     </mc:Choice>
-    <mc:Fallback>
+    <mc:Fallback xmlns="">
       <p:transition spd="med">
         <p:fade/>
       </p:transition>
@@ -7487,13 +7665,13 @@
   <p:clrMapOvr>
     <a:masterClrMapping/>
   </p:clrMapOvr>
-  <mc:AlternateContent xmlns:mc="http://schemas.openxmlformats.org/markup-compatibility/2006">
-    <mc:Choice xmlns:p14="http://schemas.microsoft.com/office/powerpoint/2010/main" Requires="p14">
+  <mc:AlternateContent xmlns:mc="http://schemas.openxmlformats.org/markup-compatibility/2006" xmlns:p14="http://schemas.microsoft.com/office/powerpoint/2010/main">
+    <mc:Choice Requires="p14">
       <p:transition spd="med" p14:dur="700">
         <p:fade/>
       </p:transition>
     </mc:Choice>
-    <mc:Fallback>
+    <mc:Fallback xmlns="">
       <p:transition spd="med">
         <p:fade/>
       </p:transition>
@@ -8188,13 +8366,13 @@
   <p:clrMapOvr>
     <a:masterClrMapping/>
   </p:clrMapOvr>
-  <mc:AlternateContent xmlns:mc="http://schemas.openxmlformats.org/markup-compatibility/2006">
-    <mc:Choice xmlns:p14="http://schemas.microsoft.com/office/powerpoint/2010/main" Requires="p14">
+  <mc:AlternateContent xmlns:mc="http://schemas.openxmlformats.org/markup-compatibility/2006" xmlns:p14="http://schemas.microsoft.com/office/powerpoint/2010/main">
+    <mc:Choice Requires="p14">
       <p:transition spd="med" p14:dur="700">
         <p:fade/>
       </p:transition>
     </mc:Choice>
-    <mc:Fallback>
+    <mc:Fallback xmlns="">
       <p:transition spd="med">
         <p:fade/>
       </p:transition>
@@ -9034,13 +9212,13 @@
   <p:clrMapOvr>
     <a:masterClrMapping/>
   </p:clrMapOvr>
-  <mc:AlternateContent xmlns:mc="http://schemas.openxmlformats.org/markup-compatibility/2006">
-    <mc:Choice xmlns:p14="http://schemas.microsoft.com/office/powerpoint/2010/main" Requires="p14">
+  <mc:AlternateContent xmlns:mc="http://schemas.openxmlformats.org/markup-compatibility/2006" xmlns:p14="http://schemas.microsoft.com/office/powerpoint/2010/main">
+    <mc:Choice Requires="p14">
       <p:transition spd="med" p14:dur="700">
         <p:fade/>
       </p:transition>
     </mc:Choice>
-    <mc:Fallback>
+    <mc:Fallback xmlns="">
       <p:transition spd="med">
         <p:fade/>
       </p:transition>
@@ -9727,13 +9905,13 @@
   <p:clrMapOvr>
     <a:masterClrMapping/>
   </p:clrMapOvr>
-  <mc:AlternateContent xmlns:mc="http://schemas.openxmlformats.org/markup-compatibility/2006">
-    <mc:Choice xmlns:p14="http://schemas.microsoft.com/office/powerpoint/2010/main" Requires="p14">
+  <mc:AlternateContent xmlns:mc="http://schemas.openxmlformats.org/markup-compatibility/2006" xmlns:p14="http://schemas.microsoft.com/office/powerpoint/2010/main">
+    <mc:Choice Requires="p14">
       <p:transition spd="med" p14:dur="700">
         <p:fade/>
       </p:transition>
     </mc:Choice>
-    <mc:Fallback>
+    <mc:Fallback xmlns="">
       <p:transition spd="med">
         <p:fade/>
       </p:transition>
@@ -10150,13 +10328,13 @@
   <p:clrMapOvr>
     <a:masterClrMapping/>
   </p:clrMapOvr>
-  <mc:AlternateContent xmlns:mc="http://schemas.openxmlformats.org/markup-compatibility/2006">
-    <mc:Choice xmlns:p14="http://schemas.microsoft.com/office/powerpoint/2010/main" Requires="p14">
+  <mc:AlternateContent xmlns:mc="http://schemas.openxmlformats.org/markup-compatibility/2006" xmlns:p14="http://schemas.microsoft.com/office/powerpoint/2010/main">
+    <mc:Choice Requires="p14">
       <p:transition spd="med" p14:dur="700">
         <p:fade/>
       </p:transition>
     </mc:Choice>
-    <mc:Fallback>
+    <mc:Fallback xmlns="">
       <p:transition spd="med">
         <p:fade/>
       </p:transition>
@@ -10544,13 +10722,13 @@
   <p:clrMapOvr>
     <a:masterClrMapping/>
   </p:clrMapOvr>
-  <mc:AlternateContent xmlns:mc="http://schemas.openxmlformats.org/markup-compatibility/2006">
-    <mc:Choice xmlns:p14="http://schemas.microsoft.com/office/powerpoint/2010/main" Requires="p14">
+  <mc:AlternateContent xmlns:mc="http://schemas.openxmlformats.org/markup-compatibility/2006" xmlns:p14="http://schemas.microsoft.com/office/powerpoint/2010/main">
+    <mc:Choice Requires="p14">
       <p:transition spd="med" p14:dur="700">
         <p:fade/>
       </p:transition>
     </mc:Choice>
-    <mc:Fallback>
+    <mc:Fallback xmlns="">
       <p:transition spd="med">
         <p:fade/>
       </p:transition>
@@ -11139,13 +11317,13 @@
   <p:clrMapOvr>
     <a:masterClrMapping/>
   </p:clrMapOvr>
-  <mc:AlternateContent xmlns:mc="http://schemas.openxmlformats.org/markup-compatibility/2006">
-    <mc:Choice xmlns:p14="http://schemas.microsoft.com/office/powerpoint/2010/main" Requires="p14">
+  <mc:AlternateContent xmlns:mc="http://schemas.openxmlformats.org/markup-compatibility/2006" xmlns:p14="http://schemas.microsoft.com/office/powerpoint/2010/main">
+    <mc:Choice Requires="p14">
       <p:transition spd="med" p14:dur="700">
         <p:fade/>
       </p:transition>
     </mc:Choice>
-    <mc:Fallback>
+    <mc:Fallback xmlns="">
       <p:transition spd="med">
         <p:fade/>
       </p:transition>
@@ -11999,13 +12177,13 @@
   <p:clrMapOvr>
     <a:masterClrMapping/>
   </p:clrMapOvr>
-  <mc:AlternateContent xmlns:mc="http://schemas.openxmlformats.org/markup-compatibility/2006">
-    <mc:Choice xmlns:p14="http://schemas.microsoft.com/office/powerpoint/2010/main" Requires="p14">
+  <mc:AlternateContent xmlns:mc="http://schemas.openxmlformats.org/markup-compatibility/2006" xmlns:p14="http://schemas.microsoft.com/office/powerpoint/2010/main">
+    <mc:Choice Requires="p14">
       <p:transition spd="med" p14:dur="700">
         <p:fade/>
       </p:transition>
     </mc:Choice>
-    <mc:Fallback>
+    <mc:Fallback xmlns="">
       <p:transition spd="med">
         <p:fade/>
       </p:transition>
@@ -13271,13 +13449,13 @@
   <p:clrMapOvr>
     <a:masterClrMapping/>
   </p:clrMapOvr>
-  <mc:AlternateContent xmlns:mc="http://schemas.openxmlformats.org/markup-compatibility/2006">
-    <mc:Choice xmlns:p14="http://schemas.microsoft.com/office/powerpoint/2010/main" Requires="p14">
+  <mc:AlternateContent xmlns:mc="http://schemas.openxmlformats.org/markup-compatibility/2006" xmlns:p14="http://schemas.microsoft.com/office/powerpoint/2010/main">
+    <mc:Choice Requires="p14">
       <p:transition spd="med" p14:dur="700">
         <p:fade/>
       </p:transition>
     </mc:Choice>
-    <mc:Fallback>
+    <mc:Fallback xmlns="">
       <p:transition spd="med">
         <p:fade/>
       </p:transition>
@@ -13968,13 +14146,13 @@
   <p:clrMapOvr>
     <a:masterClrMapping/>
   </p:clrMapOvr>
-  <mc:AlternateContent xmlns:mc="http://schemas.openxmlformats.org/markup-compatibility/2006">
-    <mc:Choice xmlns:p14="http://schemas.microsoft.com/office/powerpoint/2010/main" Requires="p14">
+  <mc:AlternateContent xmlns:mc="http://schemas.openxmlformats.org/markup-compatibility/2006" xmlns:p14="http://schemas.microsoft.com/office/powerpoint/2010/main">
+    <mc:Choice Requires="p14">
       <p:transition spd="med" p14:dur="700">
         <p:fade/>
       </p:transition>
     </mc:Choice>
-    <mc:Fallback>
+    <mc:Fallback xmlns="">
       <p:transition spd="med">
         <p:fade/>
       </p:transition>
@@ -14636,13 +14814,13 @@
   <p:clrMapOvr>
     <a:masterClrMapping/>
   </p:clrMapOvr>
-  <mc:AlternateContent xmlns:mc="http://schemas.openxmlformats.org/markup-compatibility/2006">
-    <mc:Choice xmlns:p14="http://schemas.microsoft.com/office/powerpoint/2010/main" Requires="p14">
+  <mc:AlternateContent xmlns:mc="http://schemas.openxmlformats.org/markup-compatibility/2006" xmlns:p14="http://schemas.microsoft.com/office/powerpoint/2010/main">
+    <mc:Choice Requires="p14">
       <p:transition spd="med" p14:dur="700">
         <p:fade/>
       </p:transition>
     </mc:Choice>
-    <mc:Fallback>
+    <mc:Fallback xmlns="">
       <p:transition spd="med">
         <p:fade/>
       </p:transition>
@@ -15801,13 +15979,13 @@
   <p:clrMapOvr>
     <a:masterClrMapping/>
   </p:clrMapOvr>
-  <mc:AlternateContent xmlns:mc="http://schemas.openxmlformats.org/markup-compatibility/2006">
-    <mc:Choice xmlns:p14="http://schemas.microsoft.com/office/powerpoint/2010/main" Requires="p14">
+  <mc:AlternateContent xmlns:mc="http://schemas.openxmlformats.org/markup-compatibility/2006" xmlns:p14="http://schemas.microsoft.com/office/powerpoint/2010/main">
+    <mc:Choice Requires="p14">
       <p:transition spd="med" p14:dur="700">
         <p:fade/>
       </p:transition>
     </mc:Choice>
-    <mc:Fallback>
+    <mc:Fallback xmlns="">
       <p:transition spd="med">
         <p:fade/>
       </p:transition>
@@ -16401,13 +16579,13 @@
   <p:clrMapOvr>
     <a:masterClrMapping/>
   </p:clrMapOvr>
-  <mc:AlternateContent xmlns:mc="http://schemas.openxmlformats.org/markup-compatibility/2006">
-    <mc:Choice xmlns:p14="http://schemas.microsoft.com/office/powerpoint/2010/main" Requires="p14">
+  <mc:AlternateContent xmlns:mc="http://schemas.openxmlformats.org/markup-compatibility/2006" xmlns:p14="http://schemas.microsoft.com/office/powerpoint/2010/main">
+    <mc:Choice Requires="p14">
       <p:transition spd="med" p14:dur="700">
         <p:fade/>
       </p:transition>
     </mc:Choice>
-    <mc:Fallback>
+    <mc:Fallback xmlns="">
       <p:transition spd="med">
         <p:fade/>
       </p:transition>
@@ -17023,13 +17201,13 @@
   <p:clrMapOvr>
     <a:masterClrMapping/>
   </p:clrMapOvr>
-  <mc:AlternateContent xmlns:mc="http://schemas.openxmlformats.org/markup-compatibility/2006">
-    <mc:Choice xmlns:p14="http://schemas.microsoft.com/office/powerpoint/2010/main" Requires="p14">
+  <mc:AlternateContent xmlns:mc="http://schemas.openxmlformats.org/markup-compatibility/2006" xmlns:p14="http://schemas.microsoft.com/office/powerpoint/2010/main">
+    <mc:Choice Requires="p14">
       <p:transition spd="med" p14:dur="700">
         <p:fade/>
       </p:transition>
     </mc:Choice>
-    <mc:Fallback>
+    <mc:Fallback xmlns="">
       <p:transition spd="med">
         <p:fade/>
       </p:transition>
@@ -17891,13 +18069,13 @@
   <p:clrMapOvr>
     <a:masterClrMapping/>
   </p:clrMapOvr>
-  <mc:AlternateContent xmlns:mc="http://schemas.openxmlformats.org/markup-compatibility/2006">
-    <mc:Choice xmlns:p14="http://schemas.microsoft.com/office/powerpoint/2010/main" Requires="p14">
+  <mc:AlternateContent xmlns:mc="http://schemas.openxmlformats.org/markup-compatibility/2006" xmlns:p14="http://schemas.microsoft.com/office/powerpoint/2010/main">
+    <mc:Choice Requires="p14">
       <p:transition spd="med" p14:dur="700">
         <p:fade/>
       </p:transition>
     </mc:Choice>
-    <mc:Fallback>
+    <mc:Fallback xmlns="">
       <p:transition spd="med">
         <p:fade/>
       </p:transition>
@@ -18517,13 +18695,13 @@
   <p:clrMapOvr>
     <a:masterClrMapping/>
   </p:clrMapOvr>
-  <mc:AlternateContent xmlns:mc="http://schemas.openxmlformats.org/markup-compatibility/2006">
-    <mc:Choice xmlns:p14="http://schemas.microsoft.com/office/powerpoint/2010/main" Requires="p14">
+  <mc:AlternateContent xmlns:mc="http://schemas.openxmlformats.org/markup-compatibility/2006" xmlns:p14="http://schemas.microsoft.com/office/powerpoint/2010/main">
+    <mc:Choice Requires="p14">
       <p:transition spd="med" p14:dur="700">
         <p:fade/>
       </p:transition>
     </mc:Choice>
-    <mc:Fallback>
+    <mc:Fallback xmlns="">
       <p:transition spd="med">
         <p:fade/>
       </p:transition>
@@ -19256,13 +19434,13 @@
   <p:clrMapOvr>
     <a:masterClrMapping/>
   </p:clrMapOvr>
-  <mc:AlternateContent xmlns:mc="http://schemas.openxmlformats.org/markup-compatibility/2006">
-    <mc:Choice xmlns:p14="http://schemas.microsoft.com/office/powerpoint/2010/main" Requires="p14">
+  <mc:AlternateContent xmlns:mc="http://schemas.openxmlformats.org/markup-compatibility/2006" xmlns:p14="http://schemas.microsoft.com/office/powerpoint/2010/main">
+    <mc:Choice Requires="p14">
       <p:transition spd="med" p14:dur="700">
         <p:fade/>
       </p:transition>
     </mc:Choice>
-    <mc:Fallback>
+    <mc:Fallback xmlns="">
       <p:transition spd="med">
         <p:fade/>
       </p:transition>
@@ -20248,13 +20426,13 @@
   <p:clrMapOvr>
     <a:masterClrMapping/>
   </p:clrMapOvr>
-  <mc:AlternateContent xmlns:mc="http://schemas.openxmlformats.org/markup-compatibility/2006">
-    <mc:Choice xmlns:p14="http://schemas.microsoft.com/office/powerpoint/2010/main" Requires="p14">
+  <mc:AlternateContent xmlns:mc="http://schemas.openxmlformats.org/markup-compatibility/2006" xmlns:p14="http://schemas.microsoft.com/office/powerpoint/2010/main">
+    <mc:Choice Requires="p14">
       <p:transition spd="med" p14:dur="700">
         <p:fade/>
       </p:transition>
     </mc:Choice>
-    <mc:Fallback>
+    <mc:Fallback xmlns="">
       <p:transition spd="med">
         <p:fade/>
       </p:transition>
@@ -21240,13 +21418,13 @@
   <p:clrMapOvr>
     <a:masterClrMapping/>
   </p:clrMapOvr>
-  <mc:AlternateContent xmlns:mc="http://schemas.openxmlformats.org/markup-compatibility/2006">
-    <mc:Choice xmlns:p14="http://schemas.microsoft.com/office/powerpoint/2010/main" Requires="p14">
+  <mc:AlternateContent xmlns:mc="http://schemas.openxmlformats.org/markup-compatibility/2006" xmlns:p14="http://schemas.microsoft.com/office/powerpoint/2010/main">
+    <mc:Choice Requires="p14">
       <p:transition spd="med" p14:dur="700">
         <p:fade/>
       </p:transition>
     </mc:Choice>
-    <mc:Fallback>
+    <mc:Fallback xmlns="">
       <p:transition spd="med">
         <p:fade/>
       </p:transition>
@@ -21979,13 +22157,13 @@
   <p:clrMapOvr>
     <a:masterClrMapping/>
   </p:clrMapOvr>
-  <mc:AlternateContent xmlns:mc="http://schemas.openxmlformats.org/markup-compatibility/2006">
-    <mc:Choice xmlns:p14="http://schemas.microsoft.com/office/powerpoint/2010/main" Requires="p14">
+  <mc:AlternateContent xmlns:mc="http://schemas.openxmlformats.org/markup-compatibility/2006" xmlns:p14="http://schemas.microsoft.com/office/powerpoint/2010/main">
+    <mc:Choice Requires="p14">
       <p:transition spd="med" p14:dur="700">
         <p:fade/>
       </p:transition>
     </mc:Choice>
-    <mc:Fallback>
+    <mc:Fallback xmlns="">
       <p:transition spd="med">
         <p:fade/>
       </p:transition>
@@ -22275,13 +22453,13 @@
   <p:clrMapOvr>
     <a:masterClrMapping/>
   </p:clrMapOvr>
-  <mc:AlternateContent xmlns:mc="http://schemas.openxmlformats.org/markup-compatibility/2006">
-    <mc:Choice xmlns:p14="http://schemas.microsoft.com/office/powerpoint/2010/main" Requires="p14">
+  <mc:AlternateContent xmlns:mc="http://schemas.openxmlformats.org/markup-compatibility/2006" xmlns:p14="http://schemas.microsoft.com/office/powerpoint/2010/main">
+    <mc:Choice Requires="p14">
       <p:transition spd="med" p14:dur="700">
         <p:fade/>
       </p:transition>
     </mc:Choice>
-    <mc:Fallback>
+    <mc:Fallback xmlns="">
       <p:transition spd="med">
         <p:fade/>
       </p:transition>
@@ -23222,13 +23400,13 @@
   <p:clrMapOvr>
     <a:masterClrMapping/>
   </p:clrMapOvr>
-  <mc:AlternateContent xmlns:mc="http://schemas.openxmlformats.org/markup-compatibility/2006">
-    <mc:Choice xmlns:p14="http://schemas.microsoft.com/office/powerpoint/2010/main" Requires="p14">
+  <mc:AlternateContent xmlns:mc="http://schemas.openxmlformats.org/markup-compatibility/2006" xmlns:p14="http://schemas.microsoft.com/office/powerpoint/2010/main">
+    <mc:Choice Requires="p14">
       <p:transition spd="med" p14:dur="700">
         <p:fade/>
       </p:transition>
     </mc:Choice>
-    <mc:Fallback>
+    <mc:Fallback xmlns="">
       <p:transition spd="med">
         <p:fade/>
       </p:transition>

--- a/XSS-CORS-Praesentation.pptx
+++ b/XSS-CORS-Praesentation.pptx
@@ -3378,7 +3378,7 @@
             </a:pPr>
             <a:fld id="{00000000-1234-1234-1234-123412341234}" type="slidenum">
               <a:rPr lang="en-US"/>
-              <a:t>‹Nr.›</a:t>
+              <a:t>‹#›</a:t>
             </a:fld>
             <a:endParaRPr/>
           </a:p>
@@ -8385,7 +8385,7 @@
                 <a:ea typeface="Calibri" pitchFamily="34" charset="-122"/>
                 <a:cs typeface="Calibri" pitchFamily="34" charset="-120"/>
               </a:rPr>
-              <a:t>z. B. bei deiner Bank - das Cookie liegt im Browser.</a:t>
+              <a:t>z. B. bei deiner Bank - der Cookie liegt im Browser.</a:t>
             </a:r>
             <a:endParaRPr lang="en-US" sz="1400" dirty="0"/>
           </a:p>
@@ -10349,75 +10349,6 @@
       </p:sp>
       <p:sp>
         <p:nvSpPr>
-          <p:cNvPr id="16" name="Shape 14"/>
-          <p:cNvSpPr/>
-          <p:nvPr/>
-        </p:nvSpPr>
-        <p:spPr>
-          <a:xfrm>
-            <a:off x="868680" y="5806440"/>
-            <a:ext cx="10454335" cy="0"/>
-          </a:xfrm>
-          <a:prstGeom prst="line">
-            <a:avLst/>
-          </a:prstGeom>
-          <a:noFill/>
-          <a:ln w="12700">
-            <a:solidFill>
-              <a:srgbClr val="E4E7EC"/>
-            </a:solidFill>
-            <a:prstDash val="solid"/>
-          </a:ln>
-        </p:spPr>
-        <p:txBody>
-          <a:bodyPr/>
-          <a:lstStyle/>
-          <a:p>
-            <a:endParaRPr lang="de-DE"/>
-          </a:p>
-        </p:txBody>
-      </p:sp>
-      <p:sp>
-        <p:nvSpPr>
-          <p:cNvPr id="17" name="Text 15"/>
-          <p:cNvSpPr/>
-          <p:nvPr/>
-        </p:nvSpPr>
-        <p:spPr>
-          <a:xfrm>
-            <a:off x="868680" y="5943600"/>
-            <a:ext cx="10424160" cy="365760"/>
-          </a:xfrm>
-          <a:prstGeom prst="rect">
-            <a:avLst/>
-          </a:prstGeom>
-          <a:noFill/>
-          <a:ln/>
-        </p:spPr>
-        <p:txBody>
-          <a:bodyPr wrap="square" lIns="0" tIns="0" rIns="0" bIns="0" rtlCol="0" anchor="ctr"/>
-          <a:lstStyle/>
-          <a:p>
-            <a:pPr marL="0" indent="0">
-              <a:buNone/>
-            </a:pPr>
-            <a:r>
-              <a:rPr lang="en-US" sz="1350" i="1" dirty="0">
-                <a:solidFill>
-                  <a:srgbClr val="9AA3AF"/>
-                </a:solidFill>
-                <a:latin typeface="Calibri" pitchFamily="34" charset="0"/>
-                <a:ea typeface="Calibri" pitchFamily="34" charset="-122"/>
-                <a:cs typeface="Calibri" pitchFamily="34" charset="-120"/>
-              </a:rPr>
-              <a:t>Wichtig: Der Server schickt die Antwort immer - der Browser ist der Torwächter, nicht der Server.</a:t>
-            </a:r>
-            <a:endParaRPr lang="en-US" sz="1350" dirty="0"/>
-          </a:p>
-        </p:txBody>
-      </p:sp>
-      <p:sp>
-        <p:nvSpPr>
           <p:cNvPr id="18" name="Text 1">
             <a:extLst>
               <a:ext uri="{FF2B5EF4-FFF2-40B4-BE49-F238E27FC236}">
@@ -11227,45 +11158,6 @@
               <a:t>sonst blockiert</a:t>
             </a:r>
             <a:endParaRPr lang="en-US" sz="1250" dirty="0"/>
-          </a:p>
-        </p:txBody>
-      </p:sp>
-      <p:sp>
-        <p:nvSpPr>
-          <p:cNvPr id="22" name="Text 20"/>
-          <p:cNvSpPr/>
-          <p:nvPr/>
-        </p:nvSpPr>
-        <p:spPr>
-          <a:xfrm>
-            <a:off x="868680" y="5989320"/>
-            <a:ext cx="10424160" cy="365760"/>
-          </a:xfrm>
-          <a:prstGeom prst="rect">
-            <a:avLst/>
-          </a:prstGeom>
-          <a:noFill/>
-          <a:ln/>
-        </p:spPr>
-        <p:txBody>
-          <a:bodyPr wrap="square" lIns="0" tIns="0" rIns="0" bIns="0" rtlCol="0" anchor="ctr"/>
-          <a:lstStyle/>
-          <a:p>
-            <a:pPr marL="0" indent="0">
-              <a:buNone/>
-            </a:pPr>
-            <a:r>
-              <a:rPr lang="en-US" sz="1300" i="1" dirty="0">
-                <a:solidFill>
-                  <a:srgbClr val="9AA3AF"/>
-                </a:solidFill>
-                <a:latin typeface="Calibri" pitchFamily="34" charset="0"/>
-                <a:ea typeface="Calibri" pitchFamily="34" charset="-122"/>
-                <a:cs typeface="Calibri" pitchFamily="34" charset="-120"/>
-              </a:rPr>
-              <a:t>Der Preflight kostet eine zusätzliche Runde - deshalb cachen Browser die Antwort (Access-Control-Max-Age).</a:t>
-            </a:r>
-            <a:endParaRPr lang="en-US" sz="1300" dirty="0"/>
           </a:p>
         </p:txBody>
       </p:sp>

--- a/XSS-CORS-Praesentation.pptx
+++ b/XSS-CORS-Praesentation.pptx
@@ -5,7 +5,7 @@
     <p:sldMasterId id="2147483648" r:id="rId1"/>
   </p:sldMasterIdLst>
   <p:notesMasterIdLst>
-    <p:notesMasterId r:id="rId32"/>
+    <p:notesMasterId r:id="rId31"/>
   </p:notesMasterIdLst>
   <p:sldIdLst>
     <p:sldId id="281" r:id="rId2"/>
@@ -37,7 +37,6 @@
     <p:sldId id="278" r:id="rId28"/>
     <p:sldId id="279" r:id="rId29"/>
     <p:sldId id="280" r:id="rId30"/>
-    <p:sldId id="272" r:id="rId31"/>
   </p:sldIdLst>
   <p:sldSz cx="12192000" cy="6858000"/>
   <p:notesSz cx="6858000" cy="9144000"/>
@@ -178,7 +177,6 @@
             <p14:sldId id="278"/>
             <p14:sldId id="279"/>
             <p14:sldId id="280"/>
-            <p14:sldId id="272"/>
           </p14:sldIdLst>
         </p14:section>
       </p14:sectionLst>
@@ -1658,7 +1656,36 @@
           <a:bodyPr/>
           <a:lstStyle/>
           <a:p>
-            <a:endParaRPr lang="en-US" dirty="0"/>
+            <a:r>
+              <a:rPr lang="de-DE" dirty="0"/>
+              <a:t>Übergabe Tom — Demo-Part CORS</a:t>
+            </a:r>
+          </a:p>
+          <a:p>
+            <a:r>
+              <a:rPr lang="de-DE" dirty="0"/>
+              <a:t>4 Komponenten: </a:t>
+            </a:r>
+            <a:r>
+              <a:rPr lang="de-DE" dirty="0" err="1"/>
+              <a:t>Keycloak</a:t>
+            </a:r>
+            <a:r>
+              <a:rPr lang="de-DE" dirty="0"/>
+              <a:t> :8080 · Spring API :8079 · Vue :8078 · exploit.html :5173</a:t>
+            </a:r>
+          </a:p>
+          <a:p>
+            <a:r>
+              <a:rPr lang="de-DE" dirty="0"/>
+              <a:t>Schlüssel: Port 5173 = andere Origin → Browser sieht zwei getrennte Origins</a:t>
+            </a:r>
+          </a:p>
+          <a:p>
+            <a:r>
+              <a:rPr lang="de-DE" dirty="0"/>
+              <a:t>Gleiche Daten, gleiche API — legitimer Nutzer vs. Angreifer</a:t>
+            </a:r>
           </a:p>
         </p:txBody>
       </p:sp>
@@ -1742,6 +1769,78 @@
           <a:bodyPr/>
           <a:lstStyle/>
           <a:p>
+            <a:r>
+              <a:rPr lang="de-DE" dirty="0"/>
+              <a:t>Zustand 1 (unsicher): </a:t>
+            </a:r>
+            <a:r>
+              <a:rPr lang="de-DE" dirty="0" err="1"/>
+              <a:t>allowedOriginPatterns</a:t>
+            </a:r>
+            <a:r>
+              <a:rPr lang="de-DE" dirty="0"/>
+              <a:t>("*") + </a:t>
+            </a:r>
+            <a:r>
+              <a:rPr lang="de-DE" dirty="0" err="1"/>
+              <a:t>allowCredentials</a:t>
+            </a:r>
+            <a:r>
+              <a:rPr lang="de-DE" dirty="0"/>
+              <a:t>(</a:t>
+            </a:r>
+            <a:r>
+              <a:rPr lang="de-DE" dirty="0" err="1"/>
+              <a:t>true</a:t>
+            </a:r>
+            <a:r>
+              <a:rPr lang="de-DE" dirty="0"/>
+              <a:t>)</a:t>
+            </a:r>
+          </a:p>
+          <a:p>
+            <a:r>
+              <a:rPr lang="de-DE" dirty="0"/>
+              <a:t>  → 1 Klick = stiller Download Stundenplan_Export.xlsx</a:t>
+            </a:r>
+          </a:p>
+          <a:p>
+            <a:r>
+              <a:rPr lang="de-DE" dirty="0"/>
+              <a:t>Zustand 2 (sicher): </a:t>
+            </a:r>
+            <a:r>
+              <a:rPr lang="de-DE" dirty="0" err="1"/>
+              <a:t>allowedOrigins</a:t>
+            </a:r>
+            <a:r>
+              <a:rPr lang="de-DE" dirty="0"/>
+              <a:t>(["localhost:8078"]) + </a:t>
+            </a:r>
+            <a:r>
+              <a:rPr lang="de-DE" dirty="0" err="1"/>
+              <a:t>allowCredentials</a:t>
+            </a:r>
+            <a:r>
+              <a:rPr lang="de-DE" dirty="0"/>
+              <a:t>(</a:t>
+            </a:r>
+            <a:r>
+              <a:rPr lang="de-DE" dirty="0" err="1"/>
+              <a:t>false</a:t>
+            </a:r>
+            <a:r>
+              <a:rPr lang="de-DE" dirty="0"/>
+              <a:t>)</a:t>
+            </a:r>
+          </a:p>
+          <a:p>
+            <a:r>
+              <a:rPr lang="de-DE" dirty="0"/>
+              <a:t>  → :8078 erlaubt · :5173 blockiert</a:t>
+            </a:r>
+          </a:p>
+          <a:p>
             <a:endParaRPr lang="en-US" dirty="0"/>
           </a:p>
         </p:txBody>
@@ -1826,6 +1925,24 @@
           <a:bodyPr/>
           <a:lstStyle/>
           <a:p>
+            <a:r>
+              <a:rPr lang="de-DE" dirty="0"/>
+              <a:t>[Zur Demo wechseln]</a:t>
+            </a:r>
+          </a:p>
+          <a:p>
+            <a:r>
+              <a:rPr lang="de-DE" dirty="0"/>
+              <a:t>1. Unsichere Variante zeigen → Download tritt auf</a:t>
+            </a:r>
+          </a:p>
+          <a:p>
+            <a:r>
+              <a:rPr lang="de-DE" dirty="0"/>
+              <a:t>2. Fix aktivieren → Browser blockiert Angreifer-Origin</a:t>
+            </a:r>
+          </a:p>
+          <a:p>
             <a:endParaRPr dirty="0"/>
           </a:p>
         </p:txBody>
@@ -1900,6 +2017,64 @@
         <p:txBody>
           <a:bodyPr/>
           <a:lstStyle/>
+          <a:p>
+            <a:r>
+              <a:rPr lang="de-DE" dirty="0"/>
+              <a:t>Excel war nur der sichtbare Teil — </a:t>
+            </a:r>
+            <a:r>
+              <a:rPr lang="de-DE" dirty="0" err="1"/>
+              <a:t>Keycloak</a:t>
+            </a:r>
+            <a:r>
+              <a:rPr lang="de-DE" dirty="0"/>
+              <a:t> macht es kritischer</a:t>
+            </a:r>
+          </a:p>
+          <a:p>
+            <a:r>
+              <a:rPr lang="de-DE" dirty="0" err="1"/>
+              <a:t>scheduler.json</a:t>
+            </a:r>
+            <a:r>
+              <a:rPr lang="de-DE" dirty="0"/>
+              <a:t>: </a:t>
+            </a:r>
+            <a:r>
+              <a:rPr lang="de-DE" dirty="0" err="1"/>
+              <a:t>webOrigins</a:t>
+            </a:r>
+            <a:r>
+              <a:rPr lang="de-DE" dirty="0"/>
+              <a:t>: ["*"] → jede Origin erlaubt</a:t>
+            </a:r>
+          </a:p>
+          <a:p>
+            <a:r>
+              <a:rPr lang="de-DE" dirty="0" err="1"/>
+              <a:t>implicitFlowEnabled</a:t>
+            </a:r>
+            <a:r>
+              <a:rPr lang="de-DE" dirty="0"/>
+              <a:t> → Token im URL-Fragment (veraltet, unsicher)</a:t>
+            </a:r>
+          </a:p>
+          <a:p>
+            <a:r>
+              <a:rPr lang="de-DE" dirty="0" err="1"/>
+              <a:t>directAccessGrants</a:t>
+            </a:r>
+            <a:r>
+              <a:rPr lang="de-DE" dirty="0"/>
+              <a:t> → Passwort-Grant aktiv (unnötig für SPA)</a:t>
+            </a:r>
+          </a:p>
+          <a:p>
+            <a:r>
+              <a:rPr lang="de-DE" dirty="0"/>
+              <a:t>Einzeln grenzwertig — zusammen zu breit für Produktion</a:t>
+            </a:r>
+          </a:p>
           <a:p>
             <a:endParaRPr lang="en-US" dirty="0"/>
           </a:p>
@@ -1985,6 +2160,67 @@
           <a:bodyPr/>
           <a:lstStyle/>
           <a:p>
+            <a:r>
+              <a:rPr lang="de-DE" dirty="0"/>
+              <a:t>1. Login: gültiges </a:t>
+            </a:r>
+            <a:r>
+              <a:rPr lang="de-DE" dirty="0" err="1"/>
+              <a:t>Bearer</a:t>
+            </a:r>
+            <a:r>
+              <a:rPr lang="de-DE" dirty="0"/>
+              <a:t>-Token liegt im Browser</a:t>
+            </a:r>
+          </a:p>
+          <a:p>
+            <a:r>
+              <a:rPr lang="de-DE" dirty="0"/>
+              <a:t>2. /</a:t>
+            </a:r>
+            <a:r>
+              <a:rPr lang="de-DE" dirty="0" err="1"/>
+              <a:t>session</a:t>
+            </a:r>
+            <a:r>
+              <a:rPr lang="de-DE" dirty="0"/>
+              <a:t>: Fremde Seite liest Antwort dank offenem CORS + </a:t>
+            </a:r>
+            <a:r>
+              <a:rPr lang="de-DE" dirty="0" err="1"/>
+              <a:t>Credentials</a:t>
+            </a:r>
+            <a:endParaRPr lang="de-DE" dirty="0"/>
+          </a:p>
+          <a:p>
+            <a:r>
+              <a:rPr lang="de-DE" dirty="0"/>
+              <a:t>3. </a:t>
+            </a:r>
+            <a:r>
+              <a:rPr lang="de-DE" dirty="0" err="1"/>
+              <a:t>Leaking</a:t>
+            </a:r>
+            <a:r>
+              <a:rPr lang="de-DE" dirty="0"/>
+              <a:t>: </a:t>
+            </a:r>
+            <a:r>
+              <a:rPr lang="de-DE" dirty="0" err="1"/>
+              <a:t>Bearer</a:t>
+            </a:r>
+            <a:r>
+              <a:rPr lang="de-DE" dirty="0"/>
+              <a:t>-Token im Klartext auslesbar</a:t>
+            </a:r>
+          </a:p>
+          <a:p>
+            <a:r>
+              <a:rPr lang="de-DE" dirty="0"/>
+              <a:t>4. Takeover: Angreifer agiert vollständig als Nutzer</a:t>
+            </a:r>
+          </a:p>
+          <a:p>
             <a:endParaRPr lang="en-US" dirty="0"/>
           </a:p>
         </p:txBody>
@@ -2069,6 +2305,42 @@
           <a:bodyPr/>
           <a:lstStyle/>
           <a:p>
+            <a:r>
+              <a:rPr lang="de-DE" dirty="0"/>
+              <a:t>Keine Einzel-Lücke — drei Schichten zusammen = kritisch</a:t>
+            </a:r>
+          </a:p>
+          <a:p>
+            <a:r>
+              <a:rPr lang="de-DE" dirty="0"/>
+              <a:t>Offenes CORS → Browser-Sperre für fremde Origins aufgehoben</a:t>
+            </a:r>
+          </a:p>
+          <a:p>
+            <a:r>
+              <a:rPr lang="de-DE" dirty="0"/>
+              <a:t>/</a:t>
+            </a:r>
+            <a:r>
+              <a:rPr lang="de-DE" dirty="0" err="1"/>
+              <a:t>files</a:t>
+            </a:r>
+            <a:r>
+              <a:rPr lang="de-DE" dirty="0"/>
+              <a:t>/** ohne Auth → direkter Zugriff unabhängig von CORS</a:t>
+            </a:r>
+          </a:p>
+          <a:p>
+            <a:r>
+              <a:rPr lang="de-DE" dirty="0" err="1"/>
+              <a:t>Keycloak</a:t>
+            </a:r>
+            <a:r>
+              <a:rPr lang="de-DE" dirty="0"/>
+              <a:t>: Wildcard-Origins + veraltete Flows</a:t>
+            </a:r>
+          </a:p>
+          <a:p>
             <a:endParaRPr lang="en-US" dirty="0"/>
           </a:p>
         </p:txBody>
@@ -2153,6 +2425,68 @@
           <a:bodyPr/>
           <a:lstStyle/>
           <a:p>
+            <a:r>
+              <a:rPr lang="de-DE" dirty="0"/>
+              <a:t>CORS ≠ Schutz — hebt nur Lesesperre auf · Auth prüft die Rechte</a:t>
+            </a:r>
+          </a:p>
+          <a:p>
+            <a:r>
+              <a:rPr lang="de-DE" dirty="0"/>
+              <a:t>Fix 1: Dev/</a:t>
+            </a:r>
+            <a:r>
+              <a:rPr lang="de-DE" dirty="0" err="1"/>
+              <a:t>Prod</a:t>
+            </a:r>
+            <a:r>
+              <a:rPr lang="de-DE" dirty="0"/>
+              <a:t>-Properties sauber trennen</a:t>
+            </a:r>
+          </a:p>
+          <a:p>
+            <a:r>
+              <a:rPr lang="de-DE" dirty="0"/>
+              <a:t>Fix 2: /</a:t>
+            </a:r>
+            <a:r>
+              <a:rPr lang="de-DE" dirty="0" err="1"/>
+              <a:t>files</a:t>
+            </a:r>
+            <a:r>
+              <a:rPr lang="de-DE" dirty="0"/>
+              <a:t>/** nur mit Authentifizierung</a:t>
+            </a:r>
+          </a:p>
+          <a:p>
+            <a:r>
+              <a:rPr lang="de-DE" dirty="0"/>
+              <a:t>Fix 3: </a:t>
+            </a:r>
+            <a:r>
+              <a:rPr lang="de-DE" dirty="0" err="1"/>
+              <a:t>Keycloak</a:t>
+            </a:r>
+            <a:r>
+              <a:rPr lang="de-DE" dirty="0"/>
+              <a:t> bereinigen — Wildcards schließen, Flows deaktivieren</a:t>
+            </a:r>
+          </a:p>
+          <a:p>
+            <a:r>
+              <a:rPr lang="de-DE" dirty="0"/>
+              <a:t>Fix 4: Feste CORS-</a:t>
+            </a:r>
+            <a:r>
+              <a:rPr lang="de-DE" dirty="0" err="1"/>
+              <a:t>Allowlist</a:t>
+            </a:r>
+            <a:r>
+              <a:rPr lang="de-DE" dirty="0"/>
+              <a:t> statt Wildcard</a:t>
+            </a:r>
+          </a:p>
+          <a:p>
             <a:endParaRPr lang="en-US" dirty="0"/>
           </a:p>
         </p:txBody>
@@ -2292,90 +2626,6 @@
         </p:spPr>
       </p:sp>
     </p:spTree>
-  </p:cSld>
-  <p:clrMapOvr>
-    <a:masterClrMapping/>
-  </p:clrMapOvr>
-</p:notes>
-</file>
-
-<file path=ppt/notesSlides/notesSlide30.xml><?xml version="1.0" encoding="utf-8"?>
-<p:notes xmlns:a="http://schemas.openxmlformats.org/drawingml/2006/main" xmlns:r="http://schemas.openxmlformats.org/officeDocument/2006/relationships" xmlns:p="http://schemas.openxmlformats.org/presentationml/2006/main">
-  <p:cSld>
-    <p:spTree>
-      <p:nvGrpSpPr>
-        <p:cNvPr id="1" name=""/>
-        <p:cNvGrpSpPr/>
-        <p:nvPr/>
-      </p:nvGrpSpPr>
-      <p:grpSpPr>
-        <a:xfrm>
-          <a:off x="0" y="0"/>
-          <a:ext cx="0" cy="0"/>
-          <a:chOff x="0" y="0"/>
-          <a:chExt cx="0" cy="0"/>
-        </a:xfrm>
-      </p:grpSpPr>
-      <p:sp>
-        <p:nvSpPr>
-          <p:cNvPr id="2" name="Slide Image Placeholder 1"/>
-          <p:cNvSpPr>
-            <a:spLocks noGrp="1" noRot="1" noChangeAspect="1"/>
-          </p:cNvSpPr>
-          <p:nvPr>
-            <p:ph type="sldImg"/>
-          </p:nvPr>
-        </p:nvSpPr>
-        <p:spPr/>
-      </p:sp>
-      <p:sp>
-        <p:nvSpPr>
-          <p:cNvPr id="3" name="Notes Placeholder 2"/>
-          <p:cNvSpPr>
-            <a:spLocks noGrp="1"/>
-          </p:cNvSpPr>
-          <p:nvPr>
-            <p:ph type="body" idx="1"/>
-          </p:nvPr>
-        </p:nvSpPr>
-        <p:spPr/>
-        <p:txBody>
-          <a:bodyPr/>
-          <a:lstStyle/>
-          <a:p>
-            <a:endParaRPr lang="en-US" dirty="0"/>
-          </a:p>
-        </p:txBody>
-      </p:sp>
-      <p:sp>
-        <p:nvSpPr>
-          <p:cNvPr id="4" name="Slide Number Placeholder 3"/>
-          <p:cNvSpPr>
-            <a:spLocks noGrp="1"/>
-          </p:cNvSpPr>
-          <p:nvPr>
-            <p:ph type="sldNum" sz="quarter" idx="10"/>
-          </p:nvPr>
-        </p:nvSpPr>
-        <p:spPr/>
-        <p:txBody>
-          <a:bodyPr/>
-          <a:lstStyle/>
-          <a:p>
-            <a:fld id="{F7021451-1387-4CA6-816F-3879F97B5CBC}" type="slidenum">
-              <a:rPr lang="en-US"/>
-              <a:t>30</a:t>
-            </a:fld>
-            <a:endParaRPr lang="en-US"/>
-          </a:p>
-        </p:txBody>
-      </p:sp>
-    </p:spTree>
-    <p:extLst>
-      <p:ext uri="{BB962C8B-B14F-4D97-AF65-F5344CB8AC3E}">
-        <p14:creationId xmlns:p14="http://schemas.microsoft.com/office/powerpoint/2010/main" val="1024086991"/>
-      </p:ext>
-    </p:extLst>
   </p:cSld>
   <p:clrMapOvr>
     <a:masterClrMapping/>
@@ -3378,7 +3628,7 @@
             </a:pPr>
             <a:fld id="{00000000-1234-1234-1234-123412341234}" type="slidenum">
               <a:rPr lang="en-US"/>
-              <a:t>‹#›</a:t>
+              <a:t>‹Nr.›</a:t>
             </a:fld>
             <a:endParaRPr/>
           </a:p>
@@ -19955,881 +20205,6 @@
               </a:rPr>
               <a:t>Zugriff auf Session-Tokens, LocalStorage und Cookies des Opfers ist sofort möglich.</a:t>
             </a:r>
-          </a:p>
-        </p:txBody>
-      </p:sp>
-    </p:spTree>
-  </p:cSld>
-  <p:clrMapOvr>
-    <a:masterClrMapping/>
-  </p:clrMapOvr>
-  <mc:AlternateContent xmlns:mc="http://schemas.openxmlformats.org/markup-compatibility/2006" xmlns:p14="http://schemas.microsoft.com/office/powerpoint/2010/main">
-    <mc:Choice Requires="p14">
-      <p:transition spd="med" p14:dur="700">
-        <p:fade/>
-      </p:transition>
-    </mc:Choice>
-    <mc:Fallback xmlns="">
-      <p:transition spd="med">
-        <p:fade/>
-      </p:transition>
-    </mc:Fallback>
-  </mc:AlternateContent>
-</p:sld>
-</file>
-
-<file path=ppt/slides/slide30.xml><?xml version="1.0" encoding="utf-8"?>
-<p:sld xmlns:a="http://schemas.openxmlformats.org/drawingml/2006/main" xmlns:r="http://schemas.openxmlformats.org/officeDocument/2006/relationships" xmlns:p="http://schemas.openxmlformats.org/presentationml/2006/main" show="0">
-  <p:cSld>
-    <p:spTree>
-      <p:nvGrpSpPr>
-        <p:cNvPr id="1" name=""/>
-        <p:cNvGrpSpPr/>
-        <p:nvPr/>
-      </p:nvGrpSpPr>
-      <p:grpSpPr>
-        <a:xfrm>
-          <a:off x="0" y="0"/>
-          <a:ext cx="0" cy="0"/>
-          <a:chOff x="0" y="0"/>
-          <a:chExt cx="0" cy="0"/>
-        </a:xfrm>
-      </p:grpSpPr>
-      <p:sp>
-        <p:nvSpPr>
-          <p:cNvPr id="2" name="Text 0"/>
-          <p:cNvSpPr/>
-          <p:nvPr/>
-        </p:nvSpPr>
-        <p:spPr>
-          <a:xfrm>
-            <a:off x="868680" y="502920"/>
-            <a:ext cx="7315200" cy="274320"/>
-          </a:xfrm>
-          <a:prstGeom prst="rect">
-            <a:avLst/>
-          </a:prstGeom>
-          <a:noFill/>
-          <a:ln/>
-        </p:spPr>
-        <p:txBody>
-          <a:bodyPr wrap="square" lIns="0" tIns="0" rIns="0" bIns="0" rtlCol="0" anchor="ctr"/>
-          <a:lstStyle/>
-          <a:p>
-            <a:pPr marL="0" indent="0">
-              <a:buNone/>
-            </a:pPr>
-            <a:r>
-              <a:rPr lang="en-US" sz="1050" b="1" kern="0" spc="250" dirty="0">
-                <a:solidFill>
-                  <a:srgbClr val="9AA3AF"/>
-                </a:solidFill>
-                <a:latin typeface="Calibri" pitchFamily="34" charset="0"/>
-                <a:ea typeface="Calibri" pitchFamily="34" charset="-122"/>
-                <a:cs typeface="Calibri" pitchFamily="34" charset="-120"/>
-              </a:rPr>
-              <a:t>PROBLEM IM PROJEKT · SCHEDULER</a:t>
-            </a:r>
-            <a:endParaRPr lang="en-US" sz="1050" dirty="0"/>
-          </a:p>
-        </p:txBody>
-      </p:sp>
-      <p:sp>
-        <p:nvSpPr>
-          <p:cNvPr id="4" name="Text 2"/>
-          <p:cNvSpPr/>
-          <p:nvPr/>
-        </p:nvSpPr>
-        <p:spPr>
-          <a:xfrm>
-            <a:off x="868680" y="1051560"/>
-            <a:ext cx="10424160" cy="777240"/>
-          </a:xfrm>
-          <a:prstGeom prst="rect">
-            <a:avLst/>
-          </a:prstGeom>
-          <a:noFill/>
-          <a:ln/>
-        </p:spPr>
-        <p:txBody>
-          <a:bodyPr wrap="square" lIns="0" tIns="0" rIns="0" bIns="0" rtlCol="0" anchor="ctr"/>
-          <a:lstStyle/>
-          <a:p>
-            <a:pPr marL="0" indent="0">
-              <a:buNone/>
-            </a:pPr>
-            <a:r>
-              <a:rPr lang="en-US" sz="4000" b="1" dirty="0">
-                <a:solidFill>
-                  <a:srgbClr val="16181D"/>
-                </a:solidFill>
-                <a:latin typeface="Trebuchet MS" pitchFamily="34" charset="0"/>
-                <a:ea typeface="Trebuchet MS" pitchFamily="34" charset="-122"/>
-                <a:cs typeface="Trebuchet MS" pitchFamily="34" charset="-120"/>
-              </a:rPr>
-              <a:t>Zwei Punkte zum Prüfen</a:t>
-            </a:r>
-            <a:endParaRPr lang="en-US" sz="4000" dirty="0"/>
-          </a:p>
-        </p:txBody>
-      </p:sp>
-      <p:sp>
-        <p:nvSpPr>
-          <p:cNvPr id="5" name="Text 3"/>
-          <p:cNvSpPr/>
-          <p:nvPr/>
-        </p:nvSpPr>
-        <p:spPr>
-          <a:xfrm>
-            <a:off x="868680" y="1920240"/>
-            <a:ext cx="10332720" cy="640080"/>
-          </a:xfrm>
-          <a:prstGeom prst="rect">
-            <a:avLst/>
-          </a:prstGeom>
-          <a:noFill/>
-          <a:ln/>
-        </p:spPr>
-        <p:txBody>
-          <a:bodyPr wrap="square" lIns="0" tIns="0" rIns="0" bIns="0" rtlCol="0" anchor="ctr"/>
-          <a:lstStyle/>
-          <a:p>
-            <a:pPr marL="0" indent="0">
-              <a:buNone/>
-            </a:pPr>
-            <a:r>
-              <a:rPr lang="en-US" sz="1700" dirty="0">
-                <a:solidFill>
-                  <a:srgbClr val="55606E"/>
-                </a:solidFill>
-                <a:latin typeface="Calibri" pitchFamily="34" charset="0"/>
-                <a:ea typeface="Calibri" pitchFamily="34" charset="-122"/>
-                <a:cs typeface="Calibri" pitchFamily="34" charset="-120"/>
-              </a:rPr>
-              <a:t>CORS schützt nicht vor direktem Zugriff – nur vor dem Lesen durch fremdes JavaScript. Diese zwei Stellen sind unabhängig davon sicherheitsrelevant.</a:t>
-            </a:r>
-            <a:endParaRPr lang="en-US" sz="1700" dirty="0"/>
-          </a:p>
-        </p:txBody>
-      </p:sp>
-      <p:sp>
-        <p:nvSpPr>
-          <p:cNvPr id="6" name="Shape 4"/>
-          <p:cNvSpPr/>
-          <p:nvPr/>
-        </p:nvSpPr>
-        <p:spPr>
-          <a:xfrm>
-            <a:off x="6172200" y="2971800"/>
-            <a:ext cx="0" cy="2834640"/>
-          </a:xfrm>
-          <a:prstGeom prst="line">
-            <a:avLst/>
-          </a:prstGeom>
-          <a:noFill/>
-          <a:ln w="12700">
-            <a:solidFill>
-              <a:srgbClr val="E4E7EC"/>
-            </a:solidFill>
-            <a:prstDash val="solid"/>
-          </a:ln>
-        </p:spPr>
-        <p:txBody>
-          <a:bodyPr/>
-          <a:lstStyle/>
-          <a:p>
-            <a:endParaRPr lang="de-DE"/>
-          </a:p>
-        </p:txBody>
-      </p:sp>
-      <p:sp>
-        <p:nvSpPr>
-          <p:cNvPr id="7" name="Text 5"/>
-          <p:cNvSpPr/>
-          <p:nvPr/>
-        </p:nvSpPr>
-        <p:spPr>
-          <a:xfrm>
-            <a:off x="868680" y="2971800"/>
-            <a:ext cx="914400" cy="457200"/>
-          </a:xfrm>
-          <a:prstGeom prst="rect">
-            <a:avLst/>
-          </a:prstGeom>
-          <a:noFill/>
-          <a:ln/>
-        </p:spPr>
-        <p:txBody>
-          <a:bodyPr wrap="square" lIns="0" tIns="0" rIns="0" bIns="0" rtlCol="0" anchor="ctr"/>
-          <a:lstStyle/>
-          <a:p>
-            <a:pPr marL="0" indent="0">
-              <a:buNone/>
-            </a:pPr>
-            <a:r>
-              <a:rPr lang="en-US" sz="2200" b="1" dirty="0">
-                <a:solidFill>
-                  <a:srgbClr val="9AA3AF"/>
-                </a:solidFill>
-                <a:latin typeface="Trebuchet MS" pitchFamily="34" charset="0"/>
-                <a:ea typeface="Trebuchet MS" pitchFamily="34" charset="-122"/>
-                <a:cs typeface="Trebuchet MS" pitchFamily="34" charset="-120"/>
-              </a:rPr>
-              <a:t>01</a:t>
-            </a:r>
-            <a:endParaRPr lang="en-US" sz="2200" dirty="0"/>
-          </a:p>
-        </p:txBody>
-      </p:sp>
-      <p:sp>
-        <p:nvSpPr>
-          <p:cNvPr id="8" name="Text 6"/>
-          <p:cNvSpPr/>
-          <p:nvPr/>
-        </p:nvSpPr>
-        <p:spPr>
-          <a:xfrm>
-            <a:off x="1508760" y="2990088"/>
-            <a:ext cx="4297680" cy="457200"/>
-          </a:xfrm>
-          <a:prstGeom prst="rect">
-            <a:avLst/>
-          </a:prstGeom>
-          <a:noFill/>
-          <a:ln/>
-        </p:spPr>
-        <p:txBody>
-          <a:bodyPr wrap="square" lIns="0" tIns="0" rIns="0" bIns="0" rtlCol="0" anchor="ctr"/>
-          <a:lstStyle/>
-          <a:p>
-            <a:pPr marL="0" indent="0">
-              <a:buNone/>
-            </a:pPr>
-            <a:r>
-              <a:rPr lang="en-US" sz="2200" b="1" dirty="0">
-                <a:solidFill>
-                  <a:srgbClr val="16181D"/>
-                </a:solidFill>
-                <a:latin typeface="Trebuchet MS" pitchFamily="34" charset="0"/>
-                <a:ea typeface="Trebuchet MS" pitchFamily="34" charset="-122"/>
-                <a:cs typeface="Trebuchet MS" pitchFamily="34" charset="-120"/>
-              </a:rPr>
-              <a:t>/files/** ist öffentlich</a:t>
-            </a:r>
-            <a:endParaRPr lang="en-US" sz="2200" dirty="0"/>
-          </a:p>
-        </p:txBody>
-      </p:sp>
-      <p:sp>
-        <p:nvSpPr>
-          <p:cNvPr id="9" name="Text 7"/>
-          <p:cNvSpPr/>
-          <p:nvPr/>
-        </p:nvSpPr>
-        <p:spPr>
-          <a:xfrm>
-            <a:off x="868680" y="3611880"/>
-            <a:ext cx="4937760" cy="822960"/>
-          </a:xfrm>
-          <a:prstGeom prst="rect">
-            <a:avLst/>
-          </a:prstGeom>
-          <a:noFill/>
-          <a:ln/>
-        </p:spPr>
-        <p:txBody>
-          <a:bodyPr wrap="square" lIns="0" tIns="0" rIns="0" bIns="0" rtlCol="0" anchor="ctr"/>
-          <a:lstStyle/>
-          <a:p>
-            <a:pPr marL="0" indent="0">
-              <a:buNone/>
-            </a:pPr>
-            <a:r>
-              <a:rPr lang="en-US" sz="1400" dirty="0">
-                <a:solidFill>
-                  <a:srgbClr val="55606E"/>
-                </a:solidFill>
-                <a:latin typeface="Calibri" pitchFamily="34" charset="0"/>
-                <a:ea typeface="Calibri" pitchFamily="34" charset="-122"/>
-                <a:cs typeface="Calibri" pitchFamily="34" charset="-120"/>
-              </a:rPr>
-              <a:t>Spring Security erlaubt alle Requests unter /files/** </a:t>
-            </a:r>
-            <a:r>
-              <a:rPr lang="en-US" sz="1400" b="1" dirty="0">
-                <a:solidFill>
-                  <a:srgbClr val="D23B4E"/>
-                </a:solidFill>
-                <a:latin typeface="Calibri" pitchFamily="34" charset="0"/>
-                <a:ea typeface="Calibri" pitchFamily="34" charset="-122"/>
-                <a:cs typeface="Calibri" pitchFamily="34" charset="-120"/>
-              </a:rPr>
-              <a:t>ohne Authentifizierung</a:t>
-            </a:r>
-            <a:r>
-              <a:rPr lang="en-US" sz="1400" dirty="0">
-                <a:solidFill>
-                  <a:srgbClr val="55606E"/>
-                </a:solidFill>
-                <a:latin typeface="Calibri" pitchFamily="34" charset="0"/>
-                <a:ea typeface="Calibri" pitchFamily="34" charset="-122"/>
-                <a:cs typeface="Calibri" pitchFamily="34" charset="-120"/>
-              </a:rPr>
-              <a:t> – u. a. Planungs- und ICS-Dateien.</a:t>
-            </a:r>
-            <a:endParaRPr lang="en-US" sz="1400" dirty="0"/>
-          </a:p>
-        </p:txBody>
-      </p:sp>
-      <p:sp>
-        <p:nvSpPr>
-          <p:cNvPr id="10" name="Text 8"/>
-          <p:cNvSpPr/>
-          <p:nvPr/>
-        </p:nvSpPr>
-        <p:spPr>
-          <a:xfrm>
-            <a:off x="868680" y="4480560"/>
-            <a:ext cx="4937760" cy="365760"/>
-          </a:xfrm>
-          <a:prstGeom prst="rect">
-            <a:avLst/>
-          </a:prstGeom>
-          <a:noFill/>
-          <a:ln/>
-        </p:spPr>
-        <p:txBody>
-          <a:bodyPr wrap="square" lIns="0" tIns="0" rIns="0" bIns="0" rtlCol="0" anchor="ctr"/>
-          <a:lstStyle/>
-          <a:p>
-            <a:pPr marL="0" indent="0">
-              <a:buNone/>
-            </a:pPr>
-            <a:r>
-              <a:rPr lang="en-US" sz="1300" dirty="0">
-                <a:solidFill>
-                  <a:srgbClr val="16181D"/>
-                </a:solidFill>
-                <a:latin typeface="Consolas" pitchFamily="34" charset="0"/>
-                <a:ea typeface="Consolas" pitchFamily="34" charset="-122"/>
-                <a:cs typeface="Consolas" pitchFamily="34" charset="-120"/>
-              </a:rPr>
-              <a:t>GET /files/planningperiod/{id}/download</a:t>
-            </a:r>
-            <a:endParaRPr lang="en-US" sz="1300" dirty="0"/>
-          </a:p>
-        </p:txBody>
-      </p:sp>
-      <p:sp>
-        <p:nvSpPr>
-          <p:cNvPr id="11" name="Text 9"/>
-          <p:cNvSpPr/>
-          <p:nvPr/>
-        </p:nvSpPr>
-        <p:spPr>
-          <a:xfrm>
-            <a:off x="868680" y="4983480"/>
-            <a:ext cx="4937760" cy="640080"/>
-          </a:xfrm>
-          <a:prstGeom prst="rect">
-            <a:avLst/>
-          </a:prstGeom>
-          <a:noFill/>
-          <a:ln/>
-        </p:spPr>
-        <p:txBody>
-          <a:bodyPr wrap="square" lIns="0" tIns="0" rIns="0" bIns="0" rtlCol="0" anchor="ctr"/>
-          <a:lstStyle/>
-          <a:p>
-            <a:pPr marL="0" indent="0">
-              <a:buNone/>
-            </a:pPr>
-            <a:r>
-              <a:rPr lang="en-US" sz="1250" i="1" dirty="0">
-                <a:solidFill>
-                  <a:srgbClr val="55606E"/>
-                </a:solidFill>
-                <a:latin typeface="Calibri" pitchFamily="34" charset="0"/>
-                <a:ea typeface="Calibri" pitchFamily="34" charset="-122"/>
-                <a:cs typeface="Calibri" pitchFamily="34" charset="-120"/>
-              </a:rPr>
-              <a:t>Guter Demo-Endpunkt – aber prüfen, ob wirklich alles öffentlich sein soll.</a:t>
-            </a:r>
-            <a:endParaRPr lang="en-US" sz="1250" dirty="0"/>
-          </a:p>
-        </p:txBody>
-      </p:sp>
-      <p:sp>
-        <p:nvSpPr>
-          <p:cNvPr id="12" name="Text 10"/>
-          <p:cNvSpPr/>
-          <p:nvPr/>
-        </p:nvSpPr>
-        <p:spPr>
-          <a:xfrm>
-            <a:off x="868680" y="5623560"/>
-            <a:ext cx="4937760" cy="274320"/>
-          </a:xfrm>
-          <a:prstGeom prst="rect">
-            <a:avLst/>
-          </a:prstGeom>
-          <a:noFill/>
-          <a:ln/>
-        </p:spPr>
-        <p:txBody>
-          <a:bodyPr wrap="square" lIns="0" tIns="0" rIns="0" bIns="0" rtlCol="0" anchor="ctr"/>
-          <a:lstStyle/>
-          <a:p>
-            <a:pPr marL="0" indent="0">
-              <a:buNone/>
-            </a:pPr>
-            <a:r>
-              <a:rPr lang="en-US" sz="1050" dirty="0">
-                <a:solidFill>
-                  <a:srgbClr val="9AA3AF"/>
-                </a:solidFill>
-                <a:latin typeface="Consolas" pitchFamily="34" charset="0"/>
-                <a:ea typeface="Consolas" pitchFamily="34" charset="-122"/>
-                <a:cs typeface="Consolas" pitchFamily="34" charset="-120"/>
-              </a:rPr>
-              <a:t>SecurityConfiguration.java:48</a:t>
-            </a:r>
-            <a:endParaRPr lang="en-US" sz="1050" dirty="0"/>
-          </a:p>
-        </p:txBody>
-      </p:sp>
-      <p:sp>
-        <p:nvSpPr>
-          <p:cNvPr id="13" name="Text 11"/>
-          <p:cNvSpPr/>
-          <p:nvPr/>
-        </p:nvSpPr>
-        <p:spPr>
-          <a:xfrm>
-            <a:off x="6446520" y="2971800"/>
-            <a:ext cx="914400" cy="457200"/>
-          </a:xfrm>
-          <a:prstGeom prst="rect">
-            <a:avLst/>
-          </a:prstGeom>
-          <a:noFill/>
-          <a:ln/>
-        </p:spPr>
-        <p:txBody>
-          <a:bodyPr wrap="square" lIns="0" tIns="0" rIns="0" bIns="0" rtlCol="0" anchor="ctr"/>
-          <a:lstStyle/>
-          <a:p>
-            <a:pPr marL="0" indent="0">
-              <a:buNone/>
-            </a:pPr>
-            <a:r>
-              <a:rPr lang="en-US" sz="2200" b="1" dirty="0">
-                <a:solidFill>
-                  <a:srgbClr val="9AA3AF"/>
-                </a:solidFill>
-                <a:latin typeface="Trebuchet MS" pitchFamily="34" charset="0"/>
-                <a:ea typeface="Trebuchet MS" pitchFamily="34" charset="-122"/>
-                <a:cs typeface="Trebuchet MS" pitchFamily="34" charset="-120"/>
-              </a:rPr>
-              <a:t>02</a:t>
-            </a:r>
-            <a:endParaRPr lang="en-US" sz="2200" dirty="0"/>
-          </a:p>
-        </p:txBody>
-      </p:sp>
-      <p:sp>
-        <p:nvSpPr>
-          <p:cNvPr id="14" name="Text 12"/>
-          <p:cNvSpPr/>
-          <p:nvPr/>
-        </p:nvSpPr>
-        <p:spPr>
-          <a:xfrm>
-            <a:off x="7086600" y="2990088"/>
-            <a:ext cx="4297680" cy="457200"/>
-          </a:xfrm>
-          <a:prstGeom prst="rect">
-            <a:avLst/>
-          </a:prstGeom>
-          <a:noFill/>
-          <a:ln/>
-        </p:spPr>
-        <p:txBody>
-          <a:bodyPr wrap="square" lIns="0" tIns="0" rIns="0" bIns="0" rtlCol="0" anchor="ctr"/>
-          <a:lstStyle/>
-          <a:p>
-            <a:pPr marL="0" indent="0">
-              <a:buNone/>
-            </a:pPr>
-            <a:r>
-              <a:rPr lang="en-US" sz="2200" b="1" dirty="0">
-                <a:solidFill>
-                  <a:srgbClr val="16181D"/>
-                </a:solidFill>
-                <a:latin typeface="Trebuchet MS" pitchFamily="34" charset="0"/>
-                <a:ea typeface="Trebuchet MS" pitchFamily="34" charset="-122"/>
-                <a:cs typeface="Trebuchet MS" pitchFamily="34" charset="-120"/>
-              </a:rPr>
-              <a:t>Keycloak: webOrigins</a:t>
-            </a:r>
-            <a:endParaRPr lang="en-US" sz="2200" dirty="0"/>
-          </a:p>
-        </p:txBody>
-      </p:sp>
-      <p:sp>
-        <p:nvSpPr>
-          <p:cNvPr id="15" name="Text 13"/>
-          <p:cNvSpPr/>
-          <p:nvPr/>
-        </p:nvSpPr>
-        <p:spPr>
-          <a:xfrm>
-            <a:off x="6446520" y="3611880"/>
-            <a:ext cx="4937760" cy="640080"/>
-          </a:xfrm>
-          <a:prstGeom prst="rect">
-            <a:avLst/>
-          </a:prstGeom>
-          <a:noFill/>
-          <a:ln/>
-        </p:spPr>
-        <p:txBody>
-          <a:bodyPr wrap="square" lIns="0" tIns="0" rIns="0" bIns="0" rtlCol="0" anchor="ctr"/>
-          <a:lstStyle/>
-          <a:p>
-            <a:pPr marL="0" indent="0">
-              <a:buNone/>
-            </a:pPr>
-            <a:r>
-              <a:rPr lang="en-US" sz="1400" dirty="0">
-                <a:solidFill>
-                  <a:srgbClr val="55606E"/>
-                </a:solidFill>
-                <a:latin typeface="Calibri" pitchFamily="34" charset="0"/>
-                <a:ea typeface="Calibri" pitchFamily="34" charset="-122"/>
-                <a:cs typeface="Calibri" pitchFamily="34" charset="-120"/>
-              </a:rPr>
-              <a:t>Der Web-Client im Realm-Export nutzt eine Wildcard und unnötige OAuth-Flows – zu breit für einen SPA-Client.</a:t>
-            </a:r>
-            <a:endParaRPr lang="en-US" sz="1400" dirty="0"/>
-          </a:p>
-        </p:txBody>
-      </p:sp>
-      <p:sp>
-        <p:nvSpPr>
-          <p:cNvPr id="16" name="Text 14"/>
-          <p:cNvSpPr/>
-          <p:nvPr/>
-        </p:nvSpPr>
-        <p:spPr>
-          <a:xfrm>
-            <a:off x="6446520" y="4370832"/>
-            <a:ext cx="3017520" cy="365760"/>
-          </a:xfrm>
-          <a:prstGeom prst="rect">
-            <a:avLst/>
-          </a:prstGeom>
-          <a:noFill/>
-          <a:ln/>
-        </p:spPr>
-        <p:txBody>
-          <a:bodyPr wrap="square" lIns="0" tIns="0" rIns="0" bIns="0" rtlCol="0" anchor="ctr"/>
-          <a:lstStyle/>
-          <a:p>
-            <a:pPr marL="0" indent="0">
-              <a:buNone/>
-            </a:pPr>
-            <a:r>
-              <a:rPr lang="en-US" sz="1300" b="1" dirty="0">
-                <a:solidFill>
-                  <a:srgbClr val="16181D"/>
-                </a:solidFill>
-                <a:latin typeface="Consolas" pitchFamily="34" charset="0"/>
-                <a:ea typeface="Consolas" pitchFamily="34" charset="-122"/>
-                <a:cs typeface="Consolas" pitchFamily="34" charset="-120"/>
-              </a:rPr>
-              <a:t>webOrigins: ["*"]</a:t>
-            </a:r>
-            <a:endParaRPr lang="en-US" sz="1300" dirty="0"/>
-          </a:p>
-        </p:txBody>
-      </p:sp>
-      <p:sp>
-        <p:nvSpPr>
-          <p:cNvPr id="17" name="Text 15"/>
-          <p:cNvSpPr/>
-          <p:nvPr/>
-        </p:nvSpPr>
-        <p:spPr>
-          <a:xfrm>
-            <a:off x="9464040" y="4370832"/>
-            <a:ext cx="1920240" cy="365760"/>
-          </a:xfrm>
-          <a:prstGeom prst="rect">
-            <a:avLst/>
-          </a:prstGeom>
-          <a:noFill/>
-          <a:ln/>
-        </p:spPr>
-        <p:txBody>
-          <a:bodyPr wrap="square" lIns="0" tIns="0" rIns="0" bIns="0" rtlCol="0" anchor="ctr"/>
-          <a:lstStyle/>
-          <a:p>
-            <a:pPr marL="0" indent="0" algn="r">
-              <a:buNone/>
-            </a:pPr>
-            <a:r>
-              <a:rPr lang="en-US" sz="1200" i="1" dirty="0">
-                <a:solidFill>
-                  <a:srgbClr val="D23B4E"/>
-                </a:solidFill>
-                <a:latin typeface="Calibri" pitchFamily="34" charset="0"/>
-                <a:ea typeface="Calibri" pitchFamily="34" charset="-122"/>
-                <a:cs typeface="Calibri" pitchFamily="34" charset="-120"/>
-              </a:rPr>
-              <a:t>jede Origin</a:t>
-            </a:r>
-            <a:endParaRPr lang="en-US" sz="1200" dirty="0"/>
-          </a:p>
-        </p:txBody>
-      </p:sp>
-      <p:sp>
-        <p:nvSpPr>
-          <p:cNvPr id="18" name="Text 16"/>
-          <p:cNvSpPr/>
-          <p:nvPr/>
-        </p:nvSpPr>
-        <p:spPr>
-          <a:xfrm>
-            <a:off x="6446520" y="4782312"/>
-            <a:ext cx="3017520" cy="365760"/>
-          </a:xfrm>
-          <a:prstGeom prst="rect">
-            <a:avLst/>
-          </a:prstGeom>
-          <a:noFill/>
-          <a:ln/>
-        </p:spPr>
-        <p:txBody>
-          <a:bodyPr wrap="square" lIns="0" tIns="0" rIns="0" bIns="0" rtlCol="0" anchor="ctr"/>
-          <a:lstStyle/>
-          <a:p>
-            <a:pPr marL="0" indent="0">
-              <a:buNone/>
-            </a:pPr>
-            <a:r>
-              <a:rPr lang="en-US" sz="1300" b="1" dirty="0">
-                <a:solidFill>
-                  <a:srgbClr val="16181D"/>
-                </a:solidFill>
-                <a:latin typeface="Consolas" pitchFamily="34" charset="0"/>
-                <a:ea typeface="Consolas" pitchFamily="34" charset="-122"/>
-                <a:cs typeface="Consolas" pitchFamily="34" charset="-120"/>
-              </a:rPr>
-              <a:t>implicitFlowEnabled</a:t>
-            </a:r>
-            <a:endParaRPr lang="en-US" sz="1300" dirty="0"/>
-          </a:p>
-        </p:txBody>
-      </p:sp>
-      <p:sp>
-        <p:nvSpPr>
-          <p:cNvPr id="19" name="Text 17"/>
-          <p:cNvSpPr/>
-          <p:nvPr/>
-        </p:nvSpPr>
-        <p:spPr>
-          <a:xfrm>
-            <a:off x="9464040" y="4782312"/>
-            <a:ext cx="1920240" cy="365760"/>
-          </a:xfrm>
-          <a:prstGeom prst="rect">
-            <a:avLst/>
-          </a:prstGeom>
-          <a:noFill/>
-          <a:ln/>
-        </p:spPr>
-        <p:txBody>
-          <a:bodyPr wrap="square" lIns="0" tIns="0" rIns="0" bIns="0" rtlCol="0" anchor="ctr"/>
-          <a:lstStyle/>
-          <a:p>
-            <a:pPr marL="0" indent="0" algn="r">
-              <a:buNone/>
-            </a:pPr>
-            <a:r>
-              <a:rPr lang="en-US" sz="1200" i="1" dirty="0">
-                <a:solidFill>
-                  <a:srgbClr val="D23B4E"/>
-                </a:solidFill>
-                <a:latin typeface="Calibri" pitchFamily="34" charset="0"/>
-                <a:ea typeface="Calibri" pitchFamily="34" charset="-122"/>
-                <a:cs typeface="Calibri" pitchFamily="34" charset="-120"/>
-              </a:rPr>
-              <a:t>Token im Fragment</a:t>
-            </a:r>
-            <a:endParaRPr lang="en-US" sz="1200" dirty="0"/>
-          </a:p>
-        </p:txBody>
-      </p:sp>
-      <p:sp>
-        <p:nvSpPr>
-          <p:cNvPr id="20" name="Text 18"/>
-          <p:cNvSpPr/>
-          <p:nvPr/>
-        </p:nvSpPr>
-        <p:spPr>
-          <a:xfrm>
-            <a:off x="6446520" y="5193792"/>
-            <a:ext cx="3017520" cy="365760"/>
-          </a:xfrm>
-          <a:prstGeom prst="rect">
-            <a:avLst/>
-          </a:prstGeom>
-          <a:noFill/>
-          <a:ln/>
-        </p:spPr>
-        <p:txBody>
-          <a:bodyPr wrap="square" lIns="0" tIns="0" rIns="0" bIns="0" rtlCol="0" anchor="ctr"/>
-          <a:lstStyle/>
-          <a:p>
-            <a:pPr marL="0" indent="0">
-              <a:buNone/>
-            </a:pPr>
-            <a:r>
-              <a:rPr lang="en-US" sz="1300" b="1" dirty="0">
-                <a:solidFill>
-                  <a:srgbClr val="16181D"/>
-                </a:solidFill>
-                <a:latin typeface="Consolas" pitchFamily="34" charset="0"/>
-                <a:ea typeface="Consolas" pitchFamily="34" charset="-122"/>
-                <a:cs typeface="Consolas" pitchFamily="34" charset="-120"/>
-              </a:rPr>
-              <a:t>directAccessGrants</a:t>
-            </a:r>
-            <a:endParaRPr lang="en-US" sz="1300" dirty="0"/>
-          </a:p>
-        </p:txBody>
-      </p:sp>
-      <p:sp>
-        <p:nvSpPr>
-          <p:cNvPr id="21" name="Text 19"/>
-          <p:cNvSpPr/>
-          <p:nvPr/>
-        </p:nvSpPr>
-        <p:spPr>
-          <a:xfrm>
-            <a:off x="9464040" y="5193792"/>
-            <a:ext cx="1920240" cy="365760"/>
-          </a:xfrm>
-          <a:prstGeom prst="rect">
-            <a:avLst/>
-          </a:prstGeom>
-          <a:noFill/>
-          <a:ln/>
-        </p:spPr>
-        <p:txBody>
-          <a:bodyPr wrap="square" lIns="0" tIns="0" rIns="0" bIns="0" rtlCol="0" anchor="ctr"/>
-          <a:lstStyle/>
-          <a:p>
-            <a:pPr marL="0" indent="0" algn="r">
-              <a:buNone/>
-            </a:pPr>
-            <a:r>
-              <a:rPr lang="en-US" sz="1200" i="1" dirty="0">
-                <a:solidFill>
-                  <a:srgbClr val="D23B4E"/>
-                </a:solidFill>
-                <a:latin typeface="Calibri" pitchFamily="34" charset="0"/>
-                <a:ea typeface="Calibri" pitchFamily="34" charset="-122"/>
-                <a:cs typeface="Calibri" pitchFamily="34" charset="-120"/>
-              </a:rPr>
-              <a:t>Passwort-Grant</a:t>
-            </a:r>
-            <a:endParaRPr lang="en-US" sz="1200" dirty="0"/>
-          </a:p>
-        </p:txBody>
-      </p:sp>
-      <p:sp>
-        <p:nvSpPr>
-          <p:cNvPr id="22" name="Text 20"/>
-          <p:cNvSpPr/>
-          <p:nvPr/>
-        </p:nvSpPr>
-        <p:spPr>
-          <a:xfrm>
-            <a:off x="6446520" y="5623560"/>
-            <a:ext cx="4937760" cy="274320"/>
-          </a:xfrm>
-          <a:prstGeom prst="rect">
-            <a:avLst/>
-          </a:prstGeom>
-          <a:noFill/>
-          <a:ln/>
-        </p:spPr>
-        <p:txBody>
-          <a:bodyPr wrap="square" lIns="0" tIns="0" rIns="0" bIns="0" rtlCol="0" anchor="ctr"/>
-          <a:lstStyle/>
-          <a:p>
-            <a:pPr marL="0" indent="0">
-              <a:buNone/>
-            </a:pPr>
-            <a:r>
-              <a:rPr lang="en-US" sz="1050" dirty="0">
-                <a:solidFill>
-                  <a:srgbClr val="9AA3AF"/>
-                </a:solidFill>
-                <a:latin typeface="Consolas" pitchFamily="34" charset="0"/>
-                <a:ea typeface="Consolas" pitchFamily="34" charset="-122"/>
-                <a:cs typeface="Consolas" pitchFamily="34" charset="-120"/>
-              </a:rPr>
-              <a:t>scheduler.json:859-867</a:t>
-            </a:r>
-            <a:endParaRPr lang="en-US" sz="1050" dirty="0"/>
-          </a:p>
-        </p:txBody>
-      </p:sp>
-      <p:sp>
-        <p:nvSpPr>
-          <p:cNvPr id="23" name="Text 1">
-            <a:extLst>
-              <a:ext uri="{FF2B5EF4-FFF2-40B4-BE49-F238E27FC236}">
-                <a16:creationId xmlns:a16="http://schemas.microsoft.com/office/drawing/2014/main" id="{159D14D2-A691-AC5D-DD1D-60255DAD0117}"/>
-              </a:ext>
-            </a:extLst>
-          </p:cNvPr>
-          <p:cNvSpPr/>
-          <p:nvPr/>
-        </p:nvSpPr>
-        <p:spPr>
-          <a:xfrm>
-            <a:off x="10774375" y="502920"/>
-            <a:ext cx="548640" cy="274320"/>
-          </a:xfrm>
-          <a:prstGeom prst="rect">
-            <a:avLst/>
-          </a:prstGeom>
-          <a:noFill/>
-          <a:ln/>
-        </p:spPr>
-        <p:txBody>
-          <a:bodyPr wrap="square" lIns="0" tIns="0" rIns="0" bIns="0" rtlCol="0" anchor="ctr"/>
-          <a:lstStyle/>
-          <a:p>
-            <a:pPr marL="0" indent="0" algn="r">
-              <a:buNone/>
-            </a:pPr>
-            <a:fld id="{B45D24B6-C78C-43F1-9D4F-88F7B48373A8}" type="slidenum">
-              <a:rPr lang="en-US" sz="1050" b="1" kern="0" spc="100" smtClean="0">
-                <a:solidFill>
-                  <a:srgbClr val="9AA3AF"/>
-                </a:solidFill>
-                <a:latin typeface="Calibri" pitchFamily="34" charset="0"/>
-                <a:ea typeface="Calibri" pitchFamily="34" charset="-122"/>
-                <a:cs typeface="Calibri" pitchFamily="34" charset="-120"/>
-              </a:rPr>
-              <a:t>30</a:t>
-            </a:fld>
-            <a:endParaRPr lang="en-US" sz="1050" dirty="0"/>
           </a:p>
         </p:txBody>
       </p:sp>
